--- a/docs/data/세일즈마케팅_예상매출현황.pptx
+++ b/docs/data/세일즈마케팅_예상매출현황.pptx
@@ -12756,7 +12756,7 @@
                           <a:ea typeface="대명체 보통" panose="020B0600000101010101" pitchFamily="50" charset="-127"/>
                           <a:cs typeface="+mn-cs"/>
                         </a:rPr>
-                        <a:t>15,798</a:t>
+                        <a:t>15,227</a:t>
                       </a:r>
                     </a:p>
                   </a:txBody>
@@ -12882,7 +12882,7 @@
                           <a:ea typeface="대명체 보통" panose="020B0600000101010101" pitchFamily="50" charset="-127"/>
                           <a:cs typeface="+mn-cs"/>
                         </a:rPr>
-                        <a:t>1,692</a:t>
+                        <a:t>1,121</a:t>
                       </a:r>
                     </a:p>
                   </a:txBody>
@@ -12949,7 +12949,7 @@
                           <a:ea typeface="대명체 보통" panose="020B0600000101010101" pitchFamily="50" charset="-127"/>
                           <a:cs typeface="+mn-cs"/>
                         </a:rPr>
-                        <a:t>112%</a:t>
+                        <a:t>108%</a:t>
                       </a:r>
                     </a:p>
                   </a:txBody>
@@ -13016,7 +13016,7 @@
                           <a:ea typeface="대명체 보통" panose="020B0600000101010101" pitchFamily="50" charset="-127"/>
                           <a:cs typeface="+mn-cs"/>
                         </a:rPr>
-                        <a:t>9,147</a:t>
+                        <a:t>9,538</a:t>
                       </a:r>
                     </a:p>
                   </a:txBody>
@@ -13142,7 +13142,7 @@
                           <a:ea typeface="대명체 보통" panose="020B0600000101010101" pitchFamily="50" charset="-127"/>
                           <a:cs typeface="+mn-cs"/>
                         </a:rPr>
-                        <a:t>6,651</a:t>
+                        <a:t>5,689</a:t>
                       </a:r>
                     </a:p>
                   </a:txBody>
@@ -13209,7 +13209,7 @@
                           <a:ea typeface="대명체 보통" panose="020B0600000101010101" pitchFamily="50" charset="-127"/>
                           <a:cs typeface="+mn-cs"/>
                         </a:rPr>
-                        <a:t>73%</a:t>
+                        <a:t>60%</a:t>
                       </a:r>
                     </a:p>
                   </a:txBody>
@@ -13450,7 +13450,7 @@
                           <a:ea typeface="대명체 보통" panose="020B0600000101010101" pitchFamily="50" charset="-127"/>
                           <a:cs typeface="+mn-cs"/>
                         </a:rPr>
-                        <a:t>160,375</a:t>
+                        <a:t>159,804</a:t>
                       </a:r>
                     </a:p>
                   </a:txBody>
@@ -13576,7 +13576,7 @@
                           <a:ea typeface="대명체 보통" panose="020B0600000101010101" pitchFamily="50" charset="-127"/>
                           <a:cs typeface="+mn-cs"/>
                         </a:rPr>
-                        <a:t>21,347</a:t>
+                        <a:t>20,776</a:t>
                       </a:r>
                     </a:p>
                   </a:txBody>
@@ -13710,7 +13710,7 @@
                           <a:ea typeface="대명체 보통" panose="020B0600000101010101" pitchFamily="50" charset="-127"/>
                           <a:cs typeface="+mn-cs"/>
                         </a:rPr>
-                        <a:t>111,586</a:t>
+                        <a:t>111,977</a:t>
                       </a:r>
                     </a:p>
                   </a:txBody>
@@ -13836,7 +13836,7 @@
                           <a:ea typeface="대명체 보통" panose="020B0600000101010101" pitchFamily="50" charset="-127"/>
                           <a:cs typeface="+mn-cs"/>
                         </a:rPr>
-                        <a:t>48,789</a:t>
+                        <a:t>47,827</a:t>
                       </a:r>
                     </a:p>
                   </a:txBody>
@@ -13903,7 +13903,7 @@
                           <a:ea typeface="대명체 보통" panose="020B0600000101010101" pitchFamily="50" charset="-127"/>
                           <a:cs typeface="+mn-cs"/>
                         </a:rPr>
-                        <a:t>44%</a:t>
+                        <a:t>43%</a:t>
                       </a:r>
                     </a:p>
                   </a:txBody>
@@ -14237,7 +14237,7 @@
                           <a:ea typeface="대명체 보통" panose="020B0600000101010101" pitchFamily="50" charset="-127"/>
                           <a:cs typeface="+mn-cs"/>
                         </a:rPr>
-                        <a:t>7,919</a:t>
+                        <a:t>7,597</a:t>
                       </a:r>
                     </a:p>
                   </a:txBody>
@@ -14355,7 +14355,7 @@
                           <a:ea typeface="대명체 보통" panose="020B0600000101010101" pitchFamily="50" charset="-127"/>
                           <a:cs typeface="+mn-cs"/>
                         </a:rPr>
-                        <a:t>-104</a:t>
+                        <a:t>-426</a:t>
                       </a:r>
                       <a:endParaRPr lang="en-US" altLang="ko-KR" sz="700" b="0" i="0" u="none" strike="noStrike" kern="1200" dirty="0">
                         <a:solidFill>
@@ -14427,7 +14427,7 @@
                           <a:ea typeface="대명체 보통" panose="020B0600000101010101" pitchFamily="50" charset="-127"/>
                           <a:cs typeface="+mn-cs"/>
                         </a:rPr>
-                        <a:t>99%</a:t>
+                        <a:t>95%</a:t>
                       </a:r>
                     </a:p>
                   </a:txBody>
@@ -14490,7 +14490,7 @@
                           <a:ea typeface="대명체 보통" panose="020B0600000101010101" pitchFamily="50" charset="-127"/>
                           <a:cs typeface="+mn-cs"/>
                         </a:rPr>
-                        <a:t>5,179</a:t>
+                        <a:t>5,420</a:t>
                       </a:r>
                     </a:p>
                   </a:txBody>
@@ -14608,7 +14608,7 @@
                           <a:ea typeface="대명체 보통" panose="020B0600000101010101" pitchFamily="50" charset="-127"/>
                           <a:cs typeface="+mn-cs"/>
                         </a:rPr>
-                        <a:t>2,739</a:t>
+                        <a:t>2,177</a:t>
                       </a:r>
                     </a:p>
                   </a:txBody>
@@ -14671,7 +14671,7 @@
                           <a:ea typeface="대명체 보통" panose="020B0600000101010101" pitchFamily="50" charset="-127"/>
                           <a:cs typeface="+mn-cs"/>
                         </a:rPr>
-                        <a:t>53%</a:t>
+                        <a:t>40%</a:t>
                       </a:r>
                     </a:p>
                   </a:txBody>
@@ -14900,7 +14900,7 @@
                           <a:ea typeface="대명체 보통" panose="020B0600000101010101" pitchFamily="50" charset="-127"/>
                           <a:cs typeface="+mn-cs"/>
                         </a:rPr>
-                        <a:t>92,469</a:t>
+                        <a:t>92,147</a:t>
                       </a:r>
                     </a:p>
                   </a:txBody>
@@ -15018,7 +15018,7 @@
                           <a:ea typeface="대명체 보통" panose="020B0600000101010101" pitchFamily="50" charset="-127"/>
                           <a:cs typeface="+mn-cs"/>
                         </a:rPr>
-                        <a:t>12,095</a:t>
+                        <a:t>11,773</a:t>
                       </a:r>
                     </a:p>
                   </a:txBody>
@@ -15144,7 +15144,7 @@
                           <a:ea typeface="대명체 보통" panose="020B0600000101010101" pitchFamily="50" charset="-127"/>
                           <a:cs typeface="+mn-cs"/>
                         </a:rPr>
-                        <a:t>63,835</a:t>
+                        <a:t>64,076</a:t>
                       </a:r>
                     </a:p>
                   </a:txBody>
@@ -15262,7 +15262,7 @@
                           <a:ea typeface="대명체 보통" panose="020B0600000101010101" pitchFamily="50" charset="-127"/>
                           <a:cs typeface="+mn-cs"/>
                         </a:rPr>
-                        <a:t>28,633</a:t>
+                        <a:t>28,071</a:t>
                       </a:r>
                     </a:p>
                   </a:txBody>
@@ -15325,7 +15325,7 @@
                           <a:ea typeface="대명체 보통" panose="020B0600000101010101" pitchFamily="50" charset="-127"/>
                           <a:cs typeface="+mn-cs"/>
                         </a:rPr>
-                        <a:t>45%</a:t>
+                        <a:t>44%</a:t>
                       </a:r>
                     </a:p>
                   </a:txBody>
@@ -15643,7 +15643,7 @@
                           <a:ea typeface="대명체 보통" panose="020B0600000101010101" pitchFamily="50" charset="-127"/>
                           <a:cs typeface="+mn-cs"/>
                         </a:rPr>
-                        <a:t>7,271</a:t>
+                        <a:t>7,033</a:t>
                       </a:r>
                     </a:p>
                   </a:txBody>
@@ -15753,7 +15753,7 @@
                           <a:ea typeface="대명체 보통" panose="020B0600000101010101" pitchFamily="50" charset="-127"/>
                           <a:cs typeface="+mn-cs"/>
                         </a:rPr>
-                        <a:t>1,590</a:t>
+                        <a:t>1,352</a:t>
                       </a:r>
                       <a:endParaRPr lang="en-US" altLang="ko-KR" sz="700" b="0" i="0" u="none" strike="noStrike" kern="1200" dirty="0">
                         <a:solidFill>
@@ -15821,7 +15821,7 @@
                           <a:ea typeface="대명체 보통" panose="020B0600000101010101" pitchFamily="50" charset="-127"/>
                           <a:cs typeface="+mn-cs"/>
                         </a:rPr>
-                        <a:t>128%</a:t>
+                        <a:t>124%</a:t>
                       </a:r>
                     </a:p>
                   </a:txBody>
@@ -15880,7 +15880,7 @@
                           <a:ea typeface="대명체 보통" panose="020B0600000101010101" pitchFamily="50" charset="-127"/>
                           <a:cs typeface="+mn-cs"/>
                         </a:rPr>
-                        <a:t>3,637</a:t>
+                        <a:t>3,783</a:t>
                       </a:r>
                     </a:p>
                   </a:txBody>
@@ -15990,7 +15990,7 @@
                           <a:ea typeface="대명체 보통" panose="020B0600000101010101" pitchFamily="50" charset="-127"/>
                           <a:cs typeface="+mn-cs"/>
                         </a:rPr>
-                        <a:t>3,634</a:t>
+                        <a:t>3,250</a:t>
                       </a:r>
                     </a:p>
                   </a:txBody>
@@ -16049,7 +16049,7 @@
                           <a:ea typeface="대명체 보통" panose="020B0600000101010101" pitchFamily="50" charset="-127"/>
                           <a:cs typeface="+mn-cs"/>
                         </a:rPr>
-                        <a:t>100%</a:t>
+                        <a:t>86%</a:t>
                       </a:r>
                     </a:p>
                   </a:txBody>
@@ -16266,7 +16266,7 @@
                           <a:ea typeface="대명체 보통" panose="020B0600000101010101" pitchFamily="50" charset="-127"/>
                           <a:cs typeface="+mn-cs"/>
                         </a:rPr>
-                        <a:t>62,113</a:t>
+                        <a:t>61,876</a:t>
                       </a:r>
                     </a:p>
                   </a:txBody>
@@ -16376,7 +16376,7 @@
                           <a:ea typeface="대명체 보통" panose="020B0600000101010101" pitchFamily="50" charset="-127"/>
                           <a:cs typeface="+mn-cs"/>
                         </a:rPr>
-                        <a:t>7,329</a:t>
+                        <a:t>7,092</a:t>
                       </a:r>
                     </a:p>
                   </a:txBody>
@@ -16494,7 +16494,7 @@
                           <a:ea typeface="대명체 보통" panose="020B0600000101010101" pitchFamily="50" charset="-127"/>
                           <a:cs typeface="+mn-cs"/>
                         </a:rPr>
-                        <a:t>44,193</a:t>
+                        <a:t>44,339</a:t>
                       </a:r>
                     </a:p>
                   </a:txBody>
@@ -16604,7 +16604,7 @@
                           <a:ea typeface="대명체 보통" panose="020B0600000101010101" pitchFamily="50" charset="-127"/>
                           <a:cs typeface="+mn-cs"/>
                         </a:rPr>
-                        <a:t>17,921</a:t>
+                        <a:t>17,536</a:t>
                       </a:r>
                     </a:p>
                   </a:txBody>
@@ -16663,7 +16663,7 @@
                           <a:ea typeface="대명체 보통" panose="020B0600000101010101" pitchFamily="50" charset="-127"/>
                           <a:cs typeface="+mn-cs"/>
                         </a:rPr>
-                        <a:t>41%</a:t>
+                        <a:t>40%</a:t>
                       </a:r>
                     </a:p>
                   </a:txBody>
@@ -16999,7 +16999,7 @@
                           <a:ea typeface="대명체 보통" panose="020B0600000101010101" pitchFamily="50" charset="-127"/>
                           <a:cs typeface="+mn-cs"/>
                         </a:rPr>
-                        <a:t>609</a:t>
+                        <a:t>597</a:t>
                       </a:r>
                       <a:endParaRPr lang="en-US" altLang="ko-KR" sz="700" b="0" i="0" u="none" strike="noStrike" kern="1200" dirty="0">
                         <a:solidFill>
@@ -17126,7 +17126,7 @@
                           <a:ea typeface="대명체 보통" panose="020B0600000101010101" pitchFamily="50" charset="-127"/>
                           <a:cs typeface="+mn-cs"/>
                         </a:rPr>
-                        <a:t>206</a:t>
+                        <a:t>195</a:t>
                       </a:r>
                       <a:endParaRPr lang="en-US" altLang="ko-KR" sz="700" b="0" i="0" u="none" strike="noStrike" kern="1200" dirty="0">
                         <a:solidFill>
@@ -17198,7 +17198,7 @@
                           <a:ea typeface="대명체 보통" panose="020B0600000101010101" pitchFamily="50" charset="-127"/>
                           <a:cs typeface="+mn-cs"/>
                         </a:rPr>
-                        <a:t>151%</a:t>
+                        <a:t>148%</a:t>
                       </a:r>
                     </a:p>
                   </a:txBody>
@@ -17261,7 +17261,7 @@
                           <a:ea typeface="대명체 보통" panose="020B0600000101010101" pitchFamily="50" charset="-127"/>
                           <a:cs typeface="+mn-cs"/>
                         </a:rPr>
-                        <a:t>331</a:t>
+                        <a:t>335</a:t>
                       </a:r>
                       <a:endParaRPr lang="en-US" altLang="ko-KR" sz="700" b="0" i="0" u="none" strike="noStrike" kern="1200" dirty="0">
                         <a:solidFill>
@@ -17388,7 +17388,7 @@
                           <a:ea typeface="대명체 보통" panose="020B0600000101010101" pitchFamily="50" charset="-127"/>
                           <a:cs typeface="+mn-cs"/>
                         </a:rPr>
-                        <a:t>278</a:t>
+                        <a:t>263</a:t>
                       </a:r>
                     </a:p>
                   </a:txBody>
@@ -17451,7 +17451,7 @@
                           <a:ea typeface="대명체 보통" panose="020B0600000101010101" pitchFamily="50" charset="-127"/>
                           <a:cs typeface="+mn-cs"/>
                         </a:rPr>
-                        <a:t>84%</a:t>
+                        <a:t>78%</a:t>
                       </a:r>
                     </a:p>
                   </a:txBody>
@@ -17680,7 +17680,7 @@
                           <a:ea typeface="대명체 보통" panose="020B0600000101010101" pitchFamily="50" charset="-127"/>
                           <a:cs typeface="+mn-cs"/>
                         </a:rPr>
-                        <a:t>5,793</a:t>
+                        <a:t>5,781</a:t>
                       </a:r>
                     </a:p>
                   </a:txBody>
@@ -17798,7 +17798,7 @@
                           <a:ea typeface="대명체 보통" panose="020B0600000101010101" pitchFamily="50" charset="-127"/>
                           <a:cs typeface="+mn-cs"/>
                         </a:rPr>
-                        <a:t>1,923</a:t>
+                        <a:t>1,911</a:t>
                       </a:r>
                       <a:endParaRPr lang="en-US" altLang="ko-KR" sz="700" b="0" i="0" u="none" strike="noStrike" kern="1200" dirty="0">
                         <a:solidFill>
@@ -17870,7 +17870,7 @@
                           <a:ea typeface="대명체 보통" panose="020B0600000101010101" pitchFamily="50" charset="-127"/>
                           <a:cs typeface="+mn-cs"/>
                         </a:rPr>
-                        <a:t>150%</a:t>
+                        <a:t>149%</a:t>
                       </a:r>
                     </a:p>
                   </a:txBody>
@@ -17933,7 +17933,7 @@
                           <a:ea typeface="대명체 보통" panose="020B0600000101010101" pitchFamily="50" charset="-127"/>
                           <a:cs typeface="+mn-cs"/>
                         </a:rPr>
-                        <a:t>3,558</a:t>
+                        <a:t>3,562</a:t>
                       </a:r>
                     </a:p>
                   </a:txBody>
@@ -18051,7 +18051,7 @@
                           <a:ea typeface="대명체 보통" panose="020B0600000101010101" pitchFamily="50" charset="-127"/>
                           <a:cs typeface="+mn-cs"/>
                         </a:rPr>
-                        <a:t>2,235</a:t>
+                        <a:t>2,219</a:t>
                       </a:r>
                     </a:p>
                   </a:txBody>
@@ -18114,7 +18114,7 @@
                           <a:ea typeface="대명체 보통" panose="020B0600000101010101" pitchFamily="50" charset="-127"/>
                           <a:cs typeface="+mn-cs"/>
                         </a:rPr>
-                        <a:t>63%</a:t>
+                        <a:t>62%</a:t>
                       </a:r>
                     </a:p>
                   </a:txBody>

--- a/docs/data/세일즈마케팅_예상매출현황.pptx
+++ b/docs/data/세일즈마케팅_예상매출현황.pptx
@@ -12756,7 +12756,7 @@
                           <a:ea typeface="대명체 보통" panose="020B0600000101010101" pitchFamily="50" charset="-127"/>
                           <a:cs typeface="+mn-cs"/>
                         </a:rPr>
-                        <a:t>15,227</a:t>
+                        <a:t>14,971</a:t>
                       </a:r>
                     </a:p>
                   </a:txBody>
@@ -12882,7 +12882,7 @@
                           <a:ea typeface="대명체 보통" panose="020B0600000101010101" pitchFamily="50" charset="-127"/>
                           <a:cs typeface="+mn-cs"/>
                         </a:rPr>
-                        <a:t>1,121</a:t>
+                        <a:t>865</a:t>
                       </a:r>
                     </a:p>
                   </a:txBody>
@@ -12949,7 +12949,7 @@
                           <a:ea typeface="대명체 보통" panose="020B0600000101010101" pitchFamily="50" charset="-127"/>
                           <a:cs typeface="+mn-cs"/>
                         </a:rPr>
-                        <a:t>108%</a:t>
+                        <a:t>106%</a:t>
                       </a:r>
                     </a:p>
                   </a:txBody>
@@ -13016,7 +13016,7 @@
                           <a:ea typeface="대명체 보통" panose="020B0600000101010101" pitchFamily="50" charset="-127"/>
                           <a:cs typeface="+mn-cs"/>
                         </a:rPr>
-                        <a:t>9,538</a:t>
+                        <a:t>9,656</a:t>
                       </a:r>
                     </a:p>
                   </a:txBody>
@@ -13142,7 +13142,7 @@
                           <a:ea typeface="대명체 보통" panose="020B0600000101010101" pitchFamily="50" charset="-127"/>
                           <a:cs typeface="+mn-cs"/>
                         </a:rPr>
-                        <a:t>5,689</a:t>
+                        <a:t>5,315</a:t>
                       </a:r>
                     </a:p>
                   </a:txBody>
@@ -13209,7 +13209,7 @@
                           <a:ea typeface="대명체 보통" panose="020B0600000101010101" pitchFamily="50" charset="-127"/>
                           <a:cs typeface="+mn-cs"/>
                         </a:rPr>
-                        <a:t>60%</a:t>
+                        <a:t>55%</a:t>
                       </a:r>
                     </a:p>
                   </a:txBody>
@@ -13450,7 +13450,7 @@
                           <a:ea typeface="대명체 보통" panose="020B0600000101010101" pitchFamily="50" charset="-127"/>
                           <a:cs typeface="+mn-cs"/>
                         </a:rPr>
-                        <a:t>159,804</a:t>
+                        <a:t>159,547</a:t>
                       </a:r>
                     </a:p>
                   </a:txBody>
@@ -13576,7 +13576,7 @@
                           <a:ea typeface="대명체 보통" panose="020B0600000101010101" pitchFamily="50" charset="-127"/>
                           <a:cs typeface="+mn-cs"/>
                         </a:rPr>
-                        <a:t>20,776</a:t>
+                        <a:t>20,520</a:t>
                       </a:r>
                     </a:p>
                   </a:txBody>
@@ -13710,7 +13710,7 @@
                           <a:ea typeface="대명체 보통" panose="020B0600000101010101" pitchFamily="50" charset="-127"/>
                           <a:cs typeface="+mn-cs"/>
                         </a:rPr>
-                        <a:t>111,977</a:t>
+                        <a:t>112,095</a:t>
                       </a:r>
                     </a:p>
                   </a:txBody>
@@ -13836,7 +13836,7 @@
                           <a:ea typeface="대명체 보통" panose="020B0600000101010101" pitchFamily="50" charset="-127"/>
                           <a:cs typeface="+mn-cs"/>
                         </a:rPr>
-                        <a:t>47,827</a:t>
+                        <a:t>47,453</a:t>
                       </a:r>
                     </a:p>
                   </a:txBody>
@@ -13903,7 +13903,7 @@
                           <a:ea typeface="대명체 보통" panose="020B0600000101010101" pitchFamily="50" charset="-127"/>
                           <a:cs typeface="+mn-cs"/>
                         </a:rPr>
-                        <a:t>43%</a:t>
+                        <a:t>42%</a:t>
                       </a:r>
                     </a:p>
                   </a:txBody>
@@ -14237,7 +14237,7 @@
                           <a:ea typeface="대명체 보통" panose="020B0600000101010101" pitchFamily="50" charset="-127"/>
                           <a:cs typeface="+mn-cs"/>
                         </a:rPr>
-                        <a:t>7,597</a:t>
+                        <a:t>7,467</a:t>
                       </a:r>
                     </a:p>
                   </a:txBody>
@@ -14355,7 +14355,7 @@
                           <a:ea typeface="대명체 보통" panose="020B0600000101010101" pitchFamily="50" charset="-127"/>
                           <a:cs typeface="+mn-cs"/>
                         </a:rPr>
-                        <a:t>-426</a:t>
+                        <a:t>-556</a:t>
                       </a:r>
                       <a:endParaRPr lang="en-US" altLang="ko-KR" sz="700" b="0" i="0" u="none" strike="noStrike" kern="1200" dirty="0">
                         <a:solidFill>
@@ -14427,7 +14427,7 @@
                           <a:ea typeface="대명체 보통" panose="020B0600000101010101" pitchFamily="50" charset="-127"/>
                           <a:cs typeface="+mn-cs"/>
                         </a:rPr>
-                        <a:t>95%</a:t>
+                        <a:t>93%</a:t>
                       </a:r>
                     </a:p>
                   </a:txBody>
@@ -14490,7 +14490,7 @@
                           <a:ea typeface="대명체 보통" panose="020B0600000101010101" pitchFamily="50" charset="-127"/>
                           <a:cs typeface="+mn-cs"/>
                         </a:rPr>
-                        <a:t>5,420</a:t>
+                        <a:t>5,499</a:t>
                       </a:r>
                     </a:p>
                   </a:txBody>
@@ -14608,7 +14608,7 @@
                           <a:ea typeface="대명체 보통" panose="020B0600000101010101" pitchFamily="50" charset="-127"/>
                           <a:cs typeface="+mn-cs"/>
                         </a:rPr>
-                        <a:t>2,177</a:t>
+                        <a:t>1,968</a:t>
                       </a:r>
                     </a:p>
                   </a:txBody>
@@ -14671,7 +14671,7 @@
                           <a:ea typeface="대명체 보통" panose="020B0600000101010101" pitchFamily="50" charset="-127"/>
                           <a:cs typeface="+mn-cs"/>
                         </a:rPr>
-                        <a:t>40%</a:t>
+                        <a:t>36%</a:t>
                       </a:r>
                     </a:p>
                   </a:txBody>
@@ -14900,7 +14900,7 @@
                           <a:ea typeface="대명체 보통" panose="020B0600000101010101" pitchFamily="50" charset="-127"/>
                           <a:cs typeface="+mn-cs"/>
                         </a:rPr>
-                        <a:t>92,147</a:t>
+                        <a:t>92,017</a:t>
                       </a:r>
                     </a:p>
                   </a:txBody>
@@ -15018,7 +15018,7 @@
                           <a:ea typeface="대명체 보통" panose="020B0600000101010101" pitchFamily="50" charset="-127"/>
                           <a:cs typeface="+mn-cs"/>
                         </a:rPr>
-                        <a:t>11,773</a:t>
+                        <a:t>11,643</a:t>
                       </a:r>
                     </a:p>
                   </a:txBody>
@@ -15081,7 +15081,7 @@
                           <a:ea typeface="대명체 보통" panose="020B0600000101010101" pitchFamily="50" charset="-127"/>
                           <a:cs typeface="+mn-cs"/>
                         </a:rPr>
-                        <a:t>115%</a:t>
+                        <a:t>114%</a:t>
                       </a:r>
                     </a:p>
                   </a:txBody>
@@ -15144,7 +15144,7 @@
                           <a:ea typeface="대명체 보통" panose="020B0600000101010101" pitchFamily="50" charset="-127"/>
                           <a:cs typeface="+mn-cs"/>
                         </a:rPr>
-                        <a:t>64,076</a:t>
+                        <a:t>64,155</a:t>
                       </a:r>
                     </a:p>
                   </a:txBody>
@@ -15262,7 +15262,7 @@
                           <a:ea typeface="대명체 보통" panose="020B0600000101010101" pitchFamily="50" charset="-127"/>
                           <a:cs typeface="+mn-cs"/>
                         </a:rPr>
-                        <a:t>28,071</a:t>
+                        <a:t>27,862</a:t>
                       </a:r>
                     </a:p>
                   </a:txBody>
@@ -15325,7 +15325,7 @@
                           <a:ea typeface="대명체 보통" panose="020B0600000101010101" pitchFamily="50" charset="-127"/>
                           <a:cs typeface="+mn-cs"/>
                         </a:rPr>
-                        <a:t>44%</a:t>
+                        <a:t>43%</a:t>
                       </a:r>
                     </a:p>
                   </a:txBody>
@@ -15643,7 +15643,7 @@
                           <a:ea typeface="대명체 보통" panose="020B0600000101010101" pitchFamily="50" charset="-127"/>
                           <a:cs typeface="+mn-cs"/>
                         </a:rPr>
-                        <a:t>7,033</a:t>
+                        <a:t>6,911</a:t>
                       </a:r>
                     </a:p>
                   </a:txBody>
@@ -15753,7 +15753,7 @@
                           <a:ea typeface="대명체 보통" panose="020B0600000101010101" pitchFamily="50" charset="-127"/>
                           <a:cs typeface="+mn-cs"/>
                         </a:rPr>
-                        <a:t>1,352</a:t>
+                        <a:t>1,230</a:t>
                       </a:r>
                       <a:endParaRPr lang="en-US" altLang="ko-KR" sz="700" b="0" i="0" u="none" strike="noStrike" kern="1200" dirty="0">
                         <a:solidFill>
@@ -15821,7 +15821,7 @@
                           <a:ea typeface="대명체 보통" panose="020B0600000101010101" pitchFamily="50" charset="-127"/>
                           <a:cs typeface="+mn-cs"/>
                         </a:rPr>
-                        <a:t>124%</a:t>
+                        <a:t>122%</a:t>
                       </a:r>
                     </a:p>
                   </a:txBody>
@@ -15880,7 +15880,7 @@
                           <a:ea typeface="대명체 보통" panose="020B0600000101010101" pitchFamily="50" charset="-127"/>
                           <a:cs typeface="+mn-cs"/>
                         </a:rPr>
-                        <a:t>3,783</a:t>
+                        <a:t>3,822</a:t>
                       </a:r>
                     </a:p>
                   </a:txBody>
@@ -15990,7 +15990,7 @@
                           <a:ea typeface="대명체 보통" panose="020B0600000101010101" pitchFamily="50" charset="-127"/>
                           <a:cs typeface="+mn-cs"/>
                         </a:rPr>
-                        <a:t>3,250</a:t>
+                        <a:t>3,088</a:t>
                       </a:r>
                     </a:p>
                   </a:txBody>
@@ -16049,7 +16049,7 @@
                           <a:ea typeface="대명체 보통" panose="020B0600000101010101" pitchFamily="50" charset="-127"/>
                           <a:cs typeface="+mn-cs"/>
                         </a:rPr>
-                        <a:t>86%</a:t>
+                        <a:t>81%</a:t>
                       </a:r>
                     </a:p>
                   </a:txBody>
@@ -16266,7 +16266,7 @@
                           <a:ea typeface="대명체 보통" panose="020B0600000101010101" pitchFamily="50" charset="-127"/>
                           <a:cs typeface="+mn-cs"/>
                         </a:rPr>
-                        <a:t>61,876</a:t>
+                        <a:t>61,753</a:t>
                       </a:r>
                     </a:p>
                   </a:txBody>
@@ -16376,7 +16376,7 @@
                           <a:ea typeface="대명체 보통" panose="020B0600000101010101" pitchFamily="50" charset="-127"/>
                           <a:cs typeface="+mn-cs"/>
                         </a:rPr>
-                        <a:t>7,092</a:t>
+                        <a:t>6,969</a:t>
                       </a:r>
                     </a:p>
                   </a:txBody>
@@ -16494,7 +16494,7 @@
                           <a:ea typeface="대명체 보통" panose="020B0600000101010101" pitchFamily="50" charset="-127"/>
                           <a:cs typeface="+mn-cs"/>
                         </a:rPr>
-                        <a:t>44,339</a:t>
+                        <a:t>44,378</a:t>
                       </a:r>
                     </a:p>
                   </a:txBody>
@@ -16604,7 +16604,7 @@
                           <a:ea typeface="대명체 보통" panose="020B0600000101010101" pitchFamily="50" charset="-127"/>
                           <a:cs typeface="+mn-cs"/>
                         </a:rPr>
-                        <a:t>17,536</a:t>
+                        <a:t>17,375</a:t>
                       </a:r>
                     </a:p>
                   </a:txBody>
@@ -16663,7 +16663,7 @@
                           <a:ea typeface="대명체 보통" panose="020B0600000101010101" pitchFamily="50" charset="-127"/>
                           <a:cs typeface="+mn-cs"/>
                         </a:rPr>
-                        <a:t>40%</a:t>
+                        <a:t>39%</a:t>
                       </a:r>
                     </a:p>
                   </a:txBody>
@@ -16999,7 +16999,7 @@
                           <a:ea typeface="대명체 보통" panose="020B0600000101010101" pitchFamily="50" charset="-127"/>
                           <a:cs typeface="+mn-cs"/>
                         </a:rPr>
-                        <a:t>597</a:t>
+                        <a:t>593</a:t>
                       </a:r>
                       <a:endParaRPr lang="en-US" altLang="ko-KR" sz="700" b="0" i="0" u="none" strike="noStrike" kern="1200" dirty="0">
                         <a:solidFill>
@@ -17126,7 +17126,7 @@
                           <a:ea typeface="대명체 보통" panose="020B0600000101010101" pitchFamily="50" charset="-127"/>
                           <a:cs typeface="+mn-cs"/>
                         </a:rPr>
-                        <a:t>195</a:t>
+                        <a:t>191</a:t>
                       </a:r>
                       <a:endParaRPr lang="en-US" altLang="ko-KR" sz="700" b="0" i="0" u="none" strike="noStrike" kern="1200" dirty="0">
                         <a:solidFill>
@@ -17198,7 +17198,7 @@
                           <a:ea typeface="대명체 보통" panose="020B0600000101010101" pitchFamily="50" charset="-127"/>
                           <a:cs typeface="+mn-cs"/>
                         </a:rPr>
-                        <a:t>148%</a:t>
+                        <a:t>147%</a:t>
                       </a:r>
                     </a:p>
                   </a:txBody>
@@ -17388,7 +17388,7 @@
                           <a:ea typeface="대명체 보통" panose="020B0600000101010101" pitchFamily="50" charset="-127"/>
                           <a:cs typeface="+mn-cs"/>
                         </a:rPr>
-                        <a:t>263</a:t>
+                        <a:t>259</a:t>
                       </a:r>
                     </a:p>
                   </a:txBody>
@@ -17451,7 +17451,7 @@
                           <a:ea typeface="대명체 보통" panose="020B0600000101010101" pitchFamily="50" charset="-127"/>
                           <a:cs typeface="+mn-cs"/>
                         </a:rPr>
-                        <a:t>78%</a:t>
+                        <a:t>77%</a:t>
                       </a:r>
                     </a:p>
                   </a:txBody>
@@ -17680,7 +17680,7 @@
                           <a:ea typeface="대명체 보통" panose="020B0600000101010101" pitchFamily="50" charset="-127"/>
                           <a:cs typeface="+mn-cs"/>
                         </a:rPr>
-                        <a:t>5,781</a:t>
+                        <a:t>5,777</a:t>
                       </a:r>
                     </a:p>
                   </a:txBody>
@@ -17798,7 +17798,7 @@
                           <a:ea typeface="대명체 보통" panose="020B0600000101010101" pitchFamily="50" charset="-127"/>
                           <a:cs typeface="+mn-cs"/>
                         </a:rPr>
-                        <a:t>1,911</a:t>
+                        <a:t>1,907</a:t>
                       </a:r>
                       <a:endParaRPr lang="en-US" altLang="ko-KR" sz="700" b="0" i="0" u="none" strike="noStrike" kern="1200" dirty="0">
                         <a:solidFill>
@@ -18051,7 +18051,7 @@
                           <a:ea typeface="대명체 보통" panose="020B0600000101010101" pitchFamily="50" charset="-127"/>
                           <a:cs typeface="+mn-cs"/>
                         </a:rPr>
-                        <a:t>2,219</a:t>
+                        <a:t>2,215</a:t>
                       </a:r>
                     </a:p>
                   </a:txBody>

--- a/docs/data/세일즈마케팅_예상매출현황.pptx
+++ b/docs/data/세일즈마케팅_예상매출현황.pptx
@@ -12756,7 +12756,7 @@
                           <a:ea typeface="대명체 보통" panose="020B0600000101010101" pitchFamily="50" charset="-127"/>
                           <a:cs typeface="+mn-cs"/>
                         </a:rPr>
-                        <a:t>14,971</a:t>
+                        <a:t>14,650</a:t>
                       </a:r>
                     </a:p>
                   </a:txBody>
@@ -12882,7 +12882,7 @@
                           <a:ea typeface="대명체 보통" panose="020B0600000101010101" pitchFamily="50" charset="-127"/>
                           <a:cs typeface="+mn-cs"/>
                         </a:rPr>
-                        <a:t>865</a:t>
+                        <a:t>543</a:t>
                       </a:r>
                     </a:p>
                   </a:txBody>
@@ -12949,7 +12949,7 @@
                           <a:ea typeface="대명체 보통" panose="020B0600000101010101" pitchFamily="50" charset="-127"/>
                           <a:cs typeface="+mn-cs"/>
                         </a:rPr>
-                        <a:t>106%</a:t>
+                        <a:t>104%</a:t>
                       </a:r>
                     </a:p>
                   </a:txBody>
@@ -13016,7 +13016,7 @@
                           <a:ea typeface="대명체 보통" panose="020B0600000101010101" pitchFamily="50" charset="-127"/>
                           <a:cs typeface="+mn-cs"/>
                         </a:rPr>
-                        <a:t>9,656</a:t>
+                        <a:t>9,839</a:t>
                       </a:r>
                     </a:p>
                   </a:txBody>
@@ -13142,7 +13142,7 @@
                           <a:ea typeface="대명체 보통" panose="020B0600000101010101" pitchFamily="50" charset="-127"/>
                           <a:cs typeface="+mn-cs"/>
                         </a:rPr>
-                        <a:t>5,315</a:t>
+                        <a:t>4,811</a:t>
                       </a:r>
                     </a:p>
                   </a:txBody>
@@ -13209,7 +13209,7 @@
                           <a:ea typeface="대명체 보통" panose="020B0600000101010101" pitchFamily="50" charset="-127"/>
                           <a:cs typeface="+mn-cs"/>
                         </a:rPr>
-                        <a:t>55%</a:t>
+                        <a:t>49%</a:t>
                       </a:r>
                     </a:p>
                   </a:txBody>
@@ -13450,7 +13450,7 @@
                           <a:ea typeface="대명체 보통" panose="020B0600000101010101" pitchFamily="50" charset="-127"/>
                           <a:cs typeface="+mn-cs"/>
                         </a:rPr>
-                        <a:t>159,547</a:t>
+                        <a:t>159,226</a:t>
                       </a:r>
                     </a:p>
                   </a:txBody>
@@ -13576,7 +13576,7 @@
                           <a:ea typeface="대명체 보통" panose="020B0600000101010101" pitchFamily="50" charset="-127"/>
                           <a:cs typeface="+mn-cs"/>
                         </a:rPr>
-                        <a:t>20,520</a:t>
+                        <a:t>20,198</a:t>
                       </a:r>
                     </a:p>
                   </a:txBody>
@@ -13710,7 +13710,7 @@
                           <a:ea typeface="대명체 보통" panose="020B0600000101010101" pitchFamily="50" charset="-127"/>
                           <a:cs typeface="+mn-cs"/>
                         </a:rPr>
-                        <a:t>112,095</a:t>
+                        <a:t>112,278</a:t>
                       </a:r>
                     </a:p>
                   </a:txBody>
@@ -13836,7 +13836,7 @@
                           <a:ea typeface="대명체 보통" panose="020B0600000101010101" pitchFamily="50" charset="-127"/>
                           <a:cs typeface="+mn-cs"/>
                         </a:rPr>
-                        <a:t>47,453</a:t>
+                        <a:t>46,948</a:t>
                       </a:r>
                     </a:p>
                   </a:txBody>
@@ -14237,7 +14237,7 @@
                           <a:ea typeface="대명체 보통" panose="020B0600000101010101" pitchFamily="50" charset="-127"/>
                           <a:cs typeface="+mn-cs"/>
                         </a:rPr>
-                        <a:t>7,467</a:t>
+                        <a:t>7,296</a:t>
                       </a:r>
                     </a:p>
                   </a:txBody>
@@ -14355,7 +14355,7 @@
                           <a:ea typeface="대명체 보통" panose="020B0600000101010101" pitchFamily="50" charset="-127"/>
                           <a:cs typeface="+mn-cs"/>
                         </a:rPr>
-                        <a:t>-556</a:t>
+                        <a:t>-727</a:t>
                       </a:r>
                       <a:endParaRPr lang="en-US" altLang="ko-KR" sz="700" b="0" i="0" u="none" strike="noStrike" kern="1200" dirty="0">
                         <a:solidFill>
@@ -14427,7 +14427,7 @@
                           <a:ea typeface="대명체 보통" panose="020B0600000101010101" pitchFamily="50" charset="-127"/>
                           <a:cs typeface="+mn-cs"/>
                         </a:rPr>
-                        <a:t>93%</a:t>
+                        <a:t>91%</a:t>
                       </a:r>
                     </a:p>
                   </a:txBody>
@@ -14490,7 +14490,7 @@
                           <a:ea typeface="대명체 보통" panose="020B0600000101010101" pitchFamily="50" charset="-127"/>
                           <a:cs typeface="+mn-cs"/>
                         </a:rPr>
-                        <a:t>5,499</a:t>
+                        <a:t>5,601</a:t>
                       </a:r>
                     </a:p>
                   </a:txBody>
@@ -14608,7 +14608,7 @@
                           <a:ea typeface="대명체 보통" panose="020B0600000101010101" pitchFamily="50" charset="-127"/>
                           <a:cs typeface="+mn-cs"/>
                         </a:rPr>
-                        <a:t>1,968</a:t>
+                        <a:t>1,694</a:t>
                       </a:r>
                     </a:p>
                   </a:txBody>
@@ -14671,7 +14671,7 @@
                           <a:ea typeface="대명체 보통" panose="020B0600000101010101" pitchFamily="50" charset="-127"/>
                           <a:cs typeface="+mn-cs"/>
                         </a:rPr>
-                        <a:t>36%</a:t>
+                        <a:t>30%</a:t>
                       </a:r>
                     </a:p>
                   </a:txBody>
@@ -14900,7 +14900,7 @@
                           <a:ea typeface="대명체 보통" panose="020B0600000101010101" pitchFamily="50" charset="-127"/>
                           <a:cs typeface="+mn-cs"/>
                         </a:rPr>
-                        <a:t>92,017</a:t>
+                        <a:t>91,846</a:t>
                       </a:r>
                     </a:p>
                   </a:txBody>
@@ -15018,7 +15018,7 @@
                           <a:ea typeface="대명체 보통" panose="020B0600000101010101" pitchFamily="50" charset="-127"/>
                           <a:cs typeface="+mn-cs"/>
                         </a:rPr>
-                        <a:t>11,643</a:t>
+                        <a:t>11,472</a:t>
                       </a:r>
                     </a:p>
                   </a:txBody>
@@ -15144,7 +15144,7 @@
                           <a:ea typeface="대명체 보통" panose="020B0600000101010101" pitchFamily="50" charset="-127"/>
                           <a:cs typeface="+mn-cs"/>
                         </a:rPr>
-                        <a:t>64,155</a:t>
+                        <a:t>64,257</a:t>
                       </a:r>
                     </a:p>
                   </a:txBody>
@@ -15262,7 +15262,7 @@
                           <a:ea typeface="대명체 보통" panose="020B0600000101010101" pitchFamily="50" charset="-127"/>
                           <a:cs typeface="+mn-cs"/>
                         </a:rPr>
-                        <a:t>27,862</a:t>
+                        <a:t>27,589</a:t>
                       </a:r>
                     </a:p>
                   </a:txBody>
@@ -15643,7 +15643,7 @@
                           <a:ea typeface="대명체 보통" panose="020B0600000101010101" pitchFamily="50" charset="-127"/>
                           <a:cs typeface="+mn-cs"/>
                         </a:rPr>
-                        <a:t>6,911</a:t>
+                        <a:t>6,771</a:t>
                       </a:r>
                     </a:p>
                   </a:txBody>
@@ -15753,7 +15753,7 @@
                           <a:ea typeface="대명체 보통" panose="020B0600000101010101" pitchFamily="50" charset="-127"/>
                           <a:cs typeface="+mn-cs"/>
                         </a:rPr>
-                        <a:t>1,230</a:t>
+                        <a:t>1,090</a:t>
                       </a:r>
                       <a:endParaRPr lang="en-US" altLang="ko-KR" sz="700" b="0" i="0" u="none" strike="noStrike" kern="1200" dirty="0">
                         <a:solidFill>
@@ -15821,7 +15821,7 @@
                           <a:ea typeface="대명체 보통" panose="020B0600000101010101" pitchFamily="50" charset="-127"/>
                           <a:cs typeface="+mn-cs"/>
                         </a:rPr>
-                        <a:t>122%</a:t>
+                        <a:t>119%</a:t>
                       </a:r>
                     </a:p>
                   </a:txBody>
@@ -15880,7 +15880,7 @@
                           <a:ea typeface="대명체 보통" panose="020B0600000101010101" pitchFamily="50" charset="-127"/>
                           <a:cs typeface="+mn-cs"/>
                         </a:rPr>
-                        <a:t>3,822</a:t>
+                        <a:t>3,898</a:t>
                       </a:r>
                     </a:p>
                   </a:txBody>
@@ -15990,7 +15990,7 @@
                           <a:ea typeface="대명체 보통" panose="020B0600000101010101" pitchFamily="50" charset="-127"/>
                           <a:cs typeface="+mn-cs"/>
                         </a:rPr>
-                        <a:t>3,088</a:t>
+                        <a:t>2,873</a:t>
                       </a:r>
                     </a:p>
                   </a:txBody>
@@ -16049,7 +16049,7 @@
                           <a:ea typeface="대명체 보통" panose="020B0600000101010101" pitchFamily="50" charset="-127"/>
                           <a:cs typeface="+mn-cs"/>
                         </a:rPr>
-                        <a:t>81%</a:t>
+                        <a:t>74%</a:t>
                       </a:r>
                     </a:p>
                   </a:txBody>
@@ -16266,7 +16266,7 @@
                           <a:ea typeface="대명체 보통" panose="020B0600000101010101" pitchFamily="50" charset="-127"/>
                           <a:cs typeface="+mn-cs"/>
                         </a:rPr>
-                        <a:t>61,753</a:t>
+                        <a:t>61,613</a:t>
                       </a:r>
                     </a:p>
                   </a:txBody>
@@ -16376,7 +16376,7 @@
                           <a:ea typeface="대명체 보통" panose="020B0600000101010101" pitchFamily="50" charset="-127"/>
                           <a:cs typeface="+mn-cs"/>
                         </a:rPr>
-                        <a:t>6,969</a:t>
+                        <a:t>6,829</a:t>
                       </a:r>
                     </a:p>
                   </a:txBody>
@@ -16435,7 +16435,7 @@
                           <a:ea typeface="대명체 보통" panose="020B0600000101010101" pitchFamily="50" charset="-127"/>
                           <a:cs typeface="+mn-cs"/>
                         </a:rPr>
-                        <a:t>113%</a:t>
+                        <a:t>112%</a:t>
                       </a:r>
                     </a:p>
                   </a:txBody>
@@ -16494,7 +16494,7 @@
                           <a:ea typeface="대명체 보통" panose="020B0600000101010101" pitchFamily="50" charset="-127"/>
                           <a:cs typeface="+mn-cs"/>
                         </a:rPr>
-                        <a:t>44,378</a:t>
+                        <a:t>44,454</a:t>
                       </a:r>
                     </a:p>
                   </a:txBody>
@@ -16604,7 +16604,7 @@
                           <a:ea typeface="대명체 보통" panose="020B0600000101010101" pitchFamily="50" charset="-127"/>
                           <a:cs typeface="+mn-cs"/>
                         </a:rPr>
-                        <a:t>17,375</a:t>
+                        <a:t>17,160</a:t>
                       </a:r>
                     </a:p>
                   </a:txBody>
@@ -16999,7 +16999,7 @@
                           <a:ea typeface="대명체 보통" panose="020B0600000101010101" pitchFamily="50" charset="-127"/>
                           <a:cs typeface="+mn-cs"/>
                         </a:rPr>
-                        <a:t>593</a:t>
+                        <a:t>583</a:t>
                       </a:r>
                       <a:endParaRPr lang="en-US" altLang="ko-KR" sz="700" b="0" i="0" u="none" strike="noStrike" kern="1200" dirty="0">
                         <a:solidFill>
@@ -17126,7 +17126,7 @@
                           <a:ea typeface="대명체 보통" panose="020B0600000101010101" pitchFamily="50" charset="-127"/>
                           <a:cs typeface="+mn-cs"/>
                         </a:rPr>
-                        <a:t>191</a:t>
+                        <a:t>180</a:t>
                       </a:r>
                       <a:endParaRPr lang="en-US" altLang="ko-KR" sz="700" b="0" i="0" u="none" strike="noStrike" kern="1200" dirty="0">
                         <a:solidFill>
@@ -17198,7 +17198,7 @@
                           <a:ea typeface="대명체 보통" panose="020B0600000101010101" pitchFamily="50" charset="-127"/>
                           <a:cs typeface="+mn-cs"/>
                         </a:rPr>
-                        <a:t>147%</a:t>
+                        <a:t>145%</a:t>
                       </a:r>
                     </a:p>
                   </a:txBody>
@@ -17261,7 +17261,7 @@
                           <a:ea typeface="대명체 보통" panose="020B0600000101010101" pitchFamily="50" charset="-127"/>
                           <a:cs typeface="+mn-cs"/>
                         </a:rPr>
-                        <a:t>335</a:t>
+                        <a:t>339</a:t>
                       </a:r>
                       <a:endParaRPr lang="en-US" altLang="ko-KR" sz="700" b="0" i="0" u="none" strike="noStrike" kern="1200" dirty="0">
                         <a:solidFill>
@@ -17388,7 +17388,7 @@
                           <a:ea typeface="대명체 보통" panose="020B0600000101010101" pitchFamily="50" charset="-127"/>
                           <a:cs typeface="+mn-cs"/>
                         </a:rPr>
-                        <a:t>259</a:t>
+                        <a:t>244</a:t>
                       </a:r>
                     </a:p>
                   </a:txBody>
@@ -17451,7 +17451,7 @@
                           <a:ea typeface="대명체 보통" panose="020B0600000101010101" pitchFamily="50" charset="-127"/>
                           <a:cs typeface="+mn-cs"/>
                         </a:rPr>
-                        <a:t>77%</a:t>
+                        <a:t>72%</a:t>
                       </a:r>
                     </a:p>
                   </a:txBody>
@@ -17680,7 +17680,7 @@
                           <a:ea typeface="대명체 보통" panose="020B0600000101010101" pitchFamily="50" charset="-127"/>
                           <a:cs typeface="+mn-cs"/>
                         </a:rPr>
-                        <a:t>5,777</a:t>
+                        <a:t>5,767</a:t>
                       </a:r>
                     </a:p>
                   </a:txBody>
@@ -17798,7 +17798,7 @@
                           <a:ea typeface="대명체 보통" panose="020B0600000101010101" pitchFamily="50" charset="-127"/>
                           <a:cs typeface="+mn-cs"/>
                         </a:rPr>
-                        <a:t>1,907</a:t>
+                        <a:t>1,897</a:t>
                       </a:r>
                       <a:endParaRPr lang="en-US" altLang="ko-KR" sz="700" b="0" i="0" u="none" strike="noStrike" kern="1200" dirty="0">
                         <a:solidFill>
@@ -17933,7 +17933,7 @@
                           <a:ea typeface="대명체 보통" panose="020B0600000101010101" pitchFamily="50" charset="-127"/>
                           <a:cs typeface="+mn-cs"/>
                         </a:rPr>
-                        <a:t>3,562</a:t>
+                        <a:t>3,567</a:t>
                       </a:r>
                     </a:p>
                   </a:txBody>
@@ -18051,7 +18051,7 @@
                           <a:ea typeface="대명체 보통" panose="020B0600000101010101" pitchFamily="50" charset="-127"/>
                           <a:cs typeface="+mn-cs"/>
                         </a:rPr>
-                        <a:t>2,215</a:t>
+                        <a:t>2,200</a:t>
                       </a:r>
                     </a:p>
                   </a:txBody>

--- a/docs/data/세일즈마케팅_예상매출현황.pptx
+++ b/docs/data/세일즈마케팅_예상매출현황.pptx
@@ -12756,7 +12756,7 @@
                           <a:ea typeface="대명체 보통" panose="020B0600000101010101" pitchFamily="50" charset="-127"/>
                           <a:cs typeface="+mn-cs"/>
                         </a:rPr>
-                        <a:t>14,650</a:t>
+                        <a:t>14,641</a:t>
                       </a:r>
                     </a:p>
                   </a:txBody>
@@ -12882,7 +12882,7 @@
                           <a:ea typeface="대명체 보통" panose="020B0600000101010101" pitchFamily="50" charset="-127"/>
                           <a:cs typeface="+mn-cs"/>
                         </a:rPr>
-                        <a:t>543</a:t>
+                        <a:t>534</a:t>
                       </a:r>
                     </a:p>
                   </a:txBody>
@@ -13142,7 +13142,7 @@
                           <a:ea typeface="대명체 보통" panose="020B0600000101010101" pitchFamily="50" charset="-127"/>
                           <a:cs typeface="+mn-cs"/>
                         </a:rPr>
-                        <a:t>4,811</a:t>
+                        <a:t>4,802</a:t>
                       </a:r>
                     </a:p>
                   </a:txBody>
@@ -13450,7 +13450,7 @@
                           <a:ea typeface="대명체 보통" panose="020B0600000101010101" pitchFamily="50" charset="-127"/>
                           <a:cs typeface="+mn-cs"/>
                         </a:rPr>
-                        <a:t>159,226</a:t>
+                        <a:t>159,217</a:t>
                       </a:r>
                     </a:p>
                   </a:txBody>
@@ -13576,7 +13576,7 @@
                           <a:ea typeface="대명체 보통" panose="020B0600000101010101" pitchFamily="50" charset="-127"/>
                           <a:cs typeface="+mn-cs"/>
                         </a:rPr>
-                        <a:t>20,198</a:t>
+                        <a:t>20,189</a:t>
                       </a:r>
                     </a:p>
                   </a:txBody>
@@ -13836,7 +13836,7 @@
                           <a:ea typeface="대명체 보통" panose="020B0600000101010101" pitchFamily="50" charset="-127"/>
                           <a:cs typeface="+mn-cs"/>
                         </a:rPr>
-                        <a:t>46,948</a:t>
+                        <a:t>46,939</a:t>
                       </a:r>
                     </a:p>
                   </a:txBody>
@@ -14237,7 +14237,7 @@
                           <a:ea typeface="대명체 보통" panose="020B0600000101010101" pitchFamily="50" charset="-127"/>
                           <a:cs typeface="+mn-cs"/>
                         </a:rPr>
-                        <a:t>7,296</a:t>
+                        <a:t>7,274</a:t>
                       </a:r>
                     </a:p>
                   </a:txBody>
@@ -14355,7 +14355,7 @@
                           <a:ea typeface="대명체 보통" panose="020B0600000101010101" pitchFamily="50" charset="-127"/>
                           <a:cs typeface="+mn-cs"/>
                         </a:rPr>
-                        <a:t>-727</a:t>
+                        <a:t>-749</a:t>
                       </a:r>
                       <a:endParaRPr lang="en-US" altLang="ko-KR" sz="700" b="0" i="0" u="none" strike="noStrike" kern="1200" dirty="0">
                         <a:solidFill>
@@ -14608,7 +14608,7 @@
                           <a:ea typeface="대명체 보통" panose="020B0600000101010101" pitchFamily="50" charset="-127"/>
                           <a:cs typeface="+mn-cs"/>
                         </a:rPr>
-                        <a:t>1,694</a:t>
+                        <a:t>1,672</a:t>
                       </a:r>
                     </a:p>
                   </a:txBody>
@@ -14900,7 +14900,7 @@
                           <a:ea typeface="대명체 보통" panose="020B0600000101010101" pitchFamily="50" charset="-127"/>
                           <a:cs typeface="+mn-cs"/>
                         </a:rPr>
-                        <a:t>91,846</a:t>
+                        <a:t>91,824</a:t>
                       </a:r>
                     </a:p>
                   </a:txBody>
@@ -15018,7 +15018,7 @@
                           <a:ea typeface="대명체 보통" panose="020B0600000101010101" pitchFamily="50" charset="-127"/>
                           <a:cs typeface="+mn-cs"/>
                         </a:rPr>
-                        <a:t>11,472</a:t>
+                        <a:t>11,450</a:t>
                       </a:r>
                     </a:p>
                   </a:txBody>
@@ -15262,7 +15262,7 @@
                           <a:ea typeface="대명체 보통" panose="020B0600000101010101" pitchFamily="50" charset="-127"/>
                           <a:cs typeface="+mn-cs"/>
                         </a:rPr>
-                        <a:t>27,589</a:t>
+                        <a:t>27,567</a:t>
                       </a:r>
                     </a:p>
                   </a:txBody>
@@ -15643,7 +15643,7 @@
                           <a:ea typeface="대명체 보통" panose="020B0600000101010101" pitchFamily="50" charset="-127"/>
                           <a:cs typeface="+mn-cs"/>
                         </a:rPr>
-                        <a:t>6,771</a:t>
+                        <a:t>6,777</a:t>
                       </a:r>
                     </a:p>
                   </a:txBody>
@@ -15753,7 +15753,7 @@
                           <a:ea typeface="대명체 보통" panose="020B0600000101010101" pitchFamily="50" charset="-127"/>
                           <a:cs typeface="+mn-cs"/>
                         </a:rPr>
-                        <a:t>1,090</a:t>
+                        <a:t>1,096</a:t>
                       </a:r>
                       <a:endParaRPr lang="en-US" altLang="ko-KR" sz="700" b="0" i="0" u="none" strike="noStrike" kern="1200" dirty="0">
                         <a:solidFill>
@@ -15990,7 +15990,7 @@
                           <a:ea typeface="대명체 보통" panose="020B0600000101010101" pitchFamily="50" charset="-127"/>
                           <a:cs typeface="+mn-cs"/>
                         </a:rPr>
-                        <a:t>2,873</a:t>
+                        <a:t>2,879</a:t>
                       </a:r>
                     </a:p>
                   </a:txBody>
@@ -16266,7 +16266,7 @@
                           <a:ea typeface="대명체 보통" panose="020B0600000101010101" pitchFamily="50" charset="-127"/>
                           <a:cs typeface="+mn-cs"/>
                         </a:rPr>
-                        <a:t>61,613</a:t>
+                        <a:t>61,619</a:t>
                       </a:r>
                     </a:p>
                   </a:txBody>
@@ -16376,7 +16376,7 @@
                           <a:ea typeface="대명체 보통" panose="020B0600000101010101" pitchFamily="50" charset="-127"/>
                           <a:cs typeface="+mn-cs"/>
                         </a:rPr>
-                        <a:t>6,829</a:t>
+                        <a:t>6,835</a:t>
                       </a:r>
                     </a:p>
                   </a:txBody>
@@ -16604,7 +16604,7 @@
                           <a:ea typeface="대명체 보통" panose="020B0600000101010101" pitchFamily="50" charset="-127"/>
                           <a:cs typeface="+mn-cs"/>
                         </a:rPr>
-                        <a:t>17,160</a:t>
+                        <a:t>17,166</a:t>
                       </a:r>
                     </a:p>
                   </a:txBody>
@@ -16999,7 +16999,7 @@
                           <a:ea typeface="대명체 보통" panose="020B0600000101010101" pitchFamily="50" charset="-127"/>
                           <a:cs typeface="+mn-cs"/>
                         </a:rPr>
-                        <a:t>583</a:t>
+                        <a:t>590</a:t>
                       </a:r>
                       <a:endParaRPr lang="en-US" altLang="ko-KR" sz="700" b="0" i="0" u="none" strike="noStrike" kern="1200" dirty="0">
                         <a:solidFill>
@@ -17126,7 +17126,7 @@
                           <a:ea typeface="대명체 보통" panose="020B0600000101010101" pitchFamily="50" charset="-127"/>
                           <a:cs typeface="+mn-cs"/>
                         </a:rPr>
-                        <a:t>180</a:t>
+                        <a:t>187</a:t>
                       </a:r>
                       <a:endParaRPr lang="en-US" altLang="ko-KR" sz="700" b="0" i="0" u="none" strike="noStrike" kern="1200" dirty="0">
                         <a:solidFill>
@@ -17198,7 +17198,7 @@
                           <a:ea typeface="대명체 보통" panose="020B0600000101010101" pitchFamily="50" charset="-127"/>
                           <a:cs typeface="+mn-cs"/>
                         </a:rPr>
-                        <a:t>145%</a:t>
+                        <a:t>147%</a:t>
                       </a:r>
                     </a:p>
                   </a:txBody>
@@ -17388,7 +17388,7 @@
                           <a:ea typeface="대명체 보통" panose="020B0600000101010101" pitchFamily="50" charset="-127"/>
                           <a:cs typeface="+mn-cs"/>
                         </a:rPr>
-                        <a:t>244</a:t>
+                        <a:t>251</a:t>
                       </a:r>
                     </a:p>
                   </a:txBody>
@@ -17451,7 +17451,7 @@
                           <a:ea typeface="대명체 보통" panose="020B0600000101010101" pitchFamily="50" charset="-127"/>
                           <a:cs typeface="+mn-cs"/>
                         </a:rPr>
-                        <a:t>72%</a:t>
+                        <a:t>74%</a:t>
                       </a:r>
                     </a:p>
                   </a:txBody>
@@ -17680,7 +17680,7 @@
                           <a:ea typeface="대명체 보통" panose="020B0600000101010101" pitchFamily="50" charset="-127"/>
                           <a:cs typeface="+mn-cs"/>
                         </a:rPr>
-                        <a:t>5,767</a:t>
+                        <a:t>5,774</a:t>
                       </a:r>
                     </a:p>
                   </a:txBody>
@@ -17798,7 +17798,7 @@
                           <a:ea typeface="대명체 보통" panose="020B0600000101010101" pitchFamily="50" charset="-127"/>
                           <a:cs typeface="+mn-cs"/>
                         </a:rPr>
-                        <a:t>1,897</a:t>
+                        <a:t>1,904</a:t>
                       </a:r>
                       <a:endParaRPr lang="en-US" altLang="ko-KR" sz="700" b="0" i="0" u="none" strike="noStrike" kern="1200" dirty="0">
                         <a:solidFill>
@@ -18051,7 +18051,7 @@
                           <a:ea typeface="대명체 보통" panose="020B0600000101010101" pitchFamily="50" charset="-127"/>
                           <a:cs typeface="+mn-cs"/>
                         </a:rPr>
-                        <a:t>2,200</a:t>
+                        <a:t>2,207</a:t>
                       </a:r>
                     </a:p>
                   </a:txBody>

--- a/docs/data/세일즈마케팅_예상매출현황.pptx
+++ b/docs/data/세일즈마케팅_예상매출현황.pptx
@@ -12756,7 +12756,7 @@
                           <a:ea typeface="대명체 보통" panose="020B0600000101010101" pitchFamily="50" charset="-127"/>
                           <a:cs typeface="+mn-cs"/>
                         </a:rPr>
-                        <a:t>14,641</a:t>
+                        <a:t>14,399</a:t>
                       </a:r>
                     </a:p>
                   </a:txBody>
@@ -12882,7 +12882,7 @@
                           <a:ea typeface="대명체 보통" panose="020B0600000101010101" pitchFamily="50" charset="-127"/>
                           <a:cs typeface="+mn-cs"/>
                         </a:rPr>
-                        <a:t>534</a:t>
+                        <a:t>293</a:t>
                       </a:r>
                     </a:p>
                   </a:txBody>
@@ -12949,7 +12949,7 @@
                           <a:ea typeface="대명체 보통" panose="020B0600000101010101" pitchFamily="50" charset="-127"/>
                           <a:cs typeface="+mn-cs"/>
                         </a:rPr>
-                        <a:t>104%</a:t>
+                        <a:t>102%</a:t>
                       </a:r>
                     </a:p>
                   </a:txBody>
@@ -13016,7 +13016,7 @@
                           <a:ea typeface="대명체 보통" panose="020B0600000101010101" pitchFamily="50" charset="-127"/>
                           <a:cs typeface="+mn-cs"/>
                         </a:rPr>
-                        <a:t>9,839</a:t>
+                        <a:t>9,964</a:t>
                       </a:r>
                     </a:p>
                   </a:txBody>
@@ -13142,7 +13142,7 @@
                           <a:ea typeface="대명체 보통" panose="020B0600000101010101" pitchFamily="50" charset="-127"/>
                           <a:cs typeface="+mn-cs"/>
                         </a:rPr>
-                        <a:t>4,802</a:t>
+                        <a:t>4,435</a:t>
                       </a:r>
                     </a:p>
                   </a:txBody>
@@ -13209,7 +13209,7 @@
                           <a:ea typeface="대명체 보통" panose="020B0600000101010101" pitchFamily="50" charset="-127"/>
                           <a:cs typeface="+mn-cs"/>
                         </a:rPr>
-                        <a:t>49%</a:t>
+                        <a:t>45%</a:t>
                       </a:r>
                     </a:p>
                   </a:txBody>
@@ -13450,7 +13450,7 @@
                           <a:ea typeface="대명체 보통" panose="020B0600000101010101" pitchFamily="50" charset="-127"/>
                           <a:cs typeface="+mn-cs"/>
                         </a:rPr>
-                        <a:t>159,217</a:t>
+                        <a:t>158,976</a:t>
                       </a:r>
                     </a:p>
                   </a:txBody>
@@ -13576,7 +13576,7 @@
                           <a:ea typeface="대명체 보통" panose="020B0600000101010101" pitchFamily="50" charset="-127"/>
                           <a:cs typeface="+mn-cs"/>
                         </a:rPr>
-                        <a:t>20,189</a:t>
+                        <a:t>19,948</a:t>
                       </a:r>
                     </a:p>
                   </a:txBody>
@@ -13643,7 +13643,7 @@
                           <a:ea typeface="대명체 보통" panose="020B0600000101010101" pitchFamily="50" charset="-127"/>
                           <a:cs typeface="+mn-cs"/>
                         </a:rPr>
-                        <a:t>115%</a:t>
+                        <a:t>114%</a:t>
                       </a:r>
                     </a:p>
                   </a:txBody>
@@ -13710,7 +13710,7 @@
                           <a:ea typeface="대명체 보통" panose="020B0600000101010101" pitchFamily="50" charset="-127"/>
                           <a:cs typeface="+mn-cs"/>
                         </a:rPr>
-                        <a:t>112,278</a:t>
+                        <a:t>112,403</a:t>
                       </a:r>
                     </a:p>
                   </a:txBody>
@@ -13836,7 +13836,7 @@
                           <a:ea typeface="대명체 보통" panose="020B0600000101010101" pitchFamily="50" charset="-127"/>
                           <a:cs typeface="+mn-cs"/>
                         </a:rPr>
-                        <a:t>46,939</a:t>
+                        <a:t>46,573</a:t>
                       </a:r>
                     </a:p>
                   </a:txBody>
@@ -13903,7 +13903,7 @@
                           <a:ea typeface="대명체 보통" panose="020B0600000101010101" pitchFamily="50" charset="-127"/>
                           <a:cs typeface="+mn-cs"/>
                         </a:rPr>
-                        <a:t>42%</a:t>
+                        <a:t>41%</a:t>
                       </a:r>
                     </a:p>
                   </a:txBody>
@@ -14237,7 +14237,7 @@
                           <a:ea typeface="대명체 보통" panose="020B0600000101010101" pitchFamily="50" charset="-127"/>
                           <a:cs typeface="+mn-cs"/>
                         </a:rPr>
-                        <a:t>7,274</a:t>
+                        <a:t>7,143</a:t>
                       </a:r>
                     </a:p>
                   </a:txBody>
@@ -14355,7 +14355,7 @@
                           <a:ea typeface="대명체 보통" panose="020B0600000101010101" pitchFamily="50" charset="-127"/>
                           <a:cs typeface="+mn-cs"/>
                         </a:rPr>
-                        <a:t>-749</a:t>
+                        <a:t>-880</a:t>
                       </a:r>
                       <a:endParaRPr lang="en-US" altLang="ko-KR" sz="700" b="0" i="0" u="none" strike="noStrike" kern="1200" dirty="0">
                         <a:solidFill>
@@ -14427,7 +14427,7 @@
                           <a:ea typeface="대명체 보통" panose="020B0600000101010101" pitchFamily="50" charset="-127"/>
                           <a:cs typeface="+mn-cs"/>
                         </a:rPr>
-                        <a:t>91%</a:t>
+                        <a:t>89%</a:t>
                       </a:r>
                     </a:p>
                   </a:txBody>
@@ -14490,7 +14490,7 @@
                           <a:ea typeface="대명체 보통" panose="020B0600000101010101" pitchFamily="50" charset="-127"/>
                           <a:cs typeface="+mn-cs"/>
                         </a:rPr>
-                        <a:t>5,601</a:t>
+                        <a:t>5,683</a:t>
                       </a:r>
                     </a:p>
                   </a:txBody>
@@ -14608,7 +14608,7 @@
                           <a:ea typeface="대명체 보통" panose="020B0600000101010101" pitchFamily="50" charset="-127"/>
                           <a:cs typeface="+mn-cs"/>
                         </a:rPr>
-                        <a:t>1,672</a:t>
+                        <a:t>1,460</a:t>
                       </a:r>
                     </a:p>
                   </a:txBody>
@@ -14671,7 +14671,7 @@
                           <a:ea typeface="대명체 보통" panose="020B0600000101010101" pitchFamily="50" charset="-127"/>
                           <a:cs typeface="+mn-cs"/>
                         </a:rPr>
-                        <a:t>30%</a:t>
+                        <a:t>26%</a:t>
                       </a:r>
                     </a:p>
                   </a:txBody>
@@ -14900,7 +14900,7 @@
                           <a:ea typeface="대명체 보통" panose="020B0600000101010101" pitchFamily="50" charset="-127"/>
                           <a:cs typeface="+mn-cs"/>
                         </a:rPr>
-                        <a:t>91,824</a:t>
+                        <a:t>91,693</a:t>
                       </a:r>
                     </a:p>
                   </a:txBody>
@@ -15018,7 +15018,7 @@
                           <a:ea typeface="대명체 보통" panose="020B0600000101010101" pitchFamily="50" charset="-127"/>
                           <a:cs typeface="+mn-cs"/>
                         </a:rPr>
-                        <a:t>11,450</a:t>
+                        <a:t>11,319</a:t>
                       </a:r>
                     </a:p>
                   </a:txBody>
@@ -15144,7 +15144,7 @@
                           <a:ea typeface="대명체 보통" panose="020B0600000101010101" pitchFamily="50" charset="-127"/>
                           <a:cs typeface="+mn-cs"/>
                         </a:rPr>
-                        <a:t>64,257</a:t>
+                        <a:t>64,339</a:t>
                       </a:r>
                     </a:p>
                   </a:txBody>
@@ -15262,7 +15262,7 @@
                           <a:ea typeface="대명체 보통" panose="020B0600000101010101" pitchFamily="50" charset="-127"/>
                           <a:cs typeface="+mn-cs"/>
                         </a:rPr>
-                        <a:t>27,567</a:t>
+                        <a:t>27,354</a:t>
                       </a:r>
                     </a:p>
                   </a:txBody>
@@ -15643,7 +15643,7 @@
                           <a:ea typeface="대명체 보통" panose="020B0600000101010101" pitchFamily="50" charset="-127"/>
                           <a:cs typeface="+mn-cs"/>
                         </a:rPr>
-                        <a:t>6,777</a:t>
+                        <a:t>6,671</a:t>
                       </a:r>
                     </a:p>
                   </a:txBody>
@@ -15753,7 +15753,7 @@
                           <a:ea typeface="대명체 보통" panose="020B0600000101010101" pitchFamily="50" charset="-127"/>
                           <a:cs typeface="+mn-cs"/>
                         </a:rPr>
-                        <a:t>1,096</a:t>
+                        <a:t>990</a:t>
                       </a:r>
                       <a:endParaRPr lang="en-US" altLang="ko-KR" sz="700" b="0" i="0" u="none" strike="noStrike" kern="1200" dirty="0">
                         <a:solidFill>
@@ -15821,7 +15821,7 @@
                           <a:ea typeface="대명체 보통" panose="020B0600000101010101" pitchFamily="50" charset="-127"/>
                           <a:cs typeface="+mn-cs"/>
                         </a:rPr>
-                        <a:t>119%</a:t>
+                        <a:t>117%</a:t>
                       </a:r>
                     </a:p>
                   </a:txBody>
@@ -15880,7 +15880,7 @@
                           <a:ea typeface="대명체 보통" panose="020B0600000101010101" pitchFamily="50" charset="-127"/>
                           <a:cs typeface="+mn-cs"/>
                         </a:rPr>
-                        <a:t>3,898</a:t>
+                        <a:t>3,939</a:t>
                       </a:r>
                     </a:p>
                   </a:txBody>
@@ -15990,7 +15990,7 @@
                           <a:ea typeface="대명체 보통" panose="020B0600000101010101" pitchFamily="50" charset="-127"/>
                           <a:cs typeface="+mn-cs"/>
                         </a:rPr>
-                        <a:t>2,879</a:t>
+                        <a:t>2,733</a:t>
                       </a:r>
                     </a:p>
                   </a:txBody>
@@ -16049,7 +16049,7 @@
                           <a:ea typeface="대명체 보통" panose="020B0600000101010101" pitchFamily="50" charset="-127"/>
                           <a:cs typeface="+mn-cs"/>
                         </a:rPr>
-                        <a:t>74%</a:t>
+                        <a:t>69%</a:t>
                       </a:r>
                     </a:p>
                   </a:txBody>
@@ -16266,7 +16266,7 @@
                           <a:ea typeface="대명체 보통" panose="020B0600000101010101" pitchFamily="50" charset="-127"/>
                           <a:cs typeface="+mn-cs"/>
                         </a:rPr>
-                        <a:t>61,619</a:t>
+                        <a:t>61,514</a:t>
                       </a:r>
                     </a:p>
                   </a:txBody>
@@ -16376,7 +16376,7 @@
                           <a:ea typeface="대명체 보통" panose="020B0600000101010101" pitchFamily="50" charset="-127"/>
                           <a:cs typeface="+mn-cs"/>
                         </a:rPr>
-                        <a:t>6,835</a:t>
+                        <a:t>6,730</a:t>
                       </a:r>
                     </a:p>
                   </a:txBody>
@@ -16494,7 +16494,7 @@
                           <a:ea typeface="대명체 보통" panose="020B0600000101010101" pitchFamily="50" charset="-127"/>
                           <a:cs typeface="+mn-cs"/>
                         </a:rPr>
-                        <a:t>44,454</a:t>
+                        <a:t>44,494</a:t>
                       </a:r>
                     </a:p>
                   </a:txBody>
@@ -16604,7 +16604,7 @@
                           <a:ea typeface="대명체 보통" panose="020B0600000101010101" pitchFamily="50" charset="-127"/>
                           <a:cs typeface="+mn-cs"/>
                         </a:rPr>
-                        <a:t>17,166</a:t>
+                        <a:t>17,019</a:t>
                       </a:r>
                     </a:p>
                   </a:txBody>
@@ -16663,7 +16663,7 @@
                           <a:ea typeface="대명체 보통" panose="020B0600000101010101" pitchFamily="50" charset="-127"/>
                           <a:cs typeface="+mn-cs"/>
                         </a:rPr>
-                        <a:t>39%</a:t>
+                        <a:t>38%</a:t>
                       </a:r>
                     </a:p>
                   </a:txBody>
@@ -16999,7 +16999,7 @@
                           <a:ea typeface="대명체 보통" panose="020B0600000101010101" pitchFamily="50" charset="-127"/>
                           <a:cs typeface="+mn-cs"/>
                         </a:rPr>
-                        <a:t>590</a:t>
+                        <a:t>585</a:t>
                       </a:r>
                       <a:endParaRPr lang="en-US" altLang="ko-KR" sz="700" b="0" i="0" u="none" strike="noStrike" kern="1200" dirty="0">
                         <a:solidFill>
@@ -17126,7 +17126,7 @@
                           <a:ea typeface="대명체 보통" panose="020B0600000101010101" pitchFamily="50" charset="-127"/>
                           <a:cs typeface="+mn-cs"/>
                         </a:rPr>
-                        <a:t>187</a:t>
+                        <a:t>183</a:t>
                       </a:r>
                       <a:endParaRPr lang="en-US" altLang="ko-KR" sz="700" b="0" i="0" u="none" strike="noStrike" kern="1200" dirty="0">
                         <a:solidFill>
@@ -17198,7 +17198,7 @@
                           <a:ea typeface="대명체 보통" panose="020B0600000101010101" pitchFamily="50" charset="-127"/>
                           <a:cs typeface="+mn-cs"/>
                         </a:rPr>
-                        <a:t>147%</a:t>
+                        <a:t>145%</a:t>
                       </a:r>
                     </a:p>
                   </a:txBody>
@@ -17261,7 +17261,7 @@
                           <a:ea typeface="대명체 보통" panose="020B0600000101010101" pitchFamily="50" charset="-127"/>
                           <a:cs typeface="+mn-cs"/>
                         </a:rPr>
-                        <a:t>339</a:t>
+                        <a:t>343</a:t>
                       </a:r>
                       <a:endParaRPr lang="en-US" altLang="ko-KR" sz="700" b="0" i="0" u="none" strike="noStrike" kern="1200" dirty="0">
                         <a:solidFill>
@@ -17388,7 +17388,7 @@
                           <a:ea typeface="대명체 보통" panose="020B0600000101010101" pitchFamily="50" charset="-127"/>
                           <a:cs typeface="+mn-cs"/>
                         </a:rPr>
-                        <a:t>251</a:t>
+                        <a:t>243</a:t>
                       </a:r>
                     </a:p>
                   </a:txBody>
@@ -17451,7 +17451,7 @@
                           <a:ea typeface="대명체 보통" panose="020B0600000101010101" pitchFamily="50" charset="-127"/>
                           <a:cs typeface="+mn-cs"/>
                         </a:rPr>
-                        <a:t>74%</a:t>
+                        <a:t>71%</a:t>
                       </a:r>
                     </a:p>
                   </a:txBody>
@@ -17680,7 +17680,7 @@
                           <a:ea typeface="대명체 보통" panose="020B0600000101010101" pitchFamily="50" charset="-127"/>
                           <a:cs typeface="+mn-cs"/>
                         </a:rPr>
-                        <a:t>5,774</a:t>
+                        <a:t>5,769</a:t>
                       </a:r>
                     </a:p>
                   </a:txBody>
@@ -17798,7 +17798,7 @@
                           <a:ea typeface="대명체 보통" panose="020B0600000101010101" pitchFamily="50" charset="-127"/>
                           <a:cs typeface="+mn-cs"/>
                         </a:rPr>
-                        <a:t>1,904</a:t>
+                        <a:t>1,900</a:t>
                       </a:r>
                       <a:endParaRPr lang="en-US" altLang="ko-KR" sz="700" b="0" i="0" u="none" strike="noStrike" kern="1200" dirty="0">
                         <a:solidFill>
@@ -17933,7 +17933,7 @@
                           <a:ea typeface="대명체 보통" panose="020B0600000101010101" pitchFamily="50" charset="-127"/>
                           <a:cs typeface="+mn-cs"/>
                         </a:rPr>
-                        <a:t>3,567</a:t>
+                        <a:t>3,570</a:t>
                       </a:r>
                     </a:p>
                   </a:txBody>
@@ -18051,7 +18051,7 @@
                           <a:ea typeface="대명체 보통" panose="020B0600000101010101" pitchFamily="50" charset="-127"/>
                           <a:cs typeface="+mn-cs"/>
                         </a:rPr>
-                        <a:t>2,207</a:t>
+                        <a:t>2,199</a:t>
                       </a:r>
                     </a:p>
                   </a:txBody>

--- a/docs/data/세일즈마케팅_예상매출현황.pptx
+++ b/docs/data/세일즈마케팅_예상매출현황.pptx
@@ -12756,7 +12756,7 @@
                           <a:ea typeface="대명체 보통" panose="020B0600000101010101" pitchFamily="50" charset="-127"/>
                           <a:cs typeface="+mn-cs"/>
                         </a:rPr>
-                        <a:t>14,399</a:t>
+                        <a:t>13,870</a:t>
                       </a:r>
                     </a:p>
                   </a:txBody>
@@ -12875,14 +12875,14 @@
                       <a:r>
                         <a:rPr lang="en-US" altLang="ko-KR" sz="700" b="0" i="0" u="none" strike="noStrike" kern="1200" dirty="0">
                           <a:solidFill>
-                            <a:srgbClr val="000000"/>
+                            <a:srgbClr val="FF0000"/>
                           </a:solidFill>
                           <a:effectLst/>
                           <a:latin typeface="대명체 보통" panose="020B0600000101010101" pitchFamily="50" charset="-127"/>
                           <a:ea typeface="대명체 보통" panose="020B0600000101010101" pitchFamily="50" charset="-127"/>
                           <a:cs typeface="+mn-cs"/>
                         </a:rPr>
-                        <a:t>293</a:t>
+                        <a:t>-236</a:t>
                       </a:r>
                     </a:p>
                   </a:txBody>
@@ -12949,7 +12949,7 @@
                           <a:ea typeface="대명체 보통" panose="020B0600000101010101" pitchFamily="50" charset="-127"/>
                           <a:cs typeface="+mn-cs"/>
                         </a:rPr>
-                        <a:t>102%</a:t>
+                        <a:t>98%</a:t>
                       </a:r>
                     </a:p>
                   </a:txBody>
@@ -13016,7 +13016,7 @@
                           <a:ea typeface="대명체 보통" panose="020B0600000101010101" pitchFamily="50" charset="-127"/>
                           <a:cs typeface="+mn-cs"/>
                         </a:rPr>
-                        <a:t>9,964</a:t>
+                        <a:t>10,359</a:t>
                       </a:r>
                     </a:p>
                   </a:txBody>
@@ -13142,7 +13142,7 @@
                           <a:ea typeface="대명체 보통" panose="020B0600000101010101" pitchFamily="50" charset="-127"/>
                           <a:cs typeface="+mn-cs"/>
                         </a:rPr>
-                        <a:t>4,435</a:t>
+                        <a:t>3,511</a:t>
                       </a:r>
                     </a:p>
                   </a:txBody>
@@ -13209,7 +13209,7 @@
                           <a:ea typeface="대명체 보통" panose="020B0600000101010101" pitchFamily="50" charset="-127"/>
                           <a:cs typeface="+mn-cs"/>
                         </a:rPr>
-                        <a:t>45%</a:t>
+                        <a:t>34%</a:t>
                       </a:r>
                     </a:p>
                   </a:txBody>
@@ -13450,7 +13450,7 @@
                           <a:ea typeface="대명체 보통" panose="020B0600000101010101" pitchFamily="50" charset="-127"/>
                           <a:cs typeface="+mn-cs"/>
                         </a:rPr>
-                        <a:t>158,976</a:t>
+                        <a:t>158,446</a:t>
                       </a:r>
                     </a:p>
                   </a:txBody>
@@ -13576,7 +13576,7 @@
                           <a:ea typeface="대명체 보통" panose="020B0600000101010101" pitchFamily="50" charset="-127"/>
                           <a:cs typeface="+mn-cs"/>
                         </a:rPr>
-                        <a:t>19,948</a:t>
+                        <a:t>19,419</a:t>
                       </a:r>
                     </a:p>
                   </a:txBody>
@@ -13710,7 +13710,7 @@
                           <a:ea typeface="대명체 보통" panose="020B0600000101010101" pitchFamily="50" charset="-127"/>
                           <a:cs typeface="+mn-cs"/>
                         </a:rPr>
-                        <a:t>112,403</a:t>
+                        <a:t>112,798</a:t>
                       </a:r>
                     </a:p>
                   </a:txBody>
@@ -13836,7 +13836,7 @@
                           <a:ea typeface="대명체 보통" panose="020B0600000101010101" pitchFamily="50" charset="-127"/>
                           <a:cs typeface="+mn-cs"/>
                         </a:rPr>
-                        <a:t>46,573</a:t>
+                        <a:t>45,649</a:t>
                       </a:r>
                     </a:p>
                   </a:txBody>
@@ -13903,7 +13903,7 @@
                           <a:ea typeface="대명체 보통" panose="020B0600000101010101" pitchFamily="50" charset="-127"/>
                           <a:cs typeface="+mn-cs"/>
                         </a:rPr>
-                        <a:t>41%</a:t>
+                        <a:t>40%</a:t>
                       </a:r>
                     </a:p>
                   </a:txBody>
@@ -14237,7 +14237,7 @@
                           <a:ea typeface="대명체 보통" panose="020B0600000101010101" pitchFamily="50" charset="-127"/>
                           <a:cs typeface="+mn-cs"/>
                         </a:rPr>
-                        <a:t>7,143</a:t>
+                        <a:t>6,882</a:t>
                       </a:r>
                     </a:p>
                   </a:txBody>
@@ -14355,7 +14355,7 @@
                           <a:ea typeface="대명체 보통" panose="020B0600000101010101" pitchFamily="50" charset="-127"/>
                           <a:cs typeface="+mn-cs"/>
                         </a:rPr>
-                        <a:t>-880</a:t>
+                        <a:t>-1,141</a:t>
                       </a:r>
                       <a:endParaRPr lang="en-US" altLang="ko-KR" sz="700" b="0" i="0" u="none" strike="noStrike" kern="1200" dirty="0">
                         <a:solidFill>
@@ -14427,7 +14427,7 @@
                           <a:ea typeface="대명체 보통" panose="020B0600000101010101" pitchFamily="50" charset="-127"/>
                           <a:cs typeface="+mn-cs"/>
                         </a:rPr>
-                        <a:t>89%</a:t>
+                        <a:t>86%</a:t>
                       </a:r>
                     </a:p>
                   </a:txBody>
@@ -14490,7 +14490,7 @@
                           <a:ea typeface="대명체 보통" panose="020B0600000101010101" pitchFamily="50" charset="-127"/>
                           <a:cs typeface="+mn-cs"/>
                         </a:rPr>
-                        <a:t>5,683</a:t>
+                        <a:t>5,887</a:t>
                       </a:r>
                     </a:p>
                   </a:txBody>
@@ -14608,7 +14608,7 @@
                           <a:ea typeface="대명체 보통" panose="020B0600000101010101" pitchFamily="50" charset="-127"/>
                           <a:cs typeface="+mn-cs"/>
                         </a:rPr>
-                        <a:t>1,460</a:t>
+                        <a:t>995</a:t>
                       </a:r>
                     </a:p>
                   </a:txBody>
@@ -14671,7 +14671,7 @@
                           <a:ea typeface="대명체 보통" panose="020B0600000101010101" pitchFamily="50" charset="-127"/>
                           <a:cs typeface="+mn-cs"/>
                         </a:rPr>
-                        <a:t>26%</a:t>
+                        <a:t>17%</a:t>
                       </a:r>
                     </a:p>
                   </a:txBody>
@@ -14900,7 +14900,7 @@
                           <a:ea typeface="대명체 보통" panose="020B0600000101010101" pitchFamily="50" charset="-127"/>
                           <a:cs typeface="+mn-cs"/>
                         </a:rPr>
-                        <a:t>91,693</a:t>
+                        <a:t>91,432</a:t>
                       </a:r>
                     </a:p>
                   </a:txBody>
@@ -15018,7 +15018,7 @@
                           <a:ea typeface="대명체 보통" panose="020B0600000101010101" pitchFamily="50" charset="-127"/>
                           <a:cs typeface="+mn-cs"/>
                         </a:rPr>
-                        <a:t>11,319</a:t>
+                        <a:t>11,058</a:t>
                       </a:r>
                     </a:p>
                   </a:txBody>
@@ -15144,7 +15144,7 @@
                           <a:ea typeface="대명체 보통" panose="020B0600000101010101" pitchFamily="50" charset="-127"/>
                           <a:cs typeface="+mn-cs"/>
                         </a:rPr>
-                        <a:t>64,339</a:t>
+                        <a:t>64,542</a:t>
                       </a:r>
                     </a:p>
                   </a:txBody>
@@ -15262,7 +15262,7 @@
                           <a:ea typeface="대명체 보통" panose="020B0600000101010101" pitchFamily="50" charset="-127"/>
                           <a:cs typeface="+mn-cs"/>
                         </a:rPr>
-                        <a:t>27,354</a:t>
+                        <a:t>26,890</a:t>
                       </a:r>
                     </a:p>
                   </a:txBody>
@@ -15325,7 +15325,7 @@
                           <a:ea typeface="대명체 보통" panose="020B0600000101010101" pitchFamily="50" charset="-127"/>
                           <a:cs typeface="+mn-cs"/>
                         </a:rPr>
-                        <a:t>43%</a:t>
+                        <a:t>42%</a:t>
                       </a:r>
                     </a:p>
                   </a:txBody>
@@ -15643,7 +15643,7 @@
                           <a:ea typeface="대명체 보통" panose="020B0600000101010101" pitchFamily="50" charset="-127"/>
                           <a:cs typeface="+mn-cs"/>
                         </a:rPr>
-                        <a:t>6,671</a:t>
+                        <a:t>6,420</a:t>
                       </a:r>
                     </a:p>
                   </a:txBody>
@@ -15753,7 +15753,7 @@
                           <a:ea typeface="대명체 보통" panose="020B0600000101010101" pitchFamily="50" charset="-127"/>
                           <a:cs typeface="+mn-cs"/>
                         </a:rPr>
-                        <a:t>990</a:t>
+                        <a:t>739</a:t>
                       </a:r>
                       <a:endParaRPr lang="en-US" altLang="ko-KR" sz="700" b="0" i="0" u="none" strike="noStrike" kern="1200" dirty="0">
                         <a:solidFill>
@@ -15821,7 +15821,7 @@
                           <a:ea typeface="대명체 보통" panose="020B0600000101010101" pitchFamily="50" charset="-127"/>
                           <a:cs typeface="+mn-cs"/>
                         </a:rPr>
-                        <a:t>117%</a:t>
+                        <a:t>113%</a:t>
                       </a:r>
                     </a:p>
                   </a:txBody>
@@ -15880,7 +15880,7 @@
                           <a:ea typeface="대명체 보통" panose="020B0600000101010101" pitchFamily="50" charset="-127"/>
                           <a:cs typeface="+mn-cs"/>
                         </a:rPr>
-                        <a:t>3,939</a:t>
+                        <a:t>4,118</a:t>
                       </a:r>
                     </a:p>
                   </a:txBody>
@@ -15990,7 +15990,7 @@
                           <a:ea typeface="대명체 보통" panose="020B0600000101010101" pitchFamily="50" charset="-127"/>
                           <a:cs typeface="+mn-cs"/>
                         </a:rPr>
-                        <a:t>2,733</a:t>
+                        <a:t>2,302</a:t>
                       </a:r>
                     </a:p>
                   </a:txBody>
@@ -16049,7 +16049,7 @@
                           <a:ea typeface="대명체 보통" panose="020B0600000101010101" pitchFamily="50" charset="-127"/>
                           <a:cs typeface="+mn-cs"/>
                         </a:rPr>
-                        <a:t>69%</a:t>
+                        <a:t>56%</a:t>
                       </a:r>
                     </a:p>
                   </a:txBody>
@@ -16266,7 +16266,7 @@
                           <a:ea typeface="대명체 보통" panose="020B0600000101010101" pitchFamily="50" charset="-127"/>
                           <a:cs typeface="+mn-cs"/>
                         </a:rPr>
-                        <a:t>61,514</a:t>
+                        <a:t>61,262</a:t>
                       </a:r>
                     </a:p>
                   </a:txBody>
@@ -16376,7 +16376,7 @@
                           <a:ea typeface="대명체 보통" panose="020B0600000101010101" pitchFamily="50" charset="-127"/>
                           <a:cs typeface="+mn-cs"/>
                         </a:rPr>
-                        <a:t>6,730</a:t>
+                        <a:t>6,478</a:t>
                       </a:r>
                     </a:p>
                   </a:txBody>
@@ -16494,7 +16494,7 @@
                           <a:ea typeface="대명체 보통" panose="020B0600000101010101" pitchFamily="50" charset="-127"/>
                           <a:cs typeface="+mn-cs"/>
                         </a:rPr>
-                        <a:t>44,494</a:t>
+                        <a:t>44,674</a:t>
                       </a:r>
                     </a:p>
                   </a:txBody>
@@ -16604,7 +16604,7 @@
                           <a:ea typeface="대명체 보통" panose="020B0600000101010101" pitchFamily="50" charset="-127"/>
                           <a:cs typeface="+mn-cs"/>
                         </a:rPr>
-                        <a:t>17,019</a:t>
+                        <a:t>16,588</a:t>
                       </a:r>
                     </a:p>
                   </a:txBody>
@@ -16663,7 +16663,7 @@
                           <a:ea typeface="대명체 보통" panose="020B0600000101010101" pitchFamily="50" charset="-127"/>
                           <a:cs typeface="+mn-cs"/>
                         </a:rPr>
-                        <a:t>38%</a:t>
+                        <a:t>37%</a:t>
                       </a:r>
                     </a:p>
                   </a:txBody>
@@ -16999,7 +16999,7 @@
                           <a:ea typeface="대명체 보통" panose="020B0600000101010101" pitchFamily="50" charset="-127"/>
                           <a:cs typeface="+mn-cs"/>
                         </a:rPr>
-                        <a:t>585</a:t>
+                        <a:t>568</a:t>
                       </a:r>
                       <a:endParaRPr lang="en-US" altLang="ko-KR" sz="700" b="0" i="0" u="none" strike="noStrike" kern="1200" dirty="0">
                         <a:solidFill>
@@ -17126,7 +17126,7 @@
                           <a:ea typeface="대명체 보통" panose="020B0600000101010101" pitchFamily="50" charset="-127"/>
                           <a:cs typeface="+mn-cs"/>
                         </a:rPr>
-                        <a:t>183</a:t>
+                        <a:t>165</a:t>
                       </a:r>
                       <a:endParaRPr lang="en-US" altLang="ko-KR" sz="700" b="0" i="0" u="none" strike="noStrike" kern="1200" dirty="0">
                         <a:solidFill>
@@ -17198,7 +17198,7 @@
                           <a:ea typeface="대명체 보통" panose="020B0600000101010101" pitchFamily="50" charset="-127"/>
                           <a:cs typeface="+mn-cs"/>
                         </a:rPr>
-                        <a:t>145%</a:t>
+                        <a:t>141%</a:t>
                       </a:r>
                     </a:p>
                   </a:txBody>
@@ -17261,7 +17261,7 @@
                           <a:ea typeface="대명체 보통" panose="020B0600000101010101" pitchFamily="50" charset="-127"/>
                           <a:cs typeface="+mn-cs"/>
                         </a:rPr>
-                        <a:t>343</a:t>
+                        <a:t>354</a:t>
                       </a:r>
                       <a:endParaRPr lang="en-US" altLang="ko-KR" sz="700" b="0" i="0" u="none" strike="noStrike" kern="1200" dirty="0">
                         <a:solidFill>
@@ -17388,7 +17388,7 @@
                           <a:ea typeface="대명체 보통" panose="020B0600000101010101" pitchFamily="50" charset="-127"/>
                           <a:cs typeface="+mn-cs"/>
                         </a:rPr>
-                        <a:t>243</a:t>
+                        <a:t>214</a:t>
                       </a:r>
                     </a:p>
                   </a:txBody>
@@ -17451,7 +17451,7 @@
                           <a:ea typeface="대명체 보통" panose="020B0600000101010101" pitchFamily="50" charset="-127"/>
                           <a:cs typeface="+mn-cs"/>
                         </a:rPr>
-                        <a:t>71%</a:t>
+                        <a:t>60%</a:t>
                       </a:r>
                     </a:p>
                   </a:txBody>
@@ -17680,7 +17680,7 @@
                           <a:ea typeface="대명체 보통" panose="020B0600000101010101" pitchFamily="50" charset="-127"/>
                           <a:cs typeface="+mn-cs"/>
                         </a:rPr>
-                        <a:t>5,769</a:t>
+                        <a:t>5,752</a:t>
                       </a:r>
                     </a:p>
                   </a:txBody>
@@ -17798,7 +17798,7 @@
                           <a:ea typeface="대명체 보통" panose="020B0600000101010101" pitchFamily="50" charset="-127"/>
                           <a:cs typeface="+mn-cs"/>
                         </a:rPr>
-                        <a:t>1,900</a:t>
+                        <a:t>1,882</a:t>
                       </a:r>
                       <a:endParaRPr lang="en-US" altLang="ko-KR" sz="700" b="0" i="0" u="none" strike="noStrike" kern="1200" dirty="0">
                         <a:solidFill>
@@ -17933,7 +17933,7 @@
                           <a:ea typeface="대명체 보통" panose="020B0600000101010101" pitchFamily="50" charset="-127"/>
                           <a:cs typeface="+mn-cs"/>
                         </a:rPr>
-                        <a:t>3,570</a:t>
+                        <a:t>3,581</a:t>
                       </a:r>
                     </a:p>
                   </a:txBody>
@@ -18051,7 +18051,7 @@
                           <a:ea typeface="대명체 보통" panose="020B0600000101010101" pitchFamily="50" charset="-127"/>
                           <a:cs typeface="+mn-cs"/>
                         </a:rPr>
-                        <a:t>2,199</a:t>
+                        <a:t>2,171</a:t>
                       </a:r>
                     </a:p>
                   </a:txBody>
@@ -18114,7 +18114,7 @@
                           <a:ea typeface="대명체 보통" panose="020B0600000101010101" pitchFamily="50" charset="-127"/>
                           <a:cs typeface="+mn-cs"/>
                         </a:rPr>
-                        <a:t>62%</a:t>
+                        <a:t>61%</a:t>
                       </a:r>
                     </a:p>
                   </a:txBody>

--- a/docs/data/세일즈마케팅_예상매출현황.pptx
+++ b/docs/data/세일즈마케팅_예상매출현황.pptx
@@ -12756,7 +12756,7 @@
                           <a:ea typeface="대명체 보통" panose="020B0600000101010101" pitchFamily="50" charset="-127"/>
                           <a:cs typeface="+mn-cs"/>
                         </a:rPr>
-                        <a:t>13,870</a:t>
+                        <a:t>13,828</a:t>
                       </a:r>
                     </a:p>
                   </a:txBody>
@@ -12882,7 +12882,7 @@
                           <a:ea typeface="대명체 보통" panose="020B0600000101010101" pitchFamily="50" charset="-127"/>
                           <a:cs typeface="+mn-cs"/>
                         </a:rPr>
-                        <a:t>-236</a:t>
+                        <a:t>-278</a:t>
                       </a:r>
                     </a:p>
                   </a:txBody>
@@ -13016,7 +13016,7 @@
                           <a:ea typeface="대명체 보통" panose="020B0600000101010101" pitchFamily="50" charset="-127"/>
                           <a:cs typeface="+mn-cs"/>
                         </a:rPr>
-                        <a:t>10,359</a:t>
+                        <a:t>10,436</a:t>
                       </a:r>
                     </a:p>
                   </a:txBody>
@@ -13142,7 +13142,7 @@
                           <a:ea typeface="대명체 보통" panose="020B0600000101010101" pitchFamily="50" charset="-127"/>
                           <a:cs typeface="+mn-cs"/>
                         </a:rPr>
-                        <a:t>3,511</a:t>
+                        <a:t>3,392</a:t>
                       </a:r>
                     </a:p>
                   </a:txBody>
@@ -13209,7 +13209,7 @@
                           <a:ea typeface="대명체 보통" panose="020B0600000101010101" pitchFamily="50" charset="-127"/>
                           <a:cs typeface="+mn-cs"/>
                         </a:rPr>
-                        <a:t>34%</a:t>
+                        <a:t>33%</a:t>
                       </a:r>
                     </a:p>
                   </a:txBody>
@@ -13450,7 +13450,7 @@
                           <a:ea typeface="대명체 보통" panose="020B0600000101010101" pitchFamily="50" charset="-127"/>
                           <a:cs typeface="+mn-cs"/>
                         </a:rPr>
-                        <a:t>158,446</a:t>
+                        <a:t>158,404</a:t>
                       </a:r>
                     </a:p>
                   </a:txBody>
@@ -13576,7 +13576,7 @@
                           <a:ea typeface="대명체 보통" panose="020B0600000101010101" pitchFamily="50" charset="-127"/>
                           <a:cs typeface="+mn-cs"/>
                         </a:rPr>
-                        <a:t>19,419</a:t>
+                        <a:t>19,376</a:t>
                       </a:r>
                     </a:p>
                   </a:txBody>
@@ -13710,7 +13710,7 @@
                           <a:ea typeface="대명체 보통" panose="020B0600000101010101" pitchFamily="50" charset="-127"/>
                           <a:cs typeface="+mn-cs"/>
                         </a:rPr>
-                        <a:t>112,798</a:t>
+                        <a:t>112,874</a:t>
                       </a:r>
                     </a:p>
                   </a:txBody>
@@ -13836,7 +13836,7 @@
                           <a:ea typeface="대명체 보통" panose="020B0600000101010101" pitchFamily="50" charset="-127"/>
                           <a:cs typeface="+mn-cs"/>
                         </a:rPr>
-                        <a:t>45,649</a:t>
+                        <a:t>45,530</a:t>
                       </a:r>
                     </a:p>
                   </a:txBody>
@@ -14237,7 +14237,7 @@
                           <a:ea typeface="대명체 보통" panose="020B0600000101010101" pitchFamily="50" charset="-127"/>
                           <a:cs typeface="+mn-cs"/>
                         </a:rPr>
-                        <a:t>6,882</a:t>
+                        <a:t>6,871</a:t>
                       </a:r>
                     </a:p>
                   </a:txBody>
@@ -14355,7 +14355,7 @@
                           <a:ea typeface="대명체 보통" panose="020B0600000101010101" pitchFamily="50" charset="-127"/>
                           <a:cs typeface="+mn-cs"/>
                         </a:rPr>
-                        <a:t>-1,141</a:t>
+                        <a:t>-1,152</a:t>
                       </a:r>
                       <a:endParaRPr lang="en-US" altLang="ko-KR" sz="700" b="0" i="0" u="none" strike="noStrike" kern="1200" dirty="0">
                         <a:solidFill>
@@ -14490,7 +14490,7 @@
                           <a:ea typeface="대명체 보통" panose="020B0600000101010101" pitchFamily="50" charset="-127"/>
                           <a:cs typeface="+mn-cs"/>
                         </a:rPr>
-                        <a:t>5,887</a:t>
+                        <a:t>5,934</a:t>
                       </a:r>
                     </a:p>
                   </a:txBody>
@@ -14608,7 +14608,7 @@
                           <a:ea typeface="대명체 보통" panose="020B0600000101010101" pitchFamily="50" charset="-127"/>
                           <a:cs typeface="+mn-cs"/>
                         </a:rPr>
-                        <a:t>995</a:t>
+                        <a:t>936</a:t>
                       </a:r>
                     </a:p>
                   </a:txBody>
@@ -14671,7 +14671,7 @@
                           <a:ea typeface="대명체 보통" panose="020B0600000101010101" pitchFamily="50" charset="-127"/>
                           <a:cs typeface="+mn-cs"/>
                         </a:rPr>
-                        <a:t>17%</a:t>
+                        <a:t>16%</a:t>
                       </a:r>
                     </a:p>
                   </a:txBody>
@@ -14900,7 +14900,7 @@
                           <a:ea typeface="대명체 보통" panose="020B0600000101010101" pitchFamily="50" charset="-127"/>
                           <a:cs typeface="+mn-cs"/>
                         </a:rPr>
-                        <a:t>91,432</a:t>
+                        <a:t>91,421</a:t>
                       </a:r>
                     </a:p>
                   </a:txBody>
@@ -15018,7 +15018,7 @@
                           <a:ea typeface="대명체 보통" panose="020B0600000101010101" pitchFamily="50" charset="-127"/>
                           <a:cs typeface="+mn-cs"/>
                         </a:rPr>
-                        <a:t>11,058</a:t>
+                        <a:t>11,047</a:t>
                       </a:r>
                     </a:p>
                   </a:txBody>
@@ -15144,7 +15144,7 @@
                           <a:ea typeface="대명체 보통" panose="020B0600000101010101" pitchFamily="50" charset="-127"/>
                           <a:cs typeface="+mn-cs"/>
                         </a:rPr>
-                        <a:t>64,542</a:t>
+                        <a:t>64,590</a:t>
                       </a:r>
                     </a:p>
                   </a:txBody>
@@ -15262,7 +15262,7 @@
                           <a:ea typeface="대명체 보통" panose="020B0600000101010101" pitchFamily="50" charset="-127"/>
                           <a:cs typeface="+mn-cs"/>
                         </a:rPr>
-                        <a:t>26,890</a:t>
+                        <a:t>26,830</a:t>
                       </a:r>
                     </a:p>
                   </a:txBody>
@@ -15643,7 +15643,7 @@
                           <a:ea typeface="대명체 보통" panose="020B0600000101010101" pitchFamily="50" charset="-127"/>
                           <a:cs typeface="+mn-cs"/>
                         </a:rPr>
-                        <a:t>6,420</a:t>
+                        <a:t>6,393</a:t>
                       </a:r>
                     </a:p>
                   </a:txBody>
@@ -15753,7 +15753,7 @@
                           <a:ea typeface="대명체 보통" panose="020B0600000101010101" pitchFamily="50" charset="-127"/>
                           <a:cs typeface="+mn-cs"/>
                         </a:rPr>
-                        <a:t>739</a:t>
+                        <a:t>712</a:t>
                       </a:r>
                       <a:endParaRPr lang="en-US" altLang="ko-KR" sz="700" b="0" i="0" u="none" strike="noStrike" kern="1200" dirty="0">
                         <a:solidFill>
@@ -15880,7 +15880,7 @@
                           <a:ea typeface="대명체 보통" panose="020B0600000101010101" pitchFamily="50" charset="-127"/>
                           <a:cs typeface="+mn-cs"/>
                         </a:rPr>
-                        <a:t>4,118</a:t>
+                        <a:t>4,148</a:t>
                       </a:r>
                     </a:p>
                   </a:txBody>
@@ -15990,7 +15990,7 @@
                           <a:ea typeface="대명체 보통" panose="020B0600000101010101" pitchFamily="50" charset="-127"/>
                           <a:cs typeface="+mn-cs"/>
                         </a:rPr>
-                        <a:t>2,302</a:t>
+                        <a:t>2,245</a:t>
                       </a:r>
                     </a:p>
                   </a:txBody>
@@ -16049,7 +16049,7 @@
                           <a:ea typeface="대명체 보통" panose="020B0600000101010101" pitchFamily="50" charset="-127"/>
                           <a:cs typeface="+mn-cs"/>
                         </a:rPr>
-                        <a:t>56%</a:t>
+                        <a:t>54%</a:t>
                       </a:r>
                     </a:p>
                   </a:txBody>
@@ -16266,7 +16266,7 @@
                           <a:ea typeface="대명체 보통" panose="020B0600000101010101" pitchFamily="50" charset="-127"/>
                           <a:cs typeface="+mn-cs"/>
                         </a:rPr>
-                        <a:t>61,262</a:t>
+                        <a:t>61,235</a:t>
                       </a:r>
                     </a:p>
                   </a:txBody>
@@ -16376,7 +16376,7 @@
                           <a:ea typeface="대명체 보통" panose="020B0600000101010101" pitchFamily="50" charset="-127"/>
                           <a:cs typeface="+mn-cs"/>
                         </a:rPr>
-                        <a:t>6,478</a:t>
+                        <a:t>6,451</a:t>
                       </a:r>
                     </a:p>
                   </a:txBody>
@@ -16494,7 +16494,7 @@
                           <a:ea typeface="대명체 보통" panose="020B0600000101010101" pitchFamily="50" charset="-127"/>
                           <a:cs typeface="+mn-cs"/>
                         </a:rPr>
-                        <a:t>44,674</a:t>
+                        <a:t>44,703</a:t>
                       </a:r>
                     </a:p>
                   </a:txBody>
@@ -16604,7 +16604,7 @@
                           <a:ea typeface="대명체 보통" panose="020B0600000101010101" pitchFamily="50" charset="-127"/>
                           <a:cs typeface="+mn-cs"/>
                         </a:rPr>
-                        <a:t>16,588</a:t>
+                        <a:t>16,532</a:t>
                       </a:r>
                     </a:p>
                   </a:txBody>
@@ -16999,7 +16999,7 @@
                           <a:ea typeface="대명체 보통" panose="020B0600000101010101" pitchFamily="50" charset="-127"/>
                           <a:cs typeface="+mn-cs"/>
                         </a:rPr>
-                        <a:t>568</a:t>
+                        <a:t>564</a:t>
                       </a:r>
                       <a:endParaRPr lang="en-US" altLang="ko-KR" sz="700" b="0" i="0" u="none" strike="noStrike" kern="1200" dirty="0">
                         <a:solidFill>
@@ -17126,7 +17126,7 @@
                           <a:ea typeface="대명체 보통" panose="020B0600000101010101" pitchFamily="50" charset="-127"/>
                           <a:cs typeface="+mn-cs"/>
                         </a:rPr>
-                        <a:t>165</a:t>
+                        <a:t>162</a:t>
                       </a:r>
                       <a:endParaRPr lang="en-US" altLang="ko-KR" sz="700" b="0" i="0" u="none" strike="noStrike" kern="1200" dirty="0">
                         <a:solidFill>
@@ -17198,7 +17198,7 @@
                           <a:ea typeface="대명체 보통" panose="020B0600000101010101" pitchFamily="50" charset="-127"/>
                           <a:cs typeface="+mn-cs"/>
                         </a:rPr>
-                        <a:t>141%</a:t>
+                        <a:t>140%</a:t>
                       </a:r>
                     </a:p>
                   </a:txBody>
@@ -17388,7 +17388,7 @@
                           <a:ea typeface="대명체 보통" panose="020B0600000101010101" pitchFamily="50" charset="-127"/>
                           <a:cs typeface="+mn-cs"/>
                         </a:rPr>
-                        <a:t>214</a:t>
+                        <a:t>210</a:t>
                       </a:r>
                     </a:p>
                   </a:txBody>
@@ -17451,7 +17451,7 @@
                           <a:ea typeface="대명체 보통" panose="020B0600000101010101" pitchFamily="50" charset="-127"/>
                           <a:cs typeface="+mn-cs"/>
                         </a:rPr>
-                        <a:t>60%</a:t>
+                        <a:t>59%</a:t>
                       </a:r>
                     </a:p>
                   </a:txBody>
@@ -17680,7 +17680,7 @@
                           <a:ea typeface="대명체 보통" panose="020B0600000101010101" pitchFamily="50" charset="-127"/>
                           <a:cs typeface="+mn-cs"/>
                         </a:rPr>
-                        <a:t>5,752</a:t>
+                        <a:t>5,748</a:t>
                       </a:r>
                     </a:p>
                   </a:txBody>
@@ -17798,7 +17798,7 @@
                           <a:ea typeface="대명체 보통" panose="020B0600000101010101" pitchFamily="50" charset="-127"/>
                           <a:cs typeface="+mn-cs"/>
                         </a:rPr>
-                        <a:t>1,882</a:t>
+                        <a:t>1,878</a:t>
                       </a:r>
                       <a:endParaRPr lang="en-US" altLang="ko-KR" sz="700" b="0" i="0" u="none" strike="noStrike" kern="1200" dirty="0">
                         <a:solidFill>
@@ -18051,7 +18051,7 @@
                           <a:ea typeface="대명체 보통" panose="020B0600000101010101" pitchFamily="50" charset="-127"/>
                           <a:cs typeface="+mn-cs"/>
                         </a:rPr>
-                        <a:t>2,171</a:t>
+                        <a:t>2,167</a:t>
                       </a:r>
                     </a:p>
                   </a:txBody>

--- a/docs/data/세일즈마케팅_예상매출현황.pptx
+++ b/docs/data/세일즈마케팅_예상매출현황.pptx
@@ -12756,7 +12756,7 @@
                           <a:ea typeface="대명체 보통" panose="020B0600000101010101" pitchFamily="50" charset="-127"/>
                           <a:cs typeface="+mn-cs"/>
                         </a:rPr>
-                        <a:t>13,828</a:t>
+                        <a:t>12,544</a:t>
                       </a:r>
                     </a:p>
                   </a:txBody>
@@ -12882,7 +12882,7 @@
                           <a:ea typeface="대명체 보통" panose="020B0600000101010101" pitchFamily="50" charset="-127"/>
                           <a:cs typeface="+mn-cs"/>
                         </a:rPr>
-                        <a:t>-278</a:t>
+                        <a:t>-1,562</a:t>
                       </a:r>
                     </a:p>
                   </a:txBody>
@@ -12949,7 +12949,7 @@
                           <a:ea typeface="대명체 보통" panose="020B0600000101010101" pitchFamily="50" charset="-127"/>
                           <a:cs typeface="+mn-cs"/>
                         </a:rPr>
-                        <a:t>98%</a:t>
+                        <a:t>89%</a:t>
                       </a:r>
                     </a:p>
                   </a:txBody>
@@ -13016,7 +13016,7 @@
                           <a:ea typeface="대명체 보통" panose="020B0600000101010101" pitchFamily="50" charset="-127"/>
                           <a:cs typeface="+mn-cs"/>
                         </a:rPr>
-                        <a:t>10,436</a:t>
+                        <a:t>10,907</a:t>
                       </a:r>
                     </a:p>
                   </a:txBody>
@@ -13142,7 +13142,7 @@
                           <a:ea typeface="대명체 보통" panose="020B0600000101010101" pitchFamily="50" charset="-127"/>
                           <a:cs typeface="+mn-cs"/>
                         </a:rPr>
-                        <a:t>3,392</a:t>
+                        <a:t>1,637</a:t>
                       </a:r>
                     </a:p>
                   </a:txBody>
@@ -13209,7 +13209,7 @@
                           <a:ea typeface="대명체 보통" panose="020B0600000101010101" pitchFamily="50" charset="-127"/>
                           <a:cs typeface="+mn-cs"/>
                         </a:rPr>
-                        <a:t>33%</a:t>
+                        <a:t>15%</a:t>
                       </a:r>
                     </a:p>
                   </a:txBody>
@@ -13450,7 +13450,7 @@
                           <a:ea typeface="대명체 보통" panose="020B0600000101010101" pitchFamily="50" charset="-127"/>
                           <a:cs typeface="+mn-cs"/>
                         </a:rPr>
-                        <a:t>158,404</a:t>
+                        <a:t>157,120</a:t>
                       </a:r>
                     </a:p>
                   </a:txBody>
@@ -13576,7 +13576,7 @@
                           <a:ea typeface="대명체 보통" panose="020B0600000101010101" pitchFamily="50" charset="-127"/>
                           <a:cs typeface="+mn-cs"/>
                         </a:rPr>
-                        <a:t>19,376</a:t>
+                        <a:t>18,093</a:t>
                       </a:r>
                     </a:p>
                   </a:txBody>
@@ -13643,7 +13643,7 @@
                           <a:ea typeface="대명체 보통" panose="020B0600000101010101" pitchFamily="50" charset="-127"/>
                           <a:cs typeface="+mn-cs"/>
                         </a:rPr>
-                        <a:t>114%</a:t>
+                        <a:t>113%</a:t>
                       </a:r>
                     </a:p>
                   </a:txBody>
@@ -13710,7 +13710,7 @@
                           <a:ea typeface="대명체 보통" panose="020B0600000101010101" pitchFamily="50" charset="-127"/>
                           <a:cs typeface="+mn-cs"/>
                         </a:rPr>
-                        <a:t>112,874</a:t>
+                        <a:t>113,346</a:t>
                       </a:r>
                     </a:p>
                   </a:txBody>
@@ -13836,7 +13836,7 @@
                           <a:ea typeface="대명체 보통" panose="020B0600000101010101" pitchFamily="50" charset="-127"/>
                           <a:cs typeface="+mn-cs"/>
                         </a:rPr>
-                        <a:t>45,530</a:t>
+                        <a:t>43,775</a:t>
                       </a:r>
                     </a:p>
                   </a:txBody>
@@ -13903,7 +13903,7 @@
                           <a:ea typeface="대명체 보통" panose="020B0600000101010101" pitchFamily="50" charset="-127"/>
                           <a:cs typeface="+mn-cs"/>
                         </a:rPr>
-                        <a:t>40%</a:t>
+                        <a:t>39%</a:t>
                       </a:r>
                     </a:p>
                   </a:txBody>
@@ -14237,7 +14237,7 @@
                           <a:ea typeface="대명체 보통" panose="020B0600000101010101" pitchFamily="50" charset="-127"/>
                           <a:cs typeface="+mn-cs"/>
                         </a:rPr>
-                        <a:t>6,871</a:t>
+                        <a:t>6,201</a:t>
                       </a:r>
                     </a:p>
                   </a:txBody>
@@ -14355,7 +14355,7 @@
                           <a:ea typeface="대명체 보통" panose="020B0600000101010101" pitchFamily="50" charset="-127"/>
                           <a:cs typeface="+mn-cs"/>
                         </a:rPr>
-                        <a:t>-1,152</a:t>
+                        <a:t>-1,821</a:t>
                       </a:r>
                       <a:endParaRPr lang="en-US" altLang="ko-KR" sz="700" b="0" i="0" u="none" strike="noStrike" kern="1200" dirty="0">
                         <a:solidFill>
@@ -14427,7 +14427,7 @@
                           <a:ea typeface="대명체 보통" panose="020B0600000101010101" pitchFamily="50" charset="-127"/>
                           <a:cs typeface="+mn-cs"/>
                         </a:rPr>
-                        <a:t>86%</a:t>
+                        <a:t>77%</a:t>
                       </a:r>
                     </a:p>
                   </a:txBody>
@@ -14490,7 +14490,7 @@
                           <a:ea typeface="대명체 보통" panose="020B0600000101010101" pitchFamily="50" charset="-127"/>
                           <a:cs typeface="+mn-cs"/>
                         </a:rPr>
-                        <a:t>5,934</a:t>
+                        <a:t>6,182</a:t>
                       </a:r>
                     </a:p>
                   </a:txBody>
@@ -14608,7 +14608,7 @@
                           <a:ea typeface="대명체 보통" panose="020B0600000101010101" pitchFamily="50" charset="-127"/>
                           <a:cs typeface="+mn-cs"/>
                         </a:rPr>
-                        <a:t>936</a:t>
+                        <a:t>20</a:t>
                       </a:r>
                     </a:p>
                   </a:txBody>
@@ -14671,7 +14671,7 @@
                           <a:ea typeface="대명체 보통" panose="020B0600000101010101" pitchFamily="50" charset="-127"/>
                           <a:cs typeface="+mn-cs"/>
                         </a:rPr>
-                        <a:t>16%</a:t>
+                        <a:t>0%</a:t>
                       </a:r>
                     </a:p>
                   </a:txBody>
@@ -14900,7 +14900,7 @@
                           <a:ea typeface="대명체 보통" panose="020B0600000101010101" pitchFamily="50" charset="-127"/>
                           <a:cs typeface="+mn-cs"/>
                         </a:rPr>
-                        <a:t>91,421</a:t>
+                        <a:t>90,751</a:t>
                       </a:r>
                     </a:p>
                   </a:txBody>
@@ -15018,7 +15018,7 @@
                           <a:ea typeface="대명체 보통" panose="020B0600000101010101" pitchFamily="50" charset="-127"/>
                           <a:cs typeface="+mn-cs"/>
                         </a:rPr>
-                        <a:t>11,047</a:t>
+                        <a:t>10,378</a:t>
                       </a:r>
                     </a:p>
                   </a:txBody>
@@ -15081,7 +15081,7 @@
                           <a:ea typeface="대명체 보통" panose="020B0600000101010101" pitchFamily="50" charset="-127"/>
                           <a:cs typeface="+mn-cs"/>
                         </a:rPr>
-                        <a:t>114%</a:t>
+                        <a:t>113%</a:t>
                       </a:r>
                     </a:p>
                   </a:txBody>
@@ -15144,7 +15144,7 @@
                           <a:ea typeface="대명체 보통" panose="020B0600000101010101" pitchFamily="50" charset="-127"/>
                           <a:cs typeface="+mn-cs"/>
                         </a:rPr>
-                        <a:t>64,590</a:t>
+                        <a:t>64,837</a:t>
                       </a:r>
                     </a:p>
                   </a:txBody>
@@ -15262,7 +15262,7 @@
                           <a:ea typeface="대명체 보통" panose="020B0600000101010101" pitchFamily="50" charset="-127"/>
                           <a:cs typeface="+mn-cs"/>
                         </a:rPr>
-                        <a:t>26,830</a:t>
+                        <a:t>25,914</a:t>
                       </a:r>
                     </a:p>
                   </a:txBody>
@@ -15325,7 +15325,7 @@
                           <a:ea typeface="대명체 보통" panose="020B0600000101010101" pitchFamily="50" charset="-127"/>
                           <a:cs typeface="+mn-cs"/>
                         </a:rPr>
-                        <a:t>42%</a:t>
+                        <a:t>40%</a:t>
                       </a:r>
                     </a:p>
                   </a:txBody>
@@ -15643,7 +15643,7 @@
                           <a:ea typeface="대명체 보통" panose="020B0600000101010101" pitchFamily="50" charset="-127"/>
                           <a:cs typeface="+mn-cs"/>
                         </a:rPr>
-                        <a:t>6,393</a:t>
+                        <a:t>5,784</a:t>
                       </a:r>
                     </a:p>
                   </a:txBody>
@@ -15753,7 +15753,7 @@
                           <a:ea typeface="대명체 보통" panose="020B0600000101010101" pitchFamily="50" charset="-127"/>
                           <a:cs typeface="+mn-cs"/>
                         </a:rPr>
-                        <a:t>712</a:t>
+                        <a:t>103</a:t>
                       </a:r>
                       <a:endParaRPr lang="en-US" altLang="ko-KR" sz="700" b="0" i="0" u="none" strike="noStrike" kern="1200" dirty="0">
                         <a:solidFill>
@@ -15821,7 +15821,7 @@
                           <a:ea typeface="대명체 보통" panose="020B0600000101010101" pitchFamily="50" charset="-127"/>
                           <a:cs typeface="+mn-cs"/>
                         </a:rPr>
-                        <a:t>113%</a:t>
+                        <a:t>102%</a:t>
                       </a:r>
                     </a:p>
                   </a:txBody>
@@ -15880,7 +15880,7 @@
                           <a:ea typeface="대명체 보통" panose="020B0600000101010101" pitchFamily="50" charset="-127"/>
                           <a:cs typeface="+mn-cs"/>
                         </a:rPr>
-                        <a:t>4,148</a:t>
+                        <a:t>4,360</a:t>
                       </a:r>
                     </a:p>
                   </a:txBody>
@@ -15990,7 +15990,7 @@
                           <a:ea typeface="대명체 보통" panose="020B0600000101010101" pitchFamily="50" charset="-127"/>
                           <a:cs typeface="+mn-cs"/>
                         </a:rPr>
-                        <a:t>2,245</a:t>
+                        <a:t>1,424</a:t>
                       </a:r>
                     </a:p>
                   </a:txBody>
@@ -16049,7 +16049,7 @@
                           <a:ea typeface="대명체 보통" panose="020B0600000101010101" pitchFamily="50" charset="-127"/>
                           <a:cs typeface="+mn-cs"/>
                         </a:rPr>
-                        <a:t>54%</a:t>
+                        <a:t>33%</a:t>
                       </a:r>
                     </a:p>
                   </a:txBody>
@@ -16266,7 +16266,7 @@
                           <a:ea typeface="대명체 보통" panose="020B0600000101010101" pitchFamily="50" charset="-127"/>
                           <a:cs typeface="+mn-cs"/>
                         </a:rPr>
-                        <a:t>61,235</a:t>
+                        <a:t>60,626</a:t>
                       </a:r>
                     </a:p>
                   </a:txBody>
@@ -16376,7 +16376,7 @@
                           <a:ea typeface="대명체 보통" panose="020B0600000101010101" pitchFamily="50" charset="-127"/>
                           <a:cs typeface="+mn-cs"/>
                         </a:rPr>
-                        <a:t>6,451</a:t>
+                        <a:t>5,842</a:t>
                       </a:r>
                     </a:p>
                   </a:txBody>
@@ -16435,7 +16435,7 @@
                           <a:ea typeface="대명체 보통" panose="020B0600000101010101" pitchFamily="50" charset="-127"/>
                           <a:cs typeface="+mn-cs"/>
                         </a:rPr>
-                        <a:t>112%</a:t>
+                        <a:t>111%</a:t>
                       </a:r>
                     </a:p>
                   </a:txBody>
@@ -16494,7 +16494,7 @@
                           <a:ea typeface="대명체 보통" panose="020B0600000101010101" pitchFamily="50" charset="-127"/>
                           <a:cs typeface="+mn-cs"/>
                         </a:rPr>
-                        <a:t>44,703</a:t>
+                        <a:t>44,916</a:t>
                       </a:r>
                     </a:p>
                   </a:txBody>
@@ -16604,7 +16604,7 @@
                           <a:ea typeface="대명체 보통" panose="020B0600000101010101" pitchFamily="50" charset="-127"/>
                           <a:cs typeface="+mn-cs"/>
                         </a:rPr>
-                        <a:t>16,532</a:t>
+                        <a:t>15,711</a:t>
                       </a:r>
                     </a:p>
                   </a:txBody>
@@ -16663,7 +16663,7 @@
                           <a:ea typeface="대명체 보통" panose="020B0600000101010101" pitchFamily="50" charset="-127"/>
                           <a:cs typeface="+mn-cs"/>
                         </a:rPr>
-                        <a:t>37%</a:t>
+                        <a:t>35%</a:t>
                       </a:r>
                     </a:p>
                   </a:txBody>
@@ -16999,7 +16999,7 @@
                           <a:ea typeface="대명체 보통" panose="020B0600000101010101" pitchFamily="50" charset="-127"/>
                           <a:cs typeface="+mn-cs"/>
                         </a:rPr>
-                        <a:t>564</a:t>
+                        <a:t>559</a:t>
                       </a:r>
                       <a:endParaRPr lang="en-US" altLang="ko-KR" sz="700" b="0" i="0" u="none" strike="noStrike" kern="1200" dirty="0">
                         <a:solidFill>
@@ -17126,7 +17126,7 @@
                           <a:ea typeface="대명체 보통" panose="020B0600000101010101" pitchFamily="50" charset="-127"/>
                           <a:cs typeface="+mn-cs"/>
                         </a:rPr>
-                        <a:t>162</a:t>
+                        <a:t>156</a:t>
                       </a:r>
                       <a:endParaRPr lang="en-US" altLang="ko-KR" sz="700" b="0" i="0" u="none" strike="noStrike" kern="1200" dirty="0">
                         <a:solidFill>
@@ -17198,7 +17198,7 @@
                           <a:ea typeface="대명체 보통" panose="020B0600000101010101" pitchFamily="50" charset="-127"/>
                           <a:cs typeface="+mn-cs"/>
                         </a:rPr>
-                        <a:t>140%</a:t>
+                        <a:t>139%</a:t>
                       </a:r>
                     </a:p>
                   </a:txBody>
@@ -17261,7 +17261,7 @@
                           <a:ea typeface="대명체 보통" panose="020B0600000101010101" pitchFamily="50" charset="-127"/>
                           <a:cs typeface="+mn-cs"/>
                         </a:rPr>
-                        <a:t>354</a:t>
+                        <a:t>366</a:t>
                       </a:r>
                       <a:endParaRPr lang="en-US" altLang="ko-KR" sz="700" b="0" i="0" u="none" strike="noStrike" kern="1200" dirty="0">
                         <a:solidFill>
@@ -17388,7 +17388,7 @@
                           <a:ea typeface="대명체 보통" panose="020B0600000101010101" pitchFamily="50" charset="-127"/>
                           <a:cs typeface="+mn-cs"/>
                         </a:rPr>
-                        <a:t>210</a:t>
+                        <a:t>193</a:t>
                       </a:r>
                     </a:p>
                   </a:txBody>
@@ -17451,7 +17451,7 @@
                           <a:ea typeface="대명체 보통" panose="020B0600000101010101" pitchFamily="50" charset="-127"/>
                           <a:cs typeface="+mn-cs"/>
                         </a:rPr>
-                        <a:t>59%</a:t>
+                        <a:t>53%</a:t>
                       </a:r>
                     </a:p>
                   </a:txBody>
@@ -17680,7 +17680,7 @@
                           <a:ea typeface="대명체 보통" panose="020B0600000101010101" pitchFamily="50" charset="-127"/>
                           <a:cs typeface="+mn-cs"/>
                         </a:rPr>
-                        <a:t>5,748</a:t>
+                        <a:t>5,743</a:t>
                       </a:r>
                     </a:p>
                   </a:txBody>
@@ -17798,7 +17798,7 @@
                           <a:ea typeface="대명체 보통" panose="020B0600000101010101" pitchFamily="50" charset="-127"/>
                           <a:cs typeface="+mn-cs"/>
                         </a:rPr>
-                        <a:t>1,878</a:t>
+                        <a:t>1,873</a:t>
                       </a:r>
                       <a:endParaRPr lang="en-US" altLang="ko-KR" sz="700" b="0" i="0" u="none" strike="noStrike" kern="1200" dirty="0">
                         <a:solidFill>
@@ -17870,7 +17870,7 @@
                           <a:ea typeface="대명체 보통" panose="020B0600000101010101" pitchFamily="50" charset="-127"/>
                           <a:cs typeface="+mn-cs"/>
                         </a:rPr>
-                        <a:t>149%</a:t>
+                        <a:t>148%</a:t>
                       </a:r>
                     </a:p>
                   </a:txBody>
@@ -17933,7 +17933,7 @@
                           <a:ea typeface="대명체 보통" panose="020B0600000101010101" pitchFamily="50" charset="-127"/>
                           <a:cs typeface="+mn-cs"/>
                         </a:rPr>
-                        <a:t>3,581</a:t>
+                        <a:t>3,593</a:t>
                       </a:r>
                     </a:p>
                   </a:txBody>
@@ -18051,7 +18051,7 @@
                           <a:ea typeface="대명체 보통" panose="020B0600000101010101" pitchFamily="50" charset="-127"/>
                           <a:cs typeface="+mn-cs"/>
                         </a:rPr>
-                        <a:t>2,167</a:t>
+                        <a:t>2,150</a:t>
                       </a:r>
                     </a:p>
                   </a:txBody>
@@ -18114,7 +18114,7 @@
                           <a:ea typeface="대명체 보통" panose="020B0600000101010101" pitchFamily="50" charset="-127"/>
                           <a:cs typeface="+mn-cs"/>
                         </a:rPr>
-                        <a:t>61%</a:t>
+                        <a:t>60%</a:t>
                       </a:r>
                     </a:p>
                   </a:txBody>

--- a/docs/data/세일즈마케팅_예상매출현황.pptx
+++ b/docs/data/세일즈마케팅_예상매출현황.pptx
@@ -12756,7 +12756,7 @@
                           <a:ea typeface="대명체 보통" panose="020B0600000101010101" pitchFamily="50" charset="-127"/>
                           <a:cs typeface="+mn-cs"/>
                         </a:rPr>
-                        <a:t>12,544</a:t>
+                        <a:t>12,506</a:t>
                       </a:r>
                     </a:p>
                   </a:txBody>
@@ -12882,7 +12882,7 @@
                           <a:ea typeface="대명체 보통" panose="020B0600000101010101" pitchFamily="50" charset="-127"/>
                           <a:cs typeface="+mn-cs"/>
                         </a:rPr>
-                        <a:t>-1,562</a:t>
+                        <a:t>-1,600</a:t>
                       </a:r>
                     </a:p>
                   </a:txBody>
@@ -13142,7 +13142,7 @@
                           <a:ea typeface="대명체 보통" panose="020B0600000101010101" pitchFamily="50" charset="-127"/>
                           <a:cs typeface="+mn-cs"/>
                         </a:rPr>
-                        <a:t>1,637</a:t>
+                        <a:t>1,599</a:t>
                       </a:r>
                     </a:p>
                   </a:txBody>
@@ -13450,7 +13450,7 @@
                           <a:ea typeface="대명체 보통" panose="020B0600000101010101" pitchFamily="50" charset="-127"/>
                           <a:cs typeface="+mn-cs"/>
                         </a:rPr>
-                        <a:t>157,120</a:t>
+                        <a:t>157,083</a:t>
                       </a:r>
                     </a:p>
                   </a:txBody>
@@ -13576,7 +13576,7 @@
                           <a:ea typeface="대명체 보통" panose="020B0600000101010101" pitchFamily="50" charset="-127"/>
                           <a:cs typeface="+mn-cs"/>
                         </a:rPr>
-                        <a:t>18,093</a:t>
+                        <a:t>18,056</a:t>
                       </a:r>
                     </a:p>
                   </a:txBody>
@@ -13836,7 +13836,7 @@
                           <a:ea typeface="대명체 보통" panose="020B0600000101010101" pitchFamily="50" charset="-127"/>
                           <a:cs typeface="+mn-cs"/>
                         </a:rPr>
-                        <a:t>43,775</a:t>
+                        <a:t>43,738</a:t>
                       </a:r>
                     </a:p>
                   </a:txBody>
@@ -14237,7 +14237,7 @@
                           <a:ea typeface="대명체 보통" panose="020B0600000101010101" pitchFamily="50" charset="-127"/>
                           <a:cs typeface="+mn-cs"/>
                         </a:rPr>
-                        <a:t>6,201</a:t>
+                        <a:t>6,186</a:t>
                       </a:r>
                     </a:p>
                   </a:txBody>
@@ -14355,7 +14355,7 @@
                           <a:ea typeface="대명체 보통" panose="020B0600000101010101" pitchFamily="50" charset="-127"/>
                           <a:cs typeface="+mn-cs"/>
                         </a:rPr>
-                        <a:t>-1,821</a:t>
+                        <a:t>-1,836</a:t>
                       </a:r>
                       <a:endParaRPr lang="en-US" altLang="ko-KR" sz="700" b="0" i="0" u="none" strike="noStrike" kern="1200" dirty="0">
                         <a:solidFill>
@@ -14608,7 +14608,7 @@
                           <a:ea typeface="대명체 보통" panose="020B0600000101010101" pitchFamily="50" charset="-127"/>
                           <a:cs typeface="+mn-cs"/>
                         </a:rPr>
-                        <a:t>20</a:t>
+                        <a:t>5</a:t>
                       </a:r>
                     </a:p>
                   </a:txBody>
@@ -14900,7 +14900,7 @@
                           <a:ea typeface="대명체 보통" panose="020B0600000101010101" pitchFamily="50" charset="-127"/>
                           <a:cs typeface="+mn-cs"/>
                         </a:rPr>
-                        <a:t>90,751</a:t>
+                        <a:t>90,736</a:t>
                       </a:r>
                     </a:p>
                   </a:txBody>
@@ -15018,7 +15018,7 @@
                           <a:ea typeface="대명체 보통" panose="020B0600000101010101" pitchFamily="50" charset="-127"/>
                           <a:cs typeface="+mn-cs"/>
                         </a:rPr>
-                        <a:t>10,378</a:t>
+                        <a:t>10,363</a:t>
                       </a:r>
                     </a:p>
                   </a:txBody>
@@ -15262,7 +15262,7 @@
                           <a:ea typeface="대명체 보통" panose="020B0600000101010101" pitchFamily="50" charset="-127"/>
                           <a:cs typeface="+mn-cs"/>
                         </a:rPr>
-                        <a:t>25,914</a:t>
+                        <a:t>25,899</a:t>
                       </a:r>
                     </a:p>
                   </a:txBody>
@@ -15643,7 +15643,7 @@
                           <a:ea typeface="대명체 보통" panose="020B0600000101010101" pitchFamily="50" charset="-127"/>
                           <a:cs typeface="+mn-cs"/>
                         </a:rPr>
-                        <a:t>5,784</a:t>
+                        <a:t>5,766</a:t>
                       </a:r>
                     </a:p>
                   </a:txBody>
@@ -15753,7 +15753,7 @@
                           <a:ea typeface="대명체 보통" panose="020B0600000101010101" pitchFamily="50" charset="-127"/>
                           <a:cs typeface="+mn-cs"/>
                         </a:rPr>
-                        <a:t>103</a:t>
+                        <a:t>85</a:t>
                       </a:r>
                       <a:endParaRPr lang="en-US" altLang="ko-KR" sz="700" b="0" i="0" u="none" strike="noStrike" kern="1200" dirty="0">
                         <a:solidFill>
@@ -15821,7 +15821,7 @@
                           <a:ea typeface="대명체 보통" panose="020B0600000101010101" pitchFamily="50" charset="-127"/>
                           <a:cs typeface="+mn-cs"/>
                         </a:rPr>
-                        <a:t>102%</a:t>
+                        <a:t>101%</a:t>
                       </a:r>
                     </a:p>
                   </a:txBody>
@@ -15990,7 +15990,7 @@
                           <a:ea typeface="대명체 보통" panose="020B0600000101010101" pitchFamily="50" charset="-127"/>
                           <a:cs typeface="+mn-cs"/>
                         </a:rPr>
-                        <a:t>1,424</a:t>
+                        <a:t>1,406</a:t>
                       </a:r>
                     </a:p>
                   </a:txBody>
@@ -16049,7 +16049,7 @@
                           <a:ea typeface="대명체 보통" panose="020B0600000101010101" pitchFamily="50" charset="-127"/>
                           <a:cs typeface="+mn-cs"/>
                         </a:rPr>
-                        <a:t>33%</a:t>
+                        <a:t>32%</a:t>
                       </a:r>
                     </a:p>
                   </a:txBody>
@@ -16266,7 +16266,7 @@
                           <a:ea typeface="대명체 보통" panose="020B0600000101010101" pitchFamily="50" charset="-127"/>
                           <a:cs typeface="+mn-cs"/>
                         </a:rPr>
-                        <a:t>60,626</a:t>
+                        <a:t>60,609</a:t>
                       </a:r>
                     </a:p>
                   </a:txBody>
@@ -16376,7 +16376,7 @@
                           <a:ea typeface="대명체 보통" panose="020B0600000101010101" pitchFamily="50" charset="-127"/>
                           <a:cs typeface="+mn-cs"/>
                         </a:rPr>
-                        <a:t>5,842</a:t>
+                        <a:t>5,825</a:t>
                       </a:r>
                     </a:p>
                   </a:txBody>
@@ -16604,7 +16604,7 @@
                           <a:ea typeface="대명체 보통" panose="020B0600000101010101" pitchFamily="50" charset="-127"/>
                           <a:cs typeface="+mn-cs"/>
                         </a:rPr>
-                        <a:t>15,711</a:t>
+                        <a:t>15,694</a:t>
                       </a:r>
                     </a:p>
                   </a:txBody>
@@ -16999,7 +16999,7 @@
                           <a:ea typeface="대명체 보통" panose="020B0600000101010101" pitchFamily="50" charset="-127"/>
                           <a:cs typeface="+mn-cs"/>
                         </a:rPr>
-                        <a:t>559</a:t>
+                        <a:t>554</a:t>
                       </a:r>
                       <a:endParaRPr lang="en-US" altLang="ko-KR" sz="700" b="0" i="0" u="none" strike="noStrike" kern="1200" dirty="0">
                         <a:solidFill>
@@ -17126,7 +17126,7 @@
                           <a:ea typeface="대명체 보통" panose="020B0600000101010101" pitchFamily="50" charset="-127"/>
                           <a:cs typeface="+mn-cs"/>
                         </a:rPr>
-                        <a:t>156</a:t>
+                        <a:t>151</a:t>
                       </a:r>
                       <a:endParaRPr lang="en-US" altLang="ko-KR" sz="700" b="0" i="0" u="none" strike="noStrike" kern="1200" dirty="0">
                         <a:solidFill>
@@ -17198,7 +17198,7 @@
                           <a:ea typeface="대명체 보통" panose="020B0600000101010101" pitchFamily="50" charset="-127"/>
                           <a:cs typeface="+mn-cs"/>
                         </a:rPr>
-                        <a:t>139%</a:t>
+                        <a:t>138%</a:t>
                       </a:r>
                     </a:p>
                   </a:txBody>
@@ -17388,7 +17388,7 @@
                           <a:ea typeface="대명체 보통" panose="020B0600000101010101" pitchFamily="50" charset="-127"/>
                           <a:cs typeface="+mn-cs"/>
                         </a:rPr>
-                        <a:t>193</a:t>
+                        <a:t>188</a:t>
                       </a:r>
                     </a:p>
                   </a:txBody>
@@ -17451,7 +17451,7 @@
                           <a:ea typeface="대명체 보통" panose="020B0600000101010101" pitchFamily="50" charset="-127"/>
                           <a:cs typeface="+mn-cs"/>
                         </a:rPr>
-                        <a:t>53%</a:t>
+                        <a:t>51%</a:t>
                       </a:r>
                     </a:p>
                   </a:txBody>
@@ -17680,7 +17680,7 @@
                           <a:ea typeface="대명체 보통" panose="020B0600000101010101" pitchFamily="50" charset="-127"/>
                           <a:cs typeface="+mn-cs"/>
                         </a:rPr>
-                        <a:t>5,743</a:t>
+                        <a:t>5,738</a:t>
                       </a:r>
                     </a:p>
                   </a:txBody>
@@ -17798,7 +17798,7 @@
                           <a:ea typeface="대명체 보통" panose="020B0600000101010101" pitchFamily="50" charset="-127"/>
                           <a:cs typeface="+mn-cs"/>
                         </a:rPr>
-                        <a:t>1,873</a:t>
+                        <a:t>1,868</a:t>
                       </a:r>
                       <a:endParaRPr lang="en-US" altLang="ko-KR" sz="700" b="0" i="0" u="none" strike="noStrike" kern="1200" dirty="0">
                         <a:solidFill>
@@ -18051,7 +18051,7 @@
                           <a:ea typeface="대명체 보통" panose="020B0600000101010101" pitchFamily="50" charset="-127"/>
                           <a:cs typeface="+mn-cs"/>
                         </a:rPr>
-                        <a:t>2,150</a:t>
+                        <a:t>2,145</a:t>
                       </a:r>
                     </a:p>
                   </a:txBody>

--- a/docs/data/세일즈마케팅_예상매출현황.pptx
+++ b/docs/data/세일즈마케팅_예상매출현황.pptx
@@ -12756,7 +12756,7 @@
                           <a:ea typeface="대명체 보통" panose="020B0600000101010101" pitchFamily="50" charset="-127"/>
                           <a:cs typeface="+mn-cs"/>
                         </a:rPr>
-                        <a:t>12,506</a:t>
+                        <a:t>12,457</a:t>
                       </a:r>
                     </a:p>
                   </a:txBody>
@@ -12882,7 +12882,7 @@
                           <a:ea typeface="대명체 보통" panose="020B0600000101010101" pitchFamily="50" charset="-127"/>
                           <a:cs typeface="+mn-cs"/>
                         </a:rPr>
-                        <a:t>-1,600</a:t>
+                        <a:t>-1,649</a:t>
                       </a:r>
                     </a:p>
                   </a:txBody>
@@ -12949,7 +12949,7 @@
                           <a:ea typeface="대명체 보통" panose="020B0600000101010101" pitchFamily="50" charset="-127"/>
                           <a:cs typeface="+mn-cs"/>
                         </a:rPr>
-                        <a:t>89%</a:t>
+                        <a:t>88%</a:t>
                       </a:r>
                     </a:p>
                   </a:txBody>
@@ -13016,7 +13016,7 @@
                           <a:ea typeface="대명체 보통" panose="020B0600000101010101" pitchFamily="50" charset="-127"/>
                           <a:cs typeface="+mn-cs"/>
                         </a:rPr>
-                        <a:t>10,907</a:t>
+                        <a:t>10,929</a:t>
                       </a:r>
                     </a:p>
                   </a:txBody>
@@ -13142,7 +13142,7 @@
                           <a:ea typeface="대명체 보통" panose="020B0600000101010101" pitchFamily="50" charset="-127"/>
                           <a:cs typeface="+mn-cs"/>
                         </a:rPr>
-                        <a:t>1,599</a:t>
+                        <a:t>1,529</a:t>
                       </a:r>
                     </a:p>
                   </a:txBody>
@@ -13209,7 +13209,7 @@
                           <a:ea typeface="대명체 보통" panose="020B0600000101010101" pitchFamily="50" charset="-127"/>
                           <a:cs typeface="+mn-cs"/>
                         </a:rPr>
-                        <a:t>15%</a:t>
+                        <a:t>14%</a:t>
                       </a:r>
                     </a:p>
                   </a:txBody>
@@ -13450,7 +13450,7 @@
                           <a:ea typeface="대명체 보통" panose="020B0600000101010101" pitchFamily="50" charset="-127"/>
                           <a:cs typeface="+mn-cs"/>
                         </a:rPr>
-                        <a:t>157,083</a:t>
+                        <a:t>157,035</a:t>
                       </a:r>
                     </a:p>
                   </a:txBody>
@@ -13576,7 +13576,7 @@
                           <a:ea typeface="대명체 보통" panose="020B0600000101010101" pitchFamily="50" charset="-127"/>
                           <a:cs typeface="+mn-cs"/>
                         </a:rPr>
-                        <a:t>18,056</a:t>
+                        <a:t>18,007</a:t>
                       </a:r>
                     </a:p>
                   </a:txBody>
@@ -13710,7 +13710,7 @@
                           <a:ea typeface="대명체 보통" panose="020B0600000101010101" pitchFamily="50" charset="-127"/>
                           <a:cs typeface="+mn-cs"/>
                         </a:rPr>
-                        <a:t>113,346</a:t>
+                        <a:t>113,368</a:t>
                       </a:r>
                     </a:p>
                   </a:txBody>
@@ -13836,7 +13836,7 @@
                           <a:ea typeface="대명체 보통" panose="020B0600000101010101" pitchFamily="50" charset="-127"/>
                           <a:cs typeface="+mn-cs"/>
                         </a:rPr>
-                        <a:t>43,738</a:t>
+                        <a:t>43,667</a:t>
                       </a:r>
                     </a:p>
                   </a:txBody>
@@ -14237,7 +14237,7 @@
                           <a:ea typeface="대명체 보통" panose="020B0600000101010101" pitchFamily="50" charset="-127"/>
                           <a:cs typeface="+mn-cs"/>
                         </a:rPr>
-                        <a:t>6,186</a:t>
+                        <a:t>6,154</a:t>
                       </a:r>
                     </a:p>
                   </a:txBody>
@@ -14355,7 +14355,7 @@
                           <a:ea typeface="대명체 보통" panose="020B0600000101010101" pitchFamily="50" charset="-127"/>
                           <a:cs typeface="+mn-cs"/>
                         </a:rPr>
-                        <a:t>-1,836</a:t>
+                        <a:t>-1,869</a:t>
                       </a:r>
                       <a:endParaRPr lang="en-US" altLang="ko-KR" sz="700" b="0" i="0" u="none" strike="noStrike" kern="1200" dirty="0">
                         <a:solidFill>
@@ -14490,7 +14490,7 @@
                           <a:ea typeface="대명체 보통" panose="020B0600000101010101" pitchFamily="50" charset="-127"/>
                           <a:cs typeface="+mn-cs"/>
                         </a:rPr>
-                        <a:t>6,182</a:t>
+                        <a:t>6,193</a:t>
                       </a:r>
                     </a:p>
                   </a:txBody>
@@ -14601,14 +14601,14 @@
                       <a:r>
                         <a:rPr lang="en-US" altLang="ko-KR" sz="700" b="0" i="0" u="none" strike="noStrike" kern="1200">
                           <a:solidFill>
-                            <a:srgbClr val="000000"/>
+                            <a:srgbClr val="FF0000"/>
                           </a:solidFill>
                           <a:effectLst/>
                           <a:latin typeface="대명체 보통" panose="020B0600000101010101" pitchFamily="50" charset="-127"/>
                           <a:ea typeface="대명체 보통" panose="020B0600000101010101" pitchFamily="50" charset="-127"/>
                           <a:cs typeface="+mn-cs"/>
                         </a:rPr>
-                        <a:t>5</a:t>
+                        <a:t>-39</a:t>
                       </a:r>
                     </a:p>
                   </a:txBody>
@@ -14664,14 +14664,14 @@
                       <a:r>
                         <a:rPr lang="en-US" altLang="ko-KR" sz="700" b="0" i="0" u="none" strike="noStrike" kern="1200">
                           <a:solidFill>
-                            <a:srgbClr val="000000"/>
+                            <a:srgbClr val="FF0000"/>
                           </a:solidFill>
                           <a:effectLst/>
                           <a:latin typeface="대명체 보통" panose="020B0600000101010101" pitchFamily="50" charset="-127"/>
                           <a:ea typeface="대명체 보통" panose="020B0600000101010101" pitchFamily="50" charset="-127"/>
                           <a:cs typeface="+mn-cs"/>
                         </a:rPr>
-                        <a:t>0%</a:t>
+                        <a:t>-1%</a:t>
                       </a:r>
                     </a:p>
                   </a:txBody>
@@ -14900,7 +14900,7 @@
                           <a:ea typeface="대명체 보통" panose="020B0600000101010101" pitchFamily="50" charset="-127"/>
                           <a:cs typeface="+mn-cs"/>
                         </a:rPr>
-                        <a:t>90,736</a:t>
+                        <a:t>90,704</a:t>
                       </a:r>
                     </a:p>
                   </a:txBody>
@@ -15018,7 +15018,7 @@
                           <a:ea typeface="대명체 보통" panose="020B0600000101010101" pitchFamily="50" charset="-127"/>
                           <a:cs typeface="+mn-cs"/>
                         </a:rPr>
-                        <a:t>10,363</a:t>
+                        <a:t>10,330</a:t>
                       </a:r>
                     </a:p>
                   </a:txBody>
@@ -15144,7 +15144,7 @@
                           <a:ea typeface="대명체 보통" panose="020B0600000101010101" pitchFamily="50" charset="-127"/>
                           <a:cs typeface="+mn-cs"/>
                         </a:rPr>
-                        <a:t>64,837</a:t>
+                        <a:t>64,848</a:t>
                       </a:r>
                     </a:p>
                   </a:txBody>
@@ -15262,7 +15262,7 @@
                           <a:ea typeface="대명체 보통" panose="020B0600000101010101" pitchFamily="50" charset="-127"/>
                           <a:cs typeface="+mn-cs"/>
                         </a:rPr>
-                        <a:t>25,899</a:t>
+                        <a:t>25,855</a:t>
                       </a:r>
                     </a:p>
                   </a:txBody>
@@ -15643,7 +15643,7 @@
                           <a:ea typeface="대명체 보통" panose="020B0600000101010101" pitchFamily="50" charset="-127"/>
                           <a:cs typeface="+mn-cs"/>
                         </a:rPr>
-                        <a:t>5,766</a:t>
+                        <a:t>5,751</a:t>
                       </a:r>
                     </a:p>
                   </a:txBody>
@@ -15753,7 +15753,7 @@
                           <a:ea typeface="대명체 보통" panose="020B0600000101010101" pitchFamily="50" charset="-127"/>
                           <a:cs typeface="+mn-cs"/>
                         </a:rPr>
-                        <a:t>85</a:t>
+                        <a:t>70</a:t>
                       </a:r>
                       <a:endParaRPr lang="en-US" altLang="ko-KR" sz="700" b="0" i="0" u="none" strike="noStrike" kern="1200" dirty="0">
                         <a:solidFill>
@@ -15880,7 +15880,7 @@
                           <a:ea typeface="대명체 보통" panose="020B0600000101010101" pitchFamily="50" charset="-127"/>
                           <a:cs typeface="+mn-cs"/>
                         </a:rPr>
-                        <a:t>4,360</a:t>
+                        <a:t>4,370</a:t>
                       </a:r>
                     </a:p>
                   </a:txBody>
@@ -15990,7 +15990,7 @@
                           <a:ea typeface="대명체 보통" panose="020B0600000101010101" pitchFamily="50" charset="-127"/>
                           <a:cs typeface="+mn-cs"/>
                         </a:rPr>
-                        <a:t>1,406</a:t>
+                        <a:t>1,380</a:t>
                       </a:r>
                     </a:p>
                   </a:txBody>
@@ -16266,7 +16266,7 @@
                           <a:ea typeface="대명체 보통" panose="020B0600000101010101" pitchFamily="50" charset="-127"/>
                           <a:cs typeface="+mn-cs"/>
                         </a:rPr>
-                        <a:t>60,609</a:t>
+                        <a:t>60,594</a:t>
                       </a:r>
                     </a:p>
                   </a:txBody>
@@ -16376,7 +16376,7 @@
                           <a:ea typeface="대명체 보통" panose="020B0600000101010101" pitchFamily="50" charset="-127"/>
                           <a:cs typeface="+mn-cs"/>
                         </a:rPr>
-                        <a:t>5,825</a:t>
+                        <a:t>5,810</a:t>
                       </a:r>
                     </a:p>
                   </a:txBody>
@@ -16494,7 +16494,7 @@
                           <a:ea typeface="대명체 보통" panose="020B0600000101010101" pitchFamily="50" charset="-127"/>
                           <a:cs typeface="+mn-cs"/>
                         </a:rPr>
-                        <a:t>44,916</a:t>
+                        <a:t>44,926</a:t>
                       </a:r>
                     </a:p>
                   </a:txBody>
@@ -16604,7 +16604,7 @@
                           <a:ea typeface="대명체 보통" panose="020B0600000101010101" pitchFamily="50" charset="-127"/>
                           <a:cs typeface="+mn-cs"/>
                         </a:rPr>
-                        <a:t>15,694</a:t>
+                        <a:t>15,668</a:t>
                       </a:r>
                     </a:p>
                   </a:txBody>
@@ -16999,7 +16999,7 @@
                           <a:ea typeface="대명체 보통" panose="020B0600000101010101" pitchFamily="50" charset="-127"/>
                           <a:cs typeface="+mn-cs"/>
                         </a:rPr>
-                        <a:t>554</a:t>
+                        <a:t>553</a:t>
                       </a:r>
                       <a:endParaRPr lang="en-US" altLang="ko-KR" sz="700" b="0" i="0" u="none" strike="noStrike" kern="1200" dirty="0">
                         <a:solidFill>
@@ -17126,7 +17126,7 @@
                           <a:ea typeface="대명체 보통" panose="020B0600000101010101" pitchFamily="50" charset="-127"/>
                           <a:cs typeface="+mn-cs"/>
                         </a:rPr>
-                        <a:t>151</a:t>
+                        <a:t>150</a:t>
                       </a:r>
                       <a:endParaRPr lang="en-US" altLang="ko-KR" sz="700" b="0" i="0" u="none" strike="noStrike" kern="1200" dirty="0">
                         <a:solidFill>
@@ -17198,7 +17198,7 @@
                           <a:ea typeface="대명체 보통" panose="020B0600000101010101" pitchFamily="50" charset="-127"/>
                           <a:cs typeface="+mn-cs"/>
                         </a:rPr>
-                        <a:t>138%</a:t>
+                        <a:t>137%</a:t>
                       </a:r>
                     </a:p>
                   </a:txBody>
@@ -17388,7 +17388,7 @@
                           <a:ea typeface="대명체 보통" panose="020B0600000101010101" pitchFamily="50" charset="-127"/>
                           <a:cs typeface="+mn-cs"/>
                         </a:rPr>
-                        <a:t>188</a:t>
+                        <a:t>187</a:t>
                       </a:r>
                     </a:p>
                   </a:txBody>
@@ -17680,7 +17680,7 @@
                           <a:ea typeface="대명체 보통" panose="020B0600000101010101" pitchFamily="50" charset="-127"/>
                           <a:cs typeface="+mn-cs"/>
                         </a:rPr>
-                        <a:t>5,738</a:t>
+                        <a:t>5,737</a:t>
                       </a:r>
                     </a:p>
                   </a:txBody>
@@ -17798,7 +17798,7 @@
                           <a:ea typeface="대명체 보통" panose="020B0600000101010101" pitchFamily="50" charset="-127"/>
                           <a:cs typeface="+mn-cs"/>
                         </a:rPr>
-                        <a:t>1,868</a:t>
+                        <a:t>1,867</a:t>
                       </a:r>
                       <a:endParaRPr lang="en-US" altLang="ko-KR" sz="700" b="0" i="0" u="none" strike="noStrike" kern="1200" dirty="0">
                         <a:solidFill>
@@ -18051,7 +18051,7 @@
                           <a:ea typeface="대명체 보통" panose="020B0600000101010101" pitchFamily="50" charset="-127"/>
                           <a:cs typeface="+mn-cs"/>
                         </a:rPr>
-                        <a:t>2,145</a:t>
+                        <a:t>2,144</a:t>
                       </a:r>
                     </a:p>
                   </a:txBody>

--- a/docs/data/세일즈마케팅_예상매출현황.pptx
+++ b/docs/data/세일즈마케팅_예상매출현황.pptx
@@ -12756,7 +12756,7 @@
                           <a:ea typeface="대명체 보통" panose="020B0600000101010101" pitchFamily="50" charset="-127"/>
                           <a:cs typeface="+mn-cs"/>
                         </a:rPr>
-                        <a:t>12,457</a:t>
+                        <a:t>12,433</a:t>
                       </a:r>
                     </a:p>
                   </a:txBody>
@@ -12882,7 +12882,7 @@
                           <a:ea typeface="대명체 보통" panose="020B0600000101010101" pitchFamily="50" charset="-127"/>
                           <a:cs typeface="+mn-cs"/>
                         </a:rPr>
-                        <a:t>-1,649</a:t>
+                        <a:t>-1,674</a:t>
                       </a:r>
                     </a:p>
                   </a:txBody>
@@ -13016,7 +13016,7 @@
                           <a:ea typeface="대명체 보통" panose="020B0600000101010101" pitchFamily="50" charset="-127"/>
                           <a:cs typeface="+mn-cs"/>
                         </a:rPr>
-                        <a:t>10,929</a:t>
+                        <a:t>10,948</a:t>
                       </a:r>
                     </a:p>
                   </a:txBody>
@@ -13142,7 +13142,7 @@
                           <a:ea typeface="대명체 보통" panose="020B0600000101010101" pitchFamily="50" charset="-127"/>
                           <a:cs typeface="+mn-cs"/>
                         </a:rPr>
-                        <a:t>1,529</a:t>
+                        <a:t>1,485</a:t>
                       </a:r>
                     </a:p>
                   </a:txBody>
@@ -13450,7 +13450,7 @@
                           <a:ea typeface="대명체 보통" panose="020B0600000101010101" pitchFamily="50" charset="-127"/>
                           <a:cs typeface="+mn-cs"/>
                         </a:rPr>
-                        <a:t>157,035</a:t>
+                        <a:t>157,010</a:t>
                       </a:r>
                     </a:p>
                   </a:txBody>
@@ -13576,7 +13576,7 @@
                           <a:ea typeface="대명체 보통" panose="020B0600000101010101" pitchFamily="50" charset="-127"/>
                           <a:cs typeface="+mn-cs"/>
                         </a:rPr>
-                        <a:t>18,007</a:t>
+                        <a:t>17,982</a:t>
                       </a:r>
                     </a:p>
                   </a:txBody>
@@ -13710,7 +13710,7 @@
                           <a:ea typeface="대명체 보통" panose="020B0600000101010101" pitchFamily="50" charset="-127"/>
                           <a:cs typeface="+mn-cs"/>
                         </a:rPr>
-                        <a:t>113,368</a:t>
+                        <a:t>113,387</a:t>
                       </a:r>
                     </a:p>
                   </a:txBody>
@@ -13836,7 +13836,7 @@
                           <a:ea typeface="대명체 보통" panose="020B0600000101010101" pitchFamily="50" charset="-127"/>
                           <a:cs typeface="+mn-cs"/>
                         </a:rPr>
-                        <a:t>43,667</a:t>
+                        <a:t>43,623</a:t>
                       </a:r>
                     </a:p>
                   </a:txBody>
@@ -13903,7 +13903,7 @@
                           <a:ea typeface="대명체 보통" panose="020B0600000101010101" pitchFamily="50" charset="-127"/>
                           <a:cs typeface="+mn-cs"/>
                         </a:rPr>
-                        <a:t>39%</a:t>
+                        <a:t>38%</a:t>
                       </a:r>
                     </a:p>
                   </a:txBody>
@@ -14237,7 +14237,7 @@
                           <a:ea typeface="대명체 보통" panose="020B0600000101010101" pitchFamily="50" charset="-127"/>
                           <a:cs typeface="+mn-cs"/>
                         </a:rPr>
-                        <a:t>6,154</a:t>
+                        <a:t>6,137</a:t>
                       </a:r>
                     </a:p>
                   </a:txBody>
@@ -14355,7 +14355,7 @@
                           <a:ea typeface="대명체 보통" panose="020B0600000101010101" pitchFamily="50" charset="-127"/>
                           <a:cs typeface="+mn-cs"/>
                         </a:rPr>
-                        <a:t>-1,869</a:t>
+                        <a:t>-1,886</a:t>
                       </a:r>
                       <a:endParaRPr lang="en-US" altLang="ko-KR" sz="700" b="0" i="0" u="none" strike="noStrike" kern="1200" dirty="0">
                         <a:solidFill>
@@ -14427,7 +14427,7 @@
                           <a:ea typeface="대명체 보통" panose="020B0600000101010101" pitchFamily="50" charset="-127"/>
                           <a:cs typeface="+mn-cs"/>
                         </a:rPr>
-                        <a:t>77%</a:t>
+                        <a:t>76%</a:t>
                       </a:r>
                     </a:p>
                   </a:txBody>
@@ -14490,7 +14490,7 @@
                           <a:ea typeface="대명체 보통" panose="020B0600000101010101" pitchFamily="50" charset="-127"/>
                           <a:cs typeface="+mn-cs"/>
                         </a:rPr>
-                        <a:t>6,193</a:t>
+                        <a:t>6,203</a:t>
                       </a:r>
                     </a:p>
                   </a:txBody>
@@ -14608,7 +14608,7 @@
                           <a:ea typeface="대명체 보통" panose="020B0600000101010101" pitchFamily="50" charset="-127"/>
                           <a:cs typeface="+mn-cs"/>
                         </a:rPr>
-                        <a:t>-39</a:t>
+                        <a:t>-66</a:t>
                       </a:r>
                     </a:p>
                   </a:txBody>
@@ -14900,7 +14900,7 @@
                           <a:ea typeface="대명체 보통" panose="020B0600000101010101" pitchFamily="50" charset="-127"/>
                           <a:cs typeface="+mn-cs"/>
                         </a:rPr>
-                        <a:t>90,704</a:t>
+                        <a:t>90,687</a:t>
                       </a:r>
                     </a:p>
                   </a:txBody>
@@ -15018,7 +15018,7 @@
                           <a:ea typeface="대명체 보통" panose="020B0600000101010101" pitchFamily="50" charset="-127"/>
                           <a:cs typeface="+mn-cs"/>
                         </a:rPr>
-                        <a:t>10,330</a:t>
+                        <a:t>10,313</a:t>
                       </a:r>
                     </a:p>
                   </a:txBody>
@@ -15144,7 +15144,7 @@
                           <a:ea typeface="대명체 보통" panose="020B0600000101010101" pitchFamily="50" charset="-127"/>
                           <a:cs typeface="+mn-cs"/>
                         </a:rPr>
-                        <a:t>64,848</a:t>
+                        <a:t>64,858</a:t>
                       </a:r>
                     </a:p>
                   </a:txBody>
@@ -15262,7 +15262,7 @@
                           <a:ea typeface="대명체 보통" panose="020B0600000101010101" pitchFamily="50" charset="-127"/>
                           <a:cs typeface="+mn-cs"/>
                         </a:rPr>
-                        <a:t>25,855</a:t>
+                        <a:t>25,828</a:t>
                       </a:r>
                     </a:p>
                   </a:txBody>
@@ -15643,7 +15643,7 @@
                           <a:ea typeface="대명체 보통" panose="020B0600000101010101" pitchFamily="50" charset="-127"/>
                           <a:cs typeface="+mn-cs"/>
                         </a:rPr>
-                        <a:t>5,751</a:t>
+                        <a:t>5,744</a:t>
                       </a:r>
                     </a:p>
                   </a:txBody>
@@ -15753,7 +15753,7 @@
                           <a:ea typeface="대명체 보통" panose="020B0600000101010101" pitchFamily="50" charset="-127"/>
                           <a:cs typeface="+mn-cs"/>
                         </a:rPr>
-                        <a:t>70</a:t>
+                        <a:t>63</a:t>
                       </a:r>
                       <a:endParaRPr lang="en-US" altLang="ko-KR" sz="700" b="0" i="0" u="none" strike="noStrike" kern="1200" dirty="0">
                         <a:solidFill>
@@ -15880,7 +15880,7 @@
                           <a:ea typeface="대명체 보통" panose="020B0600000101010101" pitchFamily="50" charset="-127"/>
                           <a:cs typeface="+mn-cs"/>
                         </a:rPr>
-                        <a:t>4,370</a:t>
+                        <a:t>4,379</a:t>
                       </a:r>
                     </a:p>
                   </a:txBody>
@@ -15990,7 +15990,7 @@
                           <a:ea typeface="대명체 보통" panose="020B0600000101010101" pitchFamily="50" charset="-127"/>
                           <a:cs typeface="+mn-cs"/>
                         </a:rPr>
-                        <a:t>1,380</a:t>
+                        <a:t>1,364</a:t>
                       </a:r>
                     </a:p>
                   </a:txBody>
@@ -16049,7 +16049,7 @@
                           <a:ea typeface="대명체 보통" panose="020B0600000101010101" pitchFamily="50" charset="-127"/>
                           <a:cs typeface="+mn-cs"/>
                         </a:rPr>
-                        <a:t>32%</a:t>
+                        <a:t>31%</a:t>
                       </a:r>
                     </a:p>
                   </a:txBody>
@@ -16266,7 +16266,7 @@
                           <a:ea typeface="대명체 보통" panose="020B0600000101010101" pitchFamily="50" charset="-127"/>
                           <a:cs typeface="+mn-cs"/>
                         </a:rPr>
-                        <a:t>60,594</a:t>
+                        <a:t>60,587</a:t>
                       </a:r>
                     </a:p>
                   </a:txBody>
@@ -16376,7 +16376,7 @@
                           <a:ea typeface="대명체 보통" panose="020B0600000101010101" pitchFamily="50" charset="-127"/>
                           <a:cs typeface="+mn-cs"/>
                         </a:rPr>
-                        <a:t>5,810</a:t>
+                        <a:t>5,803</a:t>
                       </a:r>
                     </a:p>
                   </a:txBody>
@@ -16494,7 +16494,7 @@
                           <a:ea typeface="대명체 보통" panose="020B0600000101010101" pitchFamily="50" charset="-127"/>
                           <a:cs typeface="+mn-cs"/>
                         </a:rPr>
-                        <a:t>44,926</a:t>
+                        <a:t>44,935</a:t>
                       </a:r>
                     </a:p>
                   </a:txBody>
@@ -16604,7 +16604,7 @@
                           <a:ea typeface="대명체 보통" panose="020B0600000101010101" pitchFamily="50" charset="-127"/>
                           <a:cs typeface="+mn-cs"/>
                         </a:rPr>
-                        <a:t>15,668</a:t>
+                        <a:t>15,652</a:t>
                       </a:r>
                     </a:p>
                   </a:txBody>
@@ -16999,7 +16999,7 @@
                           <a:ea typeface="대명체 보통" panose="020B0600000101010101" pitchFamily="50" charset="-127"/>
                           <a:cs typeface="+mn-cs"/>
                         </a:rPr>
-                        <a:t>553</a:t>
+                        <a:t>552</a:t>
                       </a:r>
                       <a:endParaRPr lang="en-US" altLang="ko-KR" sz="700" b="0" i="0" u="none" strike="noStrike" kern="1200" dirty="0">
                         <a:solidFill>
@@ -17126,7 +17126,7 @@
                           <a:ea typeface="대명체 보통" panose="020B0600000101010101" pitchFamily="50" charset="-127"/>
                           <a:cs typeface="+mn-cs"/>
                         </a:rPr>
-                        <a:t>150</a:t>
+                        <a:t>149</a:t>
                       </a:r>
                       <a:endParaRPr lang="en-US" altLang="ko-KR" sz="700" b="0" i="0" u="none" strike="noStrike" kern="1200" dirty="0">
                         <a:solidFill>
@@ -17388,7 +17388,7 @@
                           <a:ea typeface="대명체 보통" panose="020B0600000101010101" pitchFamily="50" charset="-127"/>
                           <a:cs typeface="+mn-cs"/>
                         </a:rPr>
-                        <a:t>187</a:t>
+                        <a:t>186</a:t>
                       </a:r>
                     </a:p>
                   </a:txBody>
@@ -17680,7 +17680,7 @@
                           <a:ea typeface="대명체 보통" panose="020B0600000101010101" pitchFamily="50" charset="-127"/>
                           <a:cs typeface="+mn-cs"/>
                         </a:rPr>
-                        <a:t>5,737</a:t>
+                        <a:t>5,736</a:t>
                       </a:r>
                     </a:p>
                   </a:txBody>
@@ -17798,7 +17798,7 @@
                           <a:ea typeface="대명체 보통" panose="020B0600000101010101" pitchFamily="50" charset="-127"/>
                           <a:cs typeface="+mn-cs"/>
                         </a:rPr>
-                        <a:t>1,867</a:t>
+                        <a:t>1,866</a:t>
                       </a:r>
                       <a:endParaRPr lang="en-US" altLang="ko-KR" sz="700" b="0" i="0" u="none" strike="noStrike" kern="1200" dirty="0">
                         <a:solidFill>
@@ -18051,7 +18051,7 @@
                           <a:ea typeface="대명체 보통" panose="020B0600000101010101" pitchFamily="50" charset="-127"/>
                           <a:cs typeface="+mn-cs"/>
                         </a:rPr>
-                        <a:t>2,144</a:t>
+                        <a:t>2,143</a:t>
                       </a:r>
                     </a:p>
                   </a:txBody>

--- a/docs/data/세일즈마케팅_예상매출현황.pptx
+++ b/docs/data/세일즈마케팅_예상매출현황.pptx
@@ -4058,7 +4058,7 @@
                           <a:latin typeface="대명체 보통" panose="020B0600000101010101" pitchFamily="50" charset="-127"/>
                           <a:ea typeface="대명체 보통" panose="020B0600000101010101" pitchFamily="50" charset="-127"/>
                         </a:rPr>
-                        <a:t>당월 예상실적 (09.01~09.30)</a:t>
+                        <a:t>당월 예상실적 (10.01~10.31)</a:t>
                       </a:r>
                       <a:endParaRPr lang="en-US" altLang="ko-KR" sz="800" b="1" i="0" u="none" strike="noStrike" dirty="0">
                         <a:ln>
@@ -4310,7 +4310,7 @@
                           <a:latin typeface="대명체 보통" panose="020B0600000101010101" pitchFamily="50" charset="-127"/>
                           <a:ea typeface="대명체 보통" panose="020B0600000101010101" pitchFamily="50" charset="-127"/>
                         </a:rPr>
-                        <a:t>누계 실적 (01.01~09.30)</a:t>
+                        <a:t>누계 실적 (01.01~10.31)</a:t>
                       </a:r>
                       <a:endParaRPr lang="en-US" altLang="ko-KR" sz="800" b="1" i="0" u="none" strike="noStrike" dirty="0">
                         <a:ln>
@@ -12630,7 +12630,7 @@
                           <a:ea typeface="대명체 보통" panose="020B0600000101010101" pitchFamily="50" charset="-127"/>
                           <a:cs typeface="+mn-cs"/>
                         </a:rPr>
-                        <a:t>14,106</a:t>
+                        <a:t>15,988</a:t>
                       </a:r>
                     </a:p>
                   </a:txBody>
@@ -12756,7 +12756,7 @@
                           <a:ea typeface="대명체 보통" panose="020B0600000101010101" pitchFamily="50" charset="-127"/>
                           <a:cs typeface="+mn-cs"/>
                         </a:rPr>
-                        <a:t>12,433</a:t>
+                        <a:t>17,588</a:t>
                       </a:r>
                     </a:p>
                   </a:txBody>
@@ -12875,14 +12875,14 @@
                       <a:r>
                         <a:rPr lang="en-US" altLang="ko-KR" sz="700" b="0" i="0" u="none" strike="noStrike" kern="1200" dirty="0">
                           <a:solidFill>
-                            <a:srgbClr val="FF0000"/>
+                            <a:srgbClr val="000000"/>
                           </a:solidFill>
                           <a:effectLst/>
                           <a:latin typeface="대명체 보통" panose="020B0600000101010101" pitchFamily="50" charset="-127"/>
                           <a:ea typeface="대명체 보통" panose="020B0600000101010101" pitchFamily="50" charset="-127"/>
                           <a:cs typeface="+mn-cs"/>
                         </a:rPr>
-                        <a:t>-1,674</a:t>
+                        <a:t>1,599</a:t>
                       </a:r>
                     </a:p>
                   </a:txBody>
@@ -12949,7 +12949,7 @@
                           <a:ea typeface="대명체 보통" panose="020B0600000101010101" pitchFamily="50" charset="-127"/>
                           <a:cs typeface="+mn-cs"/>
                         </a:rPr>
-                        <a:t>88%</a:t>
+                        <a:t>110%</a:t>
                       </a:r>
                     </a:p>
                   </a:txBody>
@@ -13016,7 +13016,7 @@
                           <a:ea typeface="대명체 보통" panose="020B0600000101010101" pitchFamily="50" charset="-127"/>
                           <a:cs typeface="+mn-cs"/>
                         </a:rPr>
-                        <a:t>10,948</a:t>
+                        <a:t>9,009</a:t>
                       </a:r>
                     </a:p>
                   </a:txBody>
@@ -13142,7 +13142,7 @@
                           <a:ea typeface="대명체 보통" panose="020B0600000101010101" pitchFamily="50" charset="-127"/>
                           <a:cs typeface="+mn-cs"/>
                         </a:rPr>
-                        <a:t>1,485</a:t>
+                        <a:t>8,579</a:t>
                       </a:r>
                     </a:p>
                   </a:txBody>
@@ -13209,7 +13209,7 @@
                           <a:ea typeface="대명체 보통" panose="020B0600000101010101" pitchFamily="50" charset="-127"/>
                           <a:cs typeface="+mn-cs"/>
                         </a:rPr>
-                        <a:t>14%</a:t>
+                        <a:t>95%</a:t>
                       </a:r>
                     </a:p>
                   </a:txBody>
@@ -13328,7 +13328,7 @@
                           <a:ea typeface="대명체 보통" panose="020B0600000101010101" pitchFamily="50" charset="-127"/>
                           <a:cs typeface="+mn-cs"/>
                         </a:rPr>
-                        <a:t>139,028</a:t>
+                        <a:t>155,016</a:t>
                       </a:r>
                     </a:p>
                   </a:txBody>
@@ -13450,7 +13450,7 @@
                           <a:ea typeface="대명체 보통" panose="020B0600000101010101" pitchFamily="50" charset="-127"/>
                           <a:cs typeface="+mn-cs"/>
                         </a:rPr>
-                        <a:t>157,010</a:t>
+                        <a:t>176,146</a:t>
                       </a:r>
                     </a:p>
                   </a:txBody>
@@ -13576,7 +13576,7 @@
                           <a:ea typeface="대명체 보통" panose="020B0600000101010101" pitchFamily="50" charset="-127"/>
                           <a:cs typeface="+mn-cs"/>
                         </a:rPr>
-                        <a:t>17,982</a:t>
+                        <a:t>21,130</a:t>
                       </a:r>
                     </a:p>
                   </a:txBody>
@@ -13643,7 +13643,7 @@
                           <a:ea typeface="대명체 보통" panose="020B0600000101010101" pitchFamily="50" charset="-127"/>
                           <a:cs typeface="+mn-cs"/>
                         </a:rPr>
-                        <a:t>113%</a:t>
+                        <a:t>114%</a:t>
                       </a:r>
                     </a:p>
                   </a:txBody>
@@ -13710,7 +13710,7 @@
                           <a:ea typeface="대명체 보통" panose="020B0600000101010101" pitchFamily="50" charset="-127"/>
                           <a:cs typeface="+mn-cs"/>
                         </a:rPr>
-                        <a:t>113,387</a:t>
+                        <a:t>122,406</a:t>
                       </a:r>
                     </a:p>
                   </a:txBody>
@@ -13836,7 +13836,7 @@
                           <a:ea typeface="대명체 보통" panose="020B0600000101010101" pitchFamily="50" charset="-127"/>
                           <a:cs typeface="+mn-cs"/>
                         </a:rPr>
-                        <a:t>43,623</a:t>
+                        <a:t>53,740</a:t>
                       </a:r>
                     </a:p>
                   </a:txBody>
@@ -13903,7 +13903,7 @@
                           <a:ea typeface="대명체 보통" panose="020B0600000101010101" pitchFamily="50" charset="-127"/>
                           <a:cs typeface="+mn-cs"/>
                         </a:rPr>
-                        <a:t>38%</a:t>
+                        <a:t>44%</a:t>
                       </a:r>
                     </a:p>
                   </a:txBody>
@@ -14119,7 +14119,7 @@
                           <a:ea typeface="대명체 보통" panose="020B0600000101010101" pitchFamily="50" charset="-127"/>
                           <a:cs typeface="+mn-cs"/>
                         </a:rPr>
-                        <a:t>8,023</a:t>
+                        <a:t>9,610</a:t>
                       </a:r>
                     </a:p>
                   </a:txBody>
@@ -14237,7 +14237,7 @@
                           <a:ea typeface="대명체 보통" panose="020B0600000101010101" pitchFamily="50" charset="-127"/>
                           <a:cs typeface="+mn-cs"/>
                         </a:rPr>
-                        <a:t>6,137</a:t>
+                        <a:t>8,666</a:t>
                       </a:r>
                     </a:p>
                   </a:txBody>
@@ -14355,7 +14355,7 @@
                           <a:ea typeface="대명체 보통" panose="020B0600000101010101" pitchFamily="50" charset="-127"/>
                           <a:cs typeface="+mn-cs"/>
                         </a:rPr>
-                        <a:t>-1,886</a:t>
+                        <a:t>-945</a:t>
                       </a:r>
                       <a:endParaRPr lang="en-US" altLang="ko-KR" sz="700" b="0" i="0" u="none" strike="noStrike" kern="1200" dirty="0">
                         <a:solidFill>
@@ -14427,7 +14427,7 @@
                           <a:ea typeface="대명체 보통" panose="020B0600000101010101" pitchFamily="50" charset="-127"/>
                           <a:cs typeface="+mn-cs"/>
                         </a:rPr>
-                        <a:t>76%</a:t>
+                        <a:t>90%</a:t>
                       </a:r>
                     </a:p>
                   </a:txBody>
@@ -14490,7 +14490,7 @@
                           <a:ea typeface="대명체 보통" panose="020B0600000101010101" pitchFamily="50" charset="-127"/>
                           <a:cs typeface="+mn-cs"/>
                         </a:rPr>
-                        <a:t>6,203</a:t>
+                        <a:t>5,604</a:t>
                       </a:r>
                     </a:p>
                   </a:txBody>
@@ -14601,14 +14601,14 @@
                       <a:r>
                         <a:rPr lang="en-US" altLang="ko-KR" sz="700" b="0" i="0" u="none" strike="noStrike" kern="1200">
                           <a:solidFill>
-                            <a:srgbClr val="FF0000"/>
+                            <a:srgbClr val="000000"/>
                           </a:solidFill>
                           <a:effectLst/>
                           <a:latin typeface="대명체 보통" panose="020B0600000101010101" pitchFamily="50" charset="-127"/>
                           <a:ea typeface="대명체 보통" panose="020B0600000101010101" pitchFamily="50" charset="-127"/>
                           <a:cs typeface="+mn-cs"/>
                         </a:rPr>
-                        <a:t>-66</a:t>
+                        <a:t>3,061</a:t>
                       </a:r>
                     </a:p>
                   </a:txBody>
@@ -14653,121 +14653,6 @@
                       <a:headEnd type="none" w="med" len="med"/>
                       <a:tailEnd type="none" w="med" len="med"/>
                     </a:lnB>
-                  </a:tcPr>
-                </a:tc>
-                <a:tc>
-                  <a:txBody>
-                    <a:bodyPr/>
-                    <a:lstStyle/>
-                    <a:p>
-                      <a:pPr algn="r" rtl="0" fontAlgn="ctr"/>
-                      <a:r>
-                        <a:rPr lang="en-US" altLang="ko-KR" sz="700" b="0" i="0" u="none" strike="noStrike" kern="1200">
-                          <a:solidFill>
-                            <a:srgbClr val="FF0000"/>
-                          </a:solidFill>
-                          <a:effectLst/>
-                          <a:latin typeface="대명체 보통" panose="020B0600000101010101" pitchFamily="50" charset="-127"/>
-                          <a:ea typeface="대명체 보통" panose="020B0600000101010101" pitchFamily="50" charset="-127"/>
-                          <a:cs typeface="+mn-cs"/>
-                        </a:rPr>
-                        <a:t>-1%</a:t>
-                      </a:r>
-                    </a:p>
-                  </a:txBody>
-                  <a:tcPr marL="9525" marR="9525" marT="9525" marB="0" anchor="ctr">
-                    <a:lnL w="6350" cap="flat" cmpd="sng" algn="ctr">
-                      <a:solidFill>
-                        <a:schemeClr val="bg2">
-                          <a:lumMod val="75000"/>
-                        </a:schemeClr>
-                      </a:solidFill>
-                      <a:prstDash val="solid"/>
-                      <a:round/>
-                      <a:headEnd type="none" w="med" len="med"/>
-                      <a:tailEnd type="none" w="med" len="med"/>
-                    </a:lnL>
-                    <a:lnR w="6350" cap="flat" cmpd="sng" algn="ctr">
-                      <a:noFill/>
-                      <a:prstDash val="solid"/>
-                      <a:round/>
-                      <a:headEnd type="none" w="med" len="med"/>
-                      <a:tailEnd type="none" w="med" len="med"/>
-                    </a:lnR>
-                    <a:lnT w="6350" cap="flat" cmpd="sng" algn="ctr">
-                      <a:solidFill>
-                        <a:schemeClr val="bg2">
-                          <a:lumMod val="75000"/>
-                        </a:schemeClr>
-                      </a:solidFill>
-                      <a:prstDash val="solid"/>
-                      <a:round/>
-                      <a:headEnd type="none" w="med" len="med"/>
-                      <a:tailEnd type="none" w="med" len="med"/>
-                    </a:lnT>
-                    <a:lnB w="6350" cap="flat" cmpd="sng" algn="ctr">
-                      <a:noFill/>
-                      <a:prstDash val="solid"/>
-                      <a:round/>
-                      <a:headEnd type="none" w="med" len="med"/>
-                      <a:tailEnd type="none" w="med" len="med"/>
-                    </a:lnB>
-                  </a:tcPr>
-                </a:tc>
-                <a:tc>
-                  <a:txBody>
-                    <a:bodyPr/>
-                    <a:lstStyle/>
-                    <a:p>
-                      <a:pPr algn="r" fontAlgn="ctr"/>
-                      <a:endParaRPr lang="ko-KR" altLang="en-US" sz="700" b="0" i="0" u="none" strike="noStrike" kern="1200">
-                        <a:solidFill>
-                          <a:srgbClr val="000000"/>
-                        </a:solidFill>
-                        <a:effectLst/>
-                        <a:latin typeface="대명체 보통" panose="020B0600000101010101" pitchFamily="50" charset="-127"/>
-                        <a:ea typeface="대명체 보통" panose="020B0600000101010101" pitchFamily="50" charset="-127"/>
-                        <a:cs typeface="+mn-cs"/>
-                      </a:endParaRPr>
-                    </a:p>
-                  </a:txBody>
-                  <a:tcPr marL="9525" marR="9525" marT="9525" marB="0" anchor="ctr">
-                    <a:lnL w="6350" cap="flat" cmpd="sng" algn="ctr">
-                      <a:noFill/>
-                      <a:prstDash val="solid"/>
-                      <a:round/>
-                      <a:headEnd type="none" w="med" len="med"/>
-                      <a:tailEnd type="none" w="med" len="med"/>
-                    </a:lnL>
-                    <a:lnR w="6350" cap="flat" cmpd="sng" algn="ctr">
-                      <a:noFill/>
-                      <a:prstDash val="solid"/>
-                      <a:round/>
-                      <a:headEnd type="none" w="med" len="med"/>
-                      <a:tailEnd type="none" w="med" len="med"/>
-                    </a:lnR>
-                    <a:lnT w="6350" cap="flat" cmpd="sng" algn="ctr">
-                      <a:noFill/>
-                      <a:prstDash val="solid"/>
-                      <a:round/>
-                      <a:headEnd type="none" w="med" len="med"/>
-                      <a:tailEnd type="none" w="med" len="med"/>
-                    </a:lnT>
-                    <a:lnB w="6350" cap="flat" cmpd="sng" algn="ctr">
-                      <a:noFill/>
-                      <a:prstDash val="solid"/>
-                      <a:round/>
-                      <a:headEnd type="none" w="med" len="med"/>
-                      <a:tailEnd type="none" w="med" len="med"/>
-                    </a:lnB>
-                    <a:lnTlToBr w="12700" cmpd="sng">
-                      <a:noFill/>
-                      <a:prstDash val="solid"/>
-                    </a:lnTlToBr>
-                    <a:lnBlToTr w="12700" cmpd="sng">
-                      <a:noFill/>
-                      <a:prstDash val="solid"/>
-                    </a:lnBlToTr>
                   </a:tcPr>
                 </a:tc>
                 <a:tc>
@@ -14786,7 +14671,122 @@
                           <a:ea typeface="대명체 보통" panose="020B0600000101010101" pitchFamily="50" charset="-127"/>
                           <a:cs typeface="+mn-cs"/>
                         </a:rPr>
-                        <a:t>80,374</a:t>
+                        <a:t>55%</a:t>
+                      </a:r>
+                    </a:p>
+                  </a:txBody>
+                  <a:tcPr marL="9525" marR="9525" marT="9525" marB="0" anchor="ctr">
+                    <a:lnL w="6350" cap="flat" cmpd="sng" algn="ctr">
+                      <a:solidFill>
+                        <a:schemeClr val="bg2">
+                          <a:lumMod val="75000"/>
+                        </a:schemeClr>
+                      </a:solidFill>
+                      <a:prstDash val="solid"/>
+                      <a:round/>
+                      <a:headEnd type="none" w="med" len="med"/>
+                      <a:tailEnd type="none" w="med" len="med"/>
+                    </a:lnL>
+                    <a:lnR w="6350" cap="flat" cmpd="sng" algn="ctr">
+                      <a:noFill/>
+                      <a:prstDash val="solid"/>
+                      <a:round/>
+                      <a:headEnd type="none" w="med" len="med"/>
+                      <a:tailEnd type="none" w="med" len="med"/>
+                    </a:lnR>
+                    <a:lnT w="6350" cap="flat" cmpd="sng" algn="ctr">
+                      <a:solidFill>
+                        <a:schemeClr val="bg2">
+                          <a:lumMod val="75000"/>
+                        </a:schemeClr>
+                      </a:solidFill>
+                      <a:prstDash val="solid"/>
+                      <a:round/>
+                      <a:headEnd type="none" w="med" len="med"/>
+                      <a:tailEnd type="none" w="med" len="med"/>
+                    </a:lnT>
+                    <a:lnB w="6350" cap="flat" cmpd="sng" algn="ctr">
+                      <a:noFill/>
+                      <a:prstDash val="solid"/>
+                      <a:round/>
+                      <a:headEnd type="none" w="med" len="med"/>
+                      <a:tailEnd type="none" w="med" len="med"/>
+                    </a:lnB>
+                  </a:tcPr>
+                </a:tc>
+                <a:tc>
+                  <a:txBody>
+                    <a:bodyPr/>
+                    <a:lstStyle/>
+                    <a:p>
+                      <a:pPr algn="r" fontAlgn="ctr"/>
+                      <a:endParaRPr lang="ko-KR" altLang="en-US" sz="700" b="0" i="0" u="none" strike="noStrike" kern="1200">
+                        <a:solidFill>
+                          <a:srgbClr val="000000"/>
+                        </a:solidFill>
+                        <a:effectLst/>
+                        <a:latin typeface="대명체 보통" panose="020B0600000101010101" pitchFamily="50" charset="-127"/>
+                        <a:ea typeface="대명체 보통" panose="020B0600000101010101" pitchFamily="50" charset="-127"/>
+                        <a:cs typeface="+mn-cs"/>
+                      </a:endParaRPr>
+                    </a:p>
+                  </a:txBody>
+                  <a:tcPr marL="9525" marR="9525" marT="9525" marB="0" anchor="ctr">
+                    <a:lnL w="6350" cap="flat" cmpd="sng" algn="ctr">
+                      <a:noFill/>
+                      <a:prstDash val="solid"/>
+                      <a:round/>
+                      <a:headEnd type="none" w="med" len="med"/>
+                      <a:tailEnd type="none" w="med" len="med"/>
+                    </a:lnL>
+                    <a:lnR w="6350" cap="flat" cmpd="sng" algn="ctr">
+                      <a:noFill/>
+                      <a:prstDash val="solid"/>
+                      <a:round/>
+                      <a:headEnd type="none" w="med" len="med"/>
+                      <a:tailEnd type="none" w="med" len="med"/>
+                    </a:lnR>
+                    <a:lnT w="6350" cap="flat" cmpd="sng" algn="ctr">
+                      <a:noFill/>
+                      <a:prstDash val="solid"/>
+                      <a:round/>
+                      <a:headEnd type="none" w="med" len="med"/>
+                      <a:tailEnd type="none" w="med" len="med"/>
+                    </a:lnT>
+                    <a:lnB w="6350" cap="flat" cmpd="sng" algn="ctr">
+                      <a:noFill/>
+                      <a:prstDash val="solid"/>
+                      <a:round/>
+                      <a:headEnd type="none" w="med" len="med"/>
+                      <a:tailEnd type="none" w="med" len="med"/>
+                    </a:lnB>
+                    <a:lnTlToBr w="12700" cmpd="sng">
+                      <a:noFill/>
+                      <a:prstDash val="solid"/>
+                    </a:lnTlToBr>
+                    <a:lnBlToTr w="12700" cmpd="sng">
+                      <a:noFill/>
+                      <a:prstDash val="solid"/>
+                    </a:lnBlToTr>
+                  </a:tcPr>
+                </a:tc>
+                <a:tc>
+                  <a:txBody>
+                    <a:bodyPr/>
+                    <a:lstStyle/>
+                    <a:p>
+                      <a:pPr algn="r" rtl="0" fontAlgn="ctr"/>
+                      <a:r>
+                        <a:rPr lang="en-US" altLang="ko-KR" sz="700" b="0" i="0" u="none" strike="noStrike" kern="1200">
+                          <a:solidFill>
+                            <a:srgbClr val="000000"/>
+                          </a:solidFill>
+                          <a:effectLst/>
+                          <a:latin typeface="대명체 보통" panose="020B0600000101010101" pitchFamily="50" charset="-127"/>
+                          <a:ea typeface="대명체 보통" panose="020B0600000101010101" pitchFamily="50" charset="-127"/>
+                          <a:cs typeface="+mn-cs"/>
+                        </a:rPr>
+                        <a:t>89,984</a:t>
                       </a:r>
                     </a:p>
                   </a:txBody>
@@ -14900,7 +14900,7 @@
                           <a:ea typeface="대명체 보통" panose="020B0600000101010101" pitchFamily="50" charset="-127"/>
                           <a:cs typeface="+mn-cs"/>
                         </a:rPr>
-                        <a:t>90,687</a:t>
+                        <a:t>100,286</a:t>
                       </a:r>
                     </a:p>
                   </a:txBody>
@@ -15018,7 +15018,7 @@
                           <a:ea typeface="대명체 보통" panose="020B0600000101010101" pitchFamily="50" charset="-127"/>
                           <a:cs typeface="+mn-cs"/>
                         </a:rPr>
-                        <a:t>10,313</a:t>
+                        <a:t>10,302</a:t>
                       </a:r>
                     </a:p>
                   </a:txBody>
@@ -15081,7 +15081,7 @@
                           <a:ea typeface="대명체 보통" panose="020B0600000101010101" pitchFamily="50" charset="-127"/>
                           <a:cs typeface="+mn-cs"/>
                         </a:rPr>
-                        <a:t>113%</a:t>
+                        <a:t>111%</a:t>
                       </a:r>
                     </a:p>
                   </a:txBody>
@@ -15144,7 +15144,7 @@
                           <a:ea typeface="대명체 보통" panose="020B0600000101010101" pitchFamily="50" charset="-127"/>
                           <a:cs typeface="+mn-cs"/>
                         </a:rPr>
-                        <a:t>64,858</a:t>
+                        <a:t>70,467</a:t>
                       </a:r>
                     </a:p>
                   </a:txBody>
@@ -15262,7 +15262,7 @@
                           <a:ea typeface="대명체 보통" panose="020B0600000101010101" pitchFamily="50" charset="-127"/>
                           <a:cs typeface="+mn-cs"/>
                         </a:rPr>
-                        <a:t>25,828</a:t>
+                        <a:t>29,819</a:t>
                       </a:r>
                     </a:p>
                   </a:txBody>
@@ -15325,7 +15325,7 @@
                           <a:ea typeface="대명체 보통" panose="020B0600000101010101" pitchFamily="50" charset="-127"/>
                           <a:cs typeface="+mn-cs"/>
                         </a:rPr>
-                        <a:t>40%</a:t>
+                        <a:t>42%</a:t>
                       </a:r>
                     </a:p>
                   </a:txBody>
@@ -15533,7 +15533,7 @@
                           <a:ea typeface="대명체 보통" panose="020B0600000101010101" pitchFamily="50" charset="-127"/>
                           <a:cs typeface="+mn-cs"/>
                         </a:rPr>
-                        <a:t>5,681</a:t>
+                        <a:t>5,859</a:t>
                       </a:r>
                     </a:p>
                   </a:txBody>
@@ -15643,7 +15643,7 @@
                           <a:ea typeface="대명체 보통" panose="020B0600000101010101" pitchFamily="50" charset="-127"/>
                           <a:cs typeface="+mn-cs"/>
                         </a:rPr>
-                        <a:t>5,744</a:t>
+                        <a:t>7,976</a:t>
                       </a:r>
                     </a:p>
                   </a:txBody>
@@ -15753,7 +15753,7 @@
                           <a:ea typeface="대명체 보통" panose="020B0600000101010101" pitchFamily="50" charset="-127"/>
                           <a:cs typeface="+mn-cs"/>
                         </a:rPr>
-                        <a:t>63</a:t>
+                        <a:t>2,118</a:t>
                       </a:r>
                       <a:endParaRPr lang="en-US" altLang="ko-KR" sz="700" b="0" i="0" u="none" strike="noStrike" kern="1200" dirty="0">
                         <a:solidFill>
@@ -15821,7 +15821,7 @@
                           <a:ea typeface="대명체 보통" panose="020B0600000101010101" pitchFamily="50" charset="-127"/>
                           <a:cs typeface="+mn-cs"/>
                         </a:rPr>
-                        <a:t>101%</a:t>
+                        <a:t>136%</a:t>
                       </a:r>
                     </a:p>
                   </a:txBody>
@@ -15880,7 +15880,7 @@
                           <a:ea typeface="대명체 보통" panose="020B0600000101010101" pitchFamily="50" charset="-127"/>
                           <a:cs typeface="+mn-cs"/>
                         </a:rPr>
-                        <a:t>4,379</a:t>
+                        <a:t>2,980</a:t>
                       </a:r>
                     </a:p>
                   </a:txBody>
@@ -15990,7 +15990,7 @@
                           <a:ea typeface="대명체 보통" panose="020B0600000101010101" pitchFamily="50" charset="-127"/>
                           <a:cs typeface="+mn-cs"/>
                         </a:rPr>
-                        <a:t>1,364</a:t>
+                        <a:t>4,997</a:t>
                       </a:r>
                     </a:p>
                   </a:txBody>
@@ -16049,7 +16049,7 @@
                           <a:ea typeface="대명체 보통" panose="020B0600000101010101" pitchFamily="50" charset="-127"/>
                           <a:cs typeface="+mn-cs"/>
                         </a:rPr>
-                        <a:t>31%</a:t>
+                        <a:t>168%</a:t>
                       </a:r>
                     </a:p>
                   </a:txBody>
@@ -16160,7 +16160,7 @@
                           <a:ea typeface="대명체 보통" panose="020B0600000101010101" pitchFamily="50" charset="-127"/>
                           <a:cs typeface="+mn-cs"/>
                         </a:rPr>
-                        <a:t>54,784</a:t>
+                        <a:t>60,643</a:t>
                       </a:r>
                     </a:p>
                   </a:txBody>
@@ -16266,7 +16266,7 @@
                           <a:ea typeface="대명체 보통" panose="020B0600000101010101" pitchFamily="50" charset="-127"/>
                           <a:cs typeface="+mn-cs"/>
                         </a:rPr>
-                        <a:t>60,587</a:t>
+                        <a:t>69,132</a:t>
                       </a:r>
                     </a:p>
                   </a:txBody>
@@ -16376,7 +16376,7 @@
                           <a:ea typeface="대명체 보통" panose="020B0600000101010101" pitchFamily="50" charset="-127"/>
                           <a:cs typeface="+mn-cs"/>
                         </a:rPr>
-                        <a:t>5,803</a:t>
+                        <a:t>8,490</a:t>
                       </a:r>
                     </a:p>
                   </a:txBody>
@@ -16435,7 +16435,7 @@
                           <a:ea typeface="대명체 보통" panose="020B0600000101010101" pitchFamily="50" charset="-127"/>
                           <a:cs typeface="+mn-cs"/>
                         </a:rPr>
-                        <a:t>111%</a:t>
+                        <a:t>114%</a:t>
                       </a:r>
                     </a:p>
                   </a:txBody>
@@ -16494,7 +16494,7 @@
                           <a:ea typeface="대명체 보통" panose="020B0600000101010101" pitchFamily="50" charset="-127"/>
                           <a:cs typeface="+mn-cs"/>
                         </a:rPr>
-                        <a:t>44,935</a:t>
+                        <a:t>47,920</a:t>
                       </a:r>
                     </a:p>
                   </a:txBody>
@@ -16604,7 +16604,7 @@
                           <a:ea typeface="대명체 보통" panose="020B0600000101010101" pitchFamily="50" charset="-127"/>
                           <a:cs typeface="+mn-cs"/>
                         </a:rPr>
-                        <a:t>15,652</a:t>
+                        <a:t>21,212</a:t>
                       </a:r>
                     </a:p>
                   </a:txBody>
@@ -16663,7 +16663,7 @@
                           <a:ea typeface="대명체 보통" panose="020B0600000101010101" pitchFamily="50" charset="-127"/>
                           <a:cs typeface="+mn-cs"/>
                         </a:rPr>
-                        <a:t>35%</a:t>
+                        <a:t>44%</a:t>
                       </a:r>
                     </a:p>
                   </a:txBody>
@@ -16872,7 +16872,7 @@
                           <a:ea typeface="대명체 보통" panose="020B0600000101010101" pitchFamily="50" charset="-127"/>
                           <a:cs typeface="+mn-cs"/>
                         </a:rPr>
-                        <a:t>403</a:t>
+                        <a:t>520</a:t>
                       </a:r>
                       <a:endParaRPr lang="en-US" altLang="ko-KR" sz="700" b="0" i="0" u="none" strike="noStrike" kern="1200" dirty="0">
                         <a:solidFill>
@@ -16999,7 +16999,7 @@
                           <a:ea typeface="대명체 보통" panose="020B0600000101010101" pitchFamily="50" charset="-127"/>
                           <a:cs typeface="+mn-cs"/>
                         </a:rPr>
-                        <a:t>552</a:t>
+                        <a:t>946</a:t>
                       </a:r>
                       <a:endParaRPr lang="en-US" altLang="ko-KR" sz="700" b="0" i="0" u="none" strike="noStrike" kern="1200" dirty="0">
                         <a:solidFill>
@@ -17126,7 +17126,7 @@
                           <a:ea typeface="대명체 보통" panose="020B0600000101010101" pitchFamily="50" charset="-127"/>
                           <a:cs typeface="+mn-cs"/>
                         </a:rPr>
-                        <a:t>149</a:t>
+                        <a:t>426</a:t>
                       </a:r>
                       <a:endParaRPr lang="en-US" altLang="ko-KR" sz="700" b="0" i="0" u="none" strike="noStrike" kern="1200" dirty="0">
                         <a:solidFill>
@@ -17198,7 +17198,7 @@
                           <a:ea typeface="대명체 보통" panose="020B0600000101010101" pitchFamily="50" charset="-127"/>
                           <a:cs typeface="+mn-cs"/>
                         </a:rPr>
-                        <a:t>137%</a:t>
+                        <a:t>182%</a:t>
                       </a:r>
                     </a:p>
                   </a:txBody>
@@ -17261,7 +17261,7 @@
                           <a:ea typeface="대명체 보통" panose="020B0600000101010101" pitchFamily="50" charset="-127"/>
                           <a:cs typeface="+mn-cs"/>
                         </a:rPr>
-                        <a:t>366</a:t>
+                        <a:t>426</a:t>
                       </a:r>
                       <a:endParaRPr lang="en-US" altLang="ko-KR" sz="700" b="0" i="0" u="none" strike="noStrike" kern="1200" dirty="0">
                         <a:solidFill>
@@ -17388,7 +17388,7 @@
                           <a:ea typeface="대명체 보통" panose="020B0600000101010101" pitchFamily="50" charset="-127"/>
                           <a:cs typeface="+mn-cs"/>
                         </a:rPr>
-                        <a:t>186</a:t>
+                        <a:t>520</a:t>
                       </a:r>
                     </a:p>
                   </a:txBody>
@@ -17451,7 +17451,7 @@
                           <a:ea typeface="대명체 보통" panose="020B0600000101010101" pitchFamily="50" charset="-127"/>
                           <a:cs typeface="+mn-cs"/>
                         </a:rPr>
-                        <a:t>51%</a:t>
+                        <a:t>122%</a:t>
                       </a:r>
                     </a:p>
                   </a:txBody>
@@ -17566,7 +17566,7 @@
                           <a:ea typeface="대명체 보통" panose="020B0600000101010101" pitchFamily="50" charset="-127"/>
                           <a:cs typeface="+mn-cs"/>
                         </a:rPr>
-                        <a:t>3,870</a:t>
+                        <a:t>4,389</a:t>
                       </a:r>
                     </a:p>
                   </a:txBody>
@@ -17680,7 +17680,7 @@
                           <a:ea typeface="대명체 보통" panose="020B0600000101010101" pitchFamily="50" charset="-127"/>
                           <a:cs typeface="+mn-cs"/>
                         </a:rPr>
-                        <a:t>5,736</a:t>
+                        <a:t>6,727</a:t>
                       </a:r>
                     </a:p>
                   </a:txBody>
@@ -17798,7 +17798,7 @@
                           <a:ea typeface="대명체 보통" panose="020B0600000101010101" pitchFamily="50" charset="-127"/>
                           <a:cs typeface="+mn-cs"/>
                         </a:rPr>
-                        <a:t>1,866</a:t>
+                        <a:t>2,338</a:t>
                       </a:r>
                       <a:endParaRPr lang="en-US" altLang="ko-KR" sz="700" b="0" i="0" u="none" strike="noStrike" kern="1200" dirty="0">
                         <a:solidFill>
@@ -17870,7 +17870,7 @@
                           <a:ea typeface="대명체 보통" panose="020B0600000101010101" pitchFamily="50" charset="-127"/>
                           <a:cs typeface="+mn-cs"/>
                         </a:rPr>
-                        <a:t>148%</a:t>
+                        <a:t>153%</a:t>
                       </a:r>
                     </a:p>
                   </a:txBody>
@@ -17933,7 +17933,7 @@
                           <a:ea typeface="대명체 보통" panose="020B0600000101010101" pitchFamily="50" charset="-127"/>
                           <a:cs typeface="+mn-cs"/>
                         </a:rPr>
-                        <a:t>3,593</a:t>
+                        <a:t>4,019</a:t>
                       </a:r>
                     </a:p>
                   </a:txBody>
@@ -18051,7 +18051,7 @@
                           <a:ea typeface="대명체 보통" panose="020B0600000101010101" pitchFamily="50" charset="-127"/>
                           <a:cs typeface="+mn-cs"/>
                         </a:rPr>
-                        <a:t>2,143</a:t>
+                        <a:t>2,708</a:t>
                       </a:r>
                     </a:p>
                   </a:txBody>
@@ -18114,7 +18114,7 @@
                           <a:ea typeface="대명체 보통" panose="020B0600000101010101" pitchFamily="50" charset="-127"/>
                           <a:cs typeface="+mn-cs"/>
                         </a:rPr>
-                        <a:t>60%</a:t>
+                        <a:t>67%</a:t>
                       </a:r>
                     </a:p>
                   </a:txBody>

--- a/docs/data/세일즈마케팅_예상매출현황.pptx
+++ b/docs/data/세일즈마케팅_예상매출현황.pptx
@@ -12756,7 +12756,7 @@
                           <a:ea typeface="대명체 보통" panose="020B0600000101010101" pitchFamily="50" charset="-127"/>
                           <a:cs typeface="+mn-cs"/>
                         </a:rPr>
-                        <a:t>17,588</a:t>
+                        <a:t>17,446</a:t>
                       </a:r>
                     </a:p>
                   </a:txBody>
@@ -12882,7 +12882,7 @@
                           <a:ea typeface="대명체 보통" panose="020B0600000101010101" pitchFamily="50" charset="-127"/>
                           <a:cs typeface="+mn-cs"/>
                         </a:rPr>
-                        <a:t>1,599</a:t>
+                        <a:t>1,458</a:t>
                       </a:r>
                     </a:p>
                   </a:txBody>
@@ -12949,7 +12949,7 @@
                           <a:ea typeface="대명체 보통" panose="020B0600000101010101" pitchFamily="50" charset="-127"/>
                           <a:cs typeface="+mn-cs"/>
                         </a:rPr>
-                        <a:t>110%</a:t>
+                        <a:t>109%</a:t>
                       </a:r>
                     </a:p>
                   </a:txBody>
@@ -13016,7 +13016,7 @@
                           <a:ea typeface="대명체 보통" panose="020B0600000101010101" pitchFamily="50" charset="-127"/>
                           <a:cs typeface="+mn-cs"/>
                         </a:rPr>
-                        <a:t>9,009</a:t>
+                        <a:t>9,210</a:t>
                       </a:r>
                     </a:p>
                   </a:txBody>
@@ -13142,7 +13142,7 @@
                           <a:ea typeface="대명체 보통" panose="020B0600000101010101" pitchFamily="50" charset="-127"/>
                           <a:cs typeface="+mn-cs"/>
                         </a:rPr>
-                        <a:t>8,579</a:t>
+                        <a:t>8,236</a:t>
                       </a:r>
                     </a:p>
                   </a:txBody>
@@ -13209,7 +13209,7 @@
                           <a:ea typeface="대명체 보통" panose="020B0600000101010101" pitchFamily="50" charset="-127"/>
                           <a:cs typeface="+mn-cs"/>
                         </a:rPr>
-                        <a:t>95%</a:t>
+                        <a:t>89%</a:t>
                       </a:r>
                     </a:p>
                   </a:txBody>
@@ -13450,7 +13450,7 @@
                           <a:ea typeface="대명체 보통" panose="020B0600000101010101" pitchFamily="50" charset="-127"/>
                           <a:cs typeface="+mn-cs"/>
                         </a:rPr>
-                        <a:t>176,146</a:t>
+                        <a:t>176,004</a:t>
                       </a:r>
                     </a:p>
                   </a:txBody>
@@ -13576,7 +13576,7 @@
                           <a:ea typeface="대명체 보통" panose="020B0600000101010101" pitchFamily="50" charset="-127"/>
                           <a:cs typeface="+mn-cs"/>
                         </a:rPr>
-                        <a:t>21,130</a:t>
+                        <a:t>20,988</a:t>
                       </a:r>
                     </a:p>
                   </a:txBody>
@@ -13710,7 +13710,7 @@
                           <a:ea typeface="대명체 보통" panose="020B0600000101010101" pitchFamily="50" charset="-127"/>
                           <a:cs typeface="+mn-cs"/>
                         </a:rPr>
-                        <a:t>122,406</a:t>
+                        <a:t>122,608</a:t>
                       </a:r>
                     </a:p>
                   </a:txBody>
@@ -13836,7 +13836,7 @@
                           <a:ea typeface="대명체 보통" panose="020B0600000101010101" pitchFamily="50" charset="-127"/>
                           <a:cs typeface="+mn-cs"/>
                         </a:rPr>
-                        <a:t>53,740</a:t>
+                        <a:t>53,397</a:t>
                       </a:r>
                     </a:p>
                   </a:txBody>
@@ -14237,7 +14237,7 @@
                           <a:ea typeface="대명체 보통" panose="020B0600000101010101" pitchFamily="50" charset="-127"/>
                           <a:cs typeface="+mn-cs"/>
                         </a:rPr>
-                        <a:t>8,666</a:t>
+                        <a:t>8,642</a:t>
                       </a:r>
                     </a:p>
                   </a:txBody>
@@ -14355,7 +14355,7 @@
                           <a:ea typeface="대명체 보통" panose="020B0600000101010101" pitchFamily="50" charset="-127"/>
                           <a:cs typeface="+mn-cs"/>
                         </a:rPr>
-                        <a:t>-945</a:t>
+                        <a:t>-968</a:t>
                       </a:r>
                       <a:endParaRPr lang="en-US" altLang="ko-KR" sz="700" b="0" i="0" u="none" strike="noStrike" kern="1200" dirty="0">
                         <a:solidFill>
@@ -14490,7 +14490,7 @@
                           <a:ea typeface="대명체 보통" panose="020B0600000101010101" pitchFamily="50" charset="-127"/>
                           <a:cs typeface="+mn-cs"/>
                         </a:rPr>
-                        <a:t>5,604</a:t>
+                        <a:t>5,734</a:t>
                       </a:r>
                     </a:p>
                   </a:txBody>
@@ -14608,7 +14608,7 @@
                           <a:ea typeface="대명체 보통" panose="020B0600000101010101" pitchFamily="50" charset="-127"/>
                           <a:cs typeface="+mn-cs"/>
                         </a:rPr>
-                        <a:t>3,061</a:t>
+                        <a:t>2,907</a:t>
                       </a:r>
                     </a:p>
                   </a:txBody>
@@ -14671,7 +14671,7 @@
                           <a:ea typeface="대명체 보통" panose="020B0600000101010101" pitchFamily="50" charset="-127"/>
                           <a:cs typeface="+mn-cs"/>
                         </a:rPr>
-                        <a:t>55%</a:t>
+                        <a:t>51%</a:t>
                       </a:r>
                     </a:p>
                   </a:txBody>
@@ -14900,7 +14900,7 @@
                           <a:ea typeface="대명체 보통" panose="020B0600000101010101" pitchFamily="50" charset="-127"/>
                           <a:cs typeface="+mn-cs"/>
                         </a:rPr>
-                        <a:t>100,286</a:t>
+                        <a:t>100,263</a:t>
                       </a:r>
                     </a:p>
                   </a:txBody>
@@ -15018,7 +15018,7 @@
                           <a:ea typeface="대명체 보통" panose="020B0600000101010101" pitchFamily="50" charset="-127"/>
                           <a:cs typeface="+mn-cs"/>
                         </a:rPr>
-                        <a:t>10,302</a:t>
+                        <a:t>10,279</a:t>
                       </a:r>
                     </a:p>
                   </a:txBody>
@@ -15144,7 +15144,7 @@
                           <a:ea typeface="대명체 보통" panose="020B0600000101010101" pitchFamily="50" charset="-127"/>
                           <a:cs typeface="+mn-cs"/>
                         </a:rPr>
-                        <a:t>70,467</a:t>
+                        <a:t>70,598</a:t>
                       </a:r>
                     </a:p>
                   </a:txBody>
@@ -15262,7 +15262,7 @@
                           <a:ea typeface="대명체 보통" panose="020B0600000101010101" pitchFamily="50" charset="-127"/>
                           <a:cs typeface="+mn-cs"/>
                         </a:rPr>
-                        <a:t>29,819</a:t>
+                        <a:t>29,665</a:t>
                       </a:r>
                     </a:p>
                   </a:txBody>
@@ -15643,7 +15643,7 @@
                           <a:ea typeface="대명체 보통" panose="020B0600000101010101" pitchFamily="50" charset="-127"/>
                           <a:cs typeface="+mn-cs"/>
                         </a:rPr>
-                        <a:t>7,976</a:t>
+                        <a:t>7,875</a:t>
                       </a:r>
                     </a:p>
                   </a:txBody>
@@ -15753,7 +15753,7 @@
                           <a:ea typeface="대명체 보통" panose="020B0600000101010101" pitchFamily="50" charset="-127"/>
                           <a:cs typeface="+mn-cs"/>
                         </a:rPr>
-                        <a:t>2,118</a:t>
+                        <a:t>2,016</a:t>
                       </a:r>
                       <a:endParaRPr lang="en-US" altLang="ko-KR" sz="700" b="0" i="0" u="none" strike="noStrike" kern="1200" dirty="0">
                         <a:solidFill>
@@ -15821,7 +15821,7 @@
                           <a:ea typeface="대명체 보통" panose="020B0600000101010101" pitchFamily="50" charset="-127"/>
                           <a:cs typeface="+mn-cs"/>
                         </a:rPr>
-                        <a:t>136%</a:t>
+                        <a:t>134%</a:t>
                       </a:r>
                     </a:p>
                   </a:txBody>
@@ -15880,7 +15880,7 @@
                           <a:ea typeface="대명체 보통" panose="020B0600000101010101" pitchFamily="50" charset="-127"/>
                           <a:cs typeface="+mn-cs"/>
                         </a:rPr>
-                        <a:t>2,980</a:t>
+                        <a:t>3,039</a:t>
                       </a:r>
                     </a:p>
                   </a:txBody>
@@ -15990,7 +15990,7 @@
                           <a:ea typeface="대명체 보통" panose="020B0600000101010101" pitchFamily="50" charset="-127"/>
                           <a:cs typeface="+mn-cs"/>
                         </a:rPr>
-                        <a:t>4,997</a:t>
+                        <a:t>4,836</a:t>
                       </a:r>
                     </a:p>
                   </a:txBody>
@@ -16049,7 +16049,7 @@
                           <a:ea typeface="대명체 보통" panose="020B0600000101010101" pitchFamily="50" charset="-127"/>
                           <a:cs typeface="+mn-cs"/>
                         </a:rPr>
-                        <a:t>168%</a:t>
+                        <a:t>159%</a:t>
                       </a:r>
                     </a:p>
                   </a:txBody>
@@ -16266,7 +16266,7 @@
                           <a:ea typeface="대명체 보통" panose="020B0600000101010101" pitchFamily="50" charset="-127"/>
                           <a:cs typeface="+mn-cs"/>
                         </a:rPr>
-                        <a:t>69,132</a:t>
+                        <a:t>69,031</a:t>
                       </a:r>
                     </a:p>
                   </a:txBody>
@@ -16376,7 +16376,7 @@
                           <a:ea typeface="대명체 보통" panose="020B0600000101010101" pitchFamily="50" charset="-127"/>
                           <a:cs typeface="+mn-cs"/>
                         </a:rPr>
-                        <a:t>8,490</a:t>
+                        <a:t>8,388</a:t>
                       </a:r>
                     </a:p>
                   </a:txBody>
@@ -16494,7 +16494,7 @@
                           <a:ea typeface="대명체 보통" panose="020B0600000101010101" pitchFamily="50" charset="-127"/>
                           <a:cs typeface="+mn-cs"/>
                         </a:rPr>
-                        <a:t>47,920</a:t>
+                        <a:t>47,980</a:t>
                       </a:r>
                     </a:p>
                   </a:txBody>
@@ -16604,7 +16604,7 @@
                           <a:ea typeface="대명체 보통" panose="020B0600000101010101" pitchFamily="50" charset="-127"/>
                           <a:cs typeface="+mn-cs"/>
                         </a:rPr>
-                        <a:t>21,212</a:t>
+                        <a:t>21,051</a:t>
                       </a:r>
                     </a:p>
                   </a:txBody>
@@ -16999,7 +16999,7 @@
                           <a:ea typeface="대명체 보통" panose="020B0600000101010101" pitchFamily="50" charset="-127"/>
                           <a:cs typeface="+mn-cs"/>
                         </a:rPr>
-                        <a:t>946</a:t>
+                        <a:t>929</a:t>
                       </a:r>
                       <a:endParaRPr lang="en-US" altLang="ko-KR" sz="700" b="0" i="0" u="none" strike="noStrike" kern="1200" dirty="0">
                         <a:solidFill>
@@ -17126,7 +17126,7 @@
                           <a:ea typeface="대명체 보통" panose="020B0600000101010101" pitchFamily="50" charset="-127"/>
                           <a:cs typeface="+mn-cs"/>
                         </a:rPr>
-                        <a:t>426</a:t>
+                        <a:t>410</a:t>
                       </a:r>
                       <a:endParaRPr lang="en-US" altLang="ko-KR" sz="700" b="0" i="0" u="none" strike="noStrike" kern="1200" dirty="0">
                         <a:solidFill>
@@ -17198,7 +17198,7 @@
                           <a:ea typeface="대명체 보통" panose="020B0600000101010101" pitchFamily="50" charset="-127"/>
                           <a:cs typeface="+mn-cs"/>
                         </a:rPr>
-                        <a:t>182%</a:t>
+                        <a:t>179%</a:t>
                       </a:r>
                     </a:p>
                   </a:txBody>
@@ -17261,7 +17261,7 @@
                           <a:ea typeface="대명체 보통" panose="020B0600000101010101" pitchFamily="50" charset="-127"/>
                           <a:cs typeface="+mn-cs"/>
                         </a:rPr>
-                        <a:t>426</a:t>
+                        <a:t>437</a:t>
                       </a:r>
                       <a:endParaRPr lang="en-US" altLang="ko-KR" sz="700" b="0" i="0" u="none" strike="noStrike" kern="1200" dirty="0">
                         <a:solidFill>
@@ -17388,7 +17388,7 @@
                           <a:ea typeface="대명체 보통" panose="020B0600000101010101" pitchFamily="50" charset="-127"/>
                           <a:cs typeface="+mn-cs"/>
                         </a:rPr>
-                        <a:t>520</a:t>
+                        <a:t>492</a:t>
                       </a:r>
                     </a:p>
                   </a:txBody>
@@ -17451,7 +17451,7 @@
                           <a:ea typeface="대명체 보통" panose="020B0600000101010101" pitchFamily="50" charset="-127"/>
                           <a:cs typeface="+mn-cs"/>
                         </a:rPr>
-                        <a:t>122%</a:t>
+                        <a:t>113%</a:t>
                       </a:r>
                     </a:p>
                   </a:txBody>
@@ -17680,7 +17680,7 @@
                           <a:ea typeface="대명체 보통" panose="020B0600000101010101" pitchFamily="50" charset="-127"/>
                           <a:cs typeface="+mn-cs"/>
                         </a:rPr>
-                        <a:t>6,727</a:t>
+                        <a:t>6,710</a:t>
                       </a:r>
                     </a:p>
                   </a:txBody>
@@ -17798,7 +17798,7 @@
                           <a:ea typeface="대명체 보통" panose="020B0600000101010101" pitchFamily="50" charset="-127"/>
                           <a:cs typeface="+mn-cs"/>
                         </a:rPr>
-                        <a:t>2,338</a:t>
+                        <a:t>2,321</a:t>
                       </a:r>
                       <a:endParaRPr lang="en-US" altLang="ko-KR" sz="700" b="0" i="0" u="none" strike="noStrike" kern="1200" dirty="0">
                         <a:solidFill>
@@ -17933,7 +17933,7 @@
                           <a:ea typeface="대명체 보통" panose="020B0600000101010101" pitchFamily="50" charset="-127"/>
                           <a:cs typeface="+mn-cs"/>
                         </a:rPr>
-                        <a:t>4,019</a:t>
+                        <a:t>4,030</a:t>
                       </a:r>
                     </a:p>
                   </a:txBody>
@@ -18051,7 +18051,7 @@
                           <a:ea typeface="대명체 보통" panose="020B0600000101010101" pitchFamily="50" charset="-127"/>
                           <a:cs typeface="+mn-cs"/>
                         </a:rPr>
-                        <a:t>2,708</a:t>
+                        <a:t>2,680</a:t>
                       </a:r>
                     </a:p>
                   </a:txBody>

--- a/docs/data/세일즈마케팅_예상매출현황.pptx
+++ b/docs/data/세일즈마케팅_예상매출현황.pptx
@@ -13450,7 +13450,7 @@
                           <a:ea typeface="대명체 보통" panose="020B0600000101010101" pitchFamily="50" charset="-127"/>
                           <a:cs typeface="+mn-cs"/>
                         </a:rPr>
-                        <a:t>176,004</a:t>
+                        <a:t>288,026</a:t>
                       </a:r>
                     </a:p>
                   </a:txBody>
@@ -13576,7 +13576,7 @@
                           <a:ea typeface="대명체 보통" panose="020B0600000101010101" pitchFamily="50" charset="-127"/>
                           <a:cs typeface="+mn-cs"/>
                         </a:rPr>
-                        <a:t>20,988</a:t>
+                        <a:t>133,010</a:t>
                       </a:r>
                     </a:p>
                   </a:txBody>
@@ -13643,7 +13643,7 @@
                           <a:ea typeface="대명체 보통" panose="020B0600000101010101" pitchFamily="50" charset="-127"/>
                           <a:cs typeface="+mn-cs"/>
                         </a:rPr>
-                        <a:t>114%</a:t>
+                        <a:t>186%</a:t>
                       </a:r>
                     </a:p>
                   </a:txBody>
@@ -13836,7 +13836,7 @@
                           <a:ea typeface="대명체 보통" panose="020B0600000101010101" pitchFamily="50" charset="-127"/>
                           <a:cs typeface="+mn-cs"/>
                         </a:rPr>
-                        <a:t>53,397</a:t>
+                        <a:t>165,419</a:t>
                       </a:r>
                     </a:p>
                   </a:txBody>
@@ -13903,7 +13903,7 @@
                           <a:ea typeface="대명체 보통" panose="020B0600000101010101" pitchFamily="50" charset="-127"/>
                           <a:cs typeface="+mn-cs"/>
                         </a:rPr>
-                        <a:t>44%</a:t>
+                        <a:t>135%</a:t>
                       </a:r>
                     </a:p>
                   </a:txBody>
@@ -14900,7 +14900,7 @@
                           <a:ea typeface="대명체 보통" panose="020B0600000101010101" pitchFamily="50" charset="-127"/>
                           <a:cs typeface="+mn-cs"/>
                         </a:rPr>
-                        <a:t>100,263</a:t>
+                        <a:t>168,106</a:t>
                       </a:r>
                     </a:p>
                   </a:txBody>
@@ -15018,7 +15018,7 @@
                           <a:ea typeface="대명체 보통" panose="020B0600000101010101" pitchFamily="50" charset="-127"/>
                           <a:cs typeface="+mn-cs"/>
                         </a:rPr>
-                        <a:t>10,279</a:t>
+                        <a:t>78,122</a:t>
                       </a:r>
                     </a:p>
                   </a:txBody>
@@ -15081,7 +15081,7 @@
                           <a:ea typeface="대명체 보통" panose="020B0600000101010101" pitchFamily="50" charset="-127"/>
                           <a:cs typeface="+mn-cs"/>
                         </a:rPr>
-                        <a:t>111%</a:t>
+                        <a:t>187%</a:t>
                       </a:r>
                     </a:p>
                   </a:txBody>
@@ -15262,7 +15262,7 @@
                           <a:ea typeface="대명체 보통" panose="020B0600000101010101" pitchFamily="50" charset="-127"/>
                           <a:cs typeface="+mn-cs"/>
                         </a:rPr>
-                        <a:t>29,665</a:t>
+                        <a:t>97,508</a:t>
                       </a:r>
                     </a:p>
                   </a:txBody>
@@ -15325,7 +15325,7 @@
                           <a:ea typeface="대명체 보통" panose="020B0600000101010101" pitchFamily="50" charset="-127"/>
                           <a:cs typeface="+mn-cs"/>
                         </a:rPr>
-                        <a:t>42%</a:t>
+                        <a:t>138%</a:t>
                       </a:r>
                     </a:p>
                   </a:txBody>
@@ -16266,7 +16266,7 @@
                           <a:ea typeface="대명체 보통" panose="020B0600000101010101" pitchFamily="50" charset="-127"/>
                           <a:cs typeface="+mn-cs"/>
                         </a:rPr>
-                        <a:t>69,031</a:t>
+                        <a:t>113,210</a:t>
                       </a:r>
                     </a:p>
                   </a:txBody>
@@ -16376,7 +16376,7 @@
                           <a:ea typeface="대명체 보통" panose="020B0600000101010101" pitchFamily="50" charset="-127"/>
                           <a:cs typeface="+mn-cs"/>
                         </a:rPr>
-                        <a:t>8,388</a:t>
+                        <a:t>52,567</a:t>
                       </a:r>
                     </a:p>
                   </a:txBody>
@@ -16435,7 +16435,7 @@
                           <a:ea typeface="대명체 보통" panose="020B0600000101010101" pitchFamily="50" charset="-127"/>
                           <a:cs typeface="+mn-cs"/>
                         </a:rPr>
-                        <a:t>114%</a:t>
+                        <a:t>187%</a:t>
                       </a:r>
                     </a:p>
                   </a:txBody>
@@ -16604,7 +16604,7 @@
                           <a:ea typeface="대명체 보통" panose="020B0600000101010101" pitchFamily="50" charset="-127"/>
                           <a:cs typeface="+mn-cs"/>
                         </a:rPr>
-                        <a:t>21,051</a:t>
+                        <a:t>65,230</a:t>
                       </a:r>
                     </a:p>
                   </a:txBody>
@@ -16663,7 +16663,7 @@
                           <a:ea typeface="대명체 보통" panose="020B0600000101010101" pitchFamily="50" charset="-127"/>
                           <a:cs typeface="+mn-cs"/>
                         </a:rPr>
-                        <a:t>44%</a:t>
+                        <a:t>136%</a:t>
                       </a:r>
                     </a:p>
                   </a:txBody>

--- a/docs/data/세일즈마케팅_예상매출현황.pptx
+++ b/docs/data/세일즈마케팅_예상매출현황.pptx
@@ -13450,7 +13450,7 @@
                           <a:ea typeface="대명체 보통" panose="020B0600000101010101" pitchFamily="50" charset="-127"/>
                           <a:cs typeface="+mn-cs"/>
                         </a:rPr>
-                        <a:t>288,026</a:t>
+                        <a:t>176,245</a:t>
                       </a:r>
                     </a:p>
                   </a:txBody>
@@ -13576,7 +13576,7 @@
                           <a:ea typeface="대명체 보통" panose="020B0600000101010101" pitchFamily="50" charset="-127"/>
                           <a:cs typeface="+mn-cs"/>
                         </a:rPr>
-                        <a:t>133,010</a:t>
+                        <a:t>21,229</a:t>
                       </a:r>
                     </a:p>
                   </a:txBody>
@@ -13643,7 +13643,7 @@
                           <a:ea typeface="대명체 보통" panose="020B0600000101010101" pitchFamily="50" charset="-127"/>
                           <a:cs typeface="+mn-cs"/>
                         </a:rPr>
-                        <a:t>186%</a:t>
+                        <a:t>114%</a:t>
                       </a:r>
                     </a:p>
                   </a:txBody>
@@ -13836,7 +13836,7 @@
                           <a:ea typeface="대명체 보통" panose="020B0600000101010101" pitchFamily="50" charset="-127"/>
                           <a:cs typeface="+mn-cs"/>
                         </a:rPr>
-                        <a:t>165,419</a:t>
+                        <a:t>53,637</a:t>
                       </a:r>
                     </a:p>
                   </a:txBody>
@@ -13903,7 +13903,7 @@
                           <a:ea typeface="대명체 보통" panose="020B0600000101010101" pitchFamily="50" charset="-127"/>
                           <a:cs typeface="+mn-cs"/>
                         </a:rPr>
-                        <a:t>135%</a:t>
+                        <a:t>44%</a:t>
                       </a:r>
                     </a:p>
                   </a:txBody>
@@ -14900,7 +14900,7 @@
                           <a:ea typeface="대명체 보통" panose="020B0600000101010101" pitchFamily="50" charset="-127"/>
                           <a:cs typeface="+mn-cs"/>
                         </a:rPr>
-                        <a:t>168,106</a:t>
+                        <a:t>100,398</a:t>
                       </a:r>
                     </a:p>
                   </a:txBody>
@@ -15018,7 +15018,7 @@
                           <a:ea typeface="대명체 보통" panose="020B0600000101010101" pitchFamily="50" charset="-127"/>
                           <a:cs typeface="+mn-cs"/>
                         </a:rPr>
-                        <a:t>78,122</a:t>
+                        <a:t>10,414</a:t>
                       </a:r>
                     </a:p>
                   </a:txBody>
@@ -15081,7 +15081,7 @@
                           <a:ea typeface="대명체 보통" panose="020B0600000101010101" pitchFamily="50" charset="-127"/>
                           <a:cs typeface="+mn-cs"/>
                         </a:rPr>
-                        <a:t>187%</a:t>
+                        <a:t>112%</a:t>
                       </a:r>
                     </a:p>
                   </a:txBody>
@@ -15262,7 +15262,7 @@
                           <a:ea typeface="대명체 보통" panose="020B0600000101010101" pitchFamily="50" charset="-127"/>
                           <a:cs typeface="+mn-cs"/>
                         </a:rPr>
-                        <a:t>97,508</a:t>
+                        <a:t>29,800</a:t>
                       </a:r>
                     </a:p>
                   </a:txBody>
@@ -15325,7 +15325,7 @@
                           <a:ea typeface="대명체 보통" panose="020B0600000101010101" pitchFamily="50" charset="-127"/>
                           <a:cs typeface="+mn-cs"/>
                         </a:rPr>
-                        <a:t>138%</a:t>
+                        <a:t>42%</a:t>
                       </a:r>
                     </a:p>
                   </a:txBody>
@@ -16266,7 +16266,7 @@
                           <a:ea typeface="대명체 보통" panose="020B0600000101010101" pitchFamily="50" charset="-127"/>
                           <a:cs typeface="+mn-cs"/>
                         </a:rPr>
-                        <a:t>113,210</a:t>
+                        <a:t>69,136</a:t>
                       </a:r>
                     </a:p>
                   </a:txBody>
@@ -16376,7 +16376,7 @@
                           <a:ea typeface="대명체 보통" panose="020B0600000101010101" pitchFamily="50" charset="-127"/>
                           <a:cs typeface="+mn-cs"/>
                         </a:rPr>
-                        <a:t>52,567</a:t>
+                        <a:t>8,494</a:t>
                       </a:r>
                     </a:p>
                   </a:txBody>
@@ -16435,7 +16435,7 @@
                           <a:ea typeface="대명체 보통" panose="020B0600000101010101" pitchFamily="50" charset="-127"/>
                           <a:cs typeface="+mn-cs"/>
                         </a:rPr>
-                        <a:t>187%</a:t>
+                        <a:t>114%</a:t>
                       </a:r>
                     </a:p>
                   </a:txBody>
@@ -16604,7 +16604,7 @@
                           <a:ea typeface="대명체 보통" panose="020B0600000101010101" pitchFamily="50" charset="-127"/>
                           <a:cs typeface="+mn-cs"/>
                         </a:rPr>
-                        <a:t>65,230</a:t>
+                        <a:t>21,157</a:t>
                       </a:r>
                     </a:p>
                   </a:txBody>
@@ -16663,7 +16663,7 @@
                           <a:ea typeface="대명체 보통" panose="020B0600000101010101" pitchFamily="50" charset="-127"/>
                           <a:cs typeface="+mn-cs"/>
                         </a:rPr>
-                        <a:t>136%</a:t>
+                        <a:t>44%</a:t>
                       </a:r>
                     </a:p>
                   </a:txBody>

--- a/docs/data/세일즈마케팅_예상매출현황.pptx
+++ b/docs/data/세일즈마케팅_예상매출현황.pptx
@@ -12756,7 +12756,7 @@
                           <a:ea typeface="대명체 보통" panose="020B0600000101010101" pitchFamily="50" charset="-127"/>
                           <a:cs typeface="+mn-cs"/>
                         </a:rPr>
-                        <a:t>17,446</a:t>
+                        <a:t>17,242</a:t>
                       </a:r>
                     </a:p>
                   </a:txBody>
@@ -12882,7 +12882,7 @@
                           <a:ea typeface="대명체 보통" panose="020B0600000101010101" pitchFamily="50" charset="-127"/>
                           <a:cs typeface="+mn-cs"/>
                         </a:rPr>
-                        <a:t>1,458</a:t>
+                        <a:t>1,253</a:t>
                       </a:r>
                     </a:p>
                   </a:txBody>
@@ -12949,7 +12949,7 @@
                           <a:ea typeface="대명체 보통" panose="020B0600000101010101" pitchFamily="50" charset="-127"/>
                           <a:cs typeface="+mn-cs"/>
                         </a:rPr>
-                        <a:t>109%</a:t>
+                        <a:t>108%</a:t>
                       </a:r>
                     </a:p>
                   </a:txBody>
@@ -13016,7 +13016,7 @@
                           <a:ea typeface="대명체 보통" panose="020B0600000101010101" pitchFamily="50" charset="-127"/>
                           <a:cs typeface="+mn-cs"/>
                         </a:rPr>
-                        <a:t>9,210</a:t>
+                        <a:t>9,399</a:t>
                       </a:r>
                     </a:p>
                   </a:txBody>
@@ -13142,7 +13142,7 @@
                           <a:ea typeface="대명체 보통" panose="020B0600000101010101" pitchFamily="50" charset="-127"/>
                           <a:cs typeface="+mn-cs"/>
                         </a:rPr>
-                        <a:t>8,236</a:t>
+                        <a:t>7,843</a:t>
                       </a:r>
                     </a:p>
                   </a:txBody>
@@ -13209,7 +13209,7 @@
                           <a:ea typeface="대명체 보통" panose="020B0600000101010101" pitchFamily="50" charset="-127"/>
                           <a:cs typeface="+mn-cs"/>
                         </a:rPr>
-                        <a:t>89%</a:t>
+                        <a:t>83%</a:t>
                       </a:r>
                     </a:p>
                   </a:txBody>
@@ -13450,7 +13450,7 @@
                           <a:ea typeface="대명체 보통" panose="020B0600000101010101" pitchFamily="50" charset="-127"/>
                           <a:cs typeface="+mn-cs"/>
                         </a:rPr>
-                        <a:t>176,245</a:t>
+                        <a:t>176,040</a:t>
                       </a:r>
                     </a:p>
                   </a:txBody>
@@ -13576,7 +13576,7 @@
                           <a:ea typeface="대명체 보통" panose="020B0600000101010101" pitchFamily="50" charset="-127"/>
                           <a:cs typeface="+mn-cs"/>
                         </a:rPr>
-                        <a:t>21,229</a:t>
+                        <a:t>21,024</a:t>
                       </a:r>
                     </a:p>
                   </a:txBody>
@@ -13710,7 +13710,7 @@
                           <a:ea typeface="대명체 보통" panose="020B0600000101010101" pitchFamily="50" charset="-127"/>
                           <a:cs typeface="+mn-cs"/>
                         </a:rPr>
-                        <a:t>122,608</a:t>
+                        <a:t>122,796</a:t>
                       </a:r>
                     </a:p>
                   </a:txBody>
@@ -13836,7 +13836,7 @@
                           <a:ea typeface="대명체 보통" panose="020B0600000101010101" pitchFamily="50" charset="-127"/>
                           <a:cs typeface="+mn-cs"/>
                         </a:rPr>
-                        <a:t>53,637</a:t>
+                        <a:t>53,244</a:t>
                       </a:r>
                     </a:p>
                   </a:txBody>
@@ -13903,7 +13903,7 @@
                           <a:ea typeface="대명체 보통" panose="020B0600000101010101" pitchFamily="50" charset="-127"/>
                           <a:cs typeface="+mn-cs"/>
                         </a:rPr>
-                        <a:t>44%</a:t>
+                        <a:t>43%</a:t>
                       </a:r>
                     </a:p>
                   </a:txBody>
@@ -14237,7 +14237,7 @@
                           <a:ea typeface="대명체 보통" panose="020B0600000101010101" pitchFamily="50" charset="-127"/>
                           <a:cs typeface="+mn-cs"/>
                         </a:rPr>
-                        <a:t>8,642</a:t>
+                        <a:t>8,530</a:t>
                       </a:r>
                     </a:p>
                   </a:txBody>
@@ -14355,7 +14355,7 @@
                           <a:ea typeface="대명체 보통" panose="020B0600000101010101" pitchFamily="50" charset="-127"/>
                           <a:cs typeface="+mn-cs"/>
                         </a:rPr>
-                        <a:t>-968</a:t>
+                        <a:t>-1,080</a:t>
                       </a:r>
                       <a:endParaRPr lang="en-US" altLang="ko-KR" sz="700" b="0" i="0" u="none" strike="noStrike" kern="1200" dirty="0">
                         <a:solidFill>
@@ -14427,7 +14427,7 @@
                           <a:ea typeface="대명체 보통" panose="020B0600000101010101" pitchFamily="50" charset="-127"/>
                           <a:cs typeface="+mn-cs"/>
                         </a:rPr>
-                        <a:t>90%</a:t>
+                        <a:t>89%</a:t>
                       </a:r>
                     </a:p>
                   </a:txBody>
@@ -14490,7 +14490,7 @@
                           <a:ea typeface="대명체 보통" panose="020B0600000101010101" pitchFamily="50" charset="-127"/>
                           <a:cs typeface="+mn-cs"/>
                         </a:rPr>
-                        <a:t>5,734</a:t>
+                        <a:t>5,847</a:t>
                       </a:r>
                     </a:p>
                   </a:txBody>
@@ -14608,7 +14608,7 @@
                           <a:ea typeface="대명체 보통" panose="020B0600000101010101" pitchFamily="50" charset="-127"/>
                           <a:cs typeface="+mn-cs"/>
                         </a:rPr>
-                        <a:t>2,907</a:t>
+                        <a:t>2,683</a:t>
                       </a:r>
                     </a:p>
                   </a:txBody>
@@ -14671,7 +14671,7 @@
                           <a:ea typeface="대명체 보통" panose="020B0600000101010101" pitchFamily="50" charset="-127"/>
                           <a:cs typeface="+mn-cs"/>
                         </a:rPr>
-                        <a:t>51%</a:t>
+                        <a:t>46%</a:t>
                       </a:r>
                     </a:p>
                   </a:txBody>
@@ -14900,7 +14900,7 @@
                           <a:ea typeface="대명체 보통" panose="020B0600000101010101" pitchFamily="50" charset="-127"/>
                           <a:cs typeface="+mn-cs"/>
                         </a:rPr>
-                        <a:t>100,398</a:t>
+                        <a:t>100,286</a:t>
                       </a:r>
                     </a:p>
                   </a:txBody>
@@ -15018,7 +15018,7 @@
                           <a:ea typeface="대명체 보통" panose="020B0600000101010101" pitchFamily="50" charset="-127"/>
                           <a:cs typeface="+mn-cs"/>
                         </a:rPr>
-                        <a:t>10,414</a:t>
+                        <a:t>10,302</a:t>
                       </a:r>
                     </a:p>
                   </a:txBody>
@@ -15081,7 +15081,7 @@
                           <a:ea typeface="대명체 보통" panose="020B0600000101010101" pitchFamily="50" charset="-127"/>
                           <a:cs typeface="+mn-cs"/>
                         </a:rPr>
-                        <a:t>112%</a:t>
+                        <a:t>111%</a:t>
                       </a:r>
                     </a:p>
                   </a:txBody>
@@ -15144,7 +15144,7 @@
                           <a:ea typeface="대명체 보통" panose="020B0600000101010101" pitchFamily="50" charset="-127"/>
                           <a:cs typeface="+mn-cs"/>
                         </a:rPr>
-                        <a:t>70,598</a:t>
+                        <a:t>70,711</a:t>
                       </a:r>
                     </a:p>
                   </a:txBody>
@@ -15262,7 +15262,7 @@
                           <a:ea typeface="대명체 보통" panose="020B0600000101010101" pitchFamily="50" charset="-127"/>
                           <a:cs typeface="+mn-cs"/>
                         </a:rPr>
-                        <a:t>29,800</a:t>
+                        <a:t>29,576</a:t>
                       </a:r>
                     </a:p>
                   </a:txBody>
@@ -15643,7 +15643,7 @@
                           <a:ea typeface="대명체 보통" panose="020B0600000101010101" pitchFamily="50" charset="-127"/>
                           <a:cs typeface="+mn-cs"/>
                         </a:rPr>
-                        <a:t>7,875</a:t>
+                        <a:t>7,807</a:t>
                       </a:r>
                     </a:p>
                   </a:txBody>
@@ -15753,7 +15753,7 @@
                           <a:ea typeface="대명체 보통" panose="020B0600000101010101" pitchFamily="50" charset="-127"/>
                           <a:cs typeface="+mn-cs"/>
                         </a:rPr>
-                        <a:t>2,016</a:t>
+                        <a:t>1,948</a:t>
                       </a:r>
                       <a:endParaRPr lang="en-US" altLang="ko-KR" sz="700" b="0" i="0" u="none" strike="noStrike" kern="1200" dirty="0">
                         <a:solidFill>
@@ -15821,7 +15821,7 @@
                           <a:ea typeface="대명체 보통" panose="020B0600000101010101" pitchFamily="50" charset="-127"/>
                           <a:cs typeface="+mn-cs"/>
                         </a:rPr>
-                        <a:t>134%</a:t>
+                        <a:t>133%</a:t>
                       </a:r>
                     </a:p>
                   </a:txBody>
@@ -15880,7 +15880,7 @@
                           <a:ea typeface="대명체 보통" panose="020B0600000101010101" pitchFamily="50" charset="-127"/>
                           <a:cs typeface="+mn-cs"/>
                         </a:rPr>
-                        <a:t>3,039</a:t>
+                        <a:t>3,114</a:t>
                       </a:r>
                     </a:p>
                   </a:txBody>
@@ -15990,7 +15990,7 @@
                           <a:ea typeface="대명체 보통" panose="020B0600000101010101" pitchFamily="50" charset="-127"/>
                           <a:cs typeface="+mn-cs"/>
                         </a:rPr>
-                        <a:t>4,836</a:t>
+                        <a:t>4,693</a:t>
                       </a:r>
                     </a:p>
                   </a:txBody>
@@ -16049,7 +16049,7 @@
                           <a:ea typeface="대명체 보통" panose="020B0600000101010101" pitchFamily="50" charset="-127"/>
                           <a:cs typeface="+mn-cs"/>
                         </a:rPr>
-                        <a:t>159%</a:t>
+                        <a:t>151%</a:t>
                       </a:r>
                     </a:p>
                   </a:txBody>
@@ -16266,7 +16266,7 @@
                           <a:ea typeface="대명체 보통" panose="020B0600000101010101" pitchFamily="50" charset="-127"/>
                           <a:cs typeface="+mn-cs"/>
                         </a:rPr>
-                        <a:t>69,136</a:t>
+                        <a:t>69,068</a:t>
                       </a:r>
                     </a:p>
                   </a:txBody>
@@ -16376,7 +16376,7 @@
                           <a:ea typeface="대명체 보통" panose="020B0600000101010101" pitchFamily="50" charset="-127"/>
                           <a:cs typeface="+mn-cs"/>
                         </a:rPr>
-                        <a:t>8,494</a:t>
+                        <a:t>8,426</a:t>
                       </a:r>
                     </a:p>
                   </a:txBody>
@@ -16494,7 +16494,7 @@
                           <a:ea typeface="대명체 보통" panose="020B0600000101010101" pitchFamily="50" charset="-127"/>
                           <a:cs typeface="+mn-cs"/>
                         </a:rPr>
-                        <a:t>47,980</a:t>
+                        <a:t>48,055</a:t>
                       </a:r>
                     </a:p>
                   </a:txBody>
@@ -16604,7 +16604,7 @@
                           <a:ea typeface="대명체 보통" panose="020B0600000101010101" pitchFamily="50" charset="-127"/>
                           <a:cs typeface="+mn-cs"/>
                         </a:rPr>
-                        <a:t>21,157</a:t>
+                        <a:t>21,013</a:t>
                       </a:r>
                     </a:p>
                   </a:txBody>
@@ -16999,7 +16999,7 @@
                           <a:ea typeface="대명체 보통" panose="020B0600000101010101" pitchFamily="50" charset="-127"/>
                           <a:cs typeface="+mn-cs"/>
                         </a:rPr>
-                        <a:t>929</a:t>
+                        <a:t>904</a:t>
                       </a:r>
                       <a:endParaRPr lang="en-US" altLang="ko-KR" sz="700" b="0" i="0" u="none" strike="noStrike" kern="1200" dirty="0">
                         <a:solidFill>
@@ -17126,7 +17126,7 @@
                           <a:ea typeface="대명체 보통" panose="020B0600000101010101" pitchFamily="50" charset="-127"/>
                           <a:cs typeface="+mn-cs"/>
                         </a:rPr>
-                        <a:t>410</a:t>
+                        <a:t>385</a:t>
                       </a:r>
                       <a:endParaRPr lang="en-US" altLang="ko-KR" sz="700" b="0" i="0" u="none" strike="noStrike" kern="1200" dirty="0">
                         <a:solidFill>
@@ -17198,7 +17198,7 @@
                           <a:ea typeface="대명체 보통" panose="020B0600000101010101" pitchFamily="50" charset="-127"/>
                           <a:cs typeface="+mn-cs"/>
                         </a:rPr>
-                        <a:t>179%</a:t>
+                        <a:t>174%</a:t>
                       </a:r>
                     </a:p>
                   </a:txBody>
@@ -17388,7 +17388,7 @@
                           <a:ea typeface="대명체 보통" panose="020B0600000101010101" pitchFamily="50" charset="-127"/>
                           <a:cs typeface="+mn-cs"/>
                         </a:rPr>
-                        <a:t>492</a:t>
+                        <a:t>467</a:t>
                       </a:r>
                     </a:p>
                   </a:txBody>
@@ -17451,7 +17451,7 @@
                           <a:ea typeface="대명체 보통" panose="020B0600000101010101" pitchFamily="50" charset="-127"/>
                           <a:cs typeface="+mn-cs"/>
                         </a:rPr>
-                        <a:t>113%</a:t>
+                        <a:t>107%</a:t>
                       </a:r>
                     </a:p>
                   </a:txBody>
@@ -17680,7 +17680,7 @@
                           <a:ea typeface="대명체 보통" panose="020B0600000101010101" pitchFamily="50" charset="-127"/>
                           <a:cs typeface="+mn-cs"/>
                         </a:rPr>
-                        <a:t>6,710</a:t>
+                        <a:t>6,685</a:t>
                       </a:r>
                     </a:p>
                   </a:txBody>
@@ -17798,7 +17798,7 @@
                           <a:ea typeface="대명체 보통" panose="020B0600000101010101" pitchFamily="50" charset="-127"/>
                           <a:cs typeface="+mn-cs"/>
                         </a:rPr>
-                        <a:t>2,321</a:t>
+                        <a:t>2,296</a:t>
                       </a:r>
                       <a:endParaRPr lang="en-US" altLang="ko-KR" sz="700" b="0" i="0" u="none" strike="noStrike" kern="1200" dirty="0">
                         <a:solidFill>
@@ -17870,7 +17870,7 @@
                           <a:ea typeface="대명체 보통" panose="020B0600000101010101" pitchFamily="50" charset="-127"/>
                           <a:cs typeface="+mn-cs"/>
                         </a:rPr>
-                        <a:t>153%</a:t>
+                        <a:t>152%</a:t>
                       </a:r>
                     </a:p>
                   </a:txBody>
@@ -18051,7 +18051,7 @@
                           <a:ea typeface="대명체 보통" panose="020B0600000101010101" pitchFamily="50" charset="-127"/>
                           <a:cs typeface="+mn-cs"/>
                         </a:rPr>
-                        <a:t>2,680</a:t>
+                        <a:t>2,655</a:t>
                       </a:r>
                     </a:p>
                   </a:txBody>
@@ -18114,7 +18114,7 @@
                           <a:ea typeface="대명체 보통" panose="020B0600000101010101" pitchFamily="50" charset="-127"/>
                           <a:cs typeface="+mn-cs"/>
                         </a:rPr>
-                        <a:t>67%</a:t>
+                        <a:t>66%</a:t>
                       </a:r>
                     </a:p>
                   </a:txBody>

--- a/docs/data/세일즈마케팅_예상매출현황.pptx
+++ b/docs/data/세일즈마케팅_예상매출현황.pptx
@@ -12756,7 +12756,7 @@
                           <a:ea typeface="대명체 보통" panose="020B0600000101010101" pitchFamily="50" charset="-127"/>
                           <a:cs typeface="+mn-cs"/>
                         </a:rPr>
-                        <a:t>17,242</a:t>
+                        <a:t>17,208</a:t>
                       </a:r>
                     </a:p>
                   </a:txBody>
@@ -12882,7 +12882,7 @@
                           <a:ea typeface="대명체 보통" panose="020B0600000101010101" pitchFamily="50" charset="-127"/>
                           <a:cs typeface="+mn-cs"/>
                         </a:rPr>
-                        <a:t>1,253</a:t>
+                        <a:t>1,220</a:t>
                       </a:r>
                     </a:p>
                   </a:txBody>
@@ -13016,7 +13016,7 @@
                           <a:ea typeface="대명체 보통" panose="020B0600000101010101" pitchFamily="50" charset="-127"/>
                           <a:cs typeface="+mn-cs"/>
                         </a:rPr>
-                        <a:t>9,399</a:t>
+                        <a:t>9,900</a:t>
                       </a:r>
                     </a:p>
                   </a:txBody>
@@ -13142,7 +13142,7 @@
                           <a:ea typeface="대명체 보통" panose="020B0600000101010101" pitchFamily="50" charset="-127"/>
                           <a:cs typeface="+mn-cs"/>
                         </a:rPr>
-                        <a:t>7,843</a:t>
+                        <a:t>7,308</a:t>
                       </a:r>
                     </a:p>
                   </a:txBody>
@@ -13209,7 +13209,7 @@
                           <a:ea typeface="대명체 보통" panose="020B0600000101010101" pitchFamily="50" charset="-127"/>
                           <a:cs typeface="+mn-cs"/>
                         </a:rPr>
-                        <a:t>83%</a:t>
+                        <a:t>74%</a:t>
                       </a:r>
                     </a:p>
                   </a:txBody>
@@ -13450,7 +13450,7 @@
                           <a:ea typeface="대명체 보통" panose="020B0600000101010101" pitchFamily="50" charset="-127"/>
                           <a:cs typeface="+mn-cs"/>
                         </a:rPr>
-                        <a:t>176,040</a:t>
+                        <a:t>176,007</a:t>
                       </a:r>
                     </a:p>
                   </a:txBody>
@@ -13576,7 +13576,7 @@
                           <a:ea typeface="대명체 보통" panose="020B0600000101010101" pitchFamily="50" charset="-127"/>
                           <a:cs typeface="+mn-cs"/>
                         </a:rPr>
-                        <a:t>21,024</a:t>
+                        <a:t>20,991</a:t>
                       </a:r>
                     </a:p>
                   </a:txBody>
@@ -13710,7 +13710,7 @@
                           <a:ea typeface="대명체 보통" panose="020B0600000101010101" pitchFamily="50" charset="-127"/>
                           <a:cs typeface="+mn-cs"/>
                         </a:rPr>
-                        <a:t>122,796</a:t>
+                        <a:t>123,297</a:t>
                       </a:r>
                     </a:p>
                   </a:txBody>
@@ -13836,7 +13836,7 @@
                           <a:ea typeface="대명체 보통" panose="020B0600000101010101" pitchFamily="50" charset="-127"/>
                           <a:cs typeface="+mn-cs"/>
                         </a:rPr>
-                        <a:t>53,244</a:t>
+                        <a:t>52,710</a:t>
                       </a:r>
                     </a:p>
                   </a:txBody>
@@ -14237,7 +14237,7 @@
                           <a:ea typeface="대명체 보통" panose="020B0600000101010101" pitchFamily="50" charset="-127"/>
                           <a:cs typeface="+mn-cs"/>
                         </a:rPr>
-                        <a:t>8,530</a:t>
+                        <a:t>8,556</a:t>
                       </a:r>
                     </a:p>
                   </a:txBody>
@@ -14355,7 +14355,7 @@
                           <a:ea typeface="대명체 보통" panose="020B0600000101010101" pitchFamily="50" charset="-127"/>
                           <a:cs typeface="+mn-cs"/>
                         </a:rPr>
-                        <a:t>-1,080</a:t>
+                        <a:t>-1,054</a:t>
                       </a:r>
                       <a:endParaRPr lang="en-US" altLang="ko-KR" sz="700" b="0" i="0" u="none" strike="noStrike" kern="1200" dirty="0">
                         <a:solidFill>
@@ -14490,7 +14490,7 @@
                           <a:ea typeface="대명체 보통" panose="020B0600000101010101" pitchFamily="50" charset="-127"/>
                           <a:cs typeface="+mn-cs"/>
                         </a:rPr>
-                        <a:t>5,847</a:t>
+                        <a:t>6,187</a:t>
                       </a:r>
                     </a:p>
                   </a:txBody>
@@ -14608,7 +14608,7 @@
                           <a:ea typeface="대명체 보통" panose="020B0600000101010101" pitchFamily="50" charset="-127"/>
                           <a:cs typeface="+mn-cs"/>
                         </a:rPr>
-                        <a:t>2,683</a:t>
+                        <a:t>2,369</a:t>
                       </a:r>
                     </a:p>
                   </a:txBody>
@@ -14671,7 +14671,7 @@
                           <a:ea typeface="대명체 보통" panose="020B0600000101010101" pitchFamily="50" charset="-127"/>
                           <a:cs typeface="+mn-cs"/>
                         </a:rPr>
-                        <a:t>46%</a:t>
+                        <a:t>38%</a:t>
                       </a:r>
                     </a:p>
                   </a:txBody>
@@ -14900,7 +14900,7 @@
                           <a:ea typeface="대명체 보통" panose="020B0600000101010101" pitchFamily="50" charset="-127"/>
                           <a:cs typeface="+mn-cs"/>
                         </a:rPr>
-                        <a:t>100,286</a:t>
+                        <a:t>100,312</a:t>
                       </a:r>
                     </a:p>
                   </a:txBody>
@@ -15018,7 +15018,7 @@
                           <a:ea typeface="대명체 보통" panose="020B0600000101010101" pitchFamily="50" charset="-127"/>
                           <a:cs typeface="+mn-cs"/>
                         </a:rPr>
-                        <a:t>10,302</a:t>
+                        <a:t>10,328</a:t>
                       </a:r>
                     </a:p>
                   </a:txBody>
@@ -15144,7 +15144,7 @@
                           <a:ea typeface="대명체 보통" panose="020B0600000101010101" pitchFamily="50" charset="-127"/>
                           <a:cs typeface="+mn-cs"/>
                         </a:rPr>
-                        <a:t>70,711</a:t>
+                        <a:t>71,051</a:t>
                       </a:r>
                     </a:p>
                   </a:txBody>
@@ -15262,7 +15262,7 @@
                           <a:ea typeface="대명체 보통" panose="020B0600000101010101" pitchFamily="50" charset="-127"/>
                           <a:cs typeface="+mn-cs"/>
                         </a:rPr>
-                        <a:t>29,576</a:t>
+                        <a:t>29,261</a:t>
                       </a:r>
                     </a:p>
                   </a:txBody>
@@ -15325,7 +15325,7 @@
                           <a:ea typeface="대명체 보통" panose="020B0600000101010101" pitchFamily="50" charset="-127"/>
                           <a:cs typeface="+mn-cs"/>
                         </a:rPr>
-                        <a:t>42%</a:t>
+                        <a:t>41%</a:t>
                       </a:r>
                     </a:p>
                   </a:txBody>
@@ -15643,7 +15643,7 @@
                           <a:ea typeface="대명체 보통" panose="020B0600000101010101" pitchFamily="50" charset="-127"/>
                           <a:cs typeface="+mn-cs"/>
                         </a:rPr>
-                        <a:t>7,807</a:t>
+                        <a:t>7,764</a:t>
                       </a:r>
                     </a:p>
                   </a:txBody>
@@ -15753,7 +15753,7 @@
                           <a:ea typeface="대명체 보통" panose="020B0600000101010101" pitchFamily="50" charset="-127"/>
                           <a:cs typeface="+mn-cs"/>
                         </a:rPr>
-                        <a:t>1,948</a:t>
+                        <a:t>1,905</a:t>
                       </a:r>
                       <a:endParaRPr lang="en-US" altLang="ko-KR" sz="700" b="0" i="0" u="none" strike="noStrike" kern="1200" dirty="0">
                         <a:solidFill>
@@ -15880,7 +15880,7 @@
                           <a:ea typeface="대명체 보통" panose="020B0600000101010101" pitchFamily="50" charset="-127"/>
                           <a:cs typeface="+mn-cs"/>
                         </a:rPr>
-                        <a:t>3,114</a:t>
+                        <a:t>3,263</a:t>
                       </a:r>
                     </a:p>
                   </a:txBody>
@@ -15990,7 +15990,7 @@
                           <a:ea typeface="대명체 보통" panose="020B0600000101010101" pitchFamily="50" charset="-127"/>
                           <a:cs typeface="+mn-cs"/>
                         </a:rPr>
-                        <a:t>4,693</a:t>
+                        <a:t>4,501</a:t>
                       </a:r>
                     </a:p>
                   </a:txBody>
@@ -16049,7 +16049,7 @@
                           <a:ea typeface="대명체 보통" panose="020B0600000101010101" pitchFamily="50" charset="-127"/>
                           <a:cs typeface="+mn-cs"/>
                         </a:rPr>
-                        <a:t>151%</a:t>
+                        <a:t>138%</a:t>
                       </a:r>
                     </a:p>
                   </a:txBody>
@@ -16266,7 +16266,7 @@
                           <a:ea typeface="대명체 보통" panose="020B0600000101010101" pitchFamily="50" charset="-127"/>
                           <a:cs typeface="+mn-cs"/>
                         </a:rPr>
-                        <a:t>69,068</a:t>
+                        <a:t>69,025</a:t>
                       </a:r>
                     </a:p>
                   </a:txBody>
@@ -16376,7 +16376,7 @@
                           <a:ea typeface="대명체 보통" panose="020B0600000101010101" pitchFamily="50" charset="-127"/>
                           <a:cs typeface="+mn-cs"/>
                         </a:rPr>
-                        <a:t>8,426</a:t>
+                        <a:t>8,382</a:t>
                       </a:r>
                     </a:p>
                   </a:txBody>
@@ -16494,7 +16494,7 @@
                           <a:ea typeface="대명체 보통" panose="020B0600000101010101" pitchFamily="50" charset="-127"/>
                           <a:cs typeface="+mn-cs"/>
                         </a:rPr>
-                        <a:t>48,055</a:t>
+                        <a:t>48,203</a:t>
                       </a:r>
                     </a:p>
                   </a:txBody>
@@ -16604,7 +16604,7 @@
                           <a:ea typeface="대명체 보통" panose="020B0600000101010101" pitchFamily="50" charset="-127"/>
                           <a:cs typeface="+mn-cs"/>
                         </a:rPr>
-                        <a:t>21,013</a:t>
+                        <a:t>20,822</a:t>
                       </a:r>
                     </a:p>
                   </a:txBody>
@@ -16663,7 +16663,7 @@
                           <a:ea typeface="대명체 보통" panose="020B0600000101010101" pitchFamily="50" charset="-127"/>
                           <a:cs typeface="+mn-cs"/>
                         </a:rPr>
-                        <a:t>44%</a:t>
+                        <a:t>43%</a:t>
                       </a:r>
                     </a:p>
                   </a:txBody>
@@ -16999,7 +16999,7 @@
                           <a:ea typeface="대명체 보통" panose="020B0600000101010101" pitchFamily="50" charset="-127"/>
                           <a:cs typeface="+mn-cs"/>
                         </a:rPr>
-                        <a:t>904</a:t>
+                        <a:t>889</a:t>
                       </a:r>
                       <a:endParaRPr lang="en-US" altLang="ko-KR" sz="700" b="0" i="0" u="none" strike="noStrike" kern="1200" dirty="0">
                         <a:solidFill>
@@ -17126,7 +17126,7 @@
                           <a:ea typeface="대명체 보통" panose="020B0600000101010101" pitchFamily="50" charset="-127"/>
                           <a:cs typeface="+mn-cs"/>
                         </a:rPr>
-                        <a:t>385</a:t>
+                        <a:t>369</a:t>
                       </a:r>
                       <a:endParaRPr lang="en-US" altLang="ko-KR" sz="700" b="0" i="0" u="none" strike="noStrike" kern="1200" dirty="0">
                         <a:solidFill>
@@ -17198,7 +17198,7 @@
                           <a:ea typeface="대명체 보통" panose="020B0600000101010101" pitchFamily="50" charset="-127"/>
                           <a:cs typeface="+mn-cs"/>
                         </a:rPr>
-                        <a:t>174%</a:t>
+                        <a:t>171%</a:t>
                       </a:r>
                     </a:p>
                   </a:txBody>
@@ -17261,7 +17261,7 @@
                           <a:ea typeface="대명체 보통" panose="020B0600000101010101" pitchFamily="50" charset="-127"/>
                           <a:cs typeface="+mn-cs"/>
                         </a:rPr>
-                        <a:t>437</a:t>
+                        <a:t>450</a:t>
                       </a:r>
                       <a:endParaRPr lang="en-US" altLang="ko-KR" sz="700" b="0" i="0" u="none" strike="noStrike" kern="1200" dirty="0">
                         <a:solidFill>
@@ -17388,7 +17388,7 @@
                           <a:ea typeface="대명체 보통" panose="020B0600000101010101" pitchFamily="50" charset="-127"/>
                           <a:cs typeface="+mn-cs"/>
                         </a:rPr>
-                        <a:t>467</a:t>
+                        <a:t>439</a:t>
                       </a:r>
                     </a:p>
                   </a:txBody>
@@ -17451,7 +17451,7 @@
                           <a:ea typeface="대명체 보통" panose="020B0600000101010101" pitchFamily="50" charset="-127"/>
                           <a:cs typeface="+mn-cs"/>
                         </a:rPr>
-                        <a:t>107%</a:t>
+                        <a:t>98%</a:t>
                       </a:r>
                     </a:p>
                   </a:txBody>
@@ -17680,7 +17680,7 @@
                           <a:ea typeface="대명체 보통" panose="020B0600000101010101" pitchFamily="50" charset="-127"/>
                           <a:cs typeface="+mn-cs"/>
                         </a:rPr>
-                        <a:t>6,685</a:t>
+                        <a:t>6,670</a:t>
                       </a:r>
                     </a:p>
                   </a:txBody>
@@ -17798,7 +17798,7 @@
                           <a:ea typeface="대명체 보통" panose="020B0600000101010101" pitchFamily="50" charset="-127"/>
                           <a:cs typeface="+mn-cs"/>
                         </a:rPr>
-                        <a:t>2,296</a:t>
+                        <a:t>2,281</a:t>
                       </a:r>
                       <a:endParaRPr lang="en-US" altLang="ko-KR" sz="700" b="0" i="0" u="none" strike="noStrike" kern="1200" dirty="0">
                         <a:solidFill>
@@ -17933,7 +17933,7 @@
                           <a:ea typeface="대명체 보통" panose="020B0600000101010101" pitchFamily="50" charset="-127"/>
                           <a:cs typeface="+mn-cs"/>
                         </a:rPr>
-                        <a:t>4,030</a:t>
+                        <a:t>4,043</a:t>
                       </a:r>
                     </a:p>
                   </a:txBody>
@@ -18051,7 +18051,7 @@
                           <a:ea typeface="대명체 보통" panose="020B0600000101010101" pitchFamily="50" charset="-127"/>
                           <a:cs typeface="+mn-cs"/>
                         </a:rPr>
-                        <a:t>2,655</a:t>
+                        <a:t>2,627</a:t>
                       </a:r>
                     </a:p>
                   </a:txBody>
@@ -18114,7 +18114,7 @@
                           <a:ea typeface="대명체 보통" panose="020B0600000101010101" pitchFamily="50" charset="-127"/>
                           <a:cs typeface="+mn-cs"/>
                         </a:rPr>
-                        <a:t>66%</a:t>
+                        <a:t>65%</a:t>
                       </a:r>
                     </a:p>
                   </a:txBody>

--- a/docs/data/세일즈마케팅_예상매출현황.pptx
+++ b/docs/data/세일즈마케팅_예상매출현황.pptx
@@ -12756,7 +12756,7 @@
                           <a:ea typeface="대명체 보통" panose="020B0600000101010101" pitchFamily="50" charset="-127"/>
                           <a:cs typeface="+mn-cs"/>
                         </a:rPr>
-                        <a:t>17,208</a:t>
+                        <a:t>17,339</a:t>
                       </a:r>
                     </a:p>
                   </a:txBody>
@@ -12882,7 +12882,7 @@
                           <a:ea typeface="대명체 보통" panose="020B0600000101010101" pitchFamily="50" charset="-127"/>
                           <a:cs typeface="+mn-cs"/>
                         </a:rPr>
-                        <a:t>1,220</a:t>
+                        <a:t>1,350</a:t>
                       </a:r>
                     </a:p>
                   </a:txBody>
@@ -13016,7 +13016,7 @@
                           <a:ea typeface="대명체 보통" panose="020B0600000101010101" pitchFamily="50" charset="-127"/>
                           <a:cs typeface="+mn-cs"/>
                         </a:rPr>
-                        <a:t>9,900</a:t>
+                        <a:t>10,008</a:t>
                       </a:r>
                     </a:p>
                   </a:txBody>
@@ -13142,7 +13142,7 @@
                           <a:ea typeface="대명체 보통" panose="020B0600000101010101" pitchFamily="50" charset="-127"/>
                           <a:cs typeface="+mn-cs"/>
                         </a:rPr>
-                        <a:t>7,308</a:t>
+                        <a:t>7,331</a:t>
                       </a:r>
                     </a:p>
                   </a:txBody>
@@ -13209,7 +13209,7 @@
                           <a:ea typeface="대명체 보통" panose="020B0600000101010101" pitchFamily="50" charset="-127"/>
                           <a:cs typeface="+mn-cs"/>
                         </a:rPr>
-                        <a:t>74%</a:t>
+                        <a:t>73%</a:t>
                       </a:r>
                     </a:p>
                   </a:txBody>
@@ -13450,7 +13450,7 @@
                           <a:ea typeface="대명체 보통" panose="020B0600000101010101" pitchFamily="50" charset="-127"/>
                           <a:cs typeface="+mn-cs"/>
                         </a:rPr>
-                        <a:t>176,007</a:t>
+                        <a:t>176,137</a:t>
                       </a:r>
                     </a:p>
                   </a:txBody>
@@ -13576,7 +13576,7 @@
                           <a:ea typeface="대명체 보통" panose="020B0600000101010101" pitchFamily="50" charset="-127"/>
                           <a:cs typeface="+mn-cs"/>
                         </a:rPr>
-                        <a:t>20,991</a:t>
+                        <a:t>21,121</a:t>
                       </a:r>
                     </a:p>
                   </a:txBody>
@@ -13710,7 +13710,7 @@
                           <a:ea typeface="대명체 보통" panose="020B0600000101010101" pitchFamily="50" charset="-127"/>
                           <a:cs typeface="+mn-cs"/>
                         </a:rPr>
-                        <a:t>123,297</a:t>
+                        <a:t>123,405</a:t>
                       </a:r>
                     </a:p>
                   </a:txBody>
@@ -13836,7 +13836,7 @@
                           <a:ea typeface="대명체 보통" panose="020B0600000101010101" pitchFamily="50" charset="-127"/>
                           <a:cs typeface="+mn-cs"/>
                         </a:rPr>
-                        <a:t>52,710</a:t>
+                        <a:t>52,732</a:t>
                       </a:r>
                     </a:p>
                   </a:txBody>
@@ -14237,7 +14237,7 @@
                           <a:ea typeface="대명체 보통" panose="020B0600000101010101" pitchFamily="50" charset="-127"/>
                           <a:cs typeface="+mn-cs"/>
                         </a:rPr>
-                        <a:t>8,556</a:t>
+                        <a:t>8,645</a:t>
                       </a:r>
                     </a:p>
                   </a:txBody>
@@ -14355,7 +14355,7 @@
                           <a:ea typeface="대명체 보통" panose="020B0600000101010101" pitchFamily="50" charset="-127"/>
                           <a:cs typeface="+mn-cs"/>
                         </a:rPr>
-                        <a:t>-1,054</a:t>
+                        <a:t>-965</a:t>
                       </a:r>
                       <a:endParaRPr lang="en-US" altLang="ko-KR" sz="700" b="0" i="0" u="none" strike="noStrike" kern="1200" dirty="0">
                         <a:solidFill>
@@ -14427,7 +14427,7 @@
                           <a:ea typeface="대명체 보통" panose="020B0600000101010101" pitchFamily="50" charset="-127"/>
                           <a:cs typeface="+mn-cs"/>
                         </a:rPr>
-                        <a:t>89%</a:t>
+                        <a:t>90%</a:t>
                       </a:r>
                     </a:p>
                   </a:txBody>
@@ -14490,7 +14490,7 @@
                           <a:ea typeface="대명체 보통" panose="020B0600000101010101" pitchFamily="50" charset="-127"/>
                           <a:cs typeface="+mn-cs"/>
                         </a:rPr>
-                        <a:t>6,187</a:t>
+                        <a:t>6,256</a:t>
                       </a:r>
                     </a:p>
                   </a:txBody>
@@ -14608,7 +14608,7 @@
                           <a:ea typeface="대명체 보통" panose="020B0600000101010101" pitchFamily="50" charset="-127"/>
                           <a:cs typeface="+mn-cs"/>
                         </a:rPr>
-                        <a:t>2,369</a:t>
+                        <a:t>2,389</a:t>
                       </a:r>
                     </a:p>
                   </a:txBody>
@@ -14900,7 +14900,7 @@
                           <a:ea typeface="대명체 보통" panose="020B0600000101010101" pitchFamily="50" charset="-127"/>
                           <a:cs typeface="+mn-cs"/>
                         </a:rPr>
-                        <a:t>100,312</a:t>
+                        <a:t>100,401</a:t>
                       </a:r>
                     </a:p>
                   </a:txBody>
@@ -15018,7 +15018,7 @@
                           <a:ea typeface="대명체 보통" panose="020B0600000101010101" pitchFamily="50" charset="-127"/>
                           <a:cs typeface="+mn-cs"/>
                         </a:rPr>
-                        <a:t>10,328</a:t>
+                        <a:t>10,417</a:t>
                       </a:r>
                     </a:p>
                   </a:txBody>
@@ -15081,7 +15081,7 @@
                           <a:ea typeface="대명체 보통" panose="020B0600000101010101" pitchFamily="50" charset="-127"/>
                           <a:cs typeface="+mn-cs"/>
                         </a:rPr>
-                        <a:t>111%</a:t>
+                        <a:t>112%</a:t>
                       </a:r>
                     </a:p>
                   </a:txBody>
@@ -15144,7 +15144,7 @@
                           <a:ea typeface="대명체 보통" panose="020B0600000101010101" pitchFamily="50" charset="-127"/>
                           <a:cs typeface="+mn-cs"/>
                         </a:rPr>
-                        <a:t>71,051</a:t>
+                        <a:t>71,119</a:t>
                       </a:r>
                     </a:p>
                   </a:txBody>
@@ -15262,7 +15262,7 @@
                           <a:ea typeface="대명체 보통" panose="020B0600000101010101" pitchFamily="50" charset="-127"/>
                           <a:cs typeface="+mn-cs"/>
                         </a:rPr>
-                        <a:t>29,261</a:t>
+                        <a:t>29,282</a:t>
                       </a:r>
                     </a:p>
                   </a:txBody>
@@ -15643,7 +15643,7 @@
                           <a:ea typeface="대명체 보통" panose="020B0600000101010101" pitchFamily="50" charset="-127"/>
                           <a:cs typeface="+mn-cs"/>
                         </a:rPr>
-                        <a:t>7,764</a:t>
+                        <a:t>7,817</a:t>
                       </a:r>
                     </a:p>
                   </a:txBody>
@@ -15753,7 +15753,7 @@
                           <a:ea typeface="대명체 보통" panose="020B0600000101010101" pitchFamily="50" charset="-127"/>
                           <a:cs typeface="+mn-cs"/>
                         </a:rPr>
-                        <a:t>1,905</a:t>
+                        <a:t>1,958</a:t>
                       </a:r>
                       <a:endParaRPr lang="en-US" altLang="ko-KR" sz="700" b="0" i="0" u="none" strike="noStrike" kern="1200" dirty="0">
                         <a:solidFill>
@@ -15880,7 +15880,7 @@
                           <a:ea typeface="대명체 보통" panose="020B0600000101010101" pitchFamily="50" charset="-127"/>
                           <a:cs typeface="+mn-cs"/>
                         </a:rPr>
-                        <a:t>3,263</a:t>
+                        <a:t>3,302</a:t>
                       </a:r>
                     </a:p>
                   </a:txBody>
@@ -15990,7 +15990,7 @@
                           <a:ea typeface="대명체 보통" panose="020B0600000101010101" pitchFamily="50" charset="-127"/>
                           <a:cs typeface="+mn-cs"/>
                         </a:rPr>
-                        <a:t>4,501</a:t>
+                        <a:t>4,515</a:t>
                       </a:r>
                     </a:p>
                   </a:txBody>
@@ -16049,7 +16049,7 @@
                           <a:ea typeface="대명체 보통" panose="020B0600000101010101" pitchFamily="50" charset="-127"/>
                           <a:cs typeface="+mn-cs"/>
                         </a:rPr>
-                        <a:t>138%</a:t>
+                        <a:t>137%</a:t>
                       </a:r>
                     </a:p>
                   </a:txBody>
@@ -16266,7 +16266,7 @@
                           <a:ea typeface="대명체 보통" panose="020B0600000101010101" pitchFamily="50" charset="-127"/>
                           <a:cs typeface="+mn-cs"/>
                         </a:rPr>
-                        <a:t>69,025</a:t>
+                        <a:t>69,078</a:t>
                       </a:r>
                     </a:p>
                   </a:txBody>
@@ -16376,7 +16376,7 @@
                           <a:ea typeface="대명체 보통" panose="020B0600000101010101" pitchFamily="50" charset="-127"/>
                           <a:cs typeface="+mn-cs"/>
                         </a:rPr>
-                        <a:t>8,382</a:t>
+                        <a:t>8,436</a:t>
                       </a:r>
                     </a:p>
                   </a:txBody>
@@ -16494,7 +16494,7 @@
                           <a:ea typeface="대명체 보통" panose="020B0600000101010101" pitchFamily="50" charset="-127"/>
                           <a:cs typeface="+mn-cs"/>
                         </a:rPr>
-                        <a:t>48,203</a:t>
+                        <a:t>48,243</a:t>
                       </a:r>
                     </a:p>
                   </a:txBody>
@@ -16604,7 +16604,7 @@
                           <a:ea typeface="대명체 보통" panose="020B0600000101010101" pitchFamily="50" charset="-127"/>
                           <a:cs typeface="+mn-cs"/>
                         </a:rPr>
-                        <a:t>20,822</a:t>
+                        <a:t>20,835</a:t>
                       </a:r>
                     </a:p>
                   </a:txBody>
@@ -16999,7 +16999,7 @@
                           <a:ea typeface="대명체 보통" panose="020B0600000101010101" pitchFamily="50" charset="-127"/>
                           <a:cs typeface="+mn-cs"/>
                         </a:rPr>
-                        <a:t>889</a:t>
+                        <a:t>877</a:t>
                       </a:r>
                       <a:endParaRPr lang="en-US" altLang="ko-KR" sz="700" b="0" i="0" u="none" strike="noStrike" kern="1200" dirty="0">
                         <a:solidFill>
@@ -17126,7 +17126,7 @@
                           <a:ea typeface="대명체 보통" panose="020B0600000101010101" pitchFamily="50" charset="-127"/>
                           <a:cs typeface="+mn-cs"/>
                         </a:rPr>
-                        <a:t>369</a:t>
+                        <a:t>357</a:t>
                       </a:r>
                       <a:endParaRPr lang="en-US" altLang="ko-KR" sz="700" b="0" i="0" u="none" strike="noStrike" kern="1200" dirty="0">
                         <a:solidFill>
@@ -17198,7 +17198,7 @@
                           <a:ea typeface="대명체 보통" panose="020B0600000101010101" pitchFamily="50" charset="-127"/>
                           <a:cs typeface="+mn-cs"/>
                         </a:rPr>
-                        <a:t>171%</a:t>
+                        <a:t>169%</a:t>
                       </a:r>
                     </a:p>
                   </a:txBody>
@@ -17388,7 +17388,7 @@
                           <a:ea typeface="대명체 보통" panose="020B0600000101010101" pitchFamily="50" charset="-127"/>
                           <a:cs typeface="+mn-cs"/>
                         </a:rPr>
-                        <a:t>439</a:t>
+                        <a:t>427</a:t>
                       </a:r>
                     </a:p>
                   </a:txBody>
@@ -17451,7 +17451,7 @@
                           <a:ea typeface="대명체 보통" panose="020B0600000101010101" pitchFamily="50" charset="-127"/>
                           <a:cs typeface="+mn-cs"/>
                         </a:rPr>
-                        <a:t>98%</a:t>
+                        <a:t>95%</a:t>
                       </a:r>
                     </a:p>
                   </a:txBody>
@@ -17680,7 +17680,7 @@
                           <a:ea typeface="대명체 보통" panose="020B0600000101010101" pitchFamily="50" charset="-127"/>
                           <a:cs typeface="+mn-cs"/>
                         </a:rPr>
-                        <a:t>6,670</a:t>
+                        <a:t>6,658</a:t>
                       </a:r>
                     </a:p>
                   </a:txBody>
@@ -17798,7 +17798,7 @@
                           <a:ea typeface="대명체 보통" panose="020B0600000101010101" pitchFamily="50" charset="-127"/>
                           <a:cs typeface="+mn-cs"/>
                         </a:rPr>
-                        <a:t>2,281</a:t>
+                        <a:t>2,269</a:t>
                       </a:r>
                       <a:endParaRPr lang="en-US" altLang="ko-KR" sz="700" b="0" i="0" u="none" strike="noStrike" kern="1200" dirty="0">
                         <a:solidFill>
@@ -18051,7 +18051,7 @@
                           <a:ea typeface="대명체 보통" panose="020B0600000101010101" pitchFamily="50" charset="-127"/>
                           <a:cs typeface="+mn-cs"/>
                         </a:rPr>
-                        <a:t>2,627</a:t>
+                        <a:t>2,615</a:t>
                       </a:r>
                     </a:p>
                   </a:txBody>

--- a/docs/data/세일즈마케팅_예상매출현황.pptx
+++ b/docs/data/세일즈마케팅_예상매출현황.pptx
@@ -12756,7 +12756,7 @@
                           <a:ea typeface="대명체 보통" panose="020B0600000101010101" pitchFamily="50" charset="-127"/>
                           <a:cs typeface="+mn-cs"/>
                         </a:rPr>
-                        <a:t>17,339</a:t>
+                        <a:t>17,472</a:t>
                       </a:r>
                     </a:p>
                   </a:txBody>
@@ -12882,7 +12882,7 @@
                           <a:ea typeface="대명체 보통" panose="020B0600000101010101" pitchFamily="50" charset="-127"/>
                           <a:cs typeface="+mn-cs"/>
                         </a:rPr>
-                        <a:t>1,350</a:t>
+                        <a:t>1,483</a:t>
                       </a:r>
                     </a:p>
                   </a:txBody>
@@ -12949,7 +12949,7 @@
                           <a:ea typeface="대명체 보통" panose="020B0600000101010101" pitchFamily="50" charset="-127"/>
                           <a:cs typeface="+mn-cs"/>
                         </a:rPr>
-                        <a:t>108%</a:t>
+                        <a:t>109%</a:t>
                       </a:r>
                     </a:p>
                   </a:txBody>
@@ -13016,7 +13016,7 @@
                           <a:ea typeface="대명체 보통" panose="020B0600000101010101" pitchFamily="50" charset="-127"/>
                           <a:cs typeface="+mn-cs"/>
                         </a:rPr>
-                        <a:t>10,008</a:t>
+                        <a:t>10,127</a:t>
                       </a:r>
                     </a:p>
                   </a:txBody>
@@ -13142,7 +13142,7 @@
                           <a:ea typeface="대명체 보통" panose="020B0600000101010101" pitchFamily="50" charset="-127"/>
                           <a:cs typeface="+mn-cs"/>
                         </a:rPr>
-                        <a:t>7,331</a:t>
+                        <a:t>7,344</a:t>
                       </a:r>
                     </a:p>
                   </a:txBody>
@@ -13450,7 +13450,7 @@
                           <a:ea typeface="대명체 보통" panose="020B0600000101010101" pitchFamily="50" charset="-127"/>
                           <a:cs typeface="+mn-cs"/>
                         </a:rPr>
-                        <a:t>176,137</a:t>
+                        <a:t>176,270</a:t>
                       </a:r>
                     </a:p>
                   </a:txBody>
@@ -13576,7 +13576,7 @@
                           <a:ea typeface="대명체 보통" panose="020B0600000101010101" pitchFamily="50" charset="-127"/>
                           <a:cs typeface="+mn-cs"/>
                         </a:rPr>
-                        <a:t>21,121</a:t>
+                        <a:t>21,254</a:t>
                       </a:r>
                     </a:p>
                   </a:txBody>
@@ -13710,7 +13710,7 @@
                           <a:ea typeface="대명체 보통" panose="020B0600000101010101" pitchFamily="50" charset="-127"/>
                           <a:cs typeface="+mn-cs"/>
                         </a:rPr>
-                        <a:t>123,405</a:t>
+                        <a:t>123,525</a:t>
                       </a:r>
                     </a:p>
                   </a:txBody>
@@ -13836,7 +13836,7 @@
                           <a:ea typeface="대명체 보통" panose="020B0600000101010101" pitchFamily="50" charset="-127"/>
                           <a:cs typeface="+mn-cs"/>
                         </a:rPr>
-                        <a:t>52,732</a:t>
+                        <a:t>52,746</a:t>
                       </a:r>
                     </a:p>
                   </a:txBody>
@@ -14237,7 +14237,7 @@
                           <a:ea typeface="대명체 보통" panose="020B0600000101010101" pitchFamily="50" charset="-127"/>
                           <a:cs typeface="+mn-cs"/>
                         </a:rPr>
-                        <a:t>8,645</a:t>
+                        <a:t>8,763</a:t>
                       </a:r>
                     </a:p>
                   </a:txBody>
@@ -14355,7 +14355,7 @@
                           <a:ea typeface="대명체 보통" panose="020B0600000101010101" pitchFamily="50" charset="-127"/>
                           <a:cs typeface="+mn-cs"/>
                         </a:rPr>
-                        <a:t>-965</a:t>
+                        <a:t>-847</a:t>
                       </a:r>
                       <a:endParaRPr lang="en-US" altLang="ko-KR" sz="700" b="0" i="0" u="none" strike="noStrike" kern="1200" dirty="0">
                         <a:solidFill>
@@ -14427,7 +14427,7 @@
                           <a:ea typeface="대명체 보통" panose="020B0600000101010101" pitchFamily="50" charset="-127"/>
                           <a:cs typeface="+mn-cs"/>
                         </a:rPr>
-                        <a:t>90%</a:t>
+                        <a:t>91%</a:t>
                       </a:r>
                     </a:p>
                   </a:txBody>
@@ -14490,7 +14490,7 @@
                           <a:ea typeface="대명체 보통" panose="020B0600000101010101" pitchFamily="50" charset="-127"/>
                           <a:cs typeface="+mn-cs"/>
                         </a:rPr>
-                        <a:t>6,256</a:t>
+                        <a:t>6,328</a:t>
                       </a:r>
                     </a:p>
                   </a:txBody>
@@ -14608,7 +14608,7 @@
                           <a:ea typeface="대명체 보통" panose="020B0600000101010101" pitchFamily="50" charset="-127"/>
                           <a:cs typeface="+mn-cs"/>
                         </a:rPr>
-                        <a:t>2,389</a:t>
+                        <a:t>2,435</a:t>
                       </a:r>
                     </a:p>
                   </a:txBody>
@@ -14900,7 +14900,7 @@
                           <a:ea typeface="대명체 보통" panose="020B0600000101010101" pitchFamily="50" charset="-127"/>
                           <a:cs typeface="+mn-cs"/>
                         </a:rPr>
-                        <a:t>100,401</a:t>
+                        <a:t>100,520</a:t>
                       </a:r>
                     </a:p>
                   </a:txBody>
@@ -15018,7 +15018,7 @@
                           <a:ea typeface="대명체 보통" panose="020B0600000101010101" pitchFamily="50" charset="-127"/>
                           <a:cs typeface="+mn-cs"/>
                         </a:rPr>
-                        <a:t>10,417</a:t>
+                        <a:t>10,536</a:t>
                       </a:r>
                     </a:p>
                   </a:txBody>
@@ -15144,7 +15144,7 @@
                           <a:ea typeface="대명체 보통" panose="020B0600000101010101" pitchFamily="50" charset="-127"/>
                           <a:cs typeface="+mn-cs"/>
                         </a:rPr>
-                        <a:t>71,119</a:t>
+                        <a:t>71,191</a:t>
                       </a:r>
                     </a:p>
                   </a:txBody>
@@ -15262,7 +15262,7 @@
                           <a:ea typeface="대명체 보통" panose="020B0600000101010101" pitchFamily="50" charset="-127"/>
                           <a:cs typeface="+mn-cs"/>
                         </a:rPr>
-                        <a:t>29,282</a:t>
+                        <a:t>29,328</a:t>
                       </a:r>
                     </a:p>
                   </a:txBody>
@@ -15643,7 +15643,7 @@
                           <a:ea typeface="대명체 보통" panose="020B0600000101010101" pitchFamily="50" charset="-127"/>
                           <a:cs typeface="+mn-cs"/>
                         </a:rPr>
-                        <a:t>7,817</a:t>
+                        <a:t>7,841</a:t>
                       </a:r>
                     </a:p>
                   </a:txBody>
@@ -15753,7 +15753,7 @@
                           <a:ea typeface="대명체 보통" panose="020B0600000101010101" pitchFamily="50" charset="-127"/>
                           <a:cs typeface="+mn-cs"/>
                         </a:rPr>
-                        <a:t>1,958</a:t>
+                        <a:t>1,982</a:t>
                       </a:r>
                       <a:endParaRPr lang="en-US" altLang="ko-KR" sz="700" b="0" i="0" u="none" strike="noStrike" kern="1200" dirty="0">
                         <a:solidFill>
@@ -15821,7 +15821,7 @@
                           <a:ea typeface="대명체 보통" panose="020B0600000101010101" pitchFamily="50" charset="-127"/>
                           <a:cs typeface="+mn-cs"/>
                         </a:rPr>
-                        <a:t>133%</a:t>
+                        <a:t>134%</a:t>
                       </a:r>
                     </a:p>
                   </a:txBody>
@@ -15880,7 +15880,7 @@
                           <a:ea typeface="대명체 보통" panose="020B0600000101010101" pitchFamily="50" charset="-127"/>
                           <a:cs typeface="+mn-cs"/>
                         </a:rPr>
-                        <a:t>3,302</a:t>
+                        <a:t>3,349</a:t>
                       </a:r>
                     </a:p>
                   </a:txBody>
@@ -15990,7 +15990,7 @@
                           <a:ea typeface="대명체 보통" panose="020B0600000101010101" pitchFamily="50" charset="-127"/>
                           <a:cs typeface="+mn-cs"/>
                         </a:rPr>
-                        <a:t>4,515</a:t>
+                        <a:t>4,491</a:t>
                       </a:r>
                     </a:p>
                   </a:txBody>
@@ -16049,7 +16049,7 @@
                           <a:ea typeface="대명체 보통" panose="020B0600000101010101" pitchFamily="50" charset="-127"/>
                           <a:cs typeface="+mn-cs"/>
                         </a:rPr>
-                        <a:t>137%</a:t>
+                        <a:t>134%</a:t>
                       </a:r>
                     </a:p>
                   </a:txBody>
@@ -16266,7 +16266,7 @@
                           <a:ea typeface="대명체 보통" panose="020B0600000101010101" pitchFamily="50" charset="-127"/>
                           <a:cs typeface="+mn-cs"/>
                         </a:rPr>
-                        <a:t>69,078</a:t>
+                        <a:t>69,102</a:t>
                       </a:r>
                     </a:p>
                   </a:txBody>
@@ -16376,7 +16376,7 @@
                           <a:ea typeface="대명체 보통" panose="020B0600000101010101" pitchFamily="50" charset="-127"/>
                           <a:cs typeface="+mn-cs"/>
                         </a:rPr>
-                        <a:t>8,436</a:t>
+                        <a:t>8,459</a:t>
                       </a:r>
                     </a:p>
                   </a:txBody>
@@ -16494,7 +16494,7 @@
                           <a:ea typeface="대명체 보통" panose="020B0600000101010101" pitchFamily="50" charset="-127"/>
                           <a:cs typeface="+mn-cs"/>
                         </a:rPr>
-                        <a:t>48,243</a:t>
+                        <a:t>48,290</a:t>
                       </a:r>
                     </a:p>
                   </a:txBody>
@@ -16604,7 +16604,7 @@
                           <a:ea typeface="대명체 보통" panose="020B0600000101010101" pitchFamily="50" charset="-127"/>
                           <a:cs typeface="+mn-cs"/>
                         </a:rPr>
-                        <a:t>20,835</a:t>
+                        <a:t>20,812</a:t>
                       </a:r>
                     </a:p>
                   </a:txBody>
@@ -16999,7 +16999,7 @@
                           <a:ea typeface="대명체 보통" panose="020B0600000101010101" pitchFamily="50" charset="-127"/>
                           <a:cs typeface="+mn-cs"/>
                         </a:rPr>
-                        <a:t>877</a:t>
+                        <a:t>868</a:t>
                       </a:r>
                       <a:endParaRPr lang="en-US" altLang="ko-KR" sz="700" b="0" i="0" u="none" strike="noStrike" kern="1200" dirty="0">
                         <a:solidFill>
@@ -17126,7 +17126,7 @@
                           <a:ea typeface="대명체 보통" panose="020B0600000101010101" pitchFamily="50" charset="-127"/>
                           <a:cs typeface="+mn-cs"/>
                         </a:rPr>
-                        <a:t>357</a:t>
+                        <a:t>348</a:t>
                       </a:r>
                       <a:endParaRPr lang="en-US" altLang="ko-KR" sz="700" b="0" i="0" u="none" strike="noStrike" kern="1200" dirty="0">
                         <a:solidFill>
@@ -17198,7 +17198,7 @@
                           <a:ea typeface="대명체 보통" panose="020B0600000101010101" pitchFamily="50" charset="-127"/>
                           <a:cs typeface="+mn-cs"/>
                         </a:rPr>
-                        <a:t>169%</a:t>
+                        <a:t>167%</a:t>
                       </a:r>
                     </a:p>
                   </a:txBody>
@@ -17388,7 +17388,7 @@
                           <a:ea typeface="대명체 보통" panose="020B0600000101010101" pitchFamily="50" charset="-127"/>
                           <a:cs typeface="+mn-cs"/>
                         </a:rPr>
-                        <a:t>427</a:t>
+                        <a:t>418</a:t>
                       </a:r>
                     </a:p>
                   </a:txBody>
@@ -17451,7 +17451,7 @@
                           <a:ea typeface="대명체 보통" panose="020B0600000101010101" pitchFamily="50" charset="-127"/>
                           <a:cs typeface="+mn-cs"/>
                         </a:rPr>
-                        <a:t>95%</a:t>
+                        <a:t>93%</a:t>
                       </a:r>
                     </a:p>
                   </a:txBody>
@@ -17680,7 +17680,7 @@
                           <a:ea typeface="대명체 보통" panose="020B0600000101010101" pitchFamily="50" charset="-127"/>
                           <a:cs typeface="+mn-cs"/>
                         </a:rPr>
-                        <a:t>6,658</a:t>
+                        <a:t>6,649</a:t>
                       </a:r>
                     </a:p>
                   </a:txBody>
@@ -17798,7 +17798,7 @@
                           <a:ea typeface="대명체 보통" panose="020B0600000101010101" pitchFamily="50" charset="-127"/>
                           <a:cs typeface="+mn-cs"/>
                         </a:rPr>
-                        <a:t>2,269</a:t>
+                        <a:t>2,260</a:t>
                       </a:r>
                       <a:endParaRPr lang="en-US" altLang="ko-KR" sz="700" b="0" i="0" u="none" strike="noStrike" kern="1200" dirty="0">
                         <a:solidFill>
@@ -17870,7 +17870,7 @@
                           <a:ea typeface="대명체 보통" panose="020B0600000101010101" pitchFamily="50" charset="-127"/>
                           <a:cs typeface="+mn-cs"/>
                         </a:rPr>
-                        <a:t>152%</a:t>
+                        <a:t>151%</a:t>
                       </a:r>
                     </a:p>
                   </a:txBody>
@@ -18051,7 +18051,7 @@
                           <a:ea typeface="대명체 보통" panose="020B0600000101010101" pitchFamily="50" charset="-127"/>
                           <a:cs typeface="+mn-cs"/>
                         </a:rPr>
-                        <a:t>2,615</a:t>
+                        <a:t>2,606</a:t>
                       </a:r>
                     </a:p>
                   </a:txBody>
@@ -18114,7 +18114,7 @@
                           <a:ea typeface="대명체 보통" panose="020B0600000101010101" pitchFamily="50" charset="-127"/>
                           <a:cs typeface="+mn-cs"/>
                         </a:rPr>
-                        <a:t>65%</a:t>
+                        <a:t>64%</a:t>
                       </a:r>
                     </a:p>
                   </a:txBody>

--- a/docs/data/세일즈마케팅_예상매출현황.pptx
+++ b/docs/data/세일즈마케팅_예상매출현황.pptx
@@ -12756,7 +12756,7 @@
                           <a:ea typeface="대명체 보통" panose="020B0600000101010101" pitchFamily="50" charset="-127"/>
                           <a:cs typeface="+mn-cs"/>
                         </a:rPr>
-                        <a:t>17,472</a:t>
+                        <a:t>16,815</a:t>
                       </a:r>
                     </a:p>
                   </a:txBody>
@@ -12882,7 +12882,7 @@
                           <a:ea typeface="대명체 보통" panose="020B0600000101010101" pitchFamily="50" charset="-127"/>
                           <a:cs typeface="+mn-cs"/>
                         </a:rPr>
-                        <a:t>1,483</a:t>
+                        <a:t>827</a:t>
                       </a:r>
                     </a:p>
                   </a:txBody>
@@ -12949,7 +12949,7 @@
                           <a:ea typeface="대명체 보통" panose="020B0600000101010101" pitchFamily="50" charset="-127"/>
                           <a:cs typeface="+mn-cs"/>
                         </a:rPr>
-                        <a:t>109%</a:t>
+                        <a:t>105%</a:t>
                       </a:r>
                     </a:p>
                   </a:txBody>
@@ -13016,7 +13016,7 @@
                           <a:ea typeface="대명체 보통" panose="020B0600000101010101" pitchFamily="50" charset="-127"/>
                           <a:cs typeface="+mn-cs"/>
                         </a:rPr>
-                        <a:t>10,127</a:t>
+                        <a:t>10,854</a:t>
                       </a:r>
                     </a:p>
                   </a:txBody>
@@ -13142,7 +13142,7 @@
                           <a:ea typeface="대명체 보통" panose="020B0600000101010101" pitchFamily="50" charset="-127"/>
                           <a:cs typeface="+mn-cs"/>
                         </a:rPr>
-                        <a:t>7,344</a:t>
+                        <a:t>5,961</a:t>
                       </a:r>
                     </a:p>
                   </a:txBody>
@@ -13209,7 +13209,7 @@
                           <a:ea typeface="대명체 보통" panose="020B0600000101010101" pitchFamily="50" charset="-127"/>
                           <a:cs typeface="+mn-cs"/>
                         </a:rPr>
-                        <a:t>73%</a:t>
+                        <a:t>55%</a:t>
                       </a:r>
                     </a:p>
                   </a:txBody>
@@ -13450,7 +13450,7 @@
                           <a:ea typeface="대명체 보통" panose="020B0600000101010101" pitchFamily="50" charset="-127"/>
                           <a:cs typeface="+mn-cs"/>
                         </a:rPr>
-                        <a:t>176,270</a:t>
+                        <a:t>175,614</a:t>
                       </a:r>
                     </a:p>
                   </a:txBody>
@@ -13576,7 +13576,7 @@
                           <a:ea typeface="대명체 보통" panose="020B0600000101010101" pitchFamily="50" charset="-127"/>
                           <a:cs typeface="+mn-cs"/>
                         </a:rPr>
-                        <a:t>21,254</a:t>
+                        <a:t>20,598</a:t>
                       </a:r>
                     </a:p>
                   </a:txBody>
@@ -13643,7 +13643,7 @@
                           <a:ea typeface="대명체 보통" panose="020B0600000101010101" pitchFamily="50" charset="-127"/>
                           <a:cs typeface="+mn-cs"/>
                         </a:rPr>
-                        <a:t>114%</a:t>
+                        <a:t>113%</a:t>
                       </a:r>
                     </a:p>
                   </a:txBody>
@@ -13710,7 +13710,7 @@
                           <a:ea typeface="대명체 보통" panose="020B0600000101010101" pitchFamily="50" charset="-127"/>
                           <a:cs typeface="+mn-cs"/>
                         </a:rPr>
-                        <a:t>123,525</a:t>
+                        <a:t>124,251</a:t>
                       </a:r>
                     </a:p>
                   </a:txBody>
@@ -13836,7 +13836,7 @@
                           <a:ea typeface="대명체 보통" panose="020B0600000101010101" pitchFamily="50" charset="-127"/>
                           <a:cs typeface="+mn-cs"/>
                         </a:rPr>
-                        <a:t>52,746</a:t>
+                        <a:t>51,363</a:t>
                       </a:r>
                     </a:p>
                   </a:txBody>
@@ -13903,7 +13903,7 @@
                           <a:ea typeface="대명체 보통" panose="020B0600000101010101" pitchFamily="50" charset="-127"/>
                           <a:cs typeface="+mn-cs"/>
                         </a:rPr>
-                        <a:t>43%</a:t>
+                        <a:t>41%</a:t>
                       </a:r>
                     </a:p>
                   </a:txBody>
@@ -14237,7 +14237,7 @@
                           <a:ea typeface="대명체 보통" panose="020B0600000101010101" pitchFamily="50" charset="-127"/>
                           <a:cs typeface="+mn-cs"/>
                         </a:rPr>
-                        <a:t>8,763</a:t>
+                        <a:t>8,538</a:t>
                       </a:r>
                     </a:p>
                   </a:txBody>
@@ -14355,7 +14355,7 @@
                           <a:ea typeface="대명체 보통" panose="020B0600000101010101" pitchFamily="50" charset="-127"/>
                           <a:cs typeface="+mn-cs"/>
                         </a:rPr>
-                        <a:t>-847</a:t>
+                        <a:t>-1,072</a:t>
                       </a:r>
                       <a:endParaRPr lang="en-US" altLang="ko-KR" sz="700" b="0" i="0" u="none" strike="noStrike" kern="1200" dirty="0">
                         <a:solidFill>
@@ -14427,7 +14427,7 @@
                           <a:ea typeface="대명체 보통" panose="020B0600000101010101" pitchFamily="50" charset="-127"/>
                           <a:cs typeface="+mn-cs"/>
                         </a:rPr>
-                        <a:t>91%</a:t>
+                        <a:t>89%</a:t>
                       </a:r>
                     </a:p>
                   </a:txBody>
@@ -14490,7 +14490,7 @@
                           <a:ea typeface="대명체 보통" panose="020B0600000101010101" pitchFamily="50" charset="-127"/>
                           <a:cs typeface="+mn-cs"/>
                         </a:rPr>
-                        <a:t>6,328</a:t>
+                        <a:t>6,748</a:t>
                       </a:r>
                     </a:p>
                   </a:txBody>
@@ -14608,7 +14608,7 @@
                           <a:ea typeface="대명체 보통" panose="020B0600000101010101" pitchFamily="50" charset="-127"/>
                           <a:cs typeface="+mn-cs"/>
                         </a:rPr>
-                        <a:t>2,435</a:t>
+                        <a:t>1,791</a:t>
                       </a:r>
                     </a:p>
                   </a:txBody>
@@ -14671,7 +14671,7 @@
                           <a:ea typeface="대명체 보통" panose="020B0600000101010101" pitchFamily="50" charset="-127"/>
                           <a:cs typeface="+mn-cs"/>
                         </a:rPr>
-                        <a:t>38%</a:t>
+                        <a:t>27%</a:t>
                       </a:r>
                     </a:p>
                   </a:txBody>
@@ -14900,7 +14900,7 @@
                           <a:ea typeface="대명체 보통" panose="020B0600000101010101" pitchFamily="50" charset="-127"/>
                           <a:cs typeface="+mn-cs"/>
                         </a:rPr>
-                        <a:t>100,520</a:t>
+                        <a:t>100,295</a:t>
                       </a:r>
                     </a:p>
                   </a:txBody>
@@ -15018,7 +15018,7 @@
                           <a:ea typeface="대명체 보통" panose="020B0600000101010101" pitchFamily="50" charset="-127"/>
                           <a:cs typeface="+mn-cs"/>
                         </a:rPr>
-                        <a:t>10,536</a:t>
+                        <a:t>10,310</a:t>
                       </a:r>
                     </a:p>
                   </a:txBody>
@@ -15081,7 +15081,7 @@
                           <a:ea typeface="대명체 보통" panose="020B0600000101010101" pitchFamily="50" charset="-127"/>
                           <a:cs typeface="+mn-cs"/>
                         </a:rPr>
-                        <a:t>112%</a:t>
+                        <a:t>111%</a:t>
                       </a:r>
                     </a:p>
                   </a:txBody>
@@ -15144,7 +15144,7 @@
                           <a:ea typeface="대명체 보통" panose="020B0600000101010101" pitchFamily="50" charset="-127"/>
                           <a:cs typeface="+mn-cs"/>
                         </a:rPr>
-                        <a:t>71,191</a:t>
+                        <a:t>71,611</a:t>
                       </a:r>
                     </a:p>
                   </a:txBody>
@@ -15262,7 +15262,7 @@
                           <a:ea typeface="대명체 보통" panose="020B0600000101010101" pitchFamily="50" charset="-127"/>
                           <a:cs typeface="+mn-cs"/>
                         </a:rPr>
-                        <a:t>29,328</a:t>
+                        <a:t>28,684</a:t>
                       </a:r>
                     </a:p>
                   </a:txBody>
@@ -15325,7 +15325,7 @@
                           <a:ea typeface="대명체 보통" panose="020B0600000101010101" pitchFamily="50" charset="-127"/>
                           <a:cs typeface="+mn-cs"/>
                         </a:rPr>
-                        <a:t>41%</a:t>
+                        <a:t>40%</a:t>
                       </a:r>
                     </a:p>
                   </a:txBody>
@@ -15643,7 +15643,7 @@
                           <a:ea typeface="대명체 보통" panose="020B0600000101010101" pitchFamily="50" charset="-127"/>
                           <a:cs typeface="+mn-cs"/>
                         </a:rPr>
-                        <a:t>7,841</a:t>
+                        <a:t>7,456</a:t>
                       </a:r>
                     </a:p>
                   </a:txBody>
@@ -15753,7 +15753,7 @@
                           <a:ea typeface="대명체 보통" panose="020B0600000101010101" pitchFamily="50" charset="-127"/>
                           <a:cs typeface="+mn-cs"/>
                         </a:rPr>
-                        <a:t>1,982</a:t>
+                        <a:t>1,597</a:t>
                       </a:r>
                       <a:endParaRPr lang="en-US" altLang="ko-KR" sz="700" b="0" i="0" u="none" strike="noStrike" kern="1200" dirty="0">
                         <a:solidFill>
@@ -15821,7 +15821,7 @@
                           <a:ea typeface="대명체 보통" panose="020B0600000101010101" pitchFamily="50" charset="-127"/>
                           <a:cs typeface="+mn-cs"/>
                         </a:rPr>
-                        <a:t>134%</a:t>
+                        <a:t>127%</a:t>
                       </a:r>
                     </a:p>
                   </a:txBody>
@@ -15880,7 +15880,7 @@
                           <a:ea typeface="대명체 보통" panose="020B0600000101010101" pitchFamily="50" charset="-127"/>
                           <a:cs typeface="+mn-cs"/>
                         </a:rPr>
-                        <a:t>3,349</a:t>
+                        <a:t>3,654</a:t>
                       </a:r>
                     </a:p>
                   </a:txBody>
@@ -15990,7 +15990,7 @@
                           <a:ea typeface="대명체 보통" panose="020B0600000101010101" pitchFamily="50" charset="-127"/>
                           <a:cs typeface="+mn-cs"/>
                         </a:rPr>
-                        <a:t>4,491</a:t>
+                        <a:t>3,802</a:t>
                       </a:r>
                     </a:p>
                   </a:txBody>
@@ -16049,7 +16049,7 @@
                           <a:ea typeface="대명체 보통" panose="020B0600000101010101" pitchFamily="50" charset="-127"/>
                           <a:cs typeface="+mn-cs"/>
                         </a:rPr>
-                        <a:t>134%</a:t>
+                        <a:t>104%</a:t>
                       </a:r>
                     </a:p>
                   </a:txBody>
@@ -16266,7 +16266,7 @@
                           <a:ea typeface="대명체 보통" panose="020B0600000101010101" pitchFamily="50" charset="-127"/>
                           <a:cs typeface="+mn-cs"/>
                         </a:rPr>
-                        <a:t>69,102</a:t>
+                        <a:t>68,717</a:t>
                       </a:r>
                     </a:p>
                   </a:txBody>
@@ -16376,7 +16376,7 @@
                           <a:ea typeface="대명체 보통" panose="020B0600000101010101" pitchFamily="50" charset="-127"/>
                           <a:cs typeface="+mn-cs"/>
                         </a:rPr>
-                        <a:t>8,459</a:t>
+                        <a:t>8,074</a:t>
                       </a:r>
                     </a:p>
                   </a:txBody>
@@ -16435,7 +16435,7 @@
                           <a:ea typeface="대명체 보통" panose="020B0600000101010101" pitchFamily="50" charset="-127"/>
                           <a:cs typeface="+mn-cs"/>
                         </a:rPr>
-                        <a:t>114%</a:t>
+                        <a:t>113%</a:t>
                       </a:r>
                     </a:p>
                   </a:txBody>
@@ -16494,7 +16494,7 @@
                           <a:ea typeface="대명체 보통" panose="020B0600000101010101" pitchFamily="50" charset="-127"/>
                           <a:cs typeface="+mn-cs"/>
                         </a:rPr>
-                        <a:t>48,290</a:t>
+                        <a:t>48,595</a:t>
                       </a:r>
                     </a:p>
                   </a:txBody>
@@ -16604,7 +16604,7 @@
                           <a:ea typeface="대명체 보통" panose="020B0600000101010101" pitchFamily="50" charset="-127"/>
                           <a:cs typeface="+mn-cs"/>
                         </a:rPr>
-                        <a:t>20,812</a:t>
+                        <a:t>20,122</a:t>
                       </a:r>
                     </a:p>
                   </a:txBody>
@@ -16663,7 +16663,7 @@
                           <a:ea typeface="대명체 보통" panose="020B0600000101010101" pitchFamily="50" charset="-127"/>
                           <a:cs typeface="+mn-cs"/>
                         </a:rPr>
-                        <a:t>43%</a:t>
+                        <a:t>41%</a:t>
                       </a:r>
                     </a:p>
                   </a:txBody>
@@ -16999,7 +16999,7 @@
                           <a:ea typeface="대명체 보통" panose="020B0600000101010101" pitchFamily="50" charset="-127"/>
                           <a:cs typeface="+mn-cs"/>
                         </a:rPr>
-                        <a:t>868</a:t>
+                        <a:t>821</a:t>
                       </a:r>
                       <a:endParaRPr lang="en-US" altLang="ko-KR" sz="700" b="0" i="0" u="none" strike="noStrike" kern="1200" dirty="0">
                         <a:solidFill>
@@ -17126,7 +17126,7 @@
                           <a:ea typeface="대명체 보통" panose="020B0600000101010101" pitchFamily="50" charset="-127"/>
                           <a:cs typeface="+mn-cs"/>
                         </a:rPr>
-                        <a:t>348</a:t>
+                        <a:t>301</a:t>
                       </a:r>
                       <a:endParaRPr lang="en-US" altLang="ko-KR" sz="700" b="0" i="0" u="none" strike="noStrike" kern="1200" dirty="0">
                         <a:solidFill>
@@ -17198,7 +17198,7 @@
                           <a:ea typeface="대명체 보통" panose="020B0600000101010101" pitchFamily="50" charset="-127"/>
                           <a:cs typeface="+mn-cs"/>
                         </a:rPr>
-                        <a:t>167%</a:t>
+                        <a:t>158%</a:t>
                       </a:r>
                     </a:p>
                   </a:txBody>
@@ -17261,7 +17261,7 @@
                           <a:ea typeface="대명체 보통" panose="020B0600000101010101" pitchFamily="50" charset="-127"/>
                           <a:cs typeface="+mn-cs"/>
                         </a:rPr>
-                        <a:t>450</a:t>
+                        <a:t>452</a:t>
                       </a:r>
                       <a:endParaRPr lang="en-US" altLang="ko-KR" sz="700" b="0" i="0" u="none" strike="noStrike" kern="1200" dirty="0">
                         <a:solidFill>
@@ -17388,7 +17388,7 @@
                           <a:ea typeface="대명체 보통" panose="020B0600000101010101" pitchFamily="50" charset="-127"/>
                           <a:cs typeface="+mn-cs"/>
                         </a:rPr>
-                        <a:t>418</a:t>
+                        <a:t>369</a:t>
                       </a:r>
                     </a:p>
                   </a:txBody>
@@ -17451,7 +17451,7 @@
                           <a:ea typeface="대명체 보통" panose="020B0600000101010101" pitchFamily="50" charset="-127"/>
                           <a:cs typeface="+mn-cs"/>
                         </a:rPr>
-                        <a:t>93%</a:t>
+                        <a:t>82%</a:t>
                       </a:r>
                     </a:p>
                   </a:txBody>
@@ -17680,7 +17680,7 @@
                           <a:ea typeface="대명체 보통" panose="020B0600000101010101" pitchFamily="50" charset="-127"/>
                           <a:cs typeface="+mn-cs"/>
                         </a:rPr>
-                        <a:t>6,649</a:t>
+                        <a:t>6,602</a:t>
                       </a:r>
                     </a:p>
                   </a:txBody>
@@ -17798,7 +17798,7 @@
                           <a:ea typeface="대명체 보통" panose="020B0600000101010101" pitchFamily="50" charset="-127"/>
                           <a:cs typeface="+mn-cs"/>
                         </a:rPr>
-                        <a:t>2,260</a:t>
+                        <a:t>2,213</a:t>
                       </a:r>
                       <a:endParaRPr lang="en-US" altLang="ko-KR" sz="700" b="0" i="0" u="none" strike="noStrike" kern="1200" dirty="0">
                         <a:solidFill>
@@ -17870,7 +17870,7 @@
                           <a:ea typeface="대명체 보통" panose="020B0600000101010101" pitchFamily="50" charset="-127"/>
                           <a:cs typeface="+mn-cs"/>
                         </a:rPr>
-                        <a:t>151%</a:t>
+                        <a:t>150%</a:t>
                       </a:r>
                     </a:p>
                   </a:txBody>
@@ -17933,7 +17933,7 @@
                           <a:ea typeface="대명체 보통" panose="020B0600000101010101" pitchFamily="50" charset="-127"/>
                           <a:cs typeface="+mn-cs"/>
                         </a:rPr>
-                        <a:t>4,043</a:t>
+                        <a:t>4,045</a:t>
                       </a:r>
                     </a:p>
                   </a:txBody>
@@ -18051,7 +18051,7 @@
                           <a:ea typeface="대명체 보통" panose="020B0600000101010101" pitchFamily="50" charset="-127"/>
                           <a:cs typeface="+mn-cs"/>
                         </a:rPr>
-                        <a:t>2,606</a:t>
+                        <a:t>2,557</a:t>
                       </a:r>
                     </a:p>
                   </a:txBody>
@@ -18114,7 +18114,7 @@
                           <a:ea typeface="대명체 보통" panose="020B0600000101010101" pitchFamily="50" charset="-127"/>
                           <a:cs typeface="+mn-cs"/>
                         </a:rPr>
-                        <a:t>64%</a:t>
+                        <a:t>63%</a:t>
                       </a:r>
                     </a:p>
                   </a:txBody>

--- a/docs/data/세일즈마케팅_예상매출현황.pptx
+++ b/docs/data/세일즈마케팅_예상매출현황.pptx
@@ -12756,7 +12756,7 @@
                           <a:ea typeface="대명체 보통" panose="020B0600000101010101" pitchFamily="50" charset="-127"/>
                           <a:cs typeface="+mn-cs"/>
                         </a:rPr>
-                        <a:t>16,815</a:t>
+                        <a:t>16,736</a:t>
                       </a:r>
                     </a:p>
                   </a:txBody>
@@ -12882,7 +12882,7 @@
                           <a:ea typeface="대명체 보통" panose="020B0600000101010101" pitchFamily="50" charset="-127"/>
                           <a:cs typeface="+mn-cs"/>
                         </a:rPr>
-                        <a:t>827</a:t>
+                        <a:t>748</a:t>
                       </a:r>
                     </a:p>
                   </a:txBody>
@@ -13016,7 +13016,7 @@
                           <a:ea typeface="대명체 보통" panose="020B0600000101010101" pitchFamily="50" charset="-127"/>
                           <a:cs typeface="+mn-cs"/>
                         </a:rPr>
-                        <a:t>10,854</a:t>
+                        <a:t>11,010</a:t>
                       </a:r>
                     </a:p>
                   </a:txBody>
@@ -13142,7 +13142,7 @@
                           <a:ea typeface="대명체 보통" panose="020B0600000101010101" pitchFamily="50" charset="-127"/>
                           <a:cs typeface="+mn-cs"/>
                         </a:rPr>
-                        <a:t>5,961</a:t>
+                        <a:t>5,727</a:t>
                       </a:r>
                     </a:p>
                   </a:txBody>
@@ -13209,7 +13209,7 @@
                           <a:ea typeface="대명체 보통" panose="020B0600000101010101" pitchFamily="50" charset="-127"/>
                           <a:cs typeface="+mn-cs"/>
                         </a:rPr>
-                        <a:t>55%</a:t>
+                        <a:t>52%</a:t>
                       </a:r>
                     </a:p>
                   </a:txBody>
@@ -13450,7 +13450,7 @@
                           <a:ea typeface="대명체 보통" panose="020B0600000101010101" pitchFamily="50" charset="-127"/>
                           <a:cs typeface="+mn-cs"/>
                         </a:rPr>
-                        <a:t>175,614</a:t>
+                        <a:t>175,535</a:t>
                       </a:r>
                     </a:p>
                   </a:txBody>
@@ -13576,7 +13576,7 @@
                           <a:ea typeface="대명체 보통" panose="020B0600000101010101" pitchFamily="50" charset="-127"/>
                           <a:cs typeface="+mn-cs"/>
                         </a:rPr>
-                        <a:t>20,598</a:t>
+                        <a:t>20,519</a:t>
                       </a:r>
                     </a:p>
                   </a:txBody>
@@ -13710,7 +13710,7 @@
                           <a:ea typeface="대명체 보통" panose="020B0600000101010101" pitchFamily="50" charset="-127"/>
                           <a:cs typeface="+mn-cs"/>
                         </a:rPr>
-                        <a:t>124,251</a:t>
+                        <a:t>124,407</a:t>
                       </a:r>
                     </a:p>
                   </a:txBody>
@@ -13836,7 +13836,7 @@
                           <a:ea typeface="대명체 보통" panose="020B0600000101010101" pitchFamily="50" charset="-127"/>
                           <a:cs typeface="+mn-cs"/>
                         </a:rPr>
-                        <a:t>51,363</a:t>
+                        <a:t>51,128</a:t>
                       </a:r>
                     </a:p>
                   </a:txBody>
@@ -14237,7 +14237,7 @@
                           <a:ea typeface="대명체 보통" panose="020B0600000101010101" pitchFamily="50" charset="-127"/>
                           <a:cs typeface="+mn-cs"/>
                         </a:rPr>
-                        <a:t>8,538</a:t>
+                        <a:t>8,527</a:t>
                       </a:r>
                     </a:p>
                   </a:txBody>
@@ -14355,7 +14355,7 @@
                           <a:ea typeface="대명체 보통" panose="020B0600000101010101" pitchFamily="50" charset="-127"/>
                           <a:cs typeface="+mn-cs"/>
                         </a:rPr>
-                        <a:t>-1,072</a:t>
+                        <a:t>-1,084</a:t>
                       </a:r>
                       <a:endParaRPr lang="en-US" altLang="ko-KR" sz="700" b="0" i="0" u="none" strike="noStrike" kern="1200" dirty="0">
                         <a:solidFill>
@@ -14490,7 +14490,7 @@
                           <a:ea typeface="대명체 보통" panose="020B0600000101010101" pitchFamily="50" charset="-127"/>
                           <a:cs typeface="+mn-cs"/>
                         </a:rPr>
-                        <a:t>6,748</a:t>
+                        <a:t>6,835</a:t>
                       </a:r>
                     </a:p>
                   </a:txBody>
@@ -14608,7 +14608,7 @@
                           <a:ea typeface="대명체 보통" panose="020B0600000101010101" pitchFamily="50" charset="-127"/>
                           <a:cs typeface="+mn-cs"/>
                         </a:rPr>
-                        <a:t>1,791</a:t>
+                        <a:t>1,692</a:t>
                       </a:r>
                     </a:p>
                   </a:txBody>
@@ -14671,7 +14671,7 @@
                           <a:ea typeface="대명체 보통" panose="020B0600000101010101" pitchFamily="50" charset="-127"/>
                           <a:cs typeface="+mn-cs"/>
                         </a:rPr>
-                        <a:t>27%</a:t>
+                        <a:t>25%</a:t>
                       </a:r>
                     </a:p>
                   </a:txBody>
@@ -14900,7 +14900,7 @@
                           <a:ea typeface="대명체 보통" panose="020B0600000101010101" pitchFamily="50" charset="-127"/>
                           <a:cs typeface="+mn-cs"/>
                         </a:rPr>
-                        <a:t>100,295</a:t>
+                        <a:t>100,283</a:t>
                       </a:r>
                     </a:p>
                   </a:txBody>
@@ -15018,7 +15018,7 @@
                           <a:ea typeface="대명체 보통" panose="020B0600000101010101" pitchFamily="50" charset="-127"/>
                           <a:cs typeface="+mn-cs"/>
                         </a:rPr>
-                        <a:t>10,310</a:t>
+                        <a:t>10,299</a:t>
                       </a:r>
                     </a:p>
                   </a:txBody>
@@ -15144,7 +15144,7 @@
                           <a:ea typeface="대명체 보통" panose="020B0600000101010101" pitchFamily="50" charset="-127"/>
                           <a:cs typeface="+mn-cs"/>
                         </a:rPr>
-                        <a:t>71,611</a:t>
+                        <a:t>71,698</a:t>
                       </a:r>
                     </a:p>
                   </a:txBody>
@@ -15262,7 +15262,7 @@
                           <a:ea typeface="대명체 보통" panose="020B0600000101010101" pitchFamily="50" charset="-127"/>
                           <a:cs typeface="+mn-cs"/>
                         </a:rPr>
-                        <a:t>28,684</a:t>
+                        <a:t>28,585</a:t>
                       </a:r>
                     </a:p>
                   </a:txBody>
@@ -15643,7 +15643,7 @@
                           <a:ea typeface="대명체 보통" panose="020B0600000101010101" pitchFamily="50" charset="-127"/>
                           <a:cs typeface="+mn-cs"/>
                         </a:rPr>
-                        <a:t>7,456</a:t>
+                        <a:t>7,383</a:t>
                       </a:r>
                     </a:p>
                   </a:txBody>
@@ -15753,7 +15753,7 @@
                           <a:ea typeface="대명체 보통" panose="020B0600000101010101" pitchFamily="50" charset="-127"/>
                           <a:cs typeface="+mn-cs"/>
                         </a:rPr>
-                        <a:t>1,597</a:t>
+                        <a:t>1,524</a:t>
                       </a:r>
                       <a:endParaRPr lang="en-US" altLang="ko-KR" sz="700" b="0" i="0" u="none" strike="noStrike" kern="1200" dirty="0">
                         <a:solidFill>
@@ -15821,7 +15821,7 @@
                           <a:ea typeface="대명체 보통" panose="020B0600000101010101" pitchFamily="50" charset="-127"/>
                           <a:cs typeface="+mn-cs"/>
                         </a:rPr>
-                        <a:t>127%</a:t>
+                        <a:t>126%</a:t>
                       </a:r>
                     </a:p>
                   </a:txBody>
@@ -15880,7 +15880,7 @@
                           <a:ea typeface="대명체 보통" panose="020B0600000101010101" pitchFamily="50" charset="-127"/>
                           <a:cs typeface="+mn-cs"/>
                         </a:rPr>
-                        <a:t>3,654</a:t>
+                        <a:t>3,714</a:t>
                       </a:r>
                     </a:p>
                   </a:txBody>
@@ -15990,7 +15990,7 @@
                           <a:ea typeface="대명체 보통" panose="020B0600000101010101" pitchFamily="50" charset="-127"/>
                           <a:cs typeface="+mn-cs"/>
                         </a:rPr>
-                        <a:t>3,802</a:t>
+                        <a:t>3,669</a:t>
                       </a:r>
                     </a:p>
                   </a:txBody>
@@ -16049,7 +16049,7 @@
                           <a:ea typeface="대명체 보통" panose="020B0600000101010101" pitchFamily="50" charset="-127"/>
                           <a:cs typeface="+mn-cs"/>
                         </a:rPr>
-                        <a:t>104%</a:t>
+                        <a:t>99%</a:t>
                       </a:r>
                     </a:p>
                   </a:txBody>
@@ -16266,7 +16266,7 @@
                           <a:ea typeface="대명체 보통" panose="020B0600000101010101" pitchFamily="50" charset="-127"/>
                           <a:cs typeface="+mn-cs"/>
                         </a:rPr>
-                        <a:t>68,717</a:t>
+                        <a:t>68,644</a:t>
                       </a:r>
                     </a:p>
                   </a:txBody>
@@ -16376,7 +16376,7 @@
                           <a:ea typeface="대명체 보통" panose="020B0600000101010101" pitchFamily="50" charset="-127"/>
                           <a:cs typeface="+mn-cs"/>
                         </a:rPr>
-                        <a:t>8,074</a:t>
+                        <a:t>8,002</a:t>
                       </a:r>
                     </a:p>
                   </a:txBody>
@@ -16494,7 +16494,7 @@
                           <a:ea typeface="대명체 보통" panose="020B0600000101010101" pitchFamily="50" charset="-127"/>
                           <a:cs typeface="+mn-cs"/>
                         </a:rPr>
-                        <a:t>48,595</a:t>
+                        <a:t>48,655</a:t>
                       </a:r>
                     </a:p>
                   </a:txBody>
@@ -16604,7 +16604,7 @@
                           <a:ea typeface="대명체 보통" panose="020B0600000101010101" pitchFamily="50" charset="-127"/>
                           <a:cs typeface="+mn-cs"/>
                         </a:rPr>
-                        <a:t>20,122</a:t>
+                        <a:t>19,990</a:t>
                       </a:r>
                     </a:p>
                   </a:txBody>
@@ -16999,7 +16999,7 @@
                           <a:ea typeface="대명체 보통" panose="020B0600000101010101" pitchFamily="50" charset="-127"/>
                           <a:cs typeface="+mn-cs"/>
                         </a:rPr>
-                        <a:t>821</a:t>
+                        <a:t>827</a:t>
                       </a:r>
                       <a:endParaRPr lang="en-US" altLang="ko-KR" sz="700" b="0" i="0" u="none" strike="noStrike" kern="1200" dirty="0">
                         <a:solidFill>
@@ -17126,7 +17126,7 @@
                           <a:ea typeface="대명체 보통" panose="020B0600000101010101" pitchFamily="50" charset="-127"/>
                           <a:cs typeface="+mn-cs"/>
                         </a:rPr>
-                        <a:t>301</a:t>
+                        <a:t>307</a:t>
                       </a:r>
                       <a:endParaRPr lang="en-US" altLang="ko-KR" sz="700" b="0" i="0" u="none" strike="noStrike" kern="1200" dirty="0">
                         <a:solidFill>
@@ -17198,7 +17198,7 @@
                           <a:ea typeface="대명체 보통" panose="020B0600000101010101" pitchFamily="50" charset="-127"/>
                           <a:cs typeface="+mn-cs"/>
                         </a:rPr>
-                        <a:t>158%</a:t>
+                        <a:t>159%</a:t>
                       </a:r>
                     </a:p>
                   </a:txBody>
@@ -17261,7 +17261,7 @@
                           <a:ea typeface="대명체 보통" panose="020B0600000101010101" pitchFamily="50" charset="-127"/>
                           <a:cs typeface="+mn-cs"/>
                         </a:rPr>
-                        <a:t>452</a:t>
+                        <a:t>461</a:t>
                       </a:r>
                       <a:endParaRPr lang="en-US" altLang="ko-KR" sz="700" b="0" i="0" u="none" strike="noStrike" kern="1200" dirty="0">
                         <a:solidFill>
@@ -17388,7 +17388,7 @@
                           <a:ea typeface="대명체 보통" panose="020B0600000101010101" pitchFamily="50" charset="-127"/>
                           <a:cs typeface="+mn-cs"/>
                         </a:rPr>
-                        <a:t>369</a:t>
+                        <a:t>366</a:t>
                       </a:r>
                     </a:p>
                   </a:txBody>
@@ -17451,7 +17451,7 @@
                           <a:ea typeface="대명체 보통" panose="020B0600000101010101" pitchFamily="50" charset="-127"/>
                           <a:cs typeface="+mn-cs"/>
                         </a:rPr>
-                        <a:t>82%</a:t>
+                        <a:t>79%</a:t>
                       </a:r>
                     </a:p>
                   </a:txBody>
@@ -17680,7 +17680,7 @@
                           <a:ea typeface="대명체 보통" panose="020B0600000101010101" pitchFamily="50" charset="-127"/>
                           <a:cs typeface="+mn-cs"/>
                         </a:rPr>
-                        <a:t>6,602</a:t>
+                        <a:t>6,608</a:t>
                       </a:r>
                     </a:p>
                   </a:txBody>
@@ -17798,7 +17798,7 @@
                           <a:ea typeface="대명체 보통" panose="020B0600000101010101" pitchFamily="50" charset="-127"/>
                           <a:cs typeface="+mn-cs"/>
                         </a:rPr>
-                        <a:t>2,213</a:t>
+                        <a:t>2,218</a:t>
                       </a:r>
                       <a:endParaRPr lang="en-US" altLang="ko-KR" sz="700" b="0" i="0" u="none" strike="noStrike" kern="1200" dirty="0">
                         <a:solidFill>
@@ -17870,7 +17870,7 @@
                           <a:ea typeface="대명체 보통" panose="020B0600000101010101" pitchFamily="50" charset="-127"/>
                           <a:cs typeface="+mn-cs"/>
                         </a:rPr>
-                        <a:t>150%</a:t>
+                        <a:t>151%</a:t>
                       </a:r>
                     </a:p>
                   </a:txBody>
@@ -17933,7 +17933,7 @@
                           <a:ea typeface="대명체 보통" panose="020B0600000101010101" pitchFamily="50" charset="-127"/>
                           <a:cs typeface="+mn-cs"/>
                         </a:rPr>
-                        <a:t>4,045</a:t>
+                        <a:t>4,054</a:t>
                       </a:r>
                     </a:p>
                   </a:txBody>
@@ -18051,7 +18051,7 @@
                           <a:ea typeface="대명체 보통" panose="020B0600000101010101" pitchFamily="50" charset="-127"/>
                           <a:cs typeface="+mn-cs"/>
                         </a:rPr>
-                        <a:t>2,557</a:t>
+                        <a:t>2,554</a:t>
                       </a:r>
                     </a:p>
                   </a:txBody>

--- a/docs/data/세일즈마케팅_예상매출현황.pptx
+++ b/docs/data/세일즈마케팅_예상매출현황.pptx
@@ -12756,7 +12756,7 @@
                           <a:ea typeface="대명체 보통" panose="020B0600000101010101" pitchFamily="50" charset="-127"/>
                           <a:cs typeface="+mn-cs"/>
                         </a:rPr>
-                        <a:t>16,736</a:t>
+                        <a:t>16,735</a:t>
                       </a:r>
                     </a:p>
                   </a:txBody>
@@ -12882,7 +12882,7 @@
                           <a:ea typeface="대명체 보통" panose="020B0600000101010101" pitchFamily="50" charset="-127"/>
                           <a:cs typeface="+mn-cs"/>
                         </a:rPr>
-                        <a:t>748</a:t>
+                        <a:t>747</a:t>
                       </a:r>
                     </a:p>
                   </a:txBody>
@@ -13142,7 +13142,7 @@
                           <a:ea typeface="대명체 보통" panose="020B0600000101010101" pitchFamily="50" charset="-127"/>
                           <a:cs typeface="+mn-cs"/>
                         </a:rPr>
-                        <a:t>5,727</a:t>
+                        <a:t>5,726</a:t>
                       </a:r>
                     </a:p>
                   </a:txBody>
@@ -13450,7 +13450,7 @@
                           <a:ea typeface="대명체 보통" panose="020B0600000101010101" pitchFamily="50" charset="-127"/>
                           <a:cs typeface="+mn-cs"/>
                         </a:rPr>
-                        <a:t>175,535</a:t>
+                        <a:t>175,534</a:t>
                       </a:r>
                     </a:p>
                   </a:txBody>
@@ -13576,7 +13576,7 @@
                           <a:ea typeface="대명체 보통" panose="020B0600000101010101" pitchFamily="50" charset="-127"/>
                           <a:cs typeface="+mn-cs"/>
                         </a:rPr>
-                        <a:t>20,519</a:t>
+                        <a:t>20,518</a:t>
                       </a:r>
                     </a:p>
                   </a:txBody>
@@ -13836,7 +13836,7 @@
                           <a:ea typeface="대명체 보통" panose="020B0600000101010101" pitchFamily="50" charset="-127"/>
                           <a:cs typeface="+mn-cs"/>
                         </a:rPr>
-                        <a:t>51,128</a:t>
+                        <a:t>51,127</a:t>
                       </a:r>
                     </a:p>
                   </a:txBody>
@@ -14237,7 +14237,7 @@
                           <a:ea typeface="대명체 보통" panose="020B0600000101010101" pitchFamily="50" charset="-127"/>
                           <a:cs typeface="+mn-cs"/>
                         </a:rPr>
-                        <a:t>8,527</a:t>
+                        <a:t>8,510</a:t>
                       </a:r>
                     </a:p>
                   </a:txBody>
@@ -14355,7 +14355,7 @@
                           <a:ea typeface="대명체 보통" panose="020B0600000101010101" pitchFamily="50" charset="-127"/>
                           <a:cs typeface="+mn-cs"/>
                         </a:rPr>
-                        <a:t>-1,084</a:t>
+                        <a:t>-1,101</a:t>
                       </a:r>
                       <a:endParaRPr lang="en-US" altLang="ko-KR" sz="700" b="0" i="0" u="none" strike="noStrike" kern="1200" dirty="0">
                         <a:solidFill>
@@ -14608,7 +14608,7 @@
                           <a:ea typeface="대명체 보통" panose="020B0600000101010101" pitchFamily="50" charset="-127"/>
                           <a:cs typeface="+mn-cs"/>
                         </a:rPr>
-                        <a:t>1,692</a:t>
+                        <a:t>1,675</a:t>
                       </a:r>
                     </a:p>
                   </a:txBody>
@@ -14900,7 +14900,7 @@
                           <a:ea typeface="대명체 보통" panose="020B0600000101010101" pitchFamily="50" charset="-127"/>
                           <a:cs typeface="+mn-cs"/>
                         </a:rPr>
-                        <a:t>100,283</a:t>
+                        <a:t>100,266</a:t>
                       </a:r>
                     </a:p>
                   </a:txBody>
@@ -15018,7 +15018,7 @@
                           <a:ea typeface="대명체 보통" panose="020B0600000101010101" pitchFamily="50" charset="-127"/>
                           <a:cs typeface="+mn-cs"/>
                         </a:rPr>
-                        <a:t>10,299</a:t>
+                        <a:t>10,282</a:t>
                       </a:r>
                     </a:p>
                   </a:txBody>
@@ -15262,7 +15262,7 @@
                           <a:ea typeface="대명체 보통" panose="020B0600000101010101" pitchFamily="50" charset="-127"/>
                           <a:cs typeface="+mn-cs"/>
                         </a:rPr>
-                        <a:t>28,585</a:t>
+                        <a:t>28,568</a:t>
                       </a:r>
                     </a:p>
                   </a:txBody>
@@ -15643,7 +15643,7 @@
                           <a:ea typeface="대명체 보통" panose="020B0600000101010101" pitchFamily="50" charset="-127"/>
                           <a:cs typeface="+mn-cs"/>
                         </a:rPr>
-                        <a:t>7,383</a:t>
+                        <a:t>7,384</a:t>
                       </a:r>
                     </a:p>
                   </a:txBody>
@@ -15753,7 +15753,7 @@
                           <a:ea typeface="대명체 보통" panose="020B0600000101010101" pitchFamily="50" charset="-127"/>
                           <a:cs typeface="+mn-cs"/>
                         </a:rPr>
-                        <a:t>1,524</a:t>
+                        <a:t>1,525</a:t>
                       </a:r>
                       <a:endParaRPr lang="en-US" altLang="ko-KR" sz="700" b="0" i="0" u="none" strike="noStrike" kern="1200" dirty="0">
                         <a:solidFill>
@@ -15990,7 +15990,7 @@
                           <a:ea typeface="대명체 보통" panose="020B0600000101010101" pitchFamily="50" charset="-127"/>
                           <a:cs typeface="+mn-cs"/>
                         </a:rPr>
-                        <a:t>3,669</a:t>
+                        <a:t>3,670</a:t>
                       </a:r>
                     </a:p>
                   </a:txBody>
@@ -16266,7 +16266,7 @@
                           <a:ea typeface="대명체 보통" panose="020B0600000101010101" pitchFamily="50" charset="-127"/>
                           <a:cs typeface="+mn-cs"/>
                         </a:rPr>
-                        <a:t>68,644</a:t>
+                        <a:t>68,645</a:t>
                       </a:r>
                     </a:p>
                   </a:txBody>
@@ -16376,7 +16376,7 @@
                           <a:ea typeface="대명체 보통" panose="020B0600000101010101" pitchFamily="50" charset="-127"/>
                           <a:cs typeface="+mn-cs"/>
                         </a:rPr>
-                        <a:t>8,002</a:t>
+                        <a:t>8,003</a:t>
                       </a:r>
                     </a:p>
                   </a:txBody>
@@ -16604,7 +16604,7 @@
                           <a:ea typeface="대명체 보통" panose="020B0600000101010101" pitchFamily="50" charset="-127"/>
                           <a:cs typeface="+mn-cs"/>
                         </a:rPr>
-                        <a:t>19,990</a:t>
+                        <a:t>19,991</a:t>
                       </a:r>
                     </a:p>
                   </a:txBody>
@@ -16999,7 +16999,7 @@
                           <a:ea typeface="대명체 보통" panose="020B0600000101010101" pitchFamily="50" charset="-127"/>
                           <a:cs typeface="+mn-cs"/>
                         </a:rPr>
-                        <a:t>827</a:t>
+                        <a:t>842</a:t>
                       </a:r>
                       <a:endParaRPr lang="en-US" altLang="ko-KR" sz="700" b="0" i="0" u="none" strike="noStrike" kern="1200" dirty="0">
                         <a:solidFill>
@@ -17126,7 +17126,7 @@
                           <a:ea typeface="대명체 보통" panose="020B0600000101010101" pitchFamily="50" charset="-127"/>
                           <a:cs typeface="+mn-cs"/>
                         </a:rPr>
-                        <a:t>307</a:t>
+                        <a:t>322</a:t>
                       </a:r>
                       <a:endParaRPr lang="en-US" altLang="ko-KR" sz="700" b="0" i="0" u="none" strike="noStrike" kern="1200" dirty="0">
                         <a:solidFill>
@@ -17198,7 +17198,7 @@
                           <a:ea typeface="대명체 보통" panose="020B0600000101010101" pitchFamily="50" charset="-127"/>
                           <a:cs typeface="+mn-cs"/>
                         </a:rPr>
-                        <a:t>159%</a:t>
+                        <a:t>162%</a:t>
                       </a:r>
                     </a:p>
                   </a:txBody>
@@ -17388,7 +17388,7 @@
                           <a:ea typeface="대명체 보통" panose="020B0600000101010101" pitchFamily="50" charset="-127"/>
                           <a:cs typeface="+mn-cs"/>
                         </a:rPr>
-                        <a:t>366</a:t>
+                        <a:t>381</a:t>
                       </a:r>
                     </a:p>
                   </a:txBody>
@@ -17451,7 +17451,7 @@
                           <a:ea typeface="대명체 보통" panose="020B0600000101010101" pitchFamily="50" charset="-127"/>
                           <a:cs typeface="+mn-cs"/>
                         </a:rPr>
-                        <a:t>79%</a:t>
+                        <a:t>83%</a:t>
                       </a:r>
                     </a:p>
                   </a:txBody>
@@ -17680,7 +17680,7 @@
                           <a:ea typeface="대명체 보통" panose="020B0600000101010101" pitchFamily="50" charset="-127"/>
                           <a:cs typeface="+mn-cs"/>
                         </a:rPr>
-                        <a:t>6,608</a:t>
+                        <a:t>6,623</a:t>
                       </a:r>
                     </a:p>
                   </a:txBody>
@@ -17798,7 +17798,7 @@
                           <a:ea typeface="대명체 보통" panose="020B0600000101010101" pitchFamily="50" charset="-127"/>
                           <a:cs typeface="+mn-cs"/>
                         </a:rPr>
-                        <a:t>2,218</a:t>
+                        <a:t>2,233</a:t>
                       </a:r>
                       <a:endParaRPr lang="en-US" altLang="ko-KR" sz="700" b="0" i="0" u="none" strike="noStrike" kern="1200" dirty="0">
                         <a:solidFill>
@@ -18051,7 +18051,7 @@
                           <a:ea typeface="대명체 보통" panose="020B0600000101010101" pitchFamily="50" charset="-127"/>
                           <a:cs typeface="+mn-cs"/>
                         </a:rPr>
-                        <a:t>2,554</a:t>
+                        <a:t>2,569</a:t>
                       </a:r>
                     </a:p>
                   </a:txBody>

--- a/docs/data/세일즈마케팅_예상매출현황.pptx
+++ b/docs/data/세일즈마케팅_예상매출현황.pptx
@@ -12756,7 +12756,7 @@
                           <a:ea typeface="대명체 보통" panose="020B0600000101010101" pitchFamily="50" charset="-127"/>
                           <a:cs typeface="+mn-cs"/>
                         </a:rPr>
-                        <a:t>16,735</a:t>
+                        <a:t>16,589</a:t>
                       </a:r>
                     </a:p>
                   </a:txBody>
@@ -12882,7 +12882,7 @@
                           <a:ea typeface="대명체 보통" panose="020B0600000101010101" pitchFamily="50" charset="-127"/>
                           <a:cs typeface="+mn-cs"/>
                         </a:rPr>
-                        <a:t>747</a:t>
+                        <a:t>600</a:t>
                       </a:r>
                     </a:p>
                   </a:txBody>
@@ -12949,7 +12949,7 @@
                           <a:ea typeface="대명체 보통" panose="020B0600000101010101" pitchFamily="50" charset="-127"/>
                           <a:cs typeface="+mn-cs"/>
                         </a:rPr>
-                        <a:t>105%</a:t>
+                        <a:t>104%</a:t>
                       </a:r>
                     </a:p>
                   </a:txBody>
@@ -13016,7 +13016,7 @@
                           <a:ea typeface="대명체 보통" panose="020B0600000101010101" pitchFamily="50" charset="-127"/>
                           <a:cs typeface="+mn-cs"/>
                         </a:rPr>
-                        <a:t>11,010</a:t>
+                        <a:t>11,152</a:t>
                       </a:r>
                     </a:p>
                   </a:txBody>
@@ -13142,7 +13142,7 @@
                           <a:ea typeface="대명체 보통" panose="020B0600000101010101" pitchFamily="50" charset="-127"/>
                           <a:cs typeface="+mn-cs"/>
                         </a:rPr>
-                        <a:t>5,726</a:t>
+                        <a:t>5,436</a:t>
                       </a:r>
                     </a:p>
                   </a:txBody>
@@ -13209,7 +13209,7 @@
                           <a:ea typeface="대명체 보통" panose="020B0600000101010101" pitchFamily="50" charset="-127"/>
                           <a:cs typeface="+mn-cs"/>
                         </a:rPr>
-                        <a:t>52%</a:t>
+                        <a:t>49%</a:t>
                       </a:r>
                     </a:p>
                   </a:txBody>
@@ -13450,7 +13450,7 @@
                           <a:ea typeface="대명체 보통" panose="020B0600000101010101" pitchFamily="50" charset="-127"/>
                           <a:cs typeface="+mn-cs"/>
                         </a:rPr>
-                        <a:t>175,534</a:t>
+                        <a:t>175,387</a:t>
                       </a:r>
                     </a:p>
                   </a:txBody>
@@ -13576,7 +13576,7 @@
                           <a:ea typeface="대명체 보통" panose="020B0600000101010101" pitchFamily="50" charset="-127"/>
                           <a:cs typeface="+mn-cs"/>
                         </a:rPr>
-                        <a:t>20,518</a:t>
+                        <a:t>20,371</a:t>
                       </a:r>
                     </a:p>
                   </a:txBody>
@@ -13710,7 +13710,7 @@
                           <a:ea typeface="대명체 보통" panose="020B0600000101010101" pitchFamily="50" charset="-127"/>
                           <a:cs typeface="+mn-cs"/>
                         </a:rPr>
-                        <a:t>124,407</a:t>
+                        <a:t>124,549</a:t>
                       </a:r>
                     </a:p>
                   </a:txBody>
@@ -13836,7 +13836,7 @@
                           <a:ea typeface="대명체 보통" panose="020B0600000101010101" pitchFamily="50" charset="-127"/>
                           <a:cs typeface="+mn-cs"/>
                         </a:rPr>
-                        <a:t>51,127</a:t>
+                        <a:t>50,838</a:t>
                       </a:r>
                     </a:p>
                   </a:txBody>
@@ -14237,7 +14237,7 @@
                           <a:ea typeface="대명체 보통" panose="020B0600000101010101" pitchFamily="50" charset="-127"/>
                           <a:cs typeface="+mn-cs"/>
                         </a:rPr>
-                        <a:t>8,510</a:t>
+                        <a:t>8,468</a:t>
                       </a:r>
                     </a:p>
                   </a:txBody>
@@ -14355,7 +14355,7 @@
                           <a:ea typeface="대명체 보통" panose="020B0600000101010101" pitchFamily="50" charset="-127"/>
                           <a:cs typeface="+mn-cs"/>
                         </a:rPr>
-                        <a:t>-1,101</a:t>
+                        <a:t>-1,143</a:t>
                       </a:r>
                       <a:endParaRPr lang="en-US" altLang="ko-KR" sz="700" b="0" i="0" u="none" strike="noStrike" kern="1200" dirty="0">
                         <a:solidFill>
@@ -14427,7 +14427,7 @@
                           <a:ea typeface="대명체 보통" panose="020B0600000101010101" pitchFamily="50" charset="-127"/>
                           <a:cs typeface="+mn-cs"/>
                         </a:rPr>
-                        <a:t>89%</a:t>
+                        <a:t>88%</a:t>
                       </a:r>
                     </a:p>
                   </a:txBody>
@@ -14490,7 +14490,7 @@
                           <a:ea typeface="대명체 보통" panose="020B0600000101010101" pitchFamily="50" charset="-127"/>
                           <a:cs typeface="+mn-cs"/>
                         </a:rPr>
-                        <a:t>6,835</a:t>
+                        <a:t>6,903</a:t>
                       </a:r>
                     </a:p>
                   </a:txBody>
@@ -14608,7 +14608,7 @@
                           <a:ea typeface="대명체 보통" panose="020B0600000101010101" pitchFamily="50" charset="-127"/>
                           <a:cs typeface="+mn-cs"/>
                         </a:rPr>
-                        <a:t>1,675</a:t>
+                        <a:t>1,565</a:t>
                       </a:r>
                     </a:p>
                   </a:txBody>
@@ -14671,7 +14671,7 @@
                           <a:ea typeface="대명체 보통" panose="020B0600000101010101" pitchFamily="50" charset="-127"/>
                           <a:cs typeface="+mn-cs"/>
                         </a:rPr>
-                        <a:t>25%</a:t>
+                        <a:t>23%</a:t>
                       </a:r>
                     </a:p>
                   </a:txBody>
@@ -14900,7 +14900,7 @@
                           <a:ea typeface="대명체 보통" panose="020B0600000101010101" pitchFamily="50" charset="-127"/>
                           <a:cs typeface="+mn-cs"/>
                         </a:rPr>
-                        <a:t>100,266</a:t>
+                        <a:t>100,224</a:t>
                       </a:r>
                     </a:p>
                   </a:txBody>
@@ -15018,7 +15018,7 @@
                           <a:ea typeface="대명체 보통" panose="020B0600000101010101" pitchFamily="50" charset="-127"/>
                           <a:cs typeface="+mn-cs"/>
                         </a:rPr>
-                        <a:t>10,282</a:t>
+                        <a:t>10,240</a:t>
                       </a:r>
                     </a:p>
                   </a:txBody>
@@ -15144,7 +15144,7 @@
                           <a:ea typeface="대명체 보통" panose="020B0600000101010101" pitchFamily="50" charset="-127"/>
                           <a:cs typeface="+mn-cs"/>
                         </a:rPr>
-                        <a:t>71,698</a:t>
+                        <a:t>71,766</a:t>
                       </a:r>
                     </a:p>
                   </a:txBody>
@@ -15262,7 +15262,7 @@
                           <a:ea typeface="대명체 보통" panose="020B0600000101010101" pitchFamily="50" charset="-127"/>
                           <a:cs typeface="+mn-cs"/>
                         </a:rPr>
-                        <a:t>28,568</a:t>
+                        <a:t>28,458</a:t>
                       </a:r>
                     </a:p>
                   </a:txBody>
@@ -15643,7 +15643,7 @@
                           <a:ea typeface="대명체 보통" panose="020B0600000101010101" pitchFamily="50" charset="-127"/>
                           <a:cs typeface="+mn-cs"/>
                         </a:rPr>
-                        <a:t>7,384</a:t>
+                        <a:t>7,294</a:t>
                       </a:r>
                     </a:p>
                   </a:txBody>
@@ -15753,7 +15753,7 @@
                           <a:ea typeface="대명체 보통" panose="020B0600000101010101" pitchFamily="50" charset="-127"/>
                           <a:cs typeface="+mn-cs"/>
                         </a:rPr>
-                        <a:t>1,525</a:t>
+                        <a:t>1,435</a:t>
                       </a:r>
                       <a:endParaRPr lang="en-US" altLang="ko-KR" sz="700" b="0" i="0" u="none" strike="noStrike" kern="1200" dirty="0">
                         <a:solidFill>
@@ -15821,7 +15821,7 @@
                           <a:ea typeface="대명체 보통" panose="020B0600000101010101" pitchFamily="50" charset="-127"/>
                           <a:cs typeface="+mn-cs"/>
                         </a:rPr>
-                        <a:t>126%</a:t>
+                        <a:t>124%</a:t>
                       </a:r>
                     </a:p>
                   </a:txBody>
@@ -15880,7 +15880,7 @@
                           <a:ea typeface="대명체 보통" panose="020B0600000101010101" pitchFamily="50" charset="-127"/>
                           <a:cs typeface="+mn-cs"/>
                         </a:rPr>
-                        <a:t>3,714</a:t>
+                        <a:t>3,778</a:t>
                       </a:r>
                     </a:p>
                   </a:txBody>
@@ -15990,7 +15990,7 @@
                           <a:ea typeface="대명체 보통" panose="020B0600000101010101" pitchFamily="50" charset="-127"/>
                           <a:cs typeface="+mn-cs"/>
                         </a:rPr>
-                        <a:t>3,670</a:t>
+                        <a:t>3,516</a:t>
                       </a:r>
                     </a:p>
                   </a:txBody>
@@ -16049,7 +16049,7 @@
                           <a:ea typeface="대명체 보통" panose="020B0600000101010101" pitchFamily="50" charset="-127"/>
                           <a:cs typeface="+mn-cs"/>
                         </a:rPr>
-                        <a:t>99%</a:t>
+                        <a:t>93%</a:t>
                       </a:r>
                     </a:p>
                   </a:txBody>
@@ -16266,7 +16266,7 @@
                           <a:ea typeface="대명체 보통" panose="020B0600000101010101" pitchFamily="50" charset="-127"/>
                           <a:cs typeface="+mn-cs"/>
                         </a:rPr>
-                        <a:t>68,645</a:t>
+                        <a:t>68,555</a:t>
                       </a:r>
                     </a:p>
                   </a:txBody>
@@ -16376,7 +16376,7 @@
                           <a:ea typeface="대명체 보통" panose="020B0600000101010101" pitchFamily="50" charset="-127"/>
                           <a:cs typeface="+mn-cs"/>
                         </a:rPr>
-                        <a:t>8,003</a:t>
+                        <a:t>7,912</a:t>
                       </a:r>
                     </a:p>
                   </a:txBody>
@@ -16494,7 +16494,7 @@
                           <a:ea typeface="대명체 보통" panose="020B0600000101010101" pitchFamily="50" charset="-127"/>
                           <a:cs typeface="+mn-cs"/>
                         </a:rPr>
-                        <a:t>48,655</a:t>
+                        <a:t>48,719</a:t>
                       </a:r>
                     </a:p>
                   </a:txBody>
@@ -16604,7 +16604,7 @@
                           <a:ea typeface="대명체 보통" panose="020B0600000101010101" pitchFamily="50" charset="-127"/>
                           <a:cs typeface="+mn-cs"/>
                         </a:rPr>
-                        <a:t>19,991</a:t>
+                        <a:t>19,836</a:t>
                       </a:r>
                     </a:p>
                   </a:txBody>
@@ -16999,7 +16999,7 @@
                           <a:ea typeface="대명체 보통" panose="020B0600000101010101" pitchFamily="50" charset="-127"/>
                           <a:cs typeface="+mn-cs"/>
                         </a:rPr>
-                        <a:t>842</a:t>
+                        <a:t>828</a:t>
                       </a:r>
                       <a:endParaRPr lang="en-US" altLang="ko-KR" sz="700" b="0" i="0" u="none" strike="noStrike" kern="1200" dirty="0">
                         <a:solidFill>
@@ -17126,7 +17126,7 @@
                           <a:ea typeface="대명체 보통" panose="020B0600000101010101" pitchFamily="50" charset="-127"/>
                           <a:cs typeface="+mn-cs"/>
                         </a:rPr>
-                        <a:t>322</a:t>
+                        <a:t>308</a:t>
                       </a:r>
                       <a:endParaRPr lang="en-US" altLang="ko-KR" sz="700" b="0" i="0" u="none" strike="noStrike" kern="1200" dirty="0">
                         <a:solidFill>
@@ -17198,7 +17198,7 @@
                           <a:ea typeface="대명체 보통" panose="020B0600000101010101" pitchFamily="50" charset="-127"/>
                           <a:cs typeface="+mn-cs"/>
                         </a:rPr>
-                        <a:t>162%</a:t>
+                        <a:t>159%</a:t>
                       </a:r>
                     </a:p>
                   </a:txBody>
@@ -17261,7 +17261,7 @@
                           <a:ea typeface="대명체 보통" panose="020B0600000101010101" pitchFamily="50" charset="-127"/>
                           <a:cs typeface="+mn-cs"/>
                         </a:rPr>
-                        <a:t>461</a:t>
+                        <a:t>472</a:t>
                       </a:r>
                       <a:endParaRPr lang="en-US" altLang="ko-KR" sz="700" b="0" i="0" u="none" strike="noStrike" kern="1200" dirty="0">
                         <a:solidFill>
@@ -17388,7 +17388,7 @@
                           <a:ea typeface="대명체 보통" panose="020B0600000101010101" pitchFamily="50" charset="-127"/>
                           <a:cs typeface="+mn-cs"/>
                         </a:rPr>
-                        <a:t>381</a:t>
+                        <a:t>356</a:t>
                       </a:r>
                     </a:p>
                   </a:txBody>
@@ -17451,7 +17451,7 @@
                           <a:ea typeface="대명체 보통" panose="020B0600000101010101" pitchFamily="50" charset="-127"/>
                           <a:cs typeface="+mn-cs"/>
                         </a:rPr>
-                        <a:t>83%</a:t>
+                        <a:t>75%</a:t>
                       </a:r>
                     </a:p>
                   </a:txBody>
@@ -17680,7 +17680,7 @@
                           <a:ea typeface="대명체 보통" panose="020B0600000101010101" pitchFamily="50" charset="-127"/>
                           <a:cs typeface="+mn-cs"/>
                         </a:rPr>
-                        <a:t>6,623</a:t>
+                        <a:t>6,609</a:t>
                       </a:r>
                     </a:p>
                   </a:txBody>
@@ -17798,7 +17798,7 @@
                           <a:ea typeface="대명체 보통" panose="020B0600000101010101" pitchFamily="50" charset="-127"/>
                           <a:cs typeface="+mn-cs"/>
                         </a:rPr>
-                        <a:t>2,233</a:t>
+                        <a:t>2,219</a:t>
                       </a:r>
                       <a:endParaRPr lang="en-US" altLang="ko-KR" sz="700" b="0" i="0" u="none" strike="noStrike" kern="1200" dirty="0">
                         <a:solidFill>
@@ -17933,7 +17933,7 @@
                           <a:ea typeface="대명체 보통" panose="020B0600000101010101" pitchFamily="50" charset="-127"/>
                           <a:cs typeface="+mn-cs"/>
                         </a:rPr>
-                        <a:t>4,054</a:t>
+                        <a:t>4,065</a:t>
                       </a:r>
                     </a:p>
                   </a:txBody>
@@ -18051,7 +18051,7 @@
                           <a:ea typeface="대명체 보통" panose="020B0600000101010101" pitchFamily="50" charset="-127"/>
                           <a:cs typeface="+mn-cs"/>
                         </a:rPr>
-                        <a:t>2,569</a:t>
+                        <a:t>2,544</a:t>
                       </a:r>
                     </a:p>
                   </a:txBody>

--- a/docs/data/세일즈마케팅_예상매출현황.pptx
+++ b/docs/data/세일즈마케팅_예상매출현황.pptx
@@ -12756,7 +12756,7 @@
                           <a:ea typeface="대명체 보통" panose="020B0600000101010101" pitchFamily="50" charset="-127"/>
                           <a:cs typeface="+mn-cs"/>
                         </a:rPr>
-                        <a:t>16,589</a:t>
+                        <a:t>16,375</a:t>
                       </a:r>
                     </a:p>
                   </a:txBody>
@@ -12882,7 +12882,7 @@
                           <a:ea typeface="대명체 보통" panose="020B0600000101010101" pitchFamily="50" charset="-127"/>
                           <a:cs typeface="+mn-cs"/>
                         </a:rPr>
-                        <a:t>600</a:t>
+                        <a:t>386</a:t>
                       </a:r>
                     </a:p>
                   </a:txBody>
@@ -12949,7 +12949,7 @@
                           <a:ea typeface="대명체 보통" panose="020B0600000101010101" pitchFamily="50" charset="-127"/>
                           <a:cs typeface="+mn-cs"/>
                         </a:rPr>
-                        <a:t>104%</a:t>
+                        <a:t>102%</a:t>
                       </a:r>
                     </a:p>
                   </a:txBody>
@@ -13016,7 +13016,7 @@
                           <a:ea typeface="대명체 보통" panose="020B0600000101010101" pitchFamily="50" charset="-127"/>
                           <a:cs typeface="+mn-cs"/>
                         </a:rPr>
-                        <a:t>11,152</a:t>
+                        <a:t>11,315</a:t>
                       </a:r>
                     </a:p>
                   </a:txBody>
@@ -13142,7 +13142,7 @@
                           <a:ea typeface="대명체 보통" panose="020B0600000101010101" pitchFamily="50" charset="-127"/>
                           <a:cs typeface="+mn-cs"/>
                         </a:rPr>
-                        <a:t>5,436</a:t>
+                        <a:t>5,059</a:t>
                       </a:r>
                     </a:p>
                   </a:txBody>
@@ -13209,7 +13209,7 @@
                           <a:ea typeface="대명체 보통" panose="020B0600000101010101" pitchFamily="50" charset="-127"/>
                           <a:cs typeface="+mn-cs"/>
                         </a:rPr>
-                        <a:t>49%</a:t>
+                        <a:t>45%</a:t>
                       </a:r>
                     </a:p>
                   </a:txBody>
@@ -13450,7 +13450,7 @@
                           <a:ea typeface="대명체 보통" panose="020B0600000101010101" pitchFamily="50" charset="-127"/>
                           <a:cs typeface="+mn-cs"/>
                         </a:rPr>
-                        <a:t>175,387</a:t>
+                        <a:t>175,174</a:t>
                       </a:r>
                     </a:p>
                   </a:txBody>
@@ -13576,7 +13576,7 @@
                           <a:ea typeface="대명체 보통" panose="020B0600000101010101" pitchFamily="50" charset="-127"/>
                           <a:cs typeface="+mn-cs"/>
                         </a:rPr>
-                        <a:t>20,371</a:t>
+                        <a:t>20,157</a:t>
                       </a:r>
                     </a:p>
                   </a:txBody>
@@ -13710,7 +13710,7 @@
                           <a:ea typeface="대명체 보통" panose="020B0600000101010101" pitchFamily="50" charset="-127"/>
                           <a:cs typeface="+mn-cs"/>
                         </a:rPr>
-                        <a:t>124,549</a:t>
+                        <a:t>124,713</a:t>
                       </a:r>
                     </a:p>
                   </a:txBody>
@@ -13836,7 +13836,7 @@
                           <a:ea typeface="대명체 보통" panose="020B0600000101010101" pitchFamily="50" charset="-127"/>
                           <a:cs typeface="+mn-cs"/>
                         </a:rPr>
-                        <a:t>50,838</a:t>
+                        <a:t>50,461</a:t>
                       </a:r>
                     </a:p>
                   </a:txBody>
@@ -13903,7 +13903,7 @@
                           <a:ea typeface="대명체 보통" panose="020B0600000101010101" pitchFamily="50" charset="-127"/>
                           <a:cs typeface="+mn-cs"/>
                         </a:rPr>
-                        <a:t>41%</a:t>
+                        <a:t>40%</a:t>
                       </a:r>
                     </a:p>
                   </a:txBody>
@@ -14237,7 +14237,7 @@
                           <a:ea typeface="대명체 보통" panose="020B0600000101010101" pitchFamily="50" charset="-127"/>
                           <a:cs typeface="+mn-cs"/>
                         </a:rPr>
-                        <a:t>8,468</a:t>
+                        <a:t>8,370</a:t>
                       </a:r>
                     </a:p>
                   </a:txBody>
@@ -14355,7 +14355,7 @@
                           <a:ea typeface="대명체 보통" panose="020B0600000101010101" pitchFamily="50" charset="-127"/>
                           <a:cs typeface="+mn-cs"/>
                         </a:rPr>
-                        <a:t>-1,143</a:t>
+                        <a:t>-1,240</a:t>
                       </a:r>
                       <a:endParaRPr lang="en-US" altLang="ko-KR" sz="700" b="0" i="0" u="none" strike="noStrike" kern="1200" dirty="0">
                         <a:solidFill>
@@ -14427,7 +14427,7 @@
                           <a:ea typeface="대명체 보통" panose="020B0600000101010101" pitchFamily="50" charset="-127"/>
                           <a:cs typeface="+mn-cs"/>
                         </a:rPr>
-                        <a:t>88%</a:t>
+                        <a:t>87%</a:t>
                       </a:r>
                     </a:p>
                   </a:txBody>
@@ -14490,7 +14490,7 @@
                           <a:ea typeface="대명체 보통" panose="020B0600000101010101" pitchFamily="50" charset="-127"/>
                           <a:cs typeface="+mn-cs"/>
                         </a:rPr>
-                        <a:t>6,903</a:t>
+                        <a:t>6,990</a:t>
                       </a:r>
                     </a:p>
                   </a:txBody>
@@ -14608,7 +14608,7 @@
                           <a:ea typeface="대명체 보통" panose="020B0600000101010101" pitchFamily="50" charset="-127"/>
                           <a:cs typeface="+mn-cs"/>
                         </a:rPr>
-                        <a:t>1,565</a:t>
+                        <a:t>1,380</a:t>
                       </a:r>
                     </a:p>
                   </a:txBody>
@@ -14630,6 +14630,294 @@
                           <a:lumMod val="75000"/>
                         </a:schemeClr>
                       </a:solidFill>
+                      <a:prstDash val="solid"/>
+                      <a:round/>
+                      <a:headEnd type="none" w="med" len="med"/>
+                      <a:tailEnd type="none" w="med" len="med"/>
+                    </a:lnR>
+                    <a:lnT w="6350" cap="flat" cmpd="sng" algn="ctr">
+                      <a:solidFill>
+                        <a:schemeClr val="bg2">
+                          <a:lumMod val="75000"/>
+                        </a:schemeClr>
+                      </a:solidFill>
+                      <a:prstDash val="solid"/>
+                      <a:round/>
+                      <a:headEnd type="none" w="med" len="med"/>
+                      <a:tailEnd type="none" w="med" len="med"/>
+                    </a:lnT>
+                    <a:lnB w="6350" cap="flat" cmpd="sng" algn="ctr">
+                      <a:noFill/>
+                      <a:prstDash val="solid"/>
+                      <a:round/>
+                      <a:headEnd type="none" w="med" len="med"/>
+                      <a:tailEnd type="none" w="med" len="med"/>
+                    </a:lnB>
+                  </a:tcPr>
+                </a:tc>
+                <a:tc>
+                  <a:txBody>
+                    <a:bodyPr/>
+                    <a:lstStyle/>
+                    <a:p>
+                      <a:pPr algn="r" rtl="0" fontAlgn="ctr"/>
+                      <a:r>
+                        <a:rPr lang="en-US" altLang="ko-KR" sz="700" b="0" i="0" u="none" strike="noStrike" kern="1200">
+                          <a:solidFill>
+                            <a:srgbClr val="000000"/>
+                          </a:solidFill>
+                          <a:effectLst/>
+                          <a:latin typeface="대명체 보통" panose="020B0600000101010101" pitchFamily="50" charset="-127"/>
+                          <a:ea typeface="대명체 보통" panose="020B0600000101010101" pitchFamily="50" charset="-127"/>
+                          <a:cs typeface="+mn-cs"/>
+                        </a:rPr>
+                        <a:t>20%</a:t>
+                      </a:r>
+                    </a:p>
+                  </a:txBody>
+                  <a:tcPr marL="9525" marR="9525" marT="9525" marB="0" anchor="ctr">
+                    <a:lnL w="6350" cap="flat" cmpd="sng" algn="ctr">
+                      <a:solidFill>
+                        <a:schemeClr val="bg2">
+                          <a:lumMod val="75000"/>
+                        </a:schemeClr>
+                      </a:solidFill>
+                      <a:prstDash val="solid"/>
+                      <a:round/>
+                      <a:headEnd type="none" w="med" len="med"/>
+                      <a:tailEnd type="none" w="med" len="med"/>
+                    </a:lnL>
+                    <a:lnR w="6350" cap="flat" cmpd="sng" algn="ctr">
+                      <a:noFill/>
+                      <a:prstDash val="solid"/>
+                      <a:round/>
+                      <a:headEnd type="none" w="med" len="med"/>
+                      <a:tailEnd type="none" w="med" len="med"/>
+                    </a:lnR>
+                    <a:lnT w="6350" cap="flat" cmpd="sng" algn="ctr">
+                      <a:solidFill>
+                        <a:schemeClr val="bg2">
+                          <a:lumMod val="75000"/>
+                        </a:schemeClr>
+                      </a:solidFill>
+                      <a:prstDash val="solid"/>
+                      <a:round/>
+                      <a:headEnd type="none" w="med" len="med"/>
+                      <a:tailEnd type="none" w="med" len="med"/>
+                    </a:lnT>
+                    <a:lnB w="6350" cap="flat" cmpd="sng" algn="ctr">
+                      <a:noFill/>
+                      <a:prstDash val="solid"/>
+                      <a:round/>
+                      <a:headEnd type="none" w="med" len="med"/>
+                      <a:tailEnd type="none" w="med" len="med"/>
+                    </a:lnB>
+                  </a:tcPr>
+                </a:tc>
+                <a:tc>
+                  <a:txBody>
+                    <a:bodyPr/>
+                    <a:lstStyle/>
+                    <a:p>
+                      <a:pPr algn="r" fontAlgn="ctr"/>
+                      <a:endParaRPr lang="ko-KR" altLang="en-US" sz="700" b="0" i="0" u="none" strike="noStrike" kern="1200">
+                        <a:solidFill>
+                          <a:srgbClr val="000000"/>
+                        </a:solidFill>
+                        <a:effectLst/>
+                        <a:latin typeface="대명체 보통" panose="020B0600000101010101" pitchFamily="50" charset="-127"/>
+                        <a:ea typeface="대명체 보통" panose="020B0600000101010101" pitchFamily="50" charset="-127"/>
+                        <a:cs typeface="+mn-cs"/>
+                      </a:endParaRPr>
+                    </a:p>
+                  </a:txBody>
+                  <a:tcPr marL="9525" marR="9525" marT="9525" marB="0" anchor="ctr">
+                    <a:lnL w="6350" cap="flat" cmpd="sng" algn="ctr">
+                      <a:noFill/>
+                      <a:prstDash val="solid"/>
+                      <a:round/>
+                      <a:headEnd type="none" w="med" len="med"/>
+                      <a:tailEnd type="none" w="med" len="med"/>
+                    </a:lnL>
+                    <a:lnR w="6350" cap="flat" cmpd="sng" algn="ctr">
+                      <a:noFill/>
+                      <a:prstDash val="solid"/>
+                      <a:round/>
+                      <a:headEnd type="none" w="med" len="med"/>
+                      <a:tailEnd type="none" w="med" len="med"/>
+                    </a:lnR>
+                    <a:lnT w="6350" cap="flat" cmpd="sng" algn="ctr">
+                      <a:noFill/>
+                      <a:prstDash val="solid"/>
+                      <a:round/>
+                      <a:headEnd type="none" w="med" len="med"/>
+                      <a:tailEnd type="none" w="med" len="med"/>
+                    </a:lnT>
+                    <a:lnB w="6350" cap="flat" cmpd="sng" algn="ctr">
+                      <a:noFill/>
+                      <a:prstDash val="solid"/>
+                      <a:round/>
+                      <a:headEnd type="none" w="med" len="med"/>
+                      <a:tailEnd type="none" w="med" len="med"/>
+                    </a:lnB>
+                    <a:lnTlToBr w="12700" cmpd="sng">
+                      <a:noFill/>
+                      <a:prstDash val="solid"/>
+                    </a:lnTlToBr>
+                    <a:lnBlToTr w="12700" cmpd="sng">
+                      <a:noFill/>
+                      <a:prstDash val="solid"/>
+                    </a:lnBlToTr>
+                  </a:tcPr>
+                </a:tc>
+                <a:tc>
+                  <a:txBody>
+                    <a:bodyPr/>
+                    <a:lstStyle/>
+                    <a:p>
+                      <a:pPr algn="r" rtl="0" fontAlgn="ctr"/>
+                      <a:r>
+                        <a:rPr lang="en-US" altLang="ko-KR" sz="700" b="0" i="0" u="none" strike="noStrike" kern="1200">
+                          <a:solidFill>
+                            <a:srgbClr val="000000"/>
+                          </a:solidFill>
+                          <a:effectLst/>
+                          <a:latin typeface="대명체 보통" panose="020B0600000101010101" pitchFamily="50" charset="-127"/>
+                          <a:ea typeface="대명체 보통" panose="020B0600000101010101" pitchFamily="50" charset="-127"/>
+                          <a:cs typeface="+mn-cs"/>
+                        </a:rPr>
+                        <a:t>89,984</a:t>
+                      </a:r>
+                    </a:p>
+                  </a:txBody>
+                  <a:tcPr marL="9525" marR="9525" marT="9525" marB="0" anchor="ctr">
+                    <a:lnL w="6350" cap="flat" cmpd="sng" algn="ctr">
+                      <a:noFill/>
+                      <a:prstDash val="solid"/>
+                      <a:round/>
+                      <a:headEnd type="none" w="med" len="med"/>
+                      <a:tailEnd type="none" w="med" len="med"/>
+                    </a:lnL>
+                    <a:lnR w="6350" cap="flat" cmpd="sng" algn="ctr">
+                      <a:noFill/>
+                      <a:prstDash val="solid"/>
+                      <a:round/>
+                      <a:headEnd type="none" w="med" len="med"/>
+                      <a:tailEnd type="none" w="med" len="med"/>
+                    </a:lnR>
+                    <a:lnT w="6350" cap="flat" cmpd="sng" algn="ctr">
+                      <a:solidFill>
+                        <a:schemeClr val="bg2">
+                          <a:lumMod val="75000"/>
+                        </a:schemeClr>
+                      </a:solidFill>
+                      <a:prstDash val="solid"/>
+                      <a:round/>
+                      <a:headEnd type="none" w="med" len="med"/>
+                      <a:tailEnd type="none" w="med" len="med"/>
+                    </a:lnT>
+                    <a:lnB w="6350" cap="flat" cmpd="sng" algn="ctr">
+                      <a:noFill/>
+                      <a:prstDash val="solid"/>
+                      <a:round/>
+                      <a:headEnd type="none" w="med" len="med"/>
+                      <a:tailEnd type="none" w="med" len="med"/>
+                    </a:lnB>
+                  </a:tcPr>
+                </a:tc>
+                <a:tc>
+                  <a:txBody>
+                    <a:bodyPr/>
+                    <a:lstStyle/>
+                    <a:p>
+                      <a:pPr algn="r" rtl="0" fontAlgn="ctr"/>
+                      <a:r>
+                        <a:rPr lang="en-US" altLang="ko-KR" sz="700" b="0" i="0" u="none" strike="noStrike" kern="1200">
+                          <a:solidFill>
+                            <a:srgbClr val="000000"/>
+                          </a:solidFill>
+                          <a:effectLst/>
+                          <a:latin typeface="대명체 보통" panose="020B0600000101010101" pitchFamily="50" charset="-127"/>
+                          <a:ea typeface="대명체 보통" panose="020B0600000101010101" pitchFamily="50" charset="-127"/>
+                          <a:cs typeface="+mn-cs"/>
+                        </a:rPr>
+                        <a:t>14%</a:t>
+                      </a:r>
+                    </a:p>
+                  </a:txBody>
+                  <a:tcPr marL="9525" marR="9525" marT="9525" marB="0" anchor="ctr">
+                    <a:lnL w="6350" cap="flat" cmpd="sng" algn="ctr">
+                      <a:noFill/>
+                      <a:prstDash val="solid"/>
+                      <a:round/>
+                      <a:headEnd type="none" w="med" len="med"/>
+                      <a:tailEnd type="none" w="med" len="med"/>
+                    </a:lnL>
+                    <a:lnR w="6350" cap="flat" cmpd="sng" algn="ctr">
+                      <a:solidFill>
+                        <a:schemeClr val="bg2">
+                          <a:lumMod val="75000"/>
+                        </a:schemeClr>
+                      </a:solidFill>
+                      <a:prstDash val="solid"/>
+                      <a:round/>
+                      <a:headEnd type="none" w="med" len="med"/>
+                      <a:tailEnd type="none" w="med" len="med"/>
+                    </a:lnR>
+                    <a:lnT w="6350" cap="flat" cmpd="sng" algn="ctr">
+                      <a:solidFill>
+                        <a:schemeClr val="bg2">
+                          <a:lumMod val="75000"/>
+                        </a:schemeClr>
+                      </a:solidFill>
+                      <a:prstDash val="solid"/>
+                      <a:round/>
+                      <a:headEnd type="none" w="med" len="med"/>
+                      <a:tailEnd type="none" w="med" len="med"/>
+                    </a:lnT>
+                    <a:lnB w="6350" cap="flat" cmpd="sng" algn="ctr">
+                      <a:noFill/>
+                      <a:prstDash val="solid"/>
+                      <a:round/>
+                      <a:headEnd type="none" w="med" len="med"/>
+                      <a:tailEnd type="none" w="med" len="med"/>
+                    </a:lnB>
+                  </a:tcPr>
+                </a:tc>
+                <a:tc>
+                  <a:txBody>
+                    <a:bodyPr/>
+                    <a:lstStyle/>
+                    <a:p>
+                      <a:pPr algn="r" rtl="0" fontAlgn="ctr"/>
+                      <a:r>
+                        <a:rPr lang="en-US" altLang="ko-KR" sz="700" b="0" i="0" u="none" strike="noStrike" kern="1200">
+                          <a:solidFill>
+                            <a:srgbClr val="000000"/>
+                          </a:solidFill>
+                          <a:effectLst/>
+                          <a:latin typeface="대명체 보통" panose="020B0600000101010101" pitchFamily="50" charset="-127"/>
+                          <a:ea typeface="대명체 보통" panose="020B0600000101010101" pitchFamily="50" charset="-127"/>
+                          <a:cs typeface="+mn-cs"/>
+                        </a:rPr>
+                        <a:t>100,126</a:t>
+                      </a:r>
+                    </a:p>
+                  </a:txBody>
+                  <a:tcPr marL="9525" marR="9525" marT="9525" marB="0" anchor="ctr">
+                    <a:lnL w="6350" cap="flat" cmpd="sng" algn="ctr">
+                      <a:solidFill>
+                        <a:schemeClr val="bg2">
+                          <a:lumMod val="75000"/>
+                        </a:schemeClr>
+                      </a:solidFill>
+                      <a:prstDash val="solid"/>
+                      <a:round/>
+                      <a:headEnd type="none" w="med" len="med"/>
+                      <a:tailEnd type="none" w="med" len="med"/>
+                    </a:lnL>
+                    <a:lnR w="6350" cap="flat" cmpd="sng" algn="ctr">
+                      <a:noFill/>
                       <a:prstDash val="solid"/>
                       <a:round/>
                       <a:headEnd type="none" w="med" len="med"/>
@@ -14677,294 +14965,6 @@
                   </a:txBody>
                   <a:tcPr marL="9525" marR="9525" marT="9525" marB="0" anchor="ctr">
                     <a:lnL w="6350" cap="flat" cmpd="sng" algn="ctr">
-                      <a:solidFill>
-                        <a:schemeClr val="bg2">
-                          <a:lumMod val="75000"/>
-                        </a:schemeClr>
-                      </a:solidFill>
-                      <a:prstDash val="solid"/>
-                      <a:round/>
-                      <a:headEnd type="none" w="med" len="med"/>
-                      <a:tailEnd type="none" w="med" len="med"/>
-                    </a:lnL>
-                    <a:lnR w="6350" cap="flat" cmpd="sng" algn="ctr">
-                      <a:noFill/>
-                      <a:prstDash val="solid"/>
-                      <a:round/>
-                      <a:headEnd type="none" w="med" len="med"/>
-                      <a:tailEnd type="none" w="med" len="med"/>
-                    </a:lnR>
-                    <a:lnT w="6350" cap="flat" cmpd="sng" algn="ctr">
-                      <a:solidFill>
-                        <a:schemeClr val="bg2">
-                          <a:lumMod val="75000"/>
-                        </a:schemeClr>
-                      </a:solidFill>
-                      <a:prstDash val="solid"/>
-                      <a:round/>
-                      <a:headEnd type="none" w="med" len="med"/>
-                      <a:tailEnd type="none" w="med" len="med"/>
-                    </a:lnT>
-                    <a:lnB w="6350" cap="flat" cmpd="sng" algn="ctr">
-                      <a:noFill/>
-                      <a:prstDash val="solid"/>
-                      <a:round/>
-                      <a:headEnd type="none" w="med" len="med"/>
-                      <a:tailEnd type="none" w="med" len="med"/>
-                    </a:lnB>
-                  </a:tcPr>
-                </a:tc>
-                <a:tc>
-                  <a:txBody>
-                    <a:bodyPr/>
-                    <a:lstStyle/>
-                    <a:p>
-                      <a:pPr algn="r" fontAlgn="ctr"/>
-                      <a:endParaRPr lang="ko-KR" altLang="en-US" sz="700" b="0" i="0" u="none" strike="noStrike" kern="1200">
-                        <a:solidFill>
-                          <a:srgbClr val="000000"/>
-                        </a:solidFill>
-                        <a:effectLst/>
-                        <a:latin typeface="대명체 보통" panose="020B0600000101010101" pitchFamily="50" charset="-127"/>
-                        <a:ea typeface="대명체 보통" panose="020B0600000101010101" pitchFamily="50" charset="-127"/>
-                        <a:cs typeface="+mn-cs"/>
-                      </a:endParaRPr>
-                    </a:p>
-                  </a:txBody>
-                  <a:tcPr marL="9525" marR="9525" marT="9525" marB="0" anchor="ctr">
-                    <a:lnL w="6350" cap="flat" cmpd="sng" algn="ctr">
-                      <a:noFill/>
-                      <a:prstDash val="solid"/>
-                      <a:round/>
-                      <a:headEnd type="none" w="med" len="med"/>
-                      <a:tailEnd type="none" w="med" len="med"/>
-                    </a:lnL>
-                    <a:lnR w="6350" cap="flat" cmpd="sng" algn="ctr">
-                      <a:noFill/>
-                      <a:prstDash val="solid"/>
-                      <a:round/>
-                      <a:headEnd type="none" w="med" len="med"/>
-                      <a:tailEnd type="none" w="med" len="med"/>
-                    </a:lnR>
-                    <a:lnT w="6350" cap="flat" cmpd="sng" algn="ctr">
-                      <a:noFill/>
-                      <a:prstDash val="solid"/>
-                      <a:round/>
-                      <a:headEnd type="none" w="med" len="med"/>
-                      <a:tailEnd type="none" w="med" len="med"/>
-                    </a:lnT>
-                    <a:lnB w="6350" cap="flat" cmpd="sng" algn="ctr">
-                      <a:noFill/>
-                      <a:prstDash val="solid"/>
-                      <a:round/>
-                      <a:headEnd type="none" w="med" len="med"/>
-                      <a:tailEnd type="none" w="med" len="med"/>
-                    </a:lnB>
-                    <a:lnTlToBr w="12700" cmpd="sng">
-                      <a:noFill/>
-                      <a:prstDash val="solid"/>
-                    </a:lnTlToBr>
-                    <a:lnBlToTr w="12700" cmpd="sng">
-                      <a:noFill/>
-                      <a:prstDash val="solid"/>
-                    </a:lnBlToTr>
-                  </a:tcPr>
-                </a:tc>
-                <a:tc>
-                  <a:txBody>
-                    <a:bodyPr/>
-                    <a:lstStyle/>
-                    <a:p>
-                      <a:pPr algn="r" rtl="0" fontAlgn="ctr"/>
-                      <a:r>
-                        <a:rPr lang="en-US" altLang="ko-KR" sz="700" b="0" i="0" u="none" strike="noStrike" kern="1200">
-                          <a:solidFill>
-                            <a:srgbClr val="000000"/>
-                          </a:solidFill>
-                          <a:effectLst/>
-                          <a:latin typeface="대명체 보통" panose="020B0600000101010101" pitchFamily="50" charset="-127"/>
-                          <a:ea typeface="대명체 보통" panose="020B0600000101010101" pitchFamily="50" charset="-127"/>
-                          <a:cs typeface="+mn-cs"/>
-                        </a:rPr>
-                        <a:t>89,984</a:t>
-                      </a:r>
-                    </a:p>
-                  </a:txBody>
-                  <a:tcPr marL="9525" marR="9525" marT="9525" marB="0" anchor="ctr">
-                    <a:lnL w="6350" cap="flat" cmpd="sng" algn="ctr">
-                      <a:noFill/>
-                      <a:prstDash val="solid"/>
-                      <a:round/>
-                      <a:headEnd type="none" w="med" len="med"/>
-                      <a:tailEnd type="none" w="med" len="med"/>
-                    </a:lnL>
-                    <a:lnR w="6350" cap="flat" cmpd="sng" algn="ctr">
-                      <a:noFill/>
-                      <a:prstDash val="solid"/>
-                      <a:round/>
-                      <a:headEnd type="none" w="med" len="med"/>
-                      <a:tailEnd type="none" w="med" len="med"/>
-                    </a:lnR>
-                    <a:lnT w="6350" cap="flat" cmpd="sng" algn="ctr">
-                      <a:solidFill>
-                        <a:schemeClr val="bg2">
-                          <a:lumMod val="75000"/>
-                        </a:schemeClr>
-                      </a:solidFill>
-                      <a:prstDash val="solid"/>
-                      <a:round/>
-                      <a:headEnd type="none" w="med" len="med"/>
-                      <a:tailEnd type="none" w="med" len="med"/>
-                    </a:lnT>
-                    <a:lnB w="6350" cap="flat" cmpd="sng" algn="ctr">
-                      <a:noFill/>
-                      <a:prstDash val="solid"/>
-                      <a:round/>
-                      <a:headEnd type="none" w="med" len="med"/>
-                      <a:tailEnd type="none" w="med" len="med"/>
-                    </a:lnB>
-                  </a:tcPr>
-                </a:tc>
-                <a:tc>
-                  <a:txBody>
-                    <a:bodyPr/>
-                    <a:lstStyle/>
-                    <a:p>
-                      <a:pPr algn="r" rtl="0" fontAlgn="ctr"/>
-                      <a:r>
-                        <a:rPr lang="en-US" altLang="ko-KR" sz="700" b="0" i="0" u="none" strike="noStrike" kern="1200">
-                          <a:solidFill>
-                            <a:srgbClr val="000000"/>
-                          </a:solidFill>
-                          <a:effectLst/>
-                          <a:latin typeface="대명체 보통" panose="020B0600000101010101" pitchFamily="50" charset="-127"/>
-                          <a:ea typeface="대명체 보통" panose="020B0600000101010101" pitchFamily="50" charset="-127"/>
-                          <a:cs typeface="+mn-cs"/>
-                        </a:rPr>
-                        <a:t>14%</a:t>
-                      </a:r>
-                    </a:p>
-                  </a:txBody>
-                  <a:tcPr marL="9525" marR="9525" marT="9525" marB="0" anchor="ctr">
-                    <a:lnL w="6350" cap="flat" cmpd="sng" algn="ctr">
-                      <a:noFill/>
-                      <a:prstDash val="solid"/>
-                      <a:round/>
-                      <a:headEnd type="none" w="med" len="med"/>
-                      <a:tailEnd type="none" w="med" len="med"/>
-                    </a:lnL>
-                    <a:lnR w="6350" cap="flat" cmpd="sng" algn="ctr">
-                      <a:solidFill>
-                        <a:schemeClr val="bg2">
-                          <a:lumMod val="75000"/>
-                        </a:schemeClr>
-                      </a:solidFill>
-                      <a:prstDash val="solid"/>
-                      <a:round/>
-                      <a:headEnd type="none" w="med" len="med"/>
-                      <a:tailEnd type="none" w="med" len="med"/>
-                    </a:lnR>
-                    <a:lnT w="6350" cap="flat" cmpd="sng" algn="ctr">
-                      <a:solidFill>
-                        <a:schemeClr val="bg2">
-                          <a:lumMod val="75000"/>
-                        </a:schemeClr>
-                      </a:solidFill>
-                      <a:prstDash val="solid"/>
-                      <a:round/>
-                      <a:headEnd type="none" w="med" len="med"/>
-                      <a:tailEnd type="none" w="med" len="med"/>
-                    </a:lnT>
-                    <a:lnB w="6350" cap="flat" cmpd="sng" algn="ctr">
-                      <a:noFill/>
-                      <a:prstDash val="solid"/>
-                      <a:round/>
-                      <a:headEnd type="none" w="med" len="med"/>
-                      <a:tailEnd type="none" w="med" len="med"/>
-                    </a:lnB>
-                  </a:tcPr>
-                </a:tc>
-                <a:tc>
-                  <a:txBody>
-                    <a:bodyPr/>
-                    <a:lstStyle/>
-                    <a:p>
-                      <a:pPr algn="r" rtl="0" fontAlgn="ctr"/>
-                      <a:r>
-                        <a:rPr lang="en-US" altLang="ko-KR" sz="700" b="0" i="0" u="none" strike="noStrike" kern="1200">
-                          <a:solidFill>
-                            <a:srgbClr val="000000"/>
-                          </a:solidFill>
-                          <a:effectLst/>
-                          <a:latin typeface="대명체 보통" panose="020B0600000101010101" pitchFamily="50" charset="-127"/>
-                          <a:ea typeface="대명체 보통" panose="020B0600000101010101" pitchFamily="50" charset="-127"/>
-                          <a:cs typeface="+mn-cs"/>
-                        </a:rPr>
-                        <a:t>100,224</a:t>
-                      </a:r>
-                    </a:p>
-                  </a:txBody>
-                  <a:tcPr marL="9525" marR="9525" marT="9525" marB="0" anchor="ctr">
-                    <a:lnL w="6350" cap="flat" cmpd="sng" algn="ctr">
-                      <a:solidFill>
-                        <a:schemeClr val="bg2">
-                          <a:lumMod val="75000"/>
-                        </a:schemeClr>
-                      </a:solidFill>
-                      <a:prstDash val="solid"/>
-                      <a:round/>
-                      <a:headEnd type="none" w="med" len="med"/>
-                      <a:tailEnd type="none" w="med" len="med"/>
-                    </a:lnL>
-                    <a:lnR w="6350" cap="flat" cmpd="sng" algn="ctr">
-                      <a:noFill/>
-                      <a:prstDash val="solid"/>
-                      <a:round/>
-                      <a:headEnd type="none" w="med" len="med"/>
-                      <a:tailEnd type="none" w="med" len="med"/>
-                    </a:lnR>
-                    <a:lnT w="6350" cap="flat" cmpd="sng" algn="ctr">
-                      <a:solidFill>
-                        <a:schemeClr val="bg2">
-                          <a:lumMod val="75000"/>
-                        </a:schemeClr>
-                      </a:solidFill>
-                      <a:prstDash val="solid"/>
-                      <a:round/>
-                      <a:headEnd type="none" w="med" len="med"/>
-                      <a:tailEnd type="none" w="med" len="med"/>
-                    </a:lnT>
-                    <a:lnB w="6350" cap="flat" cmpd="sng" algn="ctr">
-                      <a:noFill/>
-                      <a:prstDash val="solid"/>
-                      <a:round/>
-                      <a:headEnd type="none" w="med" len="med"/>
-                      <a:tailEnd type="none" w="med" len="med"/>
-                    </a:lnB>
-                  </a:tcPr>
-                </a:tc>
-                <a:tc>
-                  <a:txBody>
-                    <a:bodyPr/>
-                    <a:lstStyle/>
-                    <a:p>
-                      <a:pPr algn="r" rtl="0" fontAlgn="ctr"/>
-                      <a:r>
-                        <a:rPr lang="en-US" altLang="ko-KR" sz="700" b="0" i="0" u="none" strike="noStrike" kern="1200">
-                          <a:solidFill>
-                            <a:srgbClr val="000000"/>
-                          </a:solidFill>
-                          <a:effectLst/>
-                          <a:latin typeface="대명체 보통" panose="020B0600000101010101" pitchFamily="50" charset="-127"/>
-                          <a:ea typeface="대명체 보통" panose="020B0600000101010101" pitchFamily="50" charset="-127"/>
-                          <a:cs typeface="+mn-cs"/>
-                        </a:rPr>
-                        <a:t>23%</a:t>
-                      </a:r>
-                    </a:p>
-                  </a:txBody>
-                  <a:tcPr marL="9525" marR="9525" marT="9525" marB="0" anchor="ctr">
-                    <a:lnL w="6350" cap="flat" cmpd="sng" algn="ctr">
                       <a:noFill/>
                       <a:prstDash val="solid"/>
                       <a:round/>
@@ -15018,7 +15018,7 @@
                           <a:ea typeface="대명체 보통" panose="020B0600000101010101" pitchFamily="50" charset="-127"/>
                           <a:cs typeface="+mn-cs"/>
                         </a:rPr>
-                        <a:t>10,240</a:t>
+                        <a:t>10,142</a:t>
                       </a:r>
                     </a:p>
                   </a:txBody>
@@ -15144,7 +15144,7 @@
                           <a:ea typeface="대명체 보통" panose="020B0600000101010101" pitchFamily="50" charset="-127"/>
                           <a:cs typeface="+mn-cs"/>
                         </a:rPr>
-                        <a:t>71,766</a:t>
+                        <a:t>71,854</a:t>
                       </a:r>
                     </a:p>
                   </a:txBody>
@@ -15262,7 +15262,7 @@
                           <a:ea typeface="대명체 보통" panose="020B0600000101010101" pitchFamily="50" charset="-127"/>
                           <a:cs typeface="+mn-cs"/>
                         </a:rPr>
-                        <a:t>28,458</a:t>
+                        <a:t>28,272</a:t>
                       </a:r>
                     </a:p>
                   </a:txBody>
@@ -15325,7 +15325,7 @@
                           <a:ea typeface="대명체 보통" panose="020B0600000101010101" pitchFamily="50" charset="-127"/>
                           <a:cs typeface="+mn-cs"/>
                         </a:rPr>
-                        <a:t>40%</a:t>
+                        <a:t>39%</a:t>
                       </a:r>
                     </a:p>
                   </a:txBody>
@@ -15643,7 +15643,7 @@
                           <a:ea typeface="대명체 보통" panose="020B0600000101010101" pitchFamily="50" charset="-127"/>
                           <a:cs typeface="+mn-cs"/>
                         </a:rPr>
-                        <a:t>7,294</a:t>
+                        <a:t>7,193</a:t>
                       </a:r>
                     </a:p>
                   </a:txBody>
@@ -15753,7 +15753,7 @@
                           <a:ea typeface="대명체 보통" panose="020B0600000101010101" pitchFamily="50" charset="-127"/>
                           <a:cs typeface="+mn-cs"/>
                         </a:rPr>
-                        <a:t>1,435</a:t>
+                        <a:t>1,334</a:t>
                       </a:r>
                       <a:endParaRPr lang="en-US" altLang="ko-KR" sz="700" b="0" i="0" u="none" strike="noStrike" kern="1200" dirty="0">
                         <a:solidFill>
@@ -15821,7 +15821,7 @@
                           <a:ea typeface="대명체 보통" panose="020B0600000101010101" pitchFamily="50" charset="-127"/>
                           <a:cs typeface="+mn-cs"/>
                         </a:rPr>
-                        <a:t>124%</a:t>
+                        <a:t>123%</a:t>
                       </a:r>
                     </a:p>
                   </a:txBody>
@@ -15880,7 +15880,7 @@
                           <a:ea typeface="대명체 보통" panose="020B0600000101010101" pitchFamily="50" charset="-127"/>
                           <a:cs typeface="+mn-cs"/>
                         </a:rPr>
-                        <a:t>3,778</a:t>
+                        <a:t>3,850</a:t>
                       </a:r>
                     </a:p>
                   </a:txBody>
@@ -15990,7 +15990,7 @@
                           <a:ea typeface="대명체 보통" panose="020B0600000101010101" pitchFamily="50" charset="-127"/>
                           <a:cs typeface="+mn-cs"/>
                         </a:rPr>
-                        <a:t>3,516</a:t>
+                        <a:t>3,342</a:t>
                       </a:r>
                     </a:p>
                   </a:txBody>
@@ -16049,7 +16049,7 @@
                           <a:ea typeface="대명체 보통" panose="020B0600000101010101" pitchFamily="50" charset="-127"/>
                           <a:cs typeface="+mn-cs"/>
                         </a:rPr>
-                        <a:t>93%</a:t>
+                        <a:t>87%</a:t>
                       </a:r>
                     </a:p>
                   </a:txBody>
@@ -16266,7 +16266,7 @@
                           <a:ea typeface="대명체 보통" panose="020B0600000101010101" pitchFamily="50" charset="-127"/>
                           <a:cs typeface="+mn-cs"/>
                         </a:rPr>
-                        <a:t>68,555</a:t>
+                        <a:t>68,454</a:t>
                       </a:r>
                     </a:p>
                   </a:txBody>
@@ -16376,7 +16376,7 @@
                           <a:ea typeface="대명체 보통" panose="020B0600000101010101" pitchFamily="50" charset="-127"/>
                           <a:cs typeface="+mn-cs"/>
                         </a:rPr>
-                        <a:t>7,912</a:t>
+                        <a:t>7,811</a:t>
                       </a:r>
                     </a:p>
                   </a:txBody>
@@ -16494,7 +16494,7 @@
                           <a:ea typeface="대명체 보통" panose="020B0600000101010101" pitchFamily="50" charset="-127"/>
                           <a:cs typeface="+mn-cs"/>
                         </a:rPr>
-                        <a:t>48,719</a:t>
+                        <a:t>48,791</a:t>
                       </a:r>
                     </a:p>
                   </a:txBody>
@@ -16604,7 +16604,7 @@
                           <a:ea typeface="대명체 보통" panose="020B0600000101010101" pitchFamily="50" charset="-127"/>
                           <a:cs typeface="+mn-cs"/>
                         </a:rPr>
-                        <a:t>19,836</a:t>
+                        <a:t>19,663</a:t>
                       </a:r>
                     </a:p>
                   </a:txBody>
@@ -16663,7 +16663,7 @@
                           <a:ea typeface="대명체 보통" panose="020B0600000101010101" pitchFamily="50" charset="-127"/>
                           <a:cs typeface="+mn-cs"/>
                         </a:rPr>
-                        <a:t>41%</a:t>
+                        <a:t>40%</a:t>
                       </a:r>
                     </a:p>
                   </a:txBody>
@@ -16999,7 +16999,7 @@
                           <a:ea typeface="대명체 보통" panose="020B0600000101010101" pitchFamily="50" charset="-127"/>
                           <a:cs typeface="+mn-cs"/>
                         </a:rPr>
-                        <a:t>828</a:t>
+                        <a:t>812</a:t>
                       </a:r>
                       <a:endParaRPr lang="en-US" altLang="ko-KR" sz="700" b="0" i="0" u="none" strike="noStrike" kern="1200" dirty="0">
                         <a:solidFill>
@@ -17126,7 +17126,7 @@
                           <a:ea typeface="대명체 보통" panose="020B0600000101010101" pitchFamily="50" charset="-127"/>
                           <a:cs typeface="+mn-cs"/>
                         </a:rPr>
-                        <a:t>308</a:t>
+                        <a:t>293</a:t>
                       </a:r>
                       <a:endParaRPr lang="en-US" altLang="ko-KR" sz="700" b="0" i="0" u="none" strike="noStrike" kern="1200" dirty="0">
                         <a:solidFill>
@@ -17198,7 +17198,7 @@
                           <a:ea typeface="대명체 보통" panose="020B0600000101010101" pitchFamily="50" charset="-127"/>
                           <a:cs typeface="+mn-cs"/>
                         </a:rPr>
-                        <a:t>159%</a:t>
+                        <a:t>156%</a:t>
                       </a:r>
                     </a:p>
                   </a:txBody>
@@ -17261,7 +17261,7 @@
                           <a:ea typeface="대명체 보통" panose="020B0600000101010101" pitchFamily="50" charset="-127"/>
                           <a:cs typeface="+mn-cs"/>
                         </a:rPr>
-                        <a:t>472</a:t>
+                        <a:t>475</a:t>
                       </a:r>
                       <a:endParaRPr lang="en-US" altLang="ko-KR" sz="700" b="0" i="0" u="none" strike="noStrike" kern="1200" dirty="0">
                         <a:solidFill>
@@ -17388,7 +17388,7 @@
                           <a:ea typeface="대명체 보통" panose="020B0600000101010101" pitchFamily="50" charset="-127"/>
                           <a:cs typeface="+mn-cs"/>
                         </a:rPr>
-                        <a:t>356</a:t>
+                        <a:t>337</a:t>
                       </a:r>
                     </a:p>
                   </a:txBody>
@@ -17451,7 +17451,7 @@
                           <a:ea typeface="대명체 보통" panose="020B0600000101010101" pitchFamily="50" charset="-127"/>
                           <a:cs typeface="+mn-cs"/>
                         </a:rPr>
-                        <a:t>75%</a:t>
+                        <a:t>71%</a:t>
                       </a:r>
                     </a:p>
                   </a:txBody>
@@ -17680,7 +17680,7 @@
                           <a:ea typeface="대명체 보통" panose="020B0600000101010101" pitchFamily="50" charset="-127"/>
                           <a:cs typeface="+mn-cs"/>
                         </a:rPr>
-                        <a:t>6,609</a:t>
+                        <a:t>6,593</a:t>
                       </a:r>
                     </a:p>
                   </a:txBody>
@@ -17798,7 +17798,7 @@
                           <a:ea typeface="대명체 보통" panose="020B0600000101010101" pitchFamily="50" charset="-127"/>
                           <a:cs typeface="+mn-cs"/>
                         </a:rPr>
-                        <a:t>2,219</a:t>
+                        <a:t>2,204</a:t>
                       </a:r>
                       <a:endParaRPr lang="en-US" altLang="ko-KR" sz="700" b="0" i="0" u="none" strike="noStrike" kern="1200" dirty="0">
                         <a:solidFill>
@@ -17870,7 +17870,7 @@
                           <a:ea typeface="대명체 보통" panose="020B0600000101010101" pitchFamily="50" charset="-127"/>
                           <a:cs typeface="+mn-cs"/>
                         </a:rPr>
-                        <a:t>151%</a:t>
+                        <a:t>150%</a:t>
                       </a:r>
                     </a:p>
                   </a:txBody>
@@ -17933,7 +17933,7 @@
                           <a:ea typeface="대명체 보통" panose="020B0600000101010101" pitchFamily="50" charset="-127"/>
                           <a:cs typeface="+mn-cs"/>
                         </a:rPr>
-                        <a:t>4,065</a:t>
+                        <a:t>4,068</a:t>
                       </a:r>
                     </a:p>
                   </a:txBody>
@@ -18051,7 +18051,7 @@
                           <a:ea typeface="대명체 보통" panose="020B0600000101010101" pitchFamily="50" charset="-127"/>
                           <a:cs typeface="+mn-cs"/>
                         </a:rPr>
-                        <a:t>2,544</a:t>
+                        <a:t>2,525</a:t>
                       </a:r>
                     </a:p>
                   </a:txBody>
@@ -18114,7 +18114,7 @@
                           <a:ea typeface="대명체 보통" panose="020B0600000101010101" pitchFamily="50" charset="-127"/>
                           <a:cs typeface="+mn-cs"/>
                         </a:rPr>
-                        <a:t>63%</a:t>
+                        <a:t>62%</a:t>
                       </a:r>
                     </a:p>
                   </a:txBody>

--- a/docs/data/세일즈마케팅_예상매출현황.pptx
+++ b/docs/data/세일즈마케팅_예상매출현황.pptx
@@ -12756,7 +12756,7 @@
                           <a:ea typeface="대명체 보통" panose="020B0600000101010101" pitchFamily="50" charset="-127"/>
                           <a:cs typeface="+mn-cs"/>
                         </a:rPr>
-                        <a:t>16,375</a:t>
+                        <a:t>15,941</a:t>
                       </a:r>
                     </a:p>
                   </a:txBody>
@@ -12875,14 +12875,14 @@
                       <a:r>
                         <a:rPr lang="en-US" altLang="ko-KR" sz="700" b="0" i="0" u="none" strike="noStrike" kern="1200" dirty="0">
                           <a:solidFill>
-                            <a:srgbClr val="000000"/>
+                            <a:srgbClr val="FF0000"/>
                           </a:solidFill>
                           <a:effectLst/>
                           <a:latin typeface="대명체 보통" panose="020B0600000101010101" pitchFamily="50" charset="-127"/>
                           <a:ea typeface="대명체 보통" panose="020B0600000101010101" pitchFamily="50" charset="-127"/>
                           <a:cs typeface="+mn-cs"/>
                         </a:rPr>
-                        <a:t>386</a:t>
+                        <a:t>-47</a:t>
                       </a:r>
                     </a:p>
                   </a:txBody>
@@ -12949,7 +12949,7 @@
                           <a:ea typeface="대명체 보통" panose="020B0600000101010101" pitchFamily="50" charset="-127"/>
                           <a:cs typeface="+mn-cs"/>
                         </a:rPr>
-                        <a:t>102%</a:t>
+                        <a:t>100%</a:t>
                       </a:r>
                     </a:p>
                   </a:txBody>
@@ -13016,7 +13016,7 @@
                           <a:ea typeface="대명체 보통" panose="020B0600000101010101" pitchFamily="50" charset="-127"/>
                           <a:cs typeface="+mn-cs"/>
                         </a:rPr>
-                        <a:t>11,315</a:t>
+                        <a:t>11,708</a:t>
                       </a:r>
                     </a:p>
                   </a:txBody>
@@ -13142,7 +13142,7 @@
                           <a:ea typeface="대명체 보통" panose="020B0600000101010101" pitchFamily="50" charset="-127"/>
                           <a:cs typeface="+mn-cs"/>
                         </a:rPr>
-                        <a:t>5,059</a:t>
+                        <a:t>4,234</a:t>
                       </a:r>
                     </a:p>
                   </a:txBody>
@@ -13209,7 +13209,7 @@
                           <a:ea typeface="대명체 보통" panose="020B0600000101010101" pitchFamily="50" charset="-127"/>
                           <a:cs typeface="+mn-cs"/>
                         </a:rPr>
-                        <a:t>45%</a:t>
+                        <a:t>36%</a:t>
                       </a:r>
                     </a:p>
                   </a:txBody>
@@ -13450,7 +13450,7 @@
                           <a:ea typeface="대명체 보통" panose="020B0600000101010101" pitchFamily="50" charset="-127"/>
                           <a:cs typeface="+mn-cs"/>
                         </a:rPr>
-                        <a:t>175,174</a:t>
+                        <a:t>174,740</a:t>
                       </a:r>
                     </a:p>
                   </a:txBody>
@@ -13576,7 +13576,7 @@
                           <a:ea typeface="대명체 보통" panose="020B0600000101010101" pitchFamily="50" charset="-127"/>
                           <a:cs typeface="+mn-cs"/>
                         </a:rPr>
-                        <a:t>20,157</a:t>
+                        <a:t>19,724</a:t>
                       </a:r>
                     </a:p>
                   </a:txBody>
@@ -13710,7 +13710,7 @@
                           <a:ea typeface="대명체 보통" panose="020B0600000101010101" pitchFamily="50" charset="-127"/>
                           <a:cs typeface="+mn-cs"/>
                         </a:rPr>
-                        <a:t>124,713</a:t>
+                        <a:t>125,105</a:t>
                       </a:r>
                     </a:p>
                   </a:txBody>
@@ -13836,7 +13836,7 @@
                           <a:ea typeface="대명체 보통" panose="020B0600000101010101" pitchFamily="50" charset="-127"/>
                           <a:cs typeface="+mn-cs"/>
                         </a:rPr>
-                        <a:t>50,461</a:t>
+                        <a:t>49,635</a:t>
                       </a:r>
                     </a:p>
                   </a:txBody>
@@ -14237,7 +14237,7 @@
                           <a:ea typeface="대명체 보통" panose="020B0600000101010101" pitchFamily="50" charset="-127"/>
                           <a:cs typeface="+mn-cs"/>
                         </a:rPr>
-                        <a:t>8,370</a:t>
+                        <a:t>8,162</a:t>
                       </a:r>
                     </a:p>
                   </a:txBody>
@@ -14355,7 +14355,7 @@
                           <a:ea typeface="대명체 보통" panose="020B0600000101010101" pitchFamily="50" charset="-127"/>
                           <a:cs typeface="+mn-cs"/>
                         </a:rPr>
-                        <a:t>-1,240</a:t>
+                        <a:t>-1,448</a:t>
                       </a:r>
                       <a:endParaRPr lang="en-US" altLang="ko-KR" sz="700" b="0" i="0" u="none" strike="noStrike" kern="1200" dirty="0">
                         <a:solidFill>
@@ -14427,7 +14427,7 @@
                           <a:ea typeface="대명체 보통" panose="020B0600000101010101" pitchFamily="50" charset="-127"/>
                           <a:cs typeface="+mn-cs"/>
                         </a:rPr>
-                        <a:t>87%</a:t>
+                        <a:t>85%</a:t>
                       </a:r>
                     </a:p>
                   </a:txBody>
@@ -14490,7 +14490,7 @@
                           <a:ea typeface="대명체 보통" panose="020B0600000101010101" pitchFamily="50" charset="-127"/>
                           <a:cs typeface="+mn-cs"/>
                         </a:rPr>
-                        <a:t>6,990</a:t>
+                        <a:t>7,190</a:t>
                       </a:r>
                     </a:p>
                   </a:txBody>
@@ -14608,7 +14608,7 @@
                           <a:ea typeface="대명체 보통" panose="020B0600000101010101" pitchFamily="50" charset="-127"/>
                           <a:cs typeface="+mn-cs"/>
                         </a:rPr>
-                        <a:t>1,380</a:t>
+                        <a:t>971</a:t>
                       </a:r>
                     </a:p>
                   </a:txBody>
@@ -14671,7 +14671,7 @@
                           <a:ea typeface="대명체 보통" panose="020B0600000101010101" pitchFamily="50" charset="-127"/>
                           <a:cs typeface="+mn-cs"/>
                         </a:rPr>
-                        <a:t>20%</a:t>
+                        <a:t>14%</a:t>
                       </a:r>
                     </a:p>
                   </a:txBody>
@@ -14900,7 +14900,7 @@
                           <a:ea typeface="대명체 보통" panose="020B0600000101010101" pitchFamily="50" charset="-127"/>
                           <a:cs typeface="+mn-cs"/>
                         </a:rPr>
-                        <a:t>100,126</a:t>
+                        <a:t>99,918</a:t>
                       </a:r>
                     </a:p>
                   </a:txBody>
@@ -15018,7 +15018,7 @@
                           <a:ea typeface="대명체 보통" panose="020B0600000101010101" pitchFamily="50" charset="-127"/>
                           <a:cs typeface="+mn-cs"/>
                         </a:rPr>
-                        <a:t>10,142</a:t>
+                        <a:t>9,934</a:t>
                       </a:r>
                     </a:p>
                   </a:txBody>
@@ -15144,7 +15144,7 @@
                           <a:ea typeface="대명체 보통" panose="020B0600000101010101" pitchFamily="50" charset="-127"/>
                           <a:cs typeface="+mn-cs"/>
                         </a:rPr>
-                        <a:t>71,854</a:t>
+                        <a:t>72,054</a:t>
                       </a:r>
                     </a:p>
                   </a:txBody>
@@ -15262,7 +15262,7 @@
                           <a:ea typeface="대명체 보통" panose="020B0600000101010101" pitchFamily="50" charset="-127"/>
                           <a:cs typeface="+mn-cs"/>
                         </a:rPr>
-                        <a:t>28,272</a:t>
+                        <a:t>27,864</a:t>
                       </a:r>
                     </a:p>
                   </a:txBody>
@@ -15643,7 +15643,7 @@
                           <a:ea typeface="대명체 보통" panose="020B0600000101010101" pitchFamily="50" charset="-127"/>
                           <a:cs typeface="+mn-cs"/>
                         </a:rPr>
-                        <a:t>7,193</a:t>
+                        <a:t>6,986</a:t>
                       </a:r>
                     </a:p>
                   </a:txBody>
@@ -15753,7 +15753,7 @@
                           <a:ea typeface="대명체 보통" panose="020B0600000101010101" pitchFamily="50" charset="-127"/>
                           <a:cs typeface="+mn-cs"/>
                         </a:rPr>
-                        <a:t>1,334</a:t>
+                        <a:t>1,127</a:t>
                       </a:r>
                       <a:endParaRPr lang="en-US" altLang="ko-KR" sz="700" b="0" i="0" u="none" strike="noStrike" kern="1200" dirty="0">
                         <a:solidFill>
@@ -15821,7 +15821,7 @@
                           <a:ea typeface="대명체 보통" panose="020B0600000101010101" pitchFamily="50" charset="-127"/>
                           <a:cs typeface="+mn-cs"/>
                         </a:rPr>
-                        <a:t>123%</a:t>
+                        <a:t>119%</a:t>
                       </a:r>
                     </a:p>
                   </a:txBody>
@@ -15880,7 +15880,7 @@
                           <a:ea typeface="대명체 보통" panose="020B0600000101010101" pitchFamily="50" charset="-127"/>
                           <a:cs typeface="+mn-cs"/>
                         </a:rPr>
-                        <a:t>3,850</a:t>
+                        <a:t>4,027</a:t>
                       </a:r>
                     </a:p>
                   </a:txBody>
@@ -15990,7 +15990,7 @@
                           <a:ea typeface="대명체 보통" panose="020B0600000101010101" pitchFamily="50" charset="-127"/>
                           <a:cs typeface="+mn-cs"/>
                         </a:rPr>
-                        <a:t>3,342</a:t>
+                        <a:t>2,959</a:t>
                       </a:r>
                     </a:p>
                   </a:txBody>
@@ -16049,7 +16049,7 @@
                           <a:ea typeface="대명체 보통" panose="020B0600000101010101" pitchFamily="50" charset="-127"/>
                           <a:cs typeface="+mn-cs"/>
                         </a:rPr>
-                        <a:t>87%</a:t>
+                        <a:t>73%</a:t>
                       </a:r>
                     </a:p>
                   </a:txBody>
@@ -16266,7 +16266,7 @@
                           <a:ea typeface="대명체 보통" panose="020B0600000101010101" pitchFamily="50" charset="-127"/>
                           <a:cs typeface="+mn-cs"/>
                         </a:rPr>
-                        <a:t>68,454</a:t>
+                        <a:t>68,247</a:t>
                       </a:r>
                     </a:p>
                   </a:txBody>
@@ -16376,7 +16376,7 @@
                           <a:ea typeface="대명체 보통" panose="020B0600000101010101" pitchFamily="50" charset="-127"/>
                           <a:cs typeface="+mn-cs"/>
                         </a:rPr>
-                        <a:t>7,811</a:t>
+                        <a:t>7,604</a:t>
                       </a:r>
                     </a:p>
                   </a:txBody>
@@ -16494,7 +16494,7 @@
                           <a:ea typeface="대명체 보통" panose="020B0600000101010101" pitchFamily="50" charset="-127"/>
                           <a:cs typeface="+mn-cs"/>
                         </a:rPr>
-                        <a:t>48,791</a:t>
+                        <a:t>48,967</a:t>
                       </a:r>
                     </a:p>
                   </a:txBody>
@@ -16604,7 +16604,7 @@
                           <a:ea typeface="대명체 보통" panose="020B0600000101010101" pitchFamily="50" charset="-127"/>
                           <a:cs typeface="+mn-cs"/>
                         </a:rPr>
-                        <a:t>19,663</a:t>
+                        <a:t>19,280</a:t>
                       </a:r>
                     </a:p>
                   </a:txBody>
@@ -16663,7 +16663,7 @@
                           <a:ea typeface="대명체 보통" panose="020B0600000101010101" pitchFamily="50" charset="-127"/>
                           <a:cs typeface="+mn-cs"/>
                         </a:rPr>
-                        <a:t>40%</a:t>
+                        <a:t>39%</a:t>
                       </a:r>
                     </a:p>
                   </a:txBody>
@@ -16999,7 +16999,7 @@
                           <a:ea typeface="대명체 보통" panose="020B0600000101010101" pitchFamily="50" charset="-127"/>
                           <a:cs typeface="+mn-cs"/>
                         </a:rPr>
-                        <a:t>812</a:t>
+                        <a:t>794</a:t>
                       </a:r>
                       <a:endParaRPr lang="en-US" altLang="ko-KR" sz="700" b="0" i="0" u="none" strike="noStrike" kern="1200" dirty="0">
                         <a:solidFill>
@@ -17126,7 +17126,7 @@
                           <a:ea typeface="대명체 보통" panose="020B0600000101010101" pitchFamily="50" charset="-127"/>
                           <a:cs typeface="+mn-cs"/>
                         </a:rPr>
-                        <a:t>293</a:t>
+                        <a:t>274</a:t>
                       </a:r>
                       <a:endParaRPr lang="en-US" altLang="ko-KR" sz="700" b="0" i="0" u="none" strike="noStrike" kern="1200" dirty="0">
                         <a:solidFill>
@@ -17198,7 +17198,7 @@
                           <a:ea typeface="대명체 보통" panose="020B0600000101010101" pitchFamily="50" charset="-127"/>
                           <a:cs typeface="+mn-cs"/>
                         </a:rPr>
-                        <a:t>156%</a:t>
+                        <a:t>153%</a:t>
                       </a:r>
                     </a:p>
                   </a:txBody>
@@ -17261,7 +17261,7 @@
                           <a:ea typeface="대명체 보통" panose="020B0600000101010101" pitchFamily="50" charset="-127"/>
                           <a:cs typeface="+mn-cs"/>
                         </a:rPr>
-                        <a:t>475</a:t>
+                        <a:t>491</a:t>
                       </a:r>
                       <a:endParaRPr lang="en-US" altLang="ko-KR" sz="700" b="0" i="0" u="none" strike="noStrike" kern="1200" dirty="0">
                         <a:solidFill>
@@ -17388,7 +17388,7 @@
                           <a:ea typeface="대명체 보통" panose="020B0600000101010101" pitchFamily="50" charset="-127"/>
                           <a:cs typeface="+mn-cs"/>
                         </a:rPr>
-                        <a:t>337</a:t>
+                        <a:t>303</a:t>
                       </a:r>
                     </a:p>
                   </a:txBody>
@@ -17451,7 +17451,7 @@
                           <a:ea typeface="대명체 보통" panose="020B0600000101010101" pitchFamily="50" charset="-127"/>
                           <a:cs typeface="+mn-cs"/>
                         </a:rPr>
-                        <a:t>71%</a:t>
+                        <a:t>62%</a:t>
                       </a:r>
                     </a:p>
                   </a:txBody>
@@ -17680,7 +17680,7 @@
                           <a:ea typeface="대명체 보통" panose="020B0600000101010101" pitchFamily="50" charset="-127"/>
                           <a:cs typeface="+mn-cs"/>
                         </a:rPr>
-                        <a:t>6,593</a:t>
+                        <a:t>6,575</a:t>
                       </a:r>
                     </a:p>
                   </a:txBody>
@@ -17798,7 +17798,7 @@
                           <a:ea typeface="대명체 보통" panose="020B0600000101010101" pitchFamily="50" charset="-127"/>
                           <a:cs typeface="+mn-cs"/>
                         </a:rPr>
-                        <a:t>2,204</a:t>
+                        <a:t>2,186</a:t>
                       </a:r>
                       <a:endParaRPr lang="en-US" altLang="ko-KR" sz="700" b="0" i="0" u="none" strike="noStrike" kern="1200" dirty="0">
                         <a:solidFill>
@@ -17933,7 +17933,7 @@
                           <a:ea typeface="대명체 보통" panose="020B0600000101010101" pitchFamily="50" charset="-127"/>
                           <a:cs typeface="+mn-cs"/>
                         </a:rPr>
-                        <a:t>4,068</a:t>
+                        <a:t>4,084</a:t>
                       </a:r>
                     </a:p>
                   </a:txBody>
@@ -18051,7 +18051,7 @@
                           <a:ea typeface="대명체 보통" panose="020B0600000101010101" pitchFamily="50" charset="-127"/>
                           <a:cs typeface="+mn-cs"/>
                         </a:rPr>
-                        <a:t>2,525</a:t>
+                        <a:t>2,491</a:t>
                       </a:r>
                     </a:p>
                   </a:txBody>
@@ -18114,7 +18114,7 @@
                           <a:ea typeface="대명체 보통" panose="020B0600000101010101" pitchFamily="50" charset="-127"/>
                           <a:cs typeface="+mn-cs"/>
                         </a:rPr>
-                        <a:t>62%</a:t>
+                        <a:t>61%</a:t>
                       </a:r>
                     </a:p>
                   </a:txBody>

--- a/docs/data/세일즈마케팅_예상매출현황.pptx
+++ b/docs/data/세일즈마케팅_예상매출현황.pptx
@@ -12756,7 +12756,7 @@
                           <a:ea typeface="대명체 보통" panose="020B0600000101010101" pitchFamily="50" charset="-127"/>
                           <a:cs typeface="+mn-cs"/>
                         </a:rPr>
-                        <a:t>15,941</a:t>
+                        <a:t>15,917</a:t>
                       </a:r>
                     </a:p>
                   </a:txBody>
@@ -12882,7 +12882,7 @@
                           <a:ea typeface="대명체 보통" panose="020B0600000101010101" pitchFamily="50" charset="-127"/>
                           <a:cs typeface="+mn-cs"/>
                         </a:rPr>
-                        <a:t>-47</a:t>
+                        <a:t>-71</a:t>
                       </a:r>
                     </a:p>
                   </a:txBody>
@@ -13016,7 +13016,7 @@
                           <a:ea typeface="대명체 보통" panose="020B0600000101010101" pitchFamily="50" charset="-127"/>
                           <a:cs typeface="+mn-cs"/>
                         </a:rPr>
-                        <a:t>11,708</a:t>
+                        <a:t>11,814</a:t>
                       </a:r>
                     </a:p>
                   </a:txBody>
@@ -13142,7 +13142,7 @@
                           <a:ea typeface="대명체 보통" panose="020B0600000101010101" pitchFamily="50" charset="-127"/>
                           <a:cs typeface="+mn-cs"/>
                         </a:rPr>
-                        <a:t>4,234</a:t>
+                        <a:t>4,103</a:t>
                       </a:r>
                     </a:p>
                   </a:txBody>
@@ -13209,7 +13209,7 @@
                           <a:ea typeface="대명체 보통" panose="020B0600000101010101" pitchFamily="50" charset="-127"/>
                           <a:cs typeface="+mn-cs"/>
                         </a:rPr>
-                        <a:t>36%</a:t>
+                        <a:t>35%</a:t>
                       </a:r>
                     </a:p>
                   </a:txBody>
@@ -13450,7 +13450,7 @@
                           <a:ea typeface="대명체 보통" panose="020B0600000101010101" pitchFamily="50" charset="-127"/>
                           <a:cs typeface="+mn-cs"/>
                         </a:rPr>
-                        <a:t>174,740</a:t>
+                        <a:t>174,716</a:t>
                       </a:r>
                     </a:p>
                   </a:txBody>
@@ -13576,7 +13576,7 @@
                           <a:ea typeface="대명체 보통" panose="020B0600000101010101" pitchFamily="50" charset="-127"/>
                           <a:cs typeface="+mn-cs"/>
                         </a:rPr>
-                        <a:t>19,724</a:t>
+                        <a:t>19,700</a:t>
                       </a:r>
                     </a:p>
                   </a:txBody>
@@ -13710,7 +13710,7 @@
                           <a:ea typeface="대명체 보통" panose="020B0600000101010101" pitchFamily="50" charset="-127"/>
                           <a:cs typeface="+mn-cs"/>
                         </a:rPr>
-                        <a:t>125,105</a:t>
+                        <a:t>125,211</a:t>
                       </a:r>
                     </a:p>
                   </a:txBody>
@@ -13836,7 +13836,7 @@
                           <a:ea typeface="대명체 보통" panose="020B0600000101010101" pitchFamily="50" charset="-127"/>
                           <a:cs typeface="+mn-cs"/>
                         </a:rPr>
-                        <a:t>49,635</a:t>
+                        <a:t>49,505</a:t>
                       </a:r>
                     </a:p>
                   </a:txBody>
@@ -14237,7 +14237,7 @@
                           <a:ea typeface="대명체 보통" panose="020B0600000101010101" pitchFamily="50" charset="-127"/>
                           <a:cs typeface="+mn-cs"/>
                         </a:rPr>
-                        <a:t>8,162</a:t>
+                        <a:t>8,147</a:t>
                       </a:r>
                     </a:p>
                   </a:txBody>
@@ -14355,7 +14355,7 @@
                           <a:ea typeface="대명체 보통" panose="020B0600000101010101" pitchFamily="50" charset="-127"/>
                           <a:cs typeface="+mn-cs"/>
                         </a:rPr>
-                        <a:t>-1,448</a:t>
+                        <a:t>-1,463</a:t>
                       </a:r>
                       <a:endParaRPr lang="en-US" altLang="ko-KR" sz="700" b="0" i="0" u="none" strike="noStrike" kern="1200" dirty="0">
                         <a:solidFill>
@@ -14490,7 +14490,7 @@
                           <a:ea typeface="대명체 보통" panose="020B0600000101010101" pitchFamily="50" charset="-127"/>
                           <a:cs typeface="+mn-cs"/>
                         </a:rPr>
-                        <a:t>7,190</a:t>
+                        <a:t>7,260</a:t>
                       </a:r>
                     </a:p>
                   </a:txBody>
@@ -14608,7 +14608,7 @@
                           <a:ea typeface="대명체 보통" panose="020B0600000101010101" pitchFamily="50" charset="-127"/>
                           <a:cs typeface="+mn-cs"/>
                         </a:rPr>
-                        <a:t>971</a:t>
+                        <a:t>886</a:t>
                       </a:r>
                     </a:p>
                   </a:txBody>
@@ -14630,6 +14630,176 @@
                           <a:lumMod val="75000"/>
                         </a:schemeClr>
                       </a:solidFill>
+                      <a:prstDash val="solid"/>
+                      <a:round/>
+                      <a:headEnd type="none" w="med" len="med"/>
+                      <a:tailEnd type="none" w="med" len="med"/>
+                    </a:lnR>
+                    <a:lnT w="6350" cap="flat" cmpd="sng" algn="ctr">
+                      <a:solidFill>
+                        <a:schemeClr val="bg2">
+                          <a:lumMod val="75000"/>
+                        </a:schemeClr>
+                      </a:solidFill>
+                      <a:prstDash val="solid"/>
+                      <a:round/>
+                      <a:headEnd type="none" w="med" len="med"/>
+                      <a:tailEnd type="none" w="med" len="med"/>
+                    </a:lnT>
+                    <a:lnB w="6350" cap="flat" cmpd="sng" algn="ctr">
+                      <a:noFill/>
+                      <a:prstDash val="solid"/>
+                      <a:round/>
+                      <a:headEnd type="none" w="med" len="med"/>
+                      <a:tailEnd type="none" w="med" len="med"/>
+                    </a:lnB>
+                  </a:tcPr>
+                </a:tc>
+                <a:tc>
+                  <a:txBody>
+                    <a:bodyPr/>
+                    <a:lstStyle/>
+                    <a:p>
+                      <a:pPr algn="r" rtl="0" fontAlgn="ctr"/>
+                      <a:r>
+                        <a:rPr lang="en-US" altLang="ko-KR" sz="700" b="0" i="0" u="none" strike="noStrike" kern="1200">
+                          <a:solidFill>
+                            <a:srgbClr val="000000"/>
+                          </a:solidFill>
+                          <a:effectLst/>
+                          <a:latin typeface="대명체 보통" panose="020B0600000101010101" pitchFamily="50" charset="-127"/>
+                          <a:ea typeface="대명체 보통" panose="020B0600000101010101" pitchFamily="50" charset="-127"/>
+                          <a:cs typeface="+mn-cs"/>
+                        </a:rPr>
+                        <a:t>12%</a:t>
+                      </a:r>
+                    </a:p>
+                  </a:txBody>
+                  <a:tcPr marL="9525" marR="9525" marT="9525" marB="0" anchor="ctr">
+                    <a:lnL w="6350" cap="flat" cmpd="sng" algn="ctr">
+                      <a:solidFill>
+                        <a:schemeClr val="bg2">
+                          <a:lumMod val="75000"/>
+                        </a:schemeClr>
+                      </a:solidFill>
+                      <a:prstDash val="solid"/>
+                      <a:round/>
+                      <a:headEnd type="none" w="med" len="med"/>
+                      <a:tailEnd type="none" w="med" len="med"/>
+                    </a:lnL>
+                    <a:lnR w="6350" cap="flat" cmpd="sng" algn="ctr">
+                      <a:noFill/>
+                      <a:prstDash val="solid"/>
+                      <a:round/>
+                      <a:headEnd type="none" w="med" len="med"/>
+                      <a:tailEnd type="none" w="med" len="med"/>
+                    </a:lnR>
+                    <a:lnT w="6350" cap="flat" cmpd="sng" algn="ctr">
+                      <a:solidFill>
+                        <a:schemeClr val="bg2">
+                          <a:lumMod val="75000"/>
+                        </a:schemeClr>
+                      </a:solidFill>
+                      <a:prstDash val="solid"/>
+                      <a:round/>
+                      <a:headEnd type="none" w="med" len="med"/>
+                      <a:tailEnd type="none" w="med" len="med"/>
+                    </a:lnT>
+                    <a:lnB w="6350" cap="flat" cmpd="sng" algn="ctr">
+                      <a:noFill/>
+                      <a:prstDash val="solid"/>
+                      <a:round/>
+                      <a:headEnd type="none" w="med" len="med"/>
+                      <a:tailEnd type="none" w="med" len="med"/>
+                    </a:lnB>
+                  </a:tcPr>
+                </a:tc>
+                <a:tc>
+                  <a:txBody>
+                    <a:bodyPr/>
+                    <a:lstStyle/>
+                    <a:p>
+                      <a:pPr algn="r" fontAlgn="ctr"/>
+                      <a:endParaRPr lang="ko-KR" altLang="en-US" sz="700" b="0" i="0" u="none" strike="noStrike" kern="1200">
+                        <a:solidFill>
+                          <a:srgbClr val="000000"/>
+                        </a:solidFill>
+                        <a:effectLst/>
+                        <a:latin typeface="대명체 보통" panose="020B0600000101010101" pitchFamily="50" charset="-127"/>
+                        <a:ea typeface="대명체 보통" panose="020B0600000101010101" pitchFamily="50" charset="-127"/>
+                        <a:cs typeface="+mn-cs"/>
+                      </a:endParaRPr>
+                    </a:p>
+                  </a:txBody>
+                  <a:tcPr marL="9525" marR="9525" marT="9525" marB="0" anchor="ctr">
+                    <a:lnL w="6350" cap="flat" cmpd="sng" algn="ctr">
+                      <a:noFill/>
+                      <a:prstDash val="solid"/>
+                      <a:round/>
+                      <a:headEnd type="none" w="med" len="med"/>
+                      <a:tailEnd type="none" w="med" len="med"/>
+                    </a:lnL>
+                    <a:lnR w="6350" cap="flat" cmpd="sng" algn="ctr">
+                      <a:noFill/>
+                      <a:prstDash val="solid"/>
+                      <a:round/>
+                      <a:headEnd type="none" w="med" len="med"/>
+                      <a:tailEnd type="none" w="med" len="med"/>
+                    </a:lnR>
+                    <a:lnT w="6350" cap="flat" cmpd="sng" algn="ctr">
+                      <a:noFill/>
+                      <a:prstDash val="solid"/>
+                      <a:round/>
+                      <a:headEnd type="none" w="med" len="med"/>
+                      <a:tailEnd type="none" w="med" len="med"/>
+                    </a:lnT>
+                    <a:lnB w="6350" cap="flat" cmpd="sng" algn="ctr">
+                      <a:noFill/>
+                      <a:prstDash val="solid"/>
+                      <a:round/>
+                      <a:headEnd type="none" w="med" len="med"/>
+                      <a:tailEnd type="none" w="med" len="med"/>
+                    </a:lnB>
+                    <a:lnTlToBr w="12700" cmpd="sng">
+                      <a:noFill/>
+                      <a:prstDash val="solid"/>
+                    </a:lnTlToBr>
+                    <a:lnBlToTr w="12700" cmpd="sng">
+                      <a:noFill/>
+                      <a:prstDash val="solid"/>
+                    </a:lnBlToTr>
+                  </a:tcPr>
+                </a:tc>
+                <a:tc>
+                  <a:txBody>
+                    <a:bodyPr/>
+                    <a:lstStyle/>
+                    <a:p>
+                      <a:pPr algn="r" rtl="0" fontAlgn="ctr"/>
+                      <a:r>
+                        <a:rPr lang="en-US" altLang="ko-KR" sz="700" b="0" i="0" u="none" strike="noStrike" kern="1200">
+                          <a:solidFill>
+                            <a:srgbClr val="000000"/>
+                          </a:solidFill>
+                          <a:effectLst/>
+                          <a:latin typeface="대명체 보통" panose="020B0600000101010101" pitchFamily="50" charset="-127"/>
+                          <a:ea typeface="대명체 보통" panose="020B0600000101010101" pitchFamily="50" charset="-127"/>
+                          <a:cs typeface="+mn-cs"/>
+                        </a:rPr>
+                        <a:t>89,984</a:t>
+                      </a:r>
+                    </a:p>
+                  </a:txBody>
+                  <a:tcPr marL="9525" marR="9525" marT="9525" marB="0" anchor="ctr">
+                    <a:lnL w="6350" cap="flat" cmpd="sng" algn="ctr">
+                      <a:noFill/>
+                      <a:prstDash val="solid"/>
+                      <a:round/>
+                      <a:headEnd type="none" w="med" len="med"/>
+                      <a:tailEnd type="none" w="med" len="med"/>
+                    </a:lnL>
+                    <a:lnR w="6350" cap="flat" cmpd="sng" algn="ctr">
+                      <a:noFill/>
                       <a:prstDash val="solid"/>
                       <a:round/>
                       <a:headEnd type="none" w="med" len="med"/>
@@ -14677,97 +14847,41 @@
                   </a:txBody>
                   <a:tcPr marL="9525" marR="9525" marT="9525" marB="0" anchor="ctr">
                     <a:lnL w="6350" cap="flat" cmpd="sng" algn="ctr">
-                      <a:solidFill>
-                        <a:schemeClr val="bg2">
-                          <a:lumMod val="75000"/>
-                        </a:schemeClr>
-                      </a:solidFill>
-                      <a:prstDash val="solid"/>
-                      <a:round/>
-                      <a:headEnd type="none" w="med" len="med"/>
-                      <a:tailEnd type="none" w="med" len="med"/>
-                    </a:lnL>
-                    <a:lnR w="6350" cap="flat" cmpd="sng" algn="ctr">
-                      <a:noFill/>
-                      <a:prstDash val="solid"/>
-                      <a:round/>
-                      <a:headEnd type="none" w="med" len="med"/>
-                      <a:tailEnd type="none" w="med" len="med"/>
-                    </a:lnR>
-                    <a:lnT w="6350" cap="flat" cmpd="sng" algn="ctr">
-                      <a:solidFill>
-                        <a:schemeClr val="bg2">
-                          <a:lumMod val="75000"/>
-                        </a:schemeClr>
-                      </a:solidFill>
-                      <a:prstDash val="solid"/>
-                      <a:round/>
-                      <a:headEnd type="none" w="med" len="med"/>
-                      <a:tailEnd type="none" w="med" len="med"/>
-                    </a:lnT>
-                    <a:lnB w="6350" cap="flat" cmpd="sng" algn="ctr">
-                      <a:noFill/>
-                      <a:prstDash val="solid"/>
-                      <a:round/>
-                      <a:headEnd type="none" w="med" len="med"/>
-                      <a:tailEnd type="none" w="med" len="med"/>
-                    </a:lnB>
-                  </a:tcPr>
-                </a:tc>
-                <a:tc>
-                  <a:txBody>
-                    <a:bodyPr/>
-                    <a:lstStyle/>
-                    <a:p>
-                      <a:pPr algn="r" fontAlgn="ctr"/>
-                      <a:endParaRPr lang="ko-KR" altLang="en-US" sz="700" b="0" i="0" u="none" strike="noStrike" kern="1200">
-                        <a:solidFill>
-                          <a:srgbClr val="000000"/>
-                        </a:solidFill>
-                        <a:effectLst/>
-                        <a:latin typeface="대명체 보통" panose="020B0600000101010101" pitchFamily="50" charset="-127"/>
-                        <a:ea typeface="대명체 보통" panose="020B0600000101010101" pitchFamily="50" charset="-127"/>
-                        <a:cs typeface="+mn-cs"/>
-                      </a:endParaRPr>
-                    </a:p>
-                  </a:txBody>
-                  <a:tcPr marL="9525" marR="9525" marT="9525" marB="0" anchor="ctr">
-                    <a:lnL w="6350" cap="flat" cmpd="sng" algn="ctr">
-                      <a:noFill/>
-                      <a:prstDash val="solid"/>
-                      <a:round/>
-                      <a:headEnd type="none" w="med" len="med"/>
-                      <a:tailEnd type="none" w="med" len="med"/>
-                    </a:lnL>
-                    <a:lnR w="6350" cap="flat" cmpd="sng" algn="ctr">
-                      <a:noFill/>
-                      <a:prstDash val="solid"/>
-                      <a:round/>
-                      <a:headEnd type="none" w="med" len="med"/>
-                      <a:tailEnd type="none" w="med" len="med"/>
-                    </a:lnR>
-                    <a:lnT w="6350" cap="flat" cmpd="sng" algn="ctr">
-                      <a:noFill/>
-                      <a:prstDash val="solid"/>
-                      <a:round/>
-                      <a:headEnd type="none" w="med" len="med"/>
-                      <a:tailEnd type="none" w="med" len="med"/>
-                    </a:lnT>
-                    <a:lnB w="6350" cap="flat" cmpd="sng" algn="ctr">
-                      <a:noFill/>
-                      <a:prstDash val="solid"/>
-                      <a:round/>
-                      <a:headEnd type="none" w="med" len="med"/>
-                      <a:tailEnd type="none" w="med" len="med"/>
-                    </a:lnB>
-                    <a:lnTlToBr w="12700" cmpd="sng">
-                      <a:noFill/>
-                      <a:prstDash val="solid"/>
-                    </a:lnTlToBr>
-                    <a:lnBlToTr w="12700" cmpd="sng">
-                      <a:noFill/>
-                      <a:prstDash val="solid"/>
-                    </a:lnBlToTr>
+                      <a:noFill/>
+                      <a:prstDash val="solid"/>
+                      <a:round/>
+                      <a:headEnd type="none" w="med" len="med"/>
+                      <a:tailEnd type="none" w="med" len="med"/>
+                    </a:lnL>
+                    <a:lnR w="6350" cap="flat" cmpd="sng" algn="ctr">
+                      <a:solidFill>
+                        <a:schemeClr val="bg2">
+                          <a:lumMod val="75000"/>
+                        </a:schemeClr>
+                      </a:solidFill>
+                      <a:prstDash val="solid"/>
+                      <a:round/>
+                      <a:headEnd type="none" w="med" len="med"/>
+                      <a:tailEnd type="none" w="med" len="med"/>
+                    </a:lnR>
+                    <a:lnT w="6350" cap="flat" cmpd="sng" algn="ctr">
+                      <a:solidFill>
+                        <a:schemeClr val="bg2">
+                          <a:lumMod val="75000"/>
+                        </a:schemeClr>
+                      </a:solidFill>
+                      <a:prstDash val="solid"/>
+                      <a:round/>
+                      <a:headEnd type="none" w="med" len="med"/>
+                      <a:tailEnd type="none" w="med" len="med"/>
+                    </a:lnT>
+                    <a:lnB w="6350" cap="flat" cmpd="sng" algn="ctr">
+                      <a:noFill/>
+                      <a:prstDash val="solid"/>
+                      <a:round/>
+                      <a:headEnd type="none" w="med" len="med"/>
+                      <a:tailEnd type="none" w="med" len="med"/>
+                    </a:lnB>
                   </a:tcPr>
                 </a:tc>
                 <a:tc>
@@ -14786,121 +14900,7 @@
                           <a:ea typeface="대명체 보통" panose="020B0600000101010101" pitchFamily="50" charset="-127"/>
                           <a:cs typeface="+mn-cs"/>
                         </a:rPr>
-                        <a:t>89,984</a:t>
-                      </a:r>
-                    </a:p>
-                  </a:txBody>
-                  <a:tcPr marL="9525" marR="9525" marT="9525" marB="0" anchor="ctr">
-                    <a:lnL w="6350" cap="flat" cmpd="sng" algn="ctr">
-                      <a:noFill/>
-                      <a:prstDash val="solid"/>
-                      <a:round/>
-                      <a:headEnd type="none" w="med" len="med"/>
-                      <a:tailEnd type="none" w="med" len="med"/>
-                    </a:lnL>
-                    <a:lnR w="6350" cap="flat" cmpd="sng" algn="ctr">
-                      <a:noFill/>
-                      <a:prstDash val="solid"/>
-                      <a:round/>
-                      <a:headEnd type="none" w="med" len="med"/>
-                      <a:tailEnd type="none" w="med" len="med"/>
-                    </a:lnR>
-                    <a:lnT w="6350" cap="flat" cmpd="sng" algn="ctr">
-                      <a:solidFill>
-                        <a:schemeClr val="bg2">
-                          <a:lumMod val="75000"/>
-                        </a:schemeClr>
-                      </a:solidFill>
-                      <a:prstDash val="solid"/>
-                      <a:round/>
-                      <a:headEnd type="none" w="med" len="med"/>
-                      <a:tailEnd type="none" w="med" len="med"/>
-                    </a:lnT>
-                    <a:lnB w="6350" cap="flat" cmpd="sng" algn="ctr">
-                      <a:noFill/>
-                      <a:prstDash val="solid"/>
-                      <a:round/>
-                      <a:headEnd type="none" w="med" len="med"/>
-                      <a:tailEnd type="none" w="med" len="med"/>
-                    </a:lnB>
-                  </a:tcPr>
-                </a:tc>
-                <a:tc>
-                  <a:txBody>
-                    <a:bodyPr/>
-                    <a:lstStyle/>
-                    <a:p>
-                      <a:pPr algn="r" rtl="0" fontAlgn="ctr"/>
-                      <a:r>
-                        <a:rPr lang="en-US" altLang="ko-KR" sz="700" b="0" i="0" u="none" strike="noStrike" kern="1200">
-                          <a:solidFill>
-                            <a:srgbClr val="000000"/>
-                          </a:solidFill>
-                          <a:effectLst/>
-                          <a:latin typeface="대명체 보통" panose="020B0600000101010101" pitchFamily="50" charset="-127"/>
-                          <a:ea typeface="대명체 보통" panose="020B0600000101010101" pitchFamily="50" charset="-127"/>
-                          <a:cs typeface="+mn-cs"/>
-                        </a:rPr>
-                        <a:t>14%</a:t>
-                      </a:r>
-                    </a:p>
-                  </a:txBody>
-                  <a:tcPr marL="9525" marR="9525" marT="9525" marB="0" anchor="ctr">
-                    <a:lnL w="6350" cap="flat" cmpd="sng" algn="ctr">
-                      <a:noFill/>
-                      <a:prstDash val="solid"/>
-                      <a:round/>
-                      <a:headEnd type="none" w="med" len="med"/>
-                      <a:tailEnd type="none" w="med" len="med"/>
-                    </a:lnL>
-                    <a:lnR w="6350" cap="flat" cmpd="sng" algn="ctr">
-                      <a:solidFill>
-                        <a:schemeClr val="bg2">
-                          <a:lumMod val="75000"/>
-                        </a:schemeClr>
-                      </a:solidFill>
-                      <a:prstDash val="solid"/>
-                      <a:round/>
-                      <a:headEnd type="none" w="med" len="med"/>
-                      <a:tailEnd type="none" w="med" len="med"/>
-                    </a:lnR>
-                    <a:lnT w="6350" cap="flat" cmpd="sng" algn="ctr">
-                      <a:solidFill>
-                        <a:schemeClr val="bg2">
-                          <a:lumMod val="75000"/>
-                        </a:schemeClr>
-                      </a:solidFill>
-                      <a:prstDash val="solid"/>
-                      <a:round/>
-                      <a:headEnd type="none" w="med" len="med"/>
-                      <a:tailEnd type="none" w="med" len="med"/>
-                    </a:lnT>
-                    <a:lnB w="6350" cap="flat" cmpd="sng" algn="ctr">
-                      <a:noFill/>
-                      <a:prstDash val="solid"/>
-                      <a:round/>
-                      <a:headEnd type="none" w="med" len="med"/>
-                      <a:tailEnd type="none" w="med" len="med"/>
-                    </a:lnB>
-                  </a:tcPr>
-                </a:tc>
-                <a:tc>
-                  <a:txBody>
-                    <a:bodyPr/>
-                    <a:lstStyle/>
-                    <a:p>
-                      <a:pPr algn="r" rtl="0" fontAlgn="ctr"/>
-                      <a:r>
-                        <a:rPr lang="en-US" altLang="ko-KR" sz="700" b="0" i="0" u="none" strike="noStrike" kern="1200">
-                          <a:solidFill>
-                            <a:srgbClr val="000000"/>
-                          </a:solidFill>
-                          <a:effectLst/>
-                          <a:latin typeface="대명체 보통" panose="020B0600000101010101" pitchFamily="50" charset="-127"/>
-                          <a:ea typeface="대명체 보통" panose="020B0600000101010101" pitchFamily="50" charset="-127"/>
-                          <a:cs typeface="+mn-cs"/>
-                        </a:rPr>
-                        <a:t>99,918</a:t>
+                        <a:t>99,903</a:t>
                       </a:r>
                     </a:p>
                   </a:txBody>
@@ -15018,7 +15018,7 @@
                           <a:ea typeface="대명체 보통" panose="020B0600000101010101" pitchFamily="50" charset="-127"/>
                           <a:cs typeface="+mn-cs"/>
                         </a:rPr>
-                        <a:t>9,934</a:t>
+                        <a:t>9,919</a:t>
                       </a:r>
                     </a:p>
                   </a:txBody>
@@ -15144,7 +15144,7 @@
                           <a:ea typeface="대명체 보통" panose="020B0600000101010101" pitchFamily="50" charset="-127"/>
                           <a:cs typeface="+mn-cs"/>
                         </a:rPr>
-                        <a:t>72,054</a:t>
+                        <a:t>72,124</a:t>
                       </a:r>
                     </a:p>
                   </a:txBody>
@@ -15262,7 +15262,7 @@
                           <a:ea typeface="대명체 보통" panose="020B0600000101010101" pitchFamily="50" charset="-127"/>
                           <a:cs typeface="+mn-cs"/>
                         </a:rPr>
-                        <a:t>27,864</a:t>
+                        <a:t>27,779</a:t>
                       </a:r>
                     </a:p>
                   </a:txBody>
@@ -15643,7 +15643,7 @@
                           <a:ea typeface="대명체 보통" panose="020B0600000101010101" pitchFamily="50" charset="-127"/>
                           <a:cs typeface="+mn-cs"/>
                         </a:rPr>
-                        <a:t>6,986</a:t>
+                        <a:t>6,980</a:t>
                       </a:r>
                     </a:p>
                   </a:txBody>
@@ -15753,7 +15753,7 @@
                           <a:ea typeface="대명체 보통" panose="020B0600000101010101" pitchFamily="50" charset="-127"/>
                           <a:cs typeface="+mn-cs"/>
                         </a:rPr>
-                        <a:t>1,127</a:t>
+                        <a:t>1,121</a:t>
                       </a:r>
                       <a:endParaRPr lang="en-US" altLang="ko-KR" sz="700" b="0" i="0" u="none" strike="noStrike" kern="1200" dirty="0">
                         <a:solidFill>
@@ -15880,7 +15880,7 @@
                           <a:ea typeface="대명체 보통" panose="020B0600000101010101" pitchFamily="50" charset="-127"/>
                           <a:cs typeface="+mn-cs"/>
                         </a:rPr>
-                        <a:t>4,027</a:t>
+                        <a:t>4,063</a:t>
                       </a:r>
                     </a:p>
                   </a:txBody>
@@ -15990,7 +15990,7 @@
                           <a:ea typeface="대명체 보통" panose="020B0600000101010101" pitchFamily="50" charset="-127"/>
                           <a:cs typeface="+mn-cs"/>
                         </a:rPr>
-                        <a:t>2,959</a:t>
+                        <a:t>2,917</a:t>
                       </a:r>
                     </a:p>
                   </a:txBody>
@@ -16049,7 +16049,7 @@
                           <a:ea typeface="대명체 보통" panose="020B0600000101010101" pitchFamily="50" charset="-127"/>
                           <a:cs typeface="+mn-cs"/>
                         </a:rPr>
-                        <a:t>73%</a:t>
+                        <a:t>72%</a:t>
                       </a:r>
                     </a:p>
                   </a:txBody>
@@ -16266,7 +16266,7 @@
                           <a:ea typeface="대명체 보통" panose="020B0600000101010101" pitchFamily="50" charset="-127"/>
                           <a:cs typeface="+mn-cs"/>
                         </a:rPr>
-                        <a:t>68,247</a:t>
+                        <a:t>68,241</a:t>
                       </a:r>
                     </a:p>
                   </a:txBody>
@@ -16376,7 +16376,7 @@
                           <a:ea typeface="대명체 보통" panose="020B0600000101010101" pitchFamily="50" charset="-127"/>
                           <a:cs typeface="+mn-cs"/>
                         </a:rPr>
-                        <a:t>7,604</a:t>
+                        <a:t>7,599</a:t>
                       </a:r>
                     </a:p>
                   </a:txBody>
@@ -16494,7 +16494,7 @@
                           <a:ea typeface="대명체 보통" panose="020B0600000101010101" pitchFamily="50" charset="-127"/>
                           <a:cs typeface="+mn-cs"/>
                         </a:rPr>
-                        <a:t>48,967</a:t>
+                        <a:t>49,004</a:t>
                       </a:r>
                     </a:p>
                   </a:txBody>
@@ -16604,7 +16604,7 @@
                           <a:ea typeface="대명체 보통" panose="020B0600000101010101" pitchFamily="50" charset="-127"/>
                           <a:cs typeface="+mn-cs"/>
                         </a:rPr>
-                        <a:t>19,280</a:t>
+                        <a:t>19,237</a:t>
                       </a:r>
                     </a:p>
                   </a:txBody>
@@ -16999,7 +16999,7 @@
                           <a:ea typeface="대명체 보통" panose="020B0600000101010101" pitchFamily="50" charset="-127"/>
                           <a:cs typeface="+mn-cs"/>
                         </a:rPr>
-                        <a:t>794</a:t>
+                        <a:t>790</a:t>
                       </a:r>
                       <a:endParaRPr lang="en-US" altLang="ko-KR" sz="700" b="0" i="0" u="none" strike="noStrike" kern="1200" dirty="0">
                         <a:solidFill>
@@ -17126,7 +17126,7 @@
                           <a:ea typeface="대명체 보통" panose="020B0600000101010101" pitchFamily="50" charset="-127"/>
                           <a:cs typeface="+mn-cs"/>
                         </a:rPr>
-                        <a:t>274</a:t>
+                        <a:t>271</a:t>
                       </a:r>
                       <a:endParaRPr lang="en-US" altLang="ko-KR" sz="700" b="0" i="0" u="none" strike="noStrike" kern="1200" dirty="0">
                         <a:solidFill>
@@ -17198,7 +17198,7 @@
                           <a:ea typeface="대명체 보통" panose="020B0600000101010101" pitchFamily="50" charset="-127"/>
                           <a:cs typeface="+mn-cs"/>
                         </a:rPr>
-                        <a:t>153%</a:t>
+                        <a:t>152%</a:t>
                       </a:r>
                     </a:p>
                   </a:txBody>
@@ -17388,7 +17388,7 @@
                           <a:ea typeface="대명체 보통" panose="020B0600000101010101" pitchFamily="50" charset="-127"/>
                           <a:cs typeface="+mn-cs"/>
                         </a:rPr>
-                        <a:t>303</a:t>
+                        <a:t>300</a:t>
                       </a:r>
                     </a:p>
                   </a:txBody>
@@ -17451,7 +17451,7 @@
                           <a:ea typeface="대명체 보통" panose="020B0600000101010101" pitchFamily="50" charset="-127"/>
                           <a:cs typeface="+mn-cs"/>
                         </a:rPr>
-                        <a:t>62%</a:t>
+                        <a:t>61%</a:t>
                       </a:r>
                     </a:p>
                   </a:txBody>
@@ -17680,7 +17680,7 @@
                           <a:ea typeface="대명체 보통" panose="020B0600000101010101" pitchFamily="50" charset="-127"/>
                           <a:cs typeface="+mn-cs"/>
                         </a:rPr>
-                        <a:t>6,575</a:t>
+                        <a:t>6,572</a:t>
                       </a:r>
                     </a:p>
                   </a:txBody>
@@ -17798,7 +17798,7 @@
                           <a:ea typeface="대명체 보통" panose="020B0600000101010101" pitchFamily="50" charset="-127"/>
                           <a:cs typeface="+mn-cs"/>
                         </a:rPr>
-                        <a:t>2,186</a:t>
+                        <a:t>2,182</a:t>
                       </a:r>
                       <a:endParaRPr lang="en-US" altLang="ko-KR" sz="700" b="0" i="0" u="none" strike="noStrike" kern="1200" dirty="0">
                         <a:solidFill>
@@ -18051,7 +18051,7 @@
                           <a:ea typeface="대명체 보통" panose="020B0600000101010101" pitchFamily="50" charset="-127"/>
                           <a:cs typeface="+mn-cs"/>
                         </a:rPr>
-                        <a:t>2,491</a:t>
+                        <a:t>2,488</a:t>
                       </a:r>
                     </a:p>
                   </a:txBody>

--- a/docs/data/세일즈마케팅_예상매출현황.pptx
+++ b/docs/data/세일즈마케팅_예상매출현황.pptx
@@ -12756,7 +12756,7 @@
                           <a:ea typeface="대명체 보통" panose="020B0600000101010101" pitchFamily="50" charset="-127"/>
                           <a:cs typeface="+mn-cs"/>
                         </a:rPr>
-                        <a:t>15,917</a:t>
+                        <a:t>15,920</a:t>
                       </a:r>
                     </a:p>
                   </a:txBody>
@@ -12882,7 +12882,7 @@
                           <a:ea typeface="대명체 보통" panose="020B0600000101010101" pitchFamily="50" charset="-127"/>
                           <a:cs typeface="+mn-cs"/>
                         </a:rPr>
-                        <a:t>-71</a:t>
+                        <a:t>-68</a:t>
                       </a:r>
                     </a:p>
                   </a:txBody>
@@ -13142,7 +13142,7 @@
                           <a:ea typeface="대명체 보통" panose="020B0600000101010101" pitchFamily="50" charset="-127"/>
                           <a:cs typeface="+mn-cs"/>
                         </a:rPr>
-                        <a:t>4,103</a:t>
+                        <a:t>4,106</a:t>
                       </a:r>
                     </a:p>
                   </a:txBody>
@@ -13450,7 +13450,7 @@
                           <a:ea typeface="대명체 보통" panose="020B0600000101010101" pitchFamily="50" charset="-127"/>
                           <a:cs typeface="+mn-cs"/>
                         </a:rPr>
-                        <a:t>174,716</a:t>
+                        <a:t>174,719</a:t>
                       </a:r>
                     </a:p>
                   </a:txBody>
@@ -13576,7 +13576,7 @@
                           <a:ea typeface="대명체 보통" panose="020B0600000101010101" pitchFamily="50" charset="-127"/>
                           <a:cs typeface="+mn-cs"/>
                         </a:rPr>
-                        <a:t>19,700</a:t>
+                        <a:t>19,703</a:t>
                       </a:r>
                     </a:p>
                   </a:txBody>
@@ -13836,7 +13836,7 @@
                           <a:ea typeface="대명체 보통" panose="020B0600000101010101" pitchFamily="50" charset="-127"/>
                           <a:cs typeface="+mn-cs"/>
                         </a:rPr>
-                        <a:t>49,505</a:t>
+                        <a:t>49,508</a:t>
                       </a:r>
                     </a:p>
                   </a:txBody>
@@ -14237,7 +14237,7 @@
                           <a:ea typeface="대명체 보통" panose="020B0600000101010101" pitchFamily="50" charset="-127"/>
                           <a:cs typeface="+mn-cs"/>
                         </a:rPr>
-                        <a:t>8,147</a:t>
+                        <a:t>8,151</a:t>
                       </a:r>
                     </a:p>
                   </a:txBody>
@@ -14355,7 +14355,7 @@
                           <a:ea typeface="대명체 보통" panose="020B0600000101010101" pitchFamily="50" charset="-127"/>
                           <a:cs typeface="+mn-cs"/>
                         </a:rPr>
-                        <a:t>-1,463</a:t>
+                        <a:t>-1,459</a:t>
                       </a:r>
                       <a:endParaRPr lang="en-US" altLang="ko-KR" sz="700" b="0" i="0" u="none" strike="noStrike" kern="1200" dirty="0">
                         <a:solidFill>
@@ -14608,7 +14608,7 @@
                           <a:ea typeface="대명체 보통" panose="020B0600000101010101" pitchFamily="50" charset="-127"/>
                           <a:cs typeface="+mn-cs"/>
                         </a:rPr>
-                        <a:t>886</a:t>
+                        <a:t>890</a:t>
                       </a:r>
                     </a:p>
                   </a:txBody>
@@ -14900,7 +14900,7 @@
                           <a:ea typeface="대명체 보통" panose="020B0600000101010101" pitchFamily="50" charset="-127"/>
                           <a:cs typeface="+mn-cs"/>
                         </a:rPr>
-                        <a:t>99,903</a:t>
+                        <a:t>99,907</a:t>
                       </a:r>
                     </a:p>
                   </a:txBody>
@@ -15018,7 +15018,7 @@
                           <a:ea typeface="대명체 보통" panose="020B0600000101010101" pitchFamily="50" charset="-127"/>
                           <a:cs typeface="+mn-cs"/>
                         </a:rPr>
-                        <a:t>9,919</a:t>
+                        <a:t>9,923</a:t>
                       </a:r>
                     </a:p>
                   </a:txBody>
@@ -15262,7 +15262,7 @@
                           <a:ea typeface="대명체 보통" panose="020B0600000101010101" pitchFamily="50" charset="-127"/>
                           <a:cs typeface="+mn-cs"/>
                         </a:rPr>
-                        <a:t>27,779</a:t>
+                        <a:t>27,783</a:t>
                       </a:r>
                     </a:p>
                   </a:txBody>
@@ -16999,7 +16999,7 @@
                           <a:ea typeface="대명체 보통" panose="020B0600000101010101" pitchFamily="50" charset="-127"/>
                           <a:cs typeface="+mn-cs"/>
                         </a:rPr>
-                        <a:t>790</a:t>
+                        <a:t>789</a:t>
                       </a:r>
                       <a:endParaRPr lang="en-US" altLang="ko-KR" sz="700" b="0" i="0" u="none" strike="noStrike" kern="1200" dirty="0">
                         <a:solidFill>
@@ -17126,7 +17126,7 @@
                           <a:ea typeface="대명체 보통" panose="020B0600000101010101" pitchFamily="50" charset="-127"/>
                           <a:cs typeface="+mn-cs"/>
                         </a:rPr>
-                        <a:t>271</a:t>
+                        <a:t>270</a:t>
                       </a:r>
                       <a:endParaRPr lang="en-US" altLang="ko-KR" sz="700" b="0" i="0" u="none" strike="noStrike" kern="1200" dirty="0">
                         <a:solidFill>
@@ -17388,7 +17388,7 @@
                           <a:ea typeface="대명체 보통" panose="020B0600000101010101" pitchFamily="50" charset="-127"/>
                           <a:cs typeface="+mn-cs"/>
                         </a:rPr>
-                        <a:t>300</a:t>
+                        <a:t>299</a:t>
                       </a:r>
                     </a:p>
                   </a:txBody>
@@ -17680,7 +17680,7 @@
                           <a:ea typeface="대명체 보통" panose="020B0600000101010101" pitchFamily="50" charset="-127"/>
                           <a:cs typeface="+mn-cs"/>
                         </a:rPr>
-                        <a:t>6,572</a:t>
+                        <a:t>6,571</a:t>
                       </a:r>
                     </a:p>
                   </a:txBody>
@@ -17798,7 +17798,7 @@
                           <a:ea typeface="대명체 보통" panose="020B0600000101010101" pitchFamily="50" charset="-127"/>
                           <a:cs typeface="+mn-cs"/>
                         </a:rPr>
-                        <a:t>2,182</a:t>
+                        <a:t>2,181</a:t>
                       </a:r>
                       <a:endParaRPr lang="en-US" altLang="ko-KR" sz="700" b="0" i="0" u="none" strike="noStrike" kern="1200" dirty="0">
                         <a:solidFill>
@@ -18051,7 +18051,7 @@
                           <a:ea typeface="대명체 보통" panose="020B0600000101010101" pitchFamily="50" charset="-127"/>
                           <a:cs typeface="+mn-cs"/>
                         </a:rPr>
-                        <a:t>2,488</a:t>
+                        <a:t>2,487</a:t>
                       </a:r>
                     </a:p>
                   </a:txBody>

--- a/docs/data/세일즈마케팅_예상매출현황.pptx
+++ b/docs/data/세일즈마케팅_예상매출현황.pptx
@@ -12756,7 +12756,7 @@
                           <a:ea typeface="대명체 보통" panose="020B0600000101010101" pitchFamily="50" charset="-127"/>
                           <a:cs typeface="+mn-cs"/>
                         </a:rPr>
-                        <a:t>15,920</a:t>
+                        <a:t>15,826</a:t>
                       </a:r>
                     </a:p>
                   </a:txBody>
@@ -12882,7 +12882,7 @@
                           <a:ea typeface="대명체 보통" panose="020B0600000101010101" pitchFamily="50" charset="-127"/>
                           <a:cs typeface="+mn-cs"/>
                         </a:rPr>
-                        <a:t>-68</a:t>
+                        <a:t>-162</a:t>
                       </a:r>
                     </a:p>
                   </a:txBody>
@@ -12949,7 +12949,7 @@
                           <a:ea typeface="대명체 보통" panose="020B0600000101010101" pitchFamily="50" charset="-127"/>
                           <a:cs typeface="+mn-cs"/>
                         </a:rPr>
-                        <a:t>100%</a:t>
+                        <a:t>99%</a:t>
                       </a:r>
                     </a:p>
                   </a:txBody>
@@ -13016,7 +13016,7 @@
                           <a:ea typeface="대명체 보통" panose="020B0600000101010101" pitchFamily="50" charset="-127"/>
                           <a:cs typeface="+mn-cs"/>
                         </a:rPr>
-                        <a:t>11,814</a:t>
+                        <a:t>11,961</a:t>
                       </a:r>
                     </a:p>
                   </a:txBody>
@@ -13142,7 +13142,7 @@
                           <a:ea typeface="대명체 보통" panose="020B0600000101010101" pitchFamily="50" charset="-127"/>
                           <a:cs typeface="+mn-cs"/>
                         </a:rPr>
-                        <a:t>4,106</a:t>
+                        <a:t>3,865</a:t>
                       </a:r>
                     </a:p>
                   </a:txBody>
@@ -13209,7 +13209,7 @@
                           <a:ea typeface="대명체 보통" panose="020B0600000101010101" pitchFamily="50" charset="-127"/>
                           <a:cs typeface="+mn-cs"/>
                         </a:rPr>
-                        <a:t>35%</a:t>
+                        <a:t>32%</a:t>
                       </a:r>
                     </a:p>
                   </a:txBody>
@@ -13450,7 +13450,7 @@
                           <a:ea typeface="대명체 보통" panose="020B0600000101010101" pitchFamily="50" charset="-127"/>
                           <a:cs typeface="+mn-cs"/>
                         </a:rPr>
-                        <a:t>174,719</a:t>
+                        <a:t>174,625</a:t>
                       </a:r>
                     </a:p>
                   </a:txBody>
@@ -13576,7 +13576,7 @@
                           <a:ea typeface="대명체 보통" panose="020B0600000101010101" pitchFamily="50" charset="-127"/>
                           <a:cs typeface="+mn-cs"/>
                         </a:rPr>
-                        <a:t>19,703</a:t>
+                        <a:t>19,609</a:t>
                       </a:r>
                     </a:p>
                   </a:txBody>
@@ -13710,7 +13710,7 @@
                           <a:ea typeface="대명체 보통" panose="020B0600000101010101" pitchFamily="50" charset="-127"/>
                           <a:cs typeface="+mn-cs"/>
                         </a:rPr>
-                        <a:t>125,211</a:t>
+                        <a:t>125,358</a:t>
                       </a:r>
                     </a:p>
                   </a:txBody>
@@ -13836,7 +13836,7 @@
                           <a:ea typeface="대명체 보통" panose="020B0600000101010101" pitchFamily="50" charset="-127"/>
                           <a:cs typeface="+mn-cs"/>
                         </a:rPr>
-                        <a:t>49,508</a:t>
+                        <a:t>49,266</a:t>
                       </a:r>
                     </a:p>
                   </a:txBody>
@@ -13903,7 +13903,7 @@
                           <a:ea typeface="대명체 보통" panose="020B0600000101010101" pitchFamily="50" charset="-127"/>
                           <a:cs typeface="+mn-cs"/>
                         </a:rPr>
-                        <a:t>40%</a:t>
+                        <a:t>39%</a:t>
                       </a:r>
                     </a:p>
                   </a:txBody>
@@ -14237,7 +14237,7 @@
                           <a:ea typeface="대명체 보통" panose="020B0600000101010101" pitchFamily="50" charset="-127"/>
                           <a:cs typeface="+mn-cs"/>
                         </a:rPr>
-                        <a:t>8,151</a:t>
+                        <a:t>8,107</a:t>
                       </a:r>
                     </a:p>
                   </a:txBody>
@@ -14355,7 +14355,7 @@
                           <a:ea typeface="대명체 보통" panose="020B0600000101010101" pitchFamily="50" charset="-127"/>
                           <a:cs typeface="+mn-cs"/>
                         </a:rPr>
-                        <a:t>-1,459</a:t>
+                        <a:t>-1,503</a:t>
                       </a:r>
                       <a:endParaRPr lang="en-US" altLang="ko-KR" sz="700" b="0" i="0" u="none" strike="noStrike" kern="1200" dirty="0">
                         <a:solidFill>
@@ -14427,7 +14427,7 @@
                           <a:ea typeface="대명체 보통" panose="020B0600000101010101" pitchFamily="50" charset="-127"/>
                           <a:cs typeface="+mn-cs"/>
                         </a:rPr>
-                        <a:t>85%</a:t>
+                        <a:t>84%</a:t>
                       </a:r>
                     </a:p>
                   </a:txBody>
@@ -14490,7 +14490,7 @@
                           <a:ea typeface="대명체 보통" panose="020B0600000101010101" pitchFamily="50" charset="-127"/>
                           <a:cs typeface="+mn-cs"/>
                         </a:rPr>
-                        <a:t>7,260</a:t>
+                        <a:t>7,361</a:t>
                       </a:r>
                     </a:p>
                   </a:txBody>
@@ -14608,7 +14608,7 @@
                           <a:ea typeface="대명체 보통" panose="020B0600000101010101" pitchFamily="50" charset="-127"/>
                           <a:cs typeface="+mn-cs"/>
                         </a:rPr>
-                        <a:t>890</a:t>
+                        <a:t>746</a:t>
                       </a:r>
                     </a:p>
                   </a:txBody>
@@ -14671,7 +14671,7 @@
                           <a:ea typeface="대명체 보통" panose="020B0600000101010101" pitchFamily="50" charset="-127"/>
                           <a:cs typeface="+mn-cs"/>
                         </a:rPr>
-                        <a:t>12%</a:t>
+                        <a:t>10%</a:t>
                       </a:r>
                     </a:p>
                   </a:txBody>
@@ -14900,7 +14900,7 @@
                           <a:ea typeface="대명체 보통" panose="020B0600000101010101" pitchFamily="50" charset="-127"/>
                           <a:cs typeface="+mn-cs"/>
                         </a:rPr>
-                        <a:t>99,907</a:t>
+                        <a:t>99,863</a:t>
                       </a:r>
                     </a:p>
                   </a:txBody>
@@ -15018,7 +15018,7 @@
                           <a:ea typeface="대명체 보통" panose="020B0600000101010101" pitchFamily="50" charset="-127"/>
                           <a:cs typeface="+mn-cs"/>
                         </a:rPr>
-                        <a:t>9,923</a:t>
+                        <a:t>9,879</a:t>
                       </a:r>
                     </a:p>
                   </a:txBody>
@@ -15144,7 +15144,7 @@
                           <a:ea typeface="대명체 보통" panose="020B0600000101010101" pitchFamily="50" charset="-127"/>
                           <a:cs typeface="+mn-cs"/>
                         </a:rPr>
-                        <a:t>72,124</a:t>
+                        <a:t>72,225</a:t>
                       </a:r>
                     </a:p>
                   </a:txBody>
@@ -15262,7 +15262,7 @@
                           <a:ea typeface="대명체 보통" panose="020B0600000101010101" pitchFamily="50" charset="-127"/>
                           <a:cs typeface="+mn-cs"/>
                         </a:rPr>
-                        <a:t>27,783</a:t>
+                        <a:t>27,638</a:t>
                       </a:r>
                     </a:p>
                   </a:txBody>
@@ -15325,7 +15325,7 @@
                           <a:ea typeface="대명체 보통" panose="020B0600000101010101" pitchFamily="50" charset="-127"/>
                           <a:cs typeface="+mn-cs"/>
                         </a:rPr>
-                        <a:t>39%</a:t>
+                        <a:t>38%</a:t>
                       </a:r>
                     </a:p>
                   </a:txBody>
@@ -15643,7 +15643,7 @@
                           <a:ea typeface="대명체 보통" panose="020B0600000101010101" pitchFamily="50" charset="-127"/>
                           <a:cs typeface="+mn-cs"/>
                         </a:rPr>
-                        <a:t>6,980</a:t>
+                        <a:t>6,931</a:t>
                       </a:r>
                     </a:p>
                   </a:txBody>
@@ -15753,7 +15753,7 @@
                           <a:ea typeface="대명체 보통" panose="020B0600000101010101" pitchFamily="50" charset="-127"/>
                           <a:cs typeface="+mn-cs"/>
                         </a:rPr>
-                        <a:t>1,121</a:t>
+                        <a:t>1,072</a:t>
                       </a:r>
                       <a:endParaRPr lang="en-US" altLang="ko-KR" sz="700" b="0" i="0" u="none" strike="noStrike" kern="1200" dirty="0">
                         <a:solidFill>
@@ -15821,7 +15821,7 @@
                           <a:ea typeface="대명체 보통" panose="020B0600000101010101" pitchFamily="50" charset="-127"/>
                           <a:cs typeface="+mn-cs"/>
                         </a:rPr>
-                        <a:t>119%</a:t>
+                        <a:t>118%</a:t>
                       </a:r>
                     </a:p>
                   </a:txBody>
@@ -15880,7 +15880,7 @@
                           <a:ea typeface="대명체 보통" panose="020B0600000101010101" pitchFamily="50" charset="-127"/>
                           <a:cs typeface="+mn-cs"/>
                         </a:rPr>
-                        <a:t>4,063</a:t>
+                        <a:t>4,106</a:t>
                       </a:r>
                     </a:p>
                   </a:txBody>
@@ -15990,7 +15990,7 @@
                           <a:ea typeface="대명체 보통" panose="020B0600000101010101" pitchFamily="50" charset="-127"/>
                           <a:cs typeface="+mn-cs"/>
                         </a:rPr>
-                        <a:t>2,917</a:t>
+                        <a:t>2,825</a:t>
                       </a:r>
                     </a:p>
                   </a:txBody>
@@ -16049,7 +16049,7 @@
                           <a:ea typeface="대명체 보통" panose="020B0600000101010101" pitchFamily="50" charset="-127"/>
                           <a:cs typeface="+mn-cs"/>
                         </a:rPr>
-                        <a:t>72%</a:t>
+                        <a:t>69%</a:t>
                       </a:r>
                     </a:p>
                   </a:txBody>
@@ -16266,7 +16266,7 @@
                           <a:ea typeface="대명체 보통" panose="020B0600000101010101" pitchFamily="50" charset="-127"/>
                           <a:cs typeface="+mn-cs"/>
                         </a:rPr>
-                        <a:t>68,241</a:t>
+                        <a:t>68,192</a:t>
                       </a:r>
                     </a:p>
                   </a:txBody>
@@ -16376,7 +16376,7 @@
                           <a:ea typeface="대명체 보통" panose="020B0600000101010101" pitchFamily="50" charset="-127"/>
                           <a:cs typeface="+mn-cs"/>
                         </a:rPr>
-                        <a:t>7,599</a:t>
+                        <a:t>7,550</a:t>
                       </a:r>
                     </a:p>
                   </a:txBody>
@@ -16435,7 +16435,7 @@
                           <a:ea typeface="대명체 보통" panose="020B0600000101010101" pitchFamily="50" charset="-127"/>
                           <a:cs typeface="+mn-cs"/>
                         </a:rPr>
-                        <a:t>113%</a:t>
+                        <a:t>112%</a:t>
                       </a:r>
                     </a:p>
                   </a:txBody>
@@ -16494,7 +16494,7 @@
                           <a:ea typeface="대명체 보통" panose="020B0600000101010101" pitchFamily="50" charset="-127"/>
                           <a:cs typeface="+mn-cs"/>
                         </a:rPr>
-                        <a:t>49,004</a:t>
+                        <a:t>49,047</a:t>
                       </a:r>
                     </a:p>
                   </a:txBody>
@@ -16604,7 +16604,7 @@
                           <a:ea typeface="대명체 보통" panose="020B0600000101010101" pitchFamily="50" charset="-127"/>
                           <a:cs typeface="+mn-cs"/>
                         </a:rPr>
-                        <a:t>19,237</a:t>
+                        <a:t>19,145</a:t>
                       </a:r>
                     </a:p>
                   </a:txBody>
@@ -16999,7 +16999,7 @@
                           <a:ea typeface="대명체 보통" panose="020B0600000101010101" pitchFamily="50" charset="-127"/>
                           <a:cs typeface="+mn-cs"/>
                         </a:rPr>
-                        <a:t>789</a:t>
+                        <a:t>788</a:t>
                       </a:r>
                       <a:endParaRPr lang="en-US" altLang="ko-KR" sz="700" b="0" i="0" u="none" strike="noStrike" kern="1200" dirty="0">
                         <a:solidFill>
@@ -17126,7 +17126,7 @@
                           <a:ea typeface="대명체 보통" panose="020B0600000101010101" pitchFamily="50" charset="-127"/>
                           <a:cs typeface="+mn-cs"/>
                         </a:rPr>
-                        <a:t>270</a:t>
+                        <a:t>268</a:t>
                       </a:r>
                       <a:endParaRPr lang="en-US" altLang="ko-KR" sz="700" b="0" i="0" u="none" strike="noStrike" kern="1200" dirty="0">
                         <a:solidFill>
@@ -17261,7 +17261,7 @@
                           <a:ea typeface="대명체 보통" panose="020B0600000101010101" pitchFamily="50" charset="-127"/>
                           <a:cs typeface="+mn-cs"/>
                         </a:rPr>
-                        <a:t>491</a:t>
+                        <a:t>493</a:t>
                       </a:r>
                       <a:endParaRPr lang="en-US" altLang="ko-KR" sz="700" b="0" i="0" u="none" strike="noStrike" kern="1200" dirty="0">
                         <a:solidFill>
@@ -17388,7 +17388,7 @@
                           <a:ea typeface="대명체 보통" panose="020B0600000101010101" pitchFamily="50" charset="-127"/>
                           <a:cs typeface="+mn-cs"/>
                         </a:rPr>
-                        <a:t>299</a:t>
+                        <a:t>295</a:t>
                       </a:r>
                     </a:p>
                   </a:txBody>
@@ -17451,7 +17451,7 @@
                           <a:ea typeface="대명체 보통" panose="020B0600000101010101" pitchFamily="50" charset="-127"/>
                           <a:cs typeface="+mn-cs"/>
                         </a:rPr>
-                        <a:t>61%</a:t>
+                        <a:t>60%</a:t>
                       </a:r>
                     </a:p>
                   </a:txBody>
@@ -17680,7 +17680,7 @@
                           <a:ea typeface="대명체 보통" panose="020B0600000101010101" pitchFamily="50" charset="-127"/>
                           <a:cs typeface="+mn-cs"/>
                         </a:rPr>
-                        <a:t>6,571</a:t>
+                        <a:t>6,569</a:t>
                       </a:r>
                     </a:p>
                   </a:txBody>
@@ -17798,7 +17798,7 @@
                           <a:ea typeface="대명체 보통" panose="020B0600000101010101" pitchFamily="50" charset="-127"/>
                           <a:cs typeface="+mn-cs"/>
                         </a:rPr>
-                        <a:t>2,181</a:t>
+                        <a:t>2,180</a:t>
                       </a:r>
                       <a:endParaRPr lang="en-US" altLang="ko-KR" sz="700" b="0" i="0" u="none" strike="noStrike" kern="1200" dirty="0">
                         <a:solidFill>
@@ -17933,7 +17933,7 @@
                           <a:ea typeface="대명체 보통" panose="020B0600000101010101" pitchFamily="50" charset="-127"/>
                           <a:cs typeface="+mn-cs"/>
                         </a:rPr>
-                        <a:t>4,084</a:t>
+                        <a:t>4,087</a:t>
                       </a:r>
                     </a:p>
                   </a:txBody>
@@ -18051,7 +18051,7 @@
                           <a:ea typeface="대명체 보통" panose="020B0600000101010101" pitchFamily="50" charset="-127"/>
                           <a:cs typeface="+mn-cs"/>
                         </a:rPr>
-                        <a:t>2,487</a:t>
+                        <a:t>2,483</a:t>
                       </a:r>
                     </a:p>
                   </a:txBody>

--- a/docs/data/세일즈마케팅_예상매출현황.pptx
+++ b/docs/data/세일즈마케팅_예상매출현황.pptx
@@ -12756,7 +12756,7 @@
                           <a:ea typeface="대명체 보통" panose="020B0600000101010101" pitchFamily="50" charset="-127"/>
                           <a:cs typeface="+mn-cs"/>
                         </a:rPr>
-                        <a:t>15,826</a:t>
+                        <a:t>15,696</a:t>
                       </a:r>
                     </a:p>
                   </a:txBody>
@@ -12882,7 +12882,7 @@
                           <a:ea typeface="대명체 보통" panose="020B0600000101010101" pitchFamily="50" charset="-127"/>
                           <a:cs typeface="+mn-cs"/>
                         </a:rPr>
-                        <a:t>-162</a:t>
+                        <a:t>-293</a:t>
                       </a:r>
                     </a:p>
                   </a:txBody>
@@ -12949,7 +12949,7 @@
                           <a:ea typeface="대명체 보통" panose="020B0600000101010101" pitchFamily="50" charset="-127"/>
                           <a:cs typeface="+mn-cs"/>
                         </a:rPr>
-                        <a:t>99%</a:t>
+                        <a:t>98%</a:t>
                       </a:r>
                     </a:p>
                   </a:txBody>
@@ -13016,7 +13016,7 @@
                           <a:ea typeface="대명체 보통" panose="020B0600000101010101" pitchFamily="50" charset="-127"/>
                           <a:cs typeface="+mn-cs"/>
                         </a:rPr>
-                        <a:t>11,961</a:t>
+                        <a:t>12,105</a:t>
                       </a:r>
                     </a:p>
                   </a:txBody>
@@ -13142,7 +13142,7 @@
                           <a:ea typeface="대명체 보통" panose="020B0600000101010101" pitchFamily="50" charset="-127"/>
                           <a:cs typeface="+mn-cs"/>
                         </a:rPr>
-                        <a:t>3,865</a:t>
+                        <a:t>3,591</a:t>
                       </a:r>
                     </a:p>
                   </a:txBody>
@@ -13209,7 +13209,7 @@
                           <a:ea typeface="대명체 보통" panose="020B0600000101010101" pitchFamily="50" charset="-127"/>
                           <a:cs typeface="+mn-cs"/>
                         </a:rPr>
-                        <a:t>32%</a:t>
+                        <a:t>30%</a:t>
                       </a:r>
                     </a:p>
                   </a:txBody>
@@ -13450,7 +13450,7 @@
                           <a:ea typeface="대명체 보통" panose="020B0600000101010101" pitchFamily="50" charset="-127"/>
                           <a:cs typeface="+mn-cs"/>
                         </a:rPr>
-                        <a:t>174,625</a:t>
+                        <a:t>174,495</a:t>
                       </a:r>
                     </a:p>
                   </a:txBody>
@@ -13576,7 +13576,7 @@
                           <a:ea typeface="대명체 보통" panose="020B0600000101010101" pitchFamily="50" charset="-127"/>
                           <a:cs typeface="+mn-cs"/>
                         </a:rPr>
-                        <a:t>19,609</a:t>
+                        <a:t>19,478</a:t>
                       </a:r>
                     </a:p>
                   </a:txBody>
@@ -13710,7 +13710,7 @@
                           <a:ea typeface="대명체 보통" panose="020B0600000101010101" pitchFamily="50" charset="-127"/>
                           <a:cs typeface="+mn-cs"/>
                         </a:rPr>
-                        <a:t>125,358</a:t>
+                        <a:t>125,502</a:t>
                       </a:r>
                     </a:p>
                   </a:txBody>
@@ -13836,7 +13836,7 @@
                           <a:ea typeface="대명체 보통" panose="020B0600000101010101" pitchFamily="50" charset="-127"/>
                           <a:cs typeface="+mn-cs"/>
                         </a:rPr>
-                        <a:t>49,266</a:t>
+                        <a:t>48,992</a:t>
                       </a:r>
                     </a:p>
                   </a:txBody>
@@ -14237,7 +14237,7 @@
                           <a:ea typeface="대명체 보통" panose="020B0600000101010101" pitchFamily="50" charset="-127"/>
                           <a:cs typeface="+mn-cs"/>
                         </a:rPr>
-                        <a:t>8,107</a:t>
+                        <a:t>8,041</a:t>
                       </a:r>
                     </a:p>
                   </a:txBody>
@@ -14355,7 +14355,7 @@
                           <a:ea typeface="대명체 보통" panose="020B0600000101010101" pitchFamily="50" charset="-127"/>
                           <a:cs typeface="+mn-cs"/>
                         </a:rPr>
-                        <a:t>-1,503</a:t>
+                        <a:t>-1,569</a:t>
                       </a:r>
                       <a:endParaRPr lang="en-US" altLang="ko-KR" sz="700" b="0" i="0" u="none" strike="noStrike" kern="1200" dirty="0">
                         <a:solidFill>
@@ -14490,7 +14490,7 @@
                           <a:ea typeface="대명체 보통" panose="020B0600000101010101" pitchFamily="50" charset="-127"/>
                           <a:cs typeface="+mn-cs"/>
                         </a:rPr>
-                        <a:t>7,361</a:t>
+                        <a:t>7,454</a:t>
                       </a:r>
                     </a:p>
                   </a:txBody>
@@ -14608,7 +14608,7 @@
                           <a:ea typeface="대명체 보통" panose="020B0600000101010101" pitchFamily="50" charset="-127"/>
                           <a:cs typeface="+mn-cs"/>
                         </a:rPr>
-                        <a:t>746</a:t>
+                        <a:t>587</a:t>
                       </a:r>
                     </a:p>
                   </a:txBody>
@@ -14671,7 +14671,7 @@
                           <a:ea typeface="대명체 보통" panose="020B0600000101010101" pitchFamily="50" charset="-127"/>
                           <a:cs typeface="+mn-cs"/>
                         </a:rPr>
-                        <a:t>10%</a:t>
+                        <a:t>8%</a:t>
                       </a:r>
                     </a:p>
                   </a:txBody>
@@ -14900,7 +14900,7 @@
                           <a:ea typeface="대명체 보통" panose="020B0600000101010101" pitchFamily="50" charset="-127"/>
                           <a:cs typeface="+mn-cs"/>
                         </a:rPr>
-                        <a:t>99,863</a:t>
+                        <a:t>99,797</a:t>
                       </a:r>
                     </a:p>
                   </a:txBody>
@@ -15018,7 +15018,7 @@
                           <a:ea typeface="대명체 보통" panose="020B0600000101010101" pitchFamily="50" charset="-127"/>
                           <a:cs typeface="+mn-cs"/>
                         </a:rPr>
-                        <a:t>9,879</a:t>
+                        <a:t>9,813</a:t>
                       </a:r>
                     </a:p>
                   </a:txBody>
@@ -15144,7 +15144,7 @@
                           <a:ea typeface="대명체 보통" panose="020B0600000101010101" pitchFamily="50" charset="-127"/>
                           <a:cs typeface="+mn-cs"/>
                         </a:rPr>
-                        <a:t>72,225</a:t>
+                        <a:t>72,317</a:t>
                       </a:r>
                     </a:p>
                   </a:txBody>
@@ -15262,7 +15262,7 @@
                           <a:ea typeface="대명체 보통" panose="020B0600000101010101" pitchFamily="50" charset="-127"/>
                           <a:cs typeface="+mn-cs"/>
                         </a:rPr>
-                        <a:t>27,638</a:t>
+                        <a:t>27,480</a:t>
                       </a:r>
                     </a:p>
                   </a:txBody>
@@ -15643,7 +15643,7 @@
                           <a:ea typeface="대명체 보통" panose="020B0600000101010101" pitchFamily="50" charset="-127"/>
                           <a:cs typeface="+mn-cs"/>
                         </a:rPr>
-                        <a:t>6,931</a:t>
+                        <a:t>6,874</a:t>
                       </a:r>
                     </a:p>
                   </a:txBody>
@@ -15753,7 +15753,7 @@
                           <a:ea typeface="대명체 보통" panose="020B0600000101010101" pitchFamily="50" charset="-127"/>
                           <a:cs typeface="+mn-cs"/>
                         </a:rPr>
-                        <a:t>1,072</a:t>
+                        <a:t>1,016</a:t>
                       </a:r>
                       <a:endParaRPr lang="en-US" altLang="ko-KR" sz="700" b="0" i="0" u="none" strike="noStrike" kern="1200" dirty="0">
                         <a:solidFill>
@@ -15821,7 +15821,7 @@
                           <a:ea typeface="대명체 보통" panose="020B0600000101010101" pitchFamily="50" charset="-127"/>
                           <a:cs typeface="+mn-cs"/>
                         </a:rPr>
-                        <a:t>118%</a:t>
+                        <a:t>117%</a:t>
                       </a:r>
                     </a:p>
                   </a:txBody>
@@ -15880,7 +15880,7 @@
                           <a:ea typeface="대명체 보통" panose="020B0600000101010101" pitchFamily="50" charset="-127"/>
                           <a:cs typeface="+mn-cs"/>
                         </a:rPr>
-                        <a:t>4,106</a:t>
+                        <a:t>4,155</a:t>
                       </a:r>
                     </a:p>
                   </a:txBody>
@@ -15990,7 +15990,7 @@
                           <a:ea typeface="대명체 보통" panose="020B0600000101010101" pitchFamily="50" charset="-127"/>
                           <a:cs typeface="+mn-cs"/>
                         </a:rPr>
-                        <a:t>2,825</a:t>
+                        <a:t>2,719</a:t>
                       </a:r>
                     </a:p>
                   </a:txBody>
@@ -16049,7 +16049,7 @@
                           <a:ea typeface="대명체 보통" panose="020B0600000101010101" pitchFamily="50" charset="-127"/>
                           <a:cs typeface="+mn-cs"/>
                         </a:rPr>
-                        <a:t>69%</a:t>
+                        <a:t>65%</a:t>
                       </a:r>
                     </a:p>
                   </a:txBody>
@@ -16266,7 +16266,7 @@
                           <a:ea typeface="대명체 보통" panose="020B0600000101010101" pitchFamily="50" charset="-127"/>
                           <a:cs typeface="+mn-cs"/>
                         </a:rPr>
-                        <a:t>68,192</a:t>
+                        <a:t>68,136</a:t>
                       </a:r>
                     </a:p>
                   </a:txBody>
@@ -16376,7 +16376,7 @@
                           <a:ea typeface="대명체 보통" panose="020B0600000101010101" pitchFamily="50" charset="-127"/>
                           <a:cs typeface="+mn-cs"/>
                         </a:rPr>
-                        <a:t>7,550</a:t>
+                        <a:t>7,493</a:t>
                       </a:r>
                     </a:p>
                   </a:txBody>
@@ -16494,7 +16494,7 @@
                           <a:ea typeface="대명체 보통" panose="020B0600000101010101" pitchFamily="50" charset="-127"/>
                           <a:cs typeface="+mn-cs"/>
                         </a:rPr>
-                        <a:t>49,047</a:t>
+                        <a:t>49,096</a:t>
                       </a:r>
                     </a:p>
                   </a:txBody>
@@ -16604,7 +16604,7 @@
                           <a:ea typeface="대명체 보통" panose="020B0600000101010101" pitchFamily="50" charset="-127"/>
                           <a:cs typeface="+mn-cs"/>
                         </a:rPr>
-                        <a:t>19,145</a:t>
+                        <a:t>19,040</a:t>
                       </a:r>
                     </a:p>
                   </a:txBody>
@@ -16999,7 +16999,7 @@
                           <a:ea typeface="대명체 보통" panose="020B0600000101010101" pitchFamily="50" charset="-127"/>
                           <a:cs typeface="+mn-cs"/>
                         </a:rPr>
-                        <a:t>788</a:t>
+                        <a:t>780</a:t>
                       </a:r>
                       <a:endParaRPr lang="en-US" altLang="ko-KR" sz="700" b="0" i="0" u="none" strike="noStrike" kern="1200" dirty="0">
                         <a:solidFill>
@@ -17126,7 +17126,7 @@
                           <a:ea typeface="대명체 보통" panose="020B0600000101010101" pitchFamily="50" charset="-127"/>
                           <a:cs typeface="+mn-cs"/>
                         </a:rPr>
-                        <a:t>268</a:t>
+                        <a:t>261</a:t>
                       </a:r>
                       <a:endParaRPr lang="en-US" altLang="ko-KR" sz="700" b="0" i="0" u="none" strike="noStrike" kern="1200" dirty="0">
                         <a:solidFill>
@@ -17198,7 +17198,7 @@
                           <a:ea typeface="대명체 보통" panose="020B0600000101010101" pitchFamily="50" charset="-127"/>
                           <a:cs typeface="+mn-cs"/>
                         </a:rPr>
-                        <a:t>152%</a:t>
+                        <a:t>150%</a:t>
                       </a:r>
                     </a:p>
                   </a:txBody>
@@ -17261,7 +17261,7 @@
                           <a:ea typeface="대명체 보통" panose="020B0600000101010101" pitchFamily="50" charset="-127"/>
                           <a:cs typeface="+mn-cs"/>
                         </a:rPr>
-                        <a:t>493</a:t>
+                        <a:t>496</a:t>
                       </a:r>
                       <a:endParaRPr lang="en-US" altLang="ko-KR" sz="700" b="0" i="0" u="none" strike="noStrike" kern="1200" dirty="0">
                         <a:solidFill>
@@ -17388,7 +17388,7 @@
                           <a:ea typeface="대명체 보통" panose="020B0600000101010101" pitchFamily="50" charset="-127"/>
                           <a:cs typeface="+mn-cs"/>
                         </a:rPr>
-                        <a:t>295</a:t>
+                        <a:t>284</a:t>
                       </a:r>
                     </a:p>
                   </a:txBody>
@@ -17451,7 +17451,7 @@
                           <a:ea typeface="대명체 보통" panose="020B0600000101010101" pitchFamily="50" charset="-127"/>
                           <a:cs typeface="+mn-cs"/>
                         </a:rPr>
-                        <a:t>60%</a:t>
+                        <a:t>57%</a:t>
                       </a:r>
                     </a:p>
                   </a:txBody>
@@ -17680,7 +17680,7 @@
                           <a:ea typeface="대명체 보통" panose="020B0600000101010101" pitchFamily="50" charset="-127"/>
                           <a:cs typeface="+mn-cs"/>
                         </a:rPr>
-                        <a:t>6,569</a:t>
+                        <a:t>6,562</a:t>
                       </a:r>
                     </a:p>
                   </a:txBody>
@@ -17798,7 +17798,7 @@
                           <a:ea typeface="대명체 보통" panose="020B0600000101010101" pitchFamily="50" charset="-127"/>
                           <a:cs typeface="+mn-cs"/>
                         </a:rPr>
-                        <a:t>2,180</a:t>
+                        <a:t>2,172</a:t>
                       </a:r>
                       <a:endParaRPr lang="en-US" altLang="ko-KR" sz="700" b="0" i="0" u="none" strike="noStrike" kern="1200" dirty="0">
                         <a:solidFill>
@@ -17870,7 +17870,7 @@
                           <a:ea typeface="대명체 보통" panose="020B0600000101010101" pitchFamily="50" charset="-127"/>
                           <a:cs typeface="+mn-cs"/>
                         </a:rPr>
-                        <a:t>150%</a:t>
+                        <a:t>149%</a:t>
                       </a:r>
                     </a:p>
                   </a:txBody>
@@ -17933,7 +17933,7 @@
                           <a:ea typeface="대명체 보통" panose="020B0600000101010101" pitchFamily="50" charset="-127"/>
                           <a:cs typeface="+mn-cs"/>
                         </a:rPr>
-                        <a:t>4,087</a:t>
+                        <a:t>4,089</a:t>
                       </a:r>
                     </a:p>
                   </a:txBody>
@@ -18051,7 +18051,7 @@
                           <a:ea typeface="대명체 보통" panose="020B0600000101010101" pitchFamily="50" charset="-127"/>
                           <a:cs typeface="+mn-cs"/>
                         </a:rPr>
-                        <a:t>2,483</a:t>
+                        <a:t>2,472</a:t>
                       </a:r>
                     </a:p>
                   </a:txBody>
@@ -18114,7 +18114,7 @@
                           <a:ea typeface="대명체 보통" panose="020B0600000101010101" pitchFamily="50" charset="-127"/>
                           <a:cs typeface="+mn-cs"/>
                         </a:rPr>
-                        <a:t>61%</a:t>
+                        <a:t>60%</a:t>
                       </a:r>
                     </a:p>
                   </a:txBody>

--- a/docs/data/세일즈마케팅_예상매출현황.pptx
+++ b/docs/data/세일즈마케팅_예상매출현황.pptx
@@ -12756,7 +12756,7 @@
                           <a:ea typeface="대명체 보통" panose="020B0600000101010101" pitchFamily="50" charset="-127"/>
                           <a:cs typeface="+mn-cs"/>
                         </a:rPr>
-                        <a:t>15,696</a:t>
+                        <a:t>15,546</a:t>
                       </a:r>
                     </a:p>
                   </a:txBody>
@@ -12882,7 +12882,7 @@
                           <a:ea typeface="대명체 보통" panose="020B0600000101010101" pitchFamily="50" charset="-127"/>
                           <a:cs typeface="+mn-cs"/>
                         </a:rPr>
-                        <a:t>-293</a:t>
+                        <a:t>-442</a:t>
                       </a:r>
                     </a:p>
                   </a:txBody>
@@ -12949,7 +12949,7 @@
                           <a:ea typeface="대명체 보통" panose="020B0600000101010101" pitchFamily="50" charset="-127"/>
                           <a:cs typeface="+mn-cs"/>
                         </a:rPr>
-                        <a:t>98%</a:t>
+                        <a:t>97%</a:t>
                       </a:r>
                     </a:p>
                   </a:txBody>
@@ -13016,7 +13016,7 @@
                           <a:ea typeface="대명체 보통" panose="020B0600000101010101" pitchFamily="50" charset="-127"/>
                           <a:cs typeface="+mn-cs"/>
                         </a:rPr>
-                        <a:t>12,105</a:t>
+                        <a:t>12,246</a:t>
                       </a:r>
                     </a:p>
                   </a:txBody>
@@ -13142,7 +13142,7 @@
                           <a:ea typeface="대명체 보통" panose="020B0600000101010101" pitchFamily="50" charset="-127"/>
                           <a:cs typeface="+mn-cs"/>
                         </a:rPr>
-                        <a:t>3,591</a:t>
+                        <a:t>3,300</a:t>
                       </a:r>
                     </a:p>
                   </a:txBody>
@@ -13209,7 +13209,7 @@
                           <a:ea typeface="대명체 보통" panose="020B0600000101010101" pitchFamily="50" charset="-127"/>
                           <a:cs typeface="+mn-cs"/>
                         </a:rPr>
-                        <a:t>30%</a:t>
+                        <a:t>27%</a:t>
                       </a:r>
                     </a:p>
                   </a:txBody>
@@ -13450,7 +13450,7 @@
                           <a:ea typeface="대명체 보통" panose="020B0600000101010101" pitchFamily="50" charset="-127"/>
                           <a:cs typeface="+mn-cs"/>
                         </a:rPr>
-                        <a:t>174,495</a:t>
+                        <a:t>174,345</a:t>
                       </a:r>
                     </a:p>
                   </a:txBody>
@@ -13576,7 +13576,7 @@
                           <a:ea typeface="대명체 보통" panose="020B0600000101010101" pitchFamily="50" charset="-127"/>
                           <a:cs typeface="+mn-cs"/>
                         </a:rPr>
-                        <a:t>19,478</a:t>
+                        <a:t>19,329</a:t>
                       </a:r>
                     </a:p>
                   </a:txBody>
@@ -13643,7 +13643,7 @@
                           <a:ea typeface="대명체 보통" panose="020B0600000101010101" pitchFamily="50" charset="-127"/>
                           <a:cs typeface="+mn-cs"/>
                         </a:rPr>
-                        <a:t>113%</a:t>
+                        <a:t>112%</a:t>
                       </a:r>
                     </a:p>
                   </a:txBody>
@@ -13710,7 +13710,7 @@
                           <a:ea typeface="대명체 보통" panose="020B0600000101010101" pitchFamily="50" charset="-127"/>
                           <a:cs typeface="+mn-cs"/>
                         </a:rPr>
-                        <a:t>125,502</a:t>
+                        <a:t>125,643</a:t>
                       </a:r>
                     </a:p>
                   </a:txBody>
@@ -13836,7 +13836,7 @@
                           <a:ea typeface="대명체 보통" panose="020B0600000101010101" pitchFamily="50" charset="-127"/>
                           <a:cs typeface="+mn-cs"/>
                         </a:rPr>
-                        <a:t>48,992</a:t>
+                        <a:t>48,702</a:t>
                       </a:r>
                     </a:p>
                   </a:txBody>
@@ -14237,7 +14237,7 @@
                           <a:ea typeface="대명체 보통" panose="020B0600000101010101" pitchFamily="50" charset="-127"/>
                           <a:cs typeface="+mn-cs"/>
                         </a:rPr>
-                        <a:t>8,041</a:t>
+                        <a:t>7,954</a:t>
                       </a:r>
                     </a:p>
                   </a:txBody>
@@ -14355,7 +14355,7 @@
                           <a:ea typeface="대명체 보통" panose="020B0600000101010101" pitchFamily="50" charset="-127"/>
                           <a:cs typeface="+mn-cs"/>
                         </a:rPr>
-                        <a:t>-1,569</a:t>
+                        <a:t>-1,656</a:t>
                       </a:r>
                       <a:endParaRPr lang="en-US" altLang="ko-KR" sz="700" b="0" i="0" u="none" strike="noStrike" kern="1200" dirty="0">
                         <a:solidFill>
@@ -14427,7 +14427,7 @@
                           <a:ea typeface="대명체 보통" panose="020B0600000101010101" pitchFamily="50" charset="-127"/>
                           <a:cs typeface="+mn-cs"/>
                         </a:rPr>
-                        <a:t>84%</a:t>
+                        <a:t>83%</a:t>
                       </a:r>
                     </a:p>
                   </a:txBody>
@@ -14490,7 +14490,7 @@
                           <a:ea typeface="대명체 보통" panose="020B0600000101010101" pitchFamily="50" charset="-127"/>
                           <a:cs typeface="+mn-cs"/>
                         </a:rPr>
-                        <a:t>7,454</a:t>
+                        <a:t>7,533</a:t>
                       </a:r>
                     </a:p>
                   </a:txBody>
@@ -14608,7 +14608,7 @@
                           <a:ea typeface="대명체 보통" panose="020B0600000101010101" pitchFamily="50" charset="-127"/>
                           <a:cs typeface="+mn-cs"/>
                         </a:rPr>
-                        <a:t>587</a:t>
+                        <a:t>421</a:t>
                       </a:r>
                     </a:p>
                   </a:txBody>
@@ -14671,7 +14671,7 @@
                           <a:ea typeface="대명체 보통" panose="020B0600000101010101" pitchFamily="50" charset="-127"/>
                           <a:cs typeface="+mn-cs"/>
                         </a:rPr>
-                        <a:t>8%</a:t>
+                        <a:t>6%</a:t>
                       </a:r>
                     </a:p>
                   </a:txBody>
@@ -14900,7 +14900,7 @@
                           <a:ea typeface="대명체 보통" panose="020B0600000101010101" pitchFamily="50" charset="-127"/>
                           <a:cs typeface="+mn-cs"/>
                         </a:rPr>
-                        <a:t>99,797</a:t>
+                        <a:t>99,710</a:t>
                       </a:r>
                     </a:p>
                   </a:txBody>
@@ -15018,7 +15018,7 @@
                           <a:ea typeface="대명체 보통" panose="020B0600000101010101" pitchFamily="50" charset="-127"/>
                           <a:cs typeface="+mn-cs"/>
                         </a:rPr>
-                        <a:t>9,813</a:t>
+                        <a:t>9,726</a:t>
                       </a:r>
                     </a:p>
                   </a:txBody>
@@ -15144,7 +15144,7 @@
                           <a:ea typeface="대명체 보통" panose="020B0600000101010101" pitchFamily="50" charset="-127"/>
                           <a:cs typeface="+mn-cs"/>
                         </a:rPr>
-                        <a:t>72,317</a:t>
+                        <a:t>72,397</a:t>
                       </a:r>
                     </a:p>
                   </a:txBody>
@@ -15262,7 +15262,7 @@
                           <a:ea typeface="대명체 보통" panose="020B0600000101010101" pitchFamily="50" charset="-127"/>
                           <a:cs typeface="+mn-cs"/>
                         </a:rPr>
-                        <a:t>27,480</a:t>
+                        <a:t>27,313</a:t>
                       </a:r>
                     </a:p>
                   </a:txBody>
@@ -15643,7 +15643,7 @@
                           <a:ea typeface="대명체 보통" panose="020B0600000101010101" pitchFamily="50" charset="-127"/>
                           <a:cs typeface="+mn-cs"/>
                         </a:rPr>
-                        <a:t>6,874</a:t>
+                        <a:t>6,818</a:t>
                       </a:r>
                     </a:p>
                   </a:txBody>
@@ -15753,7 +15753,7 @@
                           <a:ea typeface="대명체 보통" panose="020B0600000101010101" pitchFamily="50" charset="-127"/>
                           <a:cs typeface="+mn-cs"/>
                         </a:rPr>
-                        <a:t>1,016</a:t>
+                        <a:t>960</a:t>
                       </a:r>
                       <a:endParaRPr lang="en-US" altLang="ko-KR" sz="700" b="0" i="0" u="none" strike="noStrike" kern="1200" dirty="0">
                         <a:solidFill>
@@ -15821,7 +15821,7 @@
                           <a:ea typeface="대명체 보통" panose="020B0600000101010101" pitchFamily="50" charset="-127"/>
                           <a:cs typeface="+mn-cs"/>
                         </a:rPr>
-                        <a:t>117%</a:t>
+                        <a:t>116%</a:t>
                       </a:r>
                     </a:p>
                   </a:txBody>
@@ -15880,7 +15880,7 @@
                           <a:ea typeface="대명체 보통" panose="020B0600000101010101" pitchFamily="50" charset="-127"/>
                           <a:cs typeface="+mn-cs"/>
                         </a:rPr>
-                        <a:t>4,155</a:t>
+                        <a:t>4,214</a:t>
                       </a:r>
                     </a:p>
                   </a:txBody>
@@ -15990,7 +15990,7 @@
                           <a:ea typeface="대명체 보통" panose="020B0600000101010101" pitchFamily="50" charset="-127"/>
                           <a:cs typeface="+mn-cs"/>
                         </a:rPr>
-                        <a:t>2,719</a:t>
+                        <a:t>2,604</a:t>
                       </a:r>
                     </a:p>
                   </a:txBody>
@@ -16049,7 +16049,7 @@
                           <a:ea typeface="대명체 보통" panose="020B0600000101010101" pitchFamily="50" charset="-127"/>
                           <a:cs typeface="+mn-cs"/>
                         </a:rPr>
-                        <a:t>65%</a:t>
+                        <a:t>62%</a:t>
                       </a:r>
                     </a:p>
                   </a:txBody>
@@ -16266,7 +16266,7 @@
                           <a:ea typeface="대명체 보통" panose="020B0600000101010101" pitchFamily="50" charset="-127"/>
                           <a:cs typeface="+mn-cs"/>
                         </a:rPr>
-                        <a:t>68,136</a:t>
+                        <a:t>68,080</a:t>
                       </a:r>
                     </a:p>
                   </a:txBody>
@@ -16376,7 +16376,7 @@
                           <a:ea typeface="대명체 보통" panose="020B0600000101010101" pitchFamily="50" charset="-127"/>
                           <a:cs typeface="+mn-cs"/>
                         </a:rPr>
-                        <a:t>7,493</a:t>
+                        <a:t>7,437</a:t>
                       </a:r>
                     </a:p>
                   </a:txBody>
@@ -16494,7 +16494,7 @@
                           <a:ea typeface="대명체 보통" panose="020B0600000101010101" pitchFamily="50" charset="-127"/>
                           <a:cs typeface="+mn-cs"/>
                         </a:rPr>
-                        <a:t>49,096</a:t>
+                        <a:t>49,155</a:t>
                       </a:r>
                     </a:p>
                   </a:txBody>
@@ -16604,7 +16604,7 @@
                           <a:ea typeface="대명체 보통" panose="020B0600000101010101" pitchFamily="50" charset="-127"/>
                           <a:cs typeface="+mn-cs"/>
                         </a:rPr>
-                        <a:t>19,040</a:t>
+                        <a:t>18,925</a:t>
                       </a:r>
                     </a:p>
                   </a:txBody>
@@ -16999,7 +16999,7 @@
                           <a:ea typeface="대명체 보통" panose="020B0600000101010101" pitchFamily="50" charset="-127"/>
                           <a:cs typeface="+mn-cs"/>
                         </a:rPr>
-                        <a:t>780</a:t>
+                        <a:t>774</a:t>
                       </a:r>
                       <a:endParaRPr lang="en-US" altLang="ko-KR" sz="700" b="0" i="0" u="none" strike="noStrike" kern="1200" dirty="0">
                         <a:solidFill>
@@ -17126,7 +17126,7 @@
                           <a:ea typeface="대명체 보통" panose="020B0600000101010101" pitchFamily="50" charset="-127"/>
                           <a:cs typeface="+mn-cs"/>
                         </a:rPr>
-                        <a:t>261</a:t>
+                        <a:t>255</a:t>
                       </a:r>
                       <a:endParaRPr lang="en-US" altLang="ko-KR" sz="700" b="0" i="0" u="none" strike="noStrike" kern="1200" dirty="0">
                         <a:solidFill>
@@ -17198,7 +17198,7 @@
                           <a:ea typeface="대명체 보통" panose="020B0600000101010101" pitchFamily="50" charset="-127"/>
                           <a:cs typeface="+mn-cs"/>
                         </a:rPr>
-                        <a:t>150%</a:t>
+                        <a:t>149%</a:t>
                       </a:r>
                     </a:p>
                   </a:txBody>
@@ -17261,7 +17261,7 @@
                           <a:ea typeface="대명체 보통" panose="020B0600000101010101" pitchFamily="50" charset="-127"/>
                           <a:cs typeface="+mn-cs"/>
                         </a:rPr>
-                        <a:t>496</a:t>
+                        <a:t>498</a:t>
                       </a:r>
                       <a:endParaRPr lang="en-US" altLang="ko-KR" sz="700" b="0" i="0" u="none" strike="noStrike" kern="1200" dirty="0">
                         <a:solidFill>
@@ -17388,7 +17388,7 @@
                           <a:ea typeface="대명체 보통" panose="020B0600000101010101" pitchFamily="50" charset="-127"/>
                           <a:cs typeface="+mn-cs"/>
                         </a:rPr>
-                        <a:t>284</a:t>
+                        <a:t>276</a:t>
                       </a:r>
                     </a:p>
                   </a:txBody>
@@ -17451,7 +17451,7 @@
                           <a:ea typeface="대명체 보통" panose="020B0600000101010101" pitchFamily="50" charset="-127"/>
                           <a:cs typeface="+mn-cs"/>
                         </a:rPr>
-                        <a:t>57%</a:t>
+                        <a:t>55%</a:t>
                       </a:r>
                     </a:p>
                   </a:txBody>
@@ -17680,7 +17680,7 @@
                           <a:ea typeface="대명체 보통" panose="020B0600000101010101" pitchFamily="50" charset="-127"/>
                           <a:cs typeface="+mn-cs"/>
                         </a:rPr>
-                        <a:t>6,562</a:t>
+                        <a:t>6,555</a:t>
                       </a:r>
                     </a:p>
                   </a:txBody>
@@ -17798,7 +17798,7 @@
                           <a:ea typeface="대명체 보통" panose="020B0600000101010101" pitchFamily="50" charset="-127"/>
                           <a:cs typeface="+mn-cs"/>
                         </a:rPr>
-                        <a:t>2,172</a:t>
+                        <a:t>2,166</a:t>
                       </a:r>
                       <a:endParaRPr lang="en-US" altLang="ko-KR" sz="700" b="0" i="0" u="none" strike="noStrike" kern="1200" dirty="0">
                         <a:solidFill>
@@ -17933,7 +17933,7 @@
                           <a:ea typeface="대명체 보통" panose="020B0600000101010101" pitchFamily="50" charset="-127"/>
                           <a:cs typeface="+mn-cs"/>
                         </a:rPr>
-                        <a:t>4,089</a:t>
+                        <a:t>4,092</a:t>
                       </a:r>
                     </a:p>
                   </a:txBody>
@@ -18051,7 +18051,7 @@
                           <a:ea typeface="대명체 보통" panose="020B0600000101010101" pitchFamily="50" charset="-127"/>
                           <a:cs typeface="+mn-cs"/>
                         </a:rPr>
-                        <a:t>2,472</a:t>
+                        <a:t>2,464</a:t>
                       </a:r>
                     </a:p>
                   </a:txBody>

--- a/docs/data/세일즈마케팅_예상매출현황.pptx
+++ b/docs/data/세일즈마케팅_예상매출현황.pptx
@@ -12756,7 +12756,7 @@
                           <a:ea typeface="대명체 보통" panose="020B0600000101010101" pitchFamily="50" charset="-127"/>
                           <a:cs typeface="+mn-cs"/>
                         </a:rPr>
-                        <a:t>15,546</a:t>
+                        <a:t>15,206</a:t>
                       </a:r>
                     </a:p>
                   </a:txBody>
@@ -12882,7 +12882,7 @@
                           <a:ea typeface="대명체 보통" panose="020B0600000101010101" pitchFamily="50" charset="-127"/>
                           <a:cs typeface="+mn-cs"/>
                         </a:rPr>
-                        <a:t>-442</a:t>
+                        <a:t>-782</a:t>
                       </a:r>
                     </a:p>
                   </a:txBody>
@@ -12949,7 +12949,7 @@
                           <a:ea typeface="대명체 보통" panose="020B0600000101010101" pitchFamily="50" charset="-127"/>
                           <a:cs typeface="+mn-cs"/>
                         </a:rPr>
-                        <a:t>97%</a:t>
+                        <a:t>95%</a:t>
                       </a:r>
                     </a:p>
                   </a:txBody>
@@ -13016,7 +13016,7 @@
                           <a:ea typeface="대명체 보통" panose="020B0600000101010101" pitchFamily="50" charset="-127"/>
                           <a:cs typeface="+mn-cs"/>
                         </a:rPr>
-                        <a:t>12,246</a:t>
+                        <a:t>12,570</a:t>
                       </a:r>
                     </a:p>
                   </a:txBody>
@@ -13142,7 +13142,7 @@
                           <a:ea typeface="대명체 보통" panose="020B0600000101010101" pitchFamily="50" charset="-127"/>
                           <a:cs typeface="+mn-cs"/>
                         </a:rPr>
-                        <a:t>3,300</a:t>
+                        <a:t>2,637</a:t>
                       </a:r>
                     </a:p>
                   </a:txBody>
@@ -13164,6 +13164,570 @@
                           <a:lumMod val="75000"/>
                         </a:schemeClr>
                       </a:solidFill>
+                      <a:prstDash val="solid"/>
+                      <a:round/>
+                      <a:headEnd type="none" w="med" len="med"/>
+                      <a:tailEnd type="none" w="med" len="med"/>
+                    </a:lnR>
+                    <a:lnT w="6350" cap="flat" cmpd="sng" algn="ctr">
+                      <a:solidFill>
+                        <a:schemeClr val="bg2">
+                          <a:lumMod val="75000"/>
+                        </a:schemeClr>
+                      </a:solidFill>
+                      <a:prstDash val="solid"/>
+                      <a:round/>
+                      <a:headEnd type="none" w="med" len="med"/>
+                      <a:tailEnd type="none" w="med" len="med"/>
+                    </a:lnT>
+                    <a:lnB w="6350" cap="flat" cmpd="sng" algn="ctr">
+                      <a:solidFill>
+                        <a:schemeClr val="bg2">
+                          <a:lumMod val="75000"/>
+                        </a:schemeClr>
+                      </a:solidFill>
+                      <a:prstDash val="solid"/>
+                      <a:round/>
+                      <a:headEnd type="none" w="med" len="med"/>
+                      <a:tailEnd type="none" w="med" len="med"/>
+                    </a:lnB>
+                  </a:tcPr>
+                </a:tc>
+                <a:tc>
+                  <a:txBody>
+                    <a:bodyPr/>
+                    <a:lstStyle/>
+                    <a:p>
+                      <a:pPr algn="r" rtl="0" fontAlgn="ctr"/>
+                      <a:r>
+                        <a:rPr lang="en-US" altLang="ko-KR" sz="700" b="0" i="0" u="none" strike="noStrike" kern="1200">
+                          <a:solidFill>
+                            <a:srgbClr val="000000"/>
+                          </a:solidFill>
+                          <a:effectLst/>
+                          <a:latin typeface="대명체 보통" panose="020B0600000101010101" pitchFamily="50" charset="-127"/>
+                          <a:ea typeface="대명체 보통" panose="020B0600000101010101" pitchFamily="50" charset="-127"/>
+                          <a:cs typeface="+mn-cs"/>
+                        </a:rPr>
+                        <a:t>21%</a:t>
+                      </a:r>
+                    </a:p>
+                  </a:txBody>
+                  <a:tcPr marL="9525" marR="9525" marT="9525" marB="0" anchor="ctr">
+                    <a:lnL w="6350" cap="flat" cmpd="sng" algn="ctr">
+                      <a:solidFill>
+                        <a:schemeClr val="bg2">
+                          <a:lumMod val="75000"/>
+                        </a:schemeClr>
+                      </a:solidFill>
+                      <a:prstDash val="solid"/>
+                      <a:round/>
+                      <a:headEnd type="none" w="med" len="med"/>
+                      <a:tailEnd type="none" w="med" len="med"/>
+                    </a:lnL>
+                    <a:lnR w="6350" cap="flat" cmpd="sng" algn="ctr">
+                      <a:noFill/>
+                      <a:prstDash val="solid"/>
+                      <a:round/>
+                      <a:headEnd type="none" w="med" len="med"/>
+                      <a:tailEnd type="none" w="med" len="med"/>
+                    </a:lnR>
+                    <a:lnT w="6350" cap="flat" cmpd="sng" algn="ctr">
+                      <a:solidFill>
+                        <a:schemeClr val="bg2">
+                          <a:lumMod val="75000"/>
+                        </a:schemeClr>
+                      </a:solidFill>
+                      <a:prstDash val="solid"/>
+                      <a:round/>
+                      <a:headEnd type="none" w="med" len="med"/>
+                      <a:tailEnd type="none" w="med" len="med"/>
+                    </a:lnT>
+                    <a:lnB w="6350" cap="flat" cmpd="sng" algn="ctr">
+                      <a:solidFill>
+                        <a:schemeClr val="bg2">
+                          <a:lumMod val="75000"/>
+                        </a:schemeClr>
+                      </a:solidFill>
+                      <a:prstDash val="solid"/>
+                      <a:round/>
+                      <a:headEnd type="none" w="med" len="med"/>
+                      <a:tailEnd type="none" w="med" len="med"/>
+                    </a:lnB>
+                  </a:tcPr>
+                </a:tc>
+                <a:tc>
+                  <a:txBody>
+                    <a:bodyPr/>
+                    <a:lstStyle/>
+                    <a:p>
+                      <a:pPr algn="r" fontAlgn="ctr"/>
+                      <a:endParaRPr lang="ko-KR" altLang="en-US" sz="700" b="0" i="0" u="none" strike="noStrike" kern="1200">
+                        <a:solidFill>
+                          <a:srgbClr val="000000"/>
+                        </a:solidFill>
+                        <a:effectLst/>
+                        <a:latin typeface="대명체 보통" panose="020B0600000101010101" pitchFamily="50" charset="-127"/>
+                        <a:ea typeface="대명체 보통" panose="020B0600000101010101" pitchFamily="50" charset="-127"/>
+                        <a:cs typeface="+mn-cs"/>
+                      </a:endParaRPr>
+                    </a:p>
+                  </a:txBody>
+                  <a:tcPr marL="9525" marR="9525" marT="9525" marB="0" anchor="ctr">
+                    <a:lnL w="6350" cap="flat" cmpd="sng" algn="ctr">
+                      <a:noFill/>
+                      <a:prstDash val="solid"/>
+                      <a:round/>
+                      <a:headEnd type="none" w="med" len="med"/>
+                      <a:tailEnd type="none" w="med" len="med"/>
+                    </a:lnL>
+                    <a:lnR w="6350" cap="flat" cmpd="sng" algn="ctr">
+                      <a:noFill/>
+                      <a:prstDash val="solid"/>
+                      <a:round/>
+                      <a:headEnd type="none" w="med" len="med"/>
+                      <a:tailEnd type="none" w="med" len="med"/>
+                    </a:lnR>
+                    <a:lnT w="6350" cap="flat" cmpd="sng" algn="ctr">
+                      <a:noFill/>
+                      <a:prstDash val="solid"/>
+                      <a:round/>
+                      <a:headEnd type="none" w="med" len="med"/>
+                      <a:tailEnd type="none" w="med" len="med"/>
+                    </a:lnT>
+                    <a:lnB w="6350" cap="flat" cmpd="sng" algn="ctr">
+                      <a:noFill/>
+                      <a:prstDash val="solid"/>
+                      <a:round/>
+                      <a:headEnd type="none" w="med" len="med"/>
+                      <a:tailEnd type="none" w="med" len="med"/>
+                    </a:lnB>
+                    <a:lnTlToBr w="12700" cmpd="sng">
+                      <a:noFill/>
+                      <a:prstDash val="solid"/>
+                    </a:lnTlToBr>
+                    <a:lnBlToTr w="12700" cmpd="sng">
+                      <a:noFill/>
+                      <a:prstDash val="solid"/>
+                    </a:lnBlToTr>
+                  </a:tcPr>
+                </a:tc>
+                <a:tc>
+                  <a:txBody>
+                    <a:bodyPr/>
+                    <a:lstStyle/>
+                    <a:p>
+                      <a:pPr algn="r" rtl="0" fontAlgn="ctr"/>
+                      <a:r>
+                        <a:rPr lang="en-US" altLang="ko-KR" sz="700" b="0" i="0" u="none" strike="noStrike" kern="1200">
+                          <a:solidFill>
+                            <a:srgbClr val="000000"/>
+                          </a:solidFill>
+                          <a:effectLst/>
+                          <a:latin typeface="대명체 보통" panose="020B0600000101010101" pitchFamily="50" charset="-127"/>
+                          <a:ea typeface="대명체 보통" panose="020B0600000101010101" pitchFamily="50" charset="-127"/>
+                          <a:cs typeface="+mn-cs"/>
+                        </a:rPr>
+                        <a:t>155,016</a:t>
+                      </a:r>
+                    </a:p>
+                  </a:txBody>
+                  <a:tcPr marL="9525" marR="9525" marT="9525" marB="0" anchor="ctr">
+                    <a:lnL w="6350" cap="flat" cmpd="sng" algn="ctr">
+                      <a:noFill/>
+                      <a:prstDash val="solid"/>
+                      <a:round/>
+                      <a:headEnd type="none" w="med" len="med"/>
+                      <a:tailEnd type="none" w="med" len="med"/>
+                    </a:lnL>
+                    <a:lnR w="6350" cap="flat" cmpd="sng" algn="ctr">
+                      <a:noFill/>
+                      <a:prstDash val="solid"/>
+                      <a:round/>
+                      <a:headEnd type="none" w="med" len="med"/>
+                      <a:tailEnd type="none" w="med" len="med"/>
+                    </a:lnR>
+                    <a:lnT w="6350" cap="flat" cmpd="sng" algn="ctr">
+                      <a:solidFill>
+                        <a:schemeClr val="bg2">
+                          <a:lumMod val="75000"/>
+                        </a:schemeClr>
+                      </a:solidFill>
+                      <a:prstDash val="solid"/>
+                      <a:round/>
+                      <a:headEnd type="none" w="med" len="med"/>
+                      <a:tailEnd type="none" w="med" len="med"/>
+                    </a:lnT>
+                    <a:lnB w="6350" cap="flat" cmpd="sng" algn="ctr">
+                      <a:solidFill>
+                        <a:schemeClr val="bg2">
+                          <a:lumMod val="75000"/>
+                        </a:schemeClr>
+                      </a:solidFill>
+                      <a:prstDash val="solid"/>
+                      <a:round/>
+                      <a:headEnd type="none" w="med" len="med"/>
+                      <a:tailEnd type="none" w="med" len="med"/>
+                    </a:lnB>
+                  </a:tcPr>
+                </a:tc>
+                <a:tc>
+                  <a:txBody>
+                    <a:bodyPr/>
+                    <a:lstStyle/>
+                    <a:p>
+                      <a:pPr algn="r" rtl="0" fontAlgn="ctr"/>
+                      <a:r>
+                        <a:rPr lang="en-US" altLang="ko-KR" sz="700" b="0" i="0" u="none" strike="noStrike" kern="1200">
+                          <a:solidFill>
+                            <a:srgbClr val="000000"/>
+                          </a:solidFill>
+                          <a:effectLst/>
+                          <a:latin typeface="대명체 보통" panose="020B0600000101010101" pitchFamily="50" charset="-127"/>
+                          <a:ea typeface="대명체 보통" panose="020B0600000101010101" pitchFamily="50" charset="-127"/>
+                          <a:cs typeface="+mn-cs"/>
+                        </a:rPr>
+                        <a:t>26%</a:t>
+                      </a:r>
+                    </a:p>
+                  </a:txBody>
+                  <a:tcPr marL="9525" marR="9525" marT="9525" marB="0" anchor="ctr">
+                    <a:lnL w="6350" cap="flat" cmpd="sng" algn="ctr">
+                      <a:noFill/>
+                      <a:prstDash val="solid"/>
+                      <a:round/>
+                      <a:headEnd type="none" w="med" len="med"/>
+                      <a:tailEnd type="none" w="med" len="med"/>
+                    </a:lnL>
+                    <a:lnR w="6350" cap="flat" cmpd="sng" algn="ctr">
+                      <a:solidFill>
+                        <a:schemeClr val="bg2">
+                          <a:lumMod val="75000"/>
+                        </a:schemeClr>
+                      </a:solidFill>
+                      <a:prstDash val="solid"/>
+                      <a:round/>
+                      <a:headEnd type="none" w="med" len="med"/>
+                      <a:tailEnd type="none" w="med" len="med"/>
+                    </a:lnR>
+                    <a:lnT w="6350" cap="flat" cmpd="sng" algn="ctr">
+                      <a:solidFill>
+                        <a:schemeClr val="bg2">
+                          <a:lumMod val="75000"/>
+                        </a:schemeClr>
+                      </a:solidFill>
+                      <a:prstDash val="solid"/>
+                      <a:round/>
+                      <a:headEnd type="none" w="med" len="med"/>
+                      <a:tailEnd type="none" w="med" len="med"/>
+                    </a:lnT>
+                    <a:lnB w="6350" cap="flat" cmpd="sng" algn="ctr">
+                      <a:solidFill>
+                        <a:schemeClr val="bg2">
+                          <a:lumMod val="75000"/>
+                        </a:schemeClr>
+                      </a:solidFill>
+                      <a:prstDash val="solid"/>
+                      <a:round/>
+                      <a:headEnd type="none" w="med" len="med"/>
+                      <a:tailEnd type="none" w="med" len="med"/>
+                    </a:lnB>
+                  </a:tcPr>
+                </a:tc>
+                <a:tc>
+                  <a:txBody>
+                    <a:bodyPr/>
+                    <a:lstStyle/>
+                    <a:p>
+                      <a:pPr algn="r" rtl="0" fontAlgn="ctr"/>
+                      <a:r>
+                        <a:rPr lang="en-US" altLang="ko-KR" sz="700" b="0" i="0" u="none" strike="noStrike" kern="1200">
+                          <a:solidFill>
+                            <a:srgbClr val="000000"/>
+                          </a:solidFill>
+                          <a:effectLst/>
+                          <a:latin typeface="대명체 보통" panose="020B0600000101010101" pitchFamily="50" charset="-127"/>
+                          <a:ea typeface="대명체 보통" panose="020B0600000101010101" pitchFamily="50" charset="-127"/>
+                          <a:cs typeface="+mn-cs"/>
+                        </a:rPr>
+                        <a:t>174,005</a:t>
+                      </a:r>
+                    </a:p>
+                  </a:txBody>
+                  <a:tcPr marL="9525" marR="9525" marT="9525" marB="0" anchor="ctr">
+                    <a:lnL w="6350" cap="flat" cmpd="sng" algn="ctr">
+                      <a:solidFill>
+                        <a:schemeClr val="bg2">
+                          <a:lumMod val="75000"/>
+                        </a:schemeClr>
+                      </a:solidFill>
+                      <a:prstDash val="solid"/>
+                      <a:round/>
+                      <a:headEnd type="none" w="med" len="med"/>
+                      <a:tailEnd type="none" w="med" len="med"/>
+                    </a:lnL>
+                    <a:lnR w="6350" cap="flat" cmpd="sng" algn="ctr">
+                      <a:noFill/>
+                      <a:prstDash val="solid"/>
+                      <a:round/>
+                      <a:headEnd type="none" w="med" len="med"/>
+                      <a:tailEnd type="none" w="med" len="med"/>
+                    </a:lnR>
+                    <a:lnT w="6350" cap="flat" cmpd="sng" algn="ctr">
+                      <a:solidFill>
+                        <a:schemeClr val="bg2">
+                          <a:lumMod val="75000"/>
+                        </a:schemeClr>
+                      </a:solidFill>
+                      <a:prstDash val="solid"/>
+                      <a:round/>
+                      <a:headEnd type="none" w="med" len="med"/>
+                      <a:tailEnd type="none" w="med" len="med"/>
+                    </a:lnT>
+                    <a:lnB w="6350" cap="flat" cmpd="sng" algn="ctr">
+                      <a:solidFill>
+                        <a:schemeClr val="bg2">
+                          <a:lumMod val="75000"/>
+                        </a:schemeClr>
+                      </a:solidFill>
+                      <a:prstDash val="solid"/>
+                      <a:round/>
+                      <a:headEnd type="none" w="med" len="med"/>
+                      <a:tailEnd type="none" w="med" len="med"/>
+                    </a:lnB>
+                  </a:tcPr>
+                </a:tc>
+                <a:tc>
+                  <a:txBody>
+                    <a:bodyPr/>
+                    <a:lstStyle/>
+                    <a:p>
+                      <a:pPr algn="r" rtl="0" fontAlgn="ctr"/>
+                      <a:r>
+                        <a:rPr lang="en-US" altLang="ko-KR" sz="700" b="0" i="0" u="none" strike="noStrike" kern="1200">
+                          <a:solidFill>
+                            <a:srgbClr val="000000"/>
+                          </a:solidFill>
+                          <a:effectLst/>
+                          <a:latin typeface="대명체 보통" panose="020B0600000101010101" pitchFamily="50" charset="-127"/>
+                          <a:ea typeface="대명체 보통" panose="020B0600000101010101" pitchFamily="50" charset="-127"/>
+                          <a:cs typeface="+mn-cs"/>
+                        </a:rPr>
+                        <a:t>40%</a:t>
+                      </a:r>
+                    </a:p>
+                  </a:txBody>
+                  <a:tcPr marL="9525" marR="9525" marT="9525" marB="0" anchor="ctr">
+                    <a:lnL w="6350" cap="flat" cmpd="sng" algn="ctr">
+                      <a:noFill/>
+                      <a:prstDash val="solid"/>
+                      <a:round/>
+                      <a:headEnd type="none" w="med" len="med"/>
+                      <a:tailEnd type="none" w="med" len="med"/>
+                    </a:lnL>
+                    <a:lnR w="6350" cap="flat" cmpd="sng" algn="ctr">
+                      <a:solidFill>
+                        <a:schemeClr val="bg2">
+                          <a:lumMod val="75000"/>
+                        </a:schemeClr>
+                      </a:solidFill>
+                      <a:prstDash val="solid"/>
+                      <a:round/>
+                      <a:headEnd type="none" w="med" len="med"/>
+                      <a:tailEnd type="none" w="med" len="med"/>
+                    </a:lnR>
+                    <a:lnT w="6350" cap="flat" cmpd="sng" algn="ctr">
+                      <a:solidFill>
+                        <a:schemeClr val="bg2">
+                          <a:lumMod val="75000"/>
+                        </a:schemeClr>
+                      </a:solidFill>
+                      <a:prstDash val="solid"/>
+                      <a:round/>
+                      <a:headEnd type="none" w="med" len="med"/>
+                      <a:tailEnd type="none" w="med" len="med"/>
+                    </a:lnT>
+                    <a:lnB w="6350" cap="flat" cmpd="sng" algn="ctr">
+                      <a:solidFill>
+                        <a:schemeClr val="bg2">
+                          <a:lumMod val="75000"/>
+                        </a:schemeClr>
+                      </a:solidFill>
+                      <a:prstDash val="solid"/>
+                      <a:round/>
+                      <a:headEnd type="none" w="med" len="med"/>
+                      <a:tailEnd type="none" w="med" len="med"/>
+                    </a:lnB>
+                  </a:tcPr>
+                </a:tc>
+                <a:tc>
+                  <a:txBody>
+                    <a:bodyPr/>
+                    <a:lstStyle/>
+                    <a:p>
+                      <a:pPr algn="r" rtl="0" fontAlgn="ctr"/>
+                      <a:r>
+                        <a:rPr lang="en-US" altLang="ko-KR" sz="700" b="0" i="0" u="none" strike="noStrike" kern="1200">
+                          <a:solidFill>
+                            <a:srgbClr val="000000"/>
+                          </a:solidFill>
+                          <a:effectLst/>
+                          <a:latin typeface="대명체 보통" panose="020B0600000101010101" pitchFamily="50" charset="-127"/>
+                          <a:ea typeface="대명체 보통" panose="020B0600000101010101" pitchFamily="50" charset="-127"/>
+                          <a:cs typeface="+mn-cs"/>
+                        </a:rPr>
+                        <a:t>18,989</a:t>
+                      </a:r>
+                    </a:p>
+                  </a:txBody>
+                  <a:tcPr marL="9525" marR="9525" marT="9525" marB="0" anchor="ctr">
+                    <a:lnL w="6350" cap="flat" cmpd="sng" algn="ctr">
+                      <a:solidFill>
+                        <a:schemeClr val="bg2">
+                          <a:lumMod val="75000"/>
+                        </a:schemeClr>
+                      </a:solidFill>
+                      <a:prstDash val="solid"/>
+                      <a:round/>
+                      <a:headEnd type="none" w="med" len="med"/>
+                      <a:tailEnd type="none" w="med" len="med"/>
+                    </a:lnL>
+                    <a:lnR w="6350" cap="flat" cmpd="sng" algn="ctr">
+                      <a:solidFill>
+                        <a:schemeClr val="bg2">
+                          <a:lumMod val="75000"/>
+                        </a:schemeClr>
+                      </a:solidFill>
+                      <a:prstDash val="solid"/>
+                      <a:round/>
+                      <a:headEnd type="none" w="med" len="med"/>
+                      <a:tailEnd type="none" w="med" len="med"/>
+                    </a:lnR>
+                    <a:lnT w="6350" cap="flat" cmpd="sng" algn="ctr">
+                      <a:solidFill>
+                        <a:schemeClr val="bg2">
+                          <a:lumMod val="75000"/>
+                        </a:schemeClr>
+                      </a:solidFill>
+                      <a:prstDash val="solid"/>
+                      <a:round/>
+                      <a:headEnd type="none" w="med" len="med"/>
+                      <a:tailEnd type="none" w="med" len="med"/>
+                    </a:lnT>
+                    <a:lnB w="6350" cap="flat" cmpd="sng" algn="ctr">
+                      <a:solidFill>
+                        <a:schemeClr val="bg2">
+                          <a:lumMod val="75000"/>
+                        </a:schemeClr>
+                      </a:solidFill>
+                      <a:prstDash val="solid"/>
+                      <a:round/>
+                      <a:headEnd type="none" w="med" len="med"/>
+                      <a:tailEnd type="none" w="med" len="med"/>
+                    </a:lnB>
+                  </a:tcPr>
+                </a:tc>
+                <a:tc>
+                  <a:txBody>
+                    <a:bodyPr/>
+                    <a:lstStyle/>
+                    <a:p>
+                      <a:pPr algn="r" rtl="0" fontAlgn="ctr"/>
+                      <a:r>
+                        <a:rPr lang="en-US" altLang="ko-KR" sz="700" b="0" i="0" u="none" strike="noStrike" kern="1200">
+                          <a:solidFill>
+                            <a:srgbClr val="000000"/>
+                          </a:solidFill>
+                          <a:effectLst/>
+                          <a:latin typeface="대명체 보통" panose="020B0600000101010101" pitchFamily="50" charset="-127"/>
+                          <a:ea typeface="대명체 보통" panose="020B0600000101010101" pitchFamily="50" charset="-127"/>
+                          <a:cs typeface="+mn-cs"/>
+                        </a:rPr>
+                        <a:t>112%</a:t>
+                      </a:r>
+                    </a:p>
+                  </a:txBody>
+                  <a:tcPr marL="9525" marR="9525" marT="9525" marB="0" anchor="ctr">
+                    <a:lnL w="6350" cap="flat" cmpd="sng" algn="ctr">
+                      <a:solidFill>
+                        <a:schemeClr val="bg2">
+                          <a:lumMod val="75000"/>
+                        </a:schemeClr>
+                      </a:solidFill>
+                      <a:prstDash val="solid"/>
+                      <a:round/>
+                      <a:headEnd type="none" w="med" len="med"/>
+                      <a:tailEnd type="none" w="med" len="med"/>
+                    </a:lnL>
+                    <a:lnR w="6350" cap="flat" cmpd="sng" algn="ctr">
+                      <a:solidFill>
+                        <a:schemeClr val="bg2">
+                          <a:lumMod val="75000"/>
+                        </a:schemeClr>
+                      </a:solidFill>
+                      <a:prstDash val="solid"/>
+                      <a:round/>
+                      <a:headEnd type="none" w="med" len="med"/>
+                      <a:tailEnd type="none" w="med" len="med"/>
+                    </a:lnR>
+                    <a:lnT w="6350" cap="flat" cmpd="sng" algn="ctr">
+                      <a:solidFill>
+                        <a:schemeClr val="bg2">
+                          <a:lumMod val="75000"/>
+                        </a:schemeClr>
+                      </a:solidFill>
+                      <a:prstDash val="solid"/>
+                      <a:round/>
+                      <a:headEnd type="none" w="med" len="med"/>
+                      <a:tailEnd type="none" w="med" len="med"/>
+                    </a:lnT>
+                    <a:lnB w="6350" cap="flat" cmpd="sng" algn="ctr">
+                      <a:solidFill>
+                        <a:schemeClr val="bg2">
+                          <a:lumMod val="75000"/>
+                        </a:schemeClr>
+                      </a:solidFill>
+                      <a:prstDash val="solid"/>
+                      <a:round/>
+                      <a:headEnd type="none" w="med" len="med"/>
+                      <a:tailEnd type="none" w="med" len="med"/>
+                    </a:lnB>
+                  </a:tcPr>
+                </a:tc>
+                <a:tc>
+                  <a:txBody>
+                    <a:bodyPr/>
+                    <a:lstStyle/>
+                    <a:p>
+                      <a:pPr algn="r" rtl="0" fontAlgn="ctr"/>
+                      <a:r>
+                        <a:rPr lang="en-US" altLang="ko-KR" sz="700" b="0" i="0" u="none" strike="noStrike" kern="1200">
+                          <a:solidFill>
+                            <a:srgbClr val="000000"/>
+                          </a:solidFill>
+                          <a:effectLst/>
+                          <a:latin typeface="대명체 보통" panose="020B0600000101010101" pitchFamily="50" charset="-127"/>
+                          <a:ea typeface="대명체 보통" panose="020B0600000101010101" pitchFamily="50" charset="-127"/>
+                          <a:cs typeface="+mn-cs"/>
+                        </a:rPr>
+                        <a:t>125,967</a:t>
+                      </a:r>
+                    </a:p>
+                  </a:txBody>
+                  <a:tcPr marL="9525" marR="9525" marT="9525" marB="0" anchor="ctr">
+                    <a:lnL w="6350" cap="flat" cmpd="sng" algn="ctr">
+                      <a:solidFill>
+                        <a:schemeClr val="bg2">
+                          <a:lumMod val="75000"/>
+                        </a:schemeClr>
+                      </a:solidFill>
+                      <a:prstDash val="solid"/>
+                      <a:round/>
+                      <a:headEnd type="none" w="med" len="med"/>
+                      <a:tailEnd type="none" w="med" len="med"/>
+                    </a:lnL>
+                    <a:lnR w="6350" cap="flat" cmpd="sng" algn="ctr">
+                      <a:noFill/>
                       <a:prstDash val="solid"/>
                       <a:round/>
                       <a:headEnd type="none" w="med" len="med"/>
@@ -13215,101 +13779,45 @@
                   </a:txBody>
                   <a:tcPr marL="9525" marR="9525" marT="9525" marB="0" anchor="ctr">
                     <a:lnL w="6350" cap="flat" cmpd="sng" algn="ctr">
-                      <a:solidFill>
-                        <a:schemeClr val="bg2">
-                          <a:lumMod val="75000"/>
-                        </a:schemeClr>
-                      </a:solidFill>
-                      <a:prstDash val="solid"/>
-                      <a:round/>
-                      <a:headEnd type="none" w="med" len="med"/>
-                      <a:tailEnd type="none" w="med" len="med"/>
-                    </a:lnL>
-                    <a:lnR w="6350" cap="flat" cmpd="sng" algn="ctr">
-                      <a:noFill/>
-                      <a:prstDash val="solid"/>
-                      <a:round/>
-                      <a:headEnd type="none" w="med" len="med"/>
-                      <a:tailEnd type="none" w="med" len="med"/>
-                    </a:lnR>
-                    <a:lnT w="6350" cap="flat" cmpd="sng" algn="ctr">
-                      <a:solidFill>
-                        <a:schemeClr val="bg2">
-                          <a:lumMod val="75000"/>
-                        </a:schemeClr>
-                      </a:solidFill>
-                      <a:prstDash val="solid"/>
-                      <a:round/>
-                      <a:headEnd type="none" w="med" len="med"/>
-                      <a:tailEnd type="none" w="med" len="med"/>
-                    </a:lnT>
-                    <a:lnB w="6350" cap="flat" cmpd="sng" algn="ctr">
-                      <a:solidFill>
-                        <a:schemeClr val="bg2">
-                          <a:lumMod val="75000"/>
-                        </a:schemeClr>
-                      </a:solidFill>
-                      <a:prstDash val="solid"/>
-                      <a:round/>
-                      <a:headEnd type="none" w="med" len="med"/>
-                      <a:tailEnd type="none" w="med" len="med"/>
-                    </a:lnB>
-                  </a:tcPr>
-                </a:tc>
-                <a:tc>
-                  <a:txBody>
-                    <a:bodyPr/>
-                    <a:lstStyle/>
-                    <a:p>
-                      <a:pPr algn="r" fontAlgn="ctr"/>
-                      <a:endParaRPr lang="ko-KR" altLang="en-US" sz="700" b="0" i="0" u="none" strike="noStrike" kern="1200">
-                        <a:solidFill>
-                          <a:srgbClr val="000000"/>
-                        </a:solidFill>
-                        <a:effectLst/>
-                        <a:latin typeface="대명체 보통" panose="020B0600000101010101" pitchFamily="50" charset="-127"/>
-                        <a:ea typeface="대명체 보통" panose="020B0600000101010101" pitchFamily="50" charset="-127"/>
-                        <a:cs typeface="+mn-cs"/>
-                      </a:endParaRPr>
-                    </a:p>
-                  </a:txBody>
-                  <a:tcPr marL="9525" marR="9525" marT="9525" marB="0" anchor="ctr">
-                    <a:lnL w="6350" cap="flat" cmpd="sng" algn="ctr">
-                      <a:noFill/>
-                      <a:prstDash val="solid"/>
-                      <a:round/>
-                      <a:headEnd type="none" w="med" len="med"/>
-                      <a:tailEnd type="none" w="med" len="med"/>
-                    </a:lnL>
-                    <a:lnR w="6350" cap="flat" cmpd="sng" algn="ctr">
-                      <a:noFill/>
-                      <a:prstDash val="solid"/>
-                      <a:round/>
-                      <a:headEnd type="none" w="med" len="med"/>
-                      <a:tailEnd type="none" w="med" len="med"/>
-                    </a:lnR>
-                    <a:lnT w="6350" cap="flat" cmpd="sng" algn="ctr">
-                      <a:noFill/>
-                      <a:prstDash val="solid"/>
-                      <a:round/>
-                      <a:headEnd type="none" w="med" len="med"/>
-                      <a:tailEnd type="none" w="med" len="med"/>
-                    </a:lnT>
-                    <a:lnB w="6350" cap="flat" cmpd="sng" algn="ctr">
-                      <a:noFill/>
-                      <a:prstDash val="solid"/>
-                      <a:round/>
-                      <a:headEnd type="none" w="med" len="med"/>
-                      <a:tailEnd type="none" w="med" len="med"/>
-                    </a:lnB>
-                    <a:lnTlToBr w="12700" cmpd="sng">
-                      <a:noFill/>
-                      <a:prstDash val="solid"/>
-                    </a:lnTlToBr>
-                    <a:lnBlToTr w="12700" cmpd="sng">
-                      <a:noFill/>
-                      <a:prstDash val="solid"/>
-                    </a:lnBlToTr>
+                      <a:noFill/>
+                      <a:prstDash val="solid"/>
+                      <a:round/>
+                      <a:headEnd type="none" w="med" len="med"/>
+                      <a:tailEnd type="none" w="med" len="med"/>
+                    </a:lnL>
+                    <a:lnR w="6350" cap="flat" cmpd="sng" algn="ctr">
+                      <a:solidFill>
+                        <a:schemeClr val="bg2">
+                          <a:lumMod val="75000"/>
+                        </a:schemeClr>
+                      </a:solidFill>
+                      <a:prstDash val="solid"/>
+                      <a:round/>
+                      <a:headEnd type="none" w="med" len="med"/>
+                      <a:tailEnd type="none" w="med" len="med"/>
+                    </a:lnR>
+                    <a:lnT w="6350" cap="flat" cmpd="sng" algn="ctr">
+                      <a:solidFill>
+                        <a:schemeClr val="bg2">
+                          <a:lumMod val="75000"/>
+                        </a:schemeClr>
+                      </a:solidFill>
+                      <a:prstDash val="solid"/>
+                      <a:round/>
+                      <a:headEnd type="none" w="med" len="med"/>
+                      <a:tailEnd type="none" w="med" len="med"/>
+                    </a:lnT>
+                    <a:lnB w="6350" cap="flat" cmpd="sng" algn="ctr">
+                      <a:solidFill>
+                        <a:schemeClr val="bg2">
+                          <a:lumMod val="75000"/>
+                        </a:schemeClr>
+                      </a:solidFill>
+                      <a:prstDash val="solid"/>
+                      <a:round/>
+                      <a:headEnd type="none" w="med" len="med"/>
+                      <a:tailEnd type="none" w="med" len="med"/>
+                    </a:lnB>
                   </a:tcPr>
                 </a:tc>
                 <a:tc>
@@ -13328,20 +13836,28 @@
                           <a:ea typeface="대명체 보통" panose="020B0600000101010101" pitchFamily="50" charset="-127"/>
                           <a:cs typeface="+mn-cs"/>
                         </a:rPr>
-                        <a:t>155,016</a:t>
+                        <a:t>48,038</a:t>
                       </a:r>
                     </a:p>
                   </a:txBody>
                   <a:tcPr marL="9525" marR="9525" marT="9525" marB="0" anchor="ctr">
                     <a:lnL w="6350" cap="flat" cmpd="sng" algn="ctr">
-                      <a:noFill/>
-                      <a:prstDash val="solid"/>
-                      <a:round/>
-                      <a:headEnd type="none" w="med" len="med"/>
-                      <a:tailEnd type="none" w="med" len="med"/>
-                    </a:lnL>
-                    <a:lnR w="6350" cap="flat" cmpd="sng" algn="ctr">
-                      <a:noFill/>
+                      <a:solidFill>
+                        <a:schemeClr val="bg2">
+                          <a:lumMod val="75000"/>
+                        </a:schemeClr>
+                      </a:solidFill>
+                      <a:prstDash val="solid"/>
+                      <a:round/>
+                      <a:headEnd type="none" w="med" len="med"/>
+                      <a:tailEnd type="none" w="med" len="med"/>
+                    </a:lnL>
+                    <a:lnR w="6350" cap="flat" cmpd="sng" algn="ctr">
+                      <a:solidFill>
+                        <a:schemeClr val="bg2">
+                          <a:lumMod val="75000"/>
+                        </a:schemeClr>
+                      </a:solidFill>
                       <a:prstDash val="solid"/>
                       <a:round/>
                       <a:headEnd type="none" w="med" len="med"/>
@@ -13387,523 +13903,7 @@
                           <a:ea typeface="대명체 보통" panose="020B0600000101010101" pitchFamily="50" charset="-127"/>
                           <a:cs typeface="+mn-cs"/>
                         </a:rPr>
-                        <a:t>26%</a:t>
-                      </a:r>
-                    </a:p>
-                  </a:txBody>
-                  <a:tcPr marL="9525" marR="9525" marT="9525" marB="0" anchor="ctr">
-                    <a:lnL w="6350" cap="flat" cmpd="sng" algn="ctr">
-                      <a:noFill/>
-                      <a:prstDash val="solid"/>
-                      <a:round/>
-                      <a:headEnd type="none" w="med" len="med"/>
-                      <a:tailEnd type="none" w="med" len="med"/>
-                    </a:lnL>
-                    <a:lnR w="6350" cap="flat" cmpd="sng" algn="ctr">
-                      <a:solidFill>
-                        <a:schemeClr val="bg2">
-                          <a:lumMod val="75000"/>
-                        </a:schemeClr>
-                      </a:solidFill>
-                      <a:prstDash val="solid"/>
-                      <a:round/>
-                      <a:headEnd type="none" w="med" len="med"/>
-                      <a:tailEnd type="none" w="med" len="med"/>
-                    </a:lnR>
-                    <a:lnT w="6350" cap="flat" cmpd="sng" algn="ctr">
-                      <a:solidFill>
-                        <a:schemeClr val="bg2">
-                          <a:lumMod val="75000"/>
-                        </a:schemeClr>
-                      </a:solidFill>
-                      <a:prstDash val="solid"/>
-                      <a:round/>
-                      <a:headEnd type="none" w="med" len="med"/>
-                      <a:tailEnd type="none" w="med" len="med"/>
-                    </a:lnT>
-                    <a:lnB w="6350" cap="flat" cmpd="sng" algn="ctr">
-                      <a:solidFill>
-                        <a:schemeClr val="bg2">
-                          <a:lumMod val="75000"/>
-                        </a:schemeClr>
-                      </a:solidFill>
-                      <a:prstDash val="solid"/>
-                      <a:round/>
-                      <a:headEnd type="none" w="med" len="med"/>
-                      <a:tailEnd type="none" w="med" len="med"/>
-                    </a:lnB>
-                  </a:tcPr>
-                </a:tc>
-                <a:tc>
-                  <a:txBody>
-                    <a:bodyPr/>
-                    <a:lstStyle/>
-                    <a:p>
-                      <a:pPr algn="r" rtl="0" fontAlgn="ctr"/>
-                      <a:r>
-                        <a:rPr lang="en-US" altLang="ko-KR" sz="700" b="0" i="0" u="none" strike="noStrike" kern="1200">
-                          <a:solidFill>
-                            <a:srgbClr val="000000"/>
-                          </a:solidFill>
-                          <a:effectLst/>
-                          <a:latin typeface="대명체 보통" panose="020B0600000101010101" pitchFamily="50" charset="-127"/>
-                          <a:ea typeface="대명체 보통" panose="020B0600000101010101" pitchFamily="50" charset="-127"/>
-                          <a:cs typeface="+mn-cs"/>
-                        </a:rPr>
-                        <a:t>174,345</a:t>
-                      </a:r>
-                    </a:p>
-                  </a:txBody>
-                  <a:tcPr marL="9525" marR="9525" marT="9525" marB="0" anchor="ctr">
-                    <a:lnL w="6350" cap="flat" cmpd="sng" algn="ctr">
-                      <a:solidFill>
-                        <a:schemeClr val="bg2">
-                          <a:lumMod val="75000"/>
-                        </a:schemeClr>
-                      </a:solidFill>
-                      <a:prstDash val="solid"/>
-                      <a:round/>
-                      <a:headEnd type="none" w="med" len="med"/>
-                      <a:tailEnd type="none" w="med" len="med"/>
-                    </a:lnL>
-                    <a:lnR w="6350" cap="flat" cmpd="sng" algn="ctr">
-                      <a:noFill/>
-                      <a:prstDash val="solid"/>
-                      <a:round/>
-                      <a:headEnd type="none" w="med" len="med"/>
-                      <a:tailEnd type="none" w="med" len="med"/>
-                    </a:lnR>
-                    <a:lnT w="6350" cap="flat" cmpd="sng" algn="ctr">
-                      <a:solidFill>
-                        <a:schemeClr val="bg2">
-                          <a:lumMod val="75000"/>
-                        </a:schemeClr>
-                      </a:solidFill>
-                      <a:prstDash val="solid"/>
-                      <a:round/>
-                      <a:headEnd type="none" w="med" len="med"/>
-                      <a:tailEnd type="none" w="med" len="med"/>
-                    </a:lnT>
-                    <a:lnB w="6350" cap="flat" cmpd="sng" algn="ctr">
-                      <a:solidFill>
-                        <a:schemeClr val="bg2">
-                          <a:lumMod val="75000"/>
-                        </a:schemeClr>
-                      </a:solidFill>
-                      <a:prstDash val="solid"/>
-                      <a:round/>
-                      <a:headEnd type="none" w="med" len="med"/>
-                      <a:tailEnd type="none" w="med" len="med"/>
-                    </a:lnB>
-                  </a:tcPr>
-                </a:tc>
-                <a:tc>
-                  <a:txBody>
-                    <a:bodyPr/>
-                    <a:lstStyle/>
-                    <a:p>
-                      <a:pPr algn="r" rtl="0" fontAlgn="ctr"/>
-                      <a:r>
-                        <a:rPr lang="en-US" altLang="ko-KR" sz="700" b="0" i="0" u="none" strike="noStrike" kern="1200">
-                          <a:solidFill>
-                            <a:srgbClr val="000000"/>
-                          </a:solidFill>
-                          <a:effectLst/>
-                          <a:latin typeface="대명체 보통" panose="020B0600000101010101" pitchFamily="50" charset="-127"/>
-                          <a:ea typeface="대명체 보통" panose="020B0600000101010101" pitchFamily="50" charset="-127"/>
-                          <a:cs typeface="+mn-cs"/>
-                        </a:rPr>
-                        <a:t>40%</a:t>
-                      </a:r>
-                    </a:p>
-                  </a:txBody>
-                  <a:tcPr marL="9525" marR="9525" marT="9525" marB="0" anchor="ctr">
-                    <a:lnL w="6350" cap="flat" cmpd="sng" algn="ctr">
-                      <a:noFill/>
-                      <a:prstDash val="solid"/>
-                      <a:round/>
-                      <a:headEnd type="none" w="med" len="med"/>
-                      <a:tailEnd type="none" w="med" len="med"/>
-                    </a:lnL>
-                    <a:lnR w="6350" cap="flat" cmpd="sng" algn="ctr">
-                      <a:solidFill>
-                        <a:schemeClr val="bg2">
-                          <a:lumMod val="75000"/>
-                        </a:schemeClr>
-                      </a:solidFill>
-                      <a:prstDash val="solid"/>
-                      <a:round/>
-                      <a:headEnd type="none" w="med" len="med"/>
-                      <a:tailEnd type="none" w="med" len="med"/>
-                    </a:lnR>
-                    <a:lnT w="6350" cap="flat" cmpd="sng" algn="ctr">
-                      <a:solidFill>
-                        <a:schemeClr val="bg2">
-                          <a:lumMod val="75000"/>
-                        </a:schemeClr>
-                      </a:solidFill>
-                      <a:prstDash val="solid"/>
-                      <a:round/>
-                      <a:headEnd type="none" w="med" len="med"/>
-                      <a:tailEnd type="none" w="med" len="med"/>
-                    </a:lnT>
-                    <a:lnB w="6350" cap="flat" cmpd="sng" algn="ctr">
-                      <a:solidFill>
-                        <a:schemeClr val="bg2">
-                          <a:lumMod val="75000"/>
-                        </a:schemeClr>
-                      </a:solidFill>
-                      <a:prstDash val="solid"/>
-                      <a:round/>
-                      <a:headEnd type="none" w="med" len="med"/>
-                      <a:tailEnd type="none" w="med" len="med"/>
-                    </a:lnB>
-                  </a:tcPr>
-                </a:tc>
-                <a:tc>
-                  <a:txBody>
-                    <a:bodyPr/>
-                    <a:lstStyle/>
-                    <a:p>
-                      <a:pPr algn="r" rtl="0" fontAlgn="ctr"/>
-                      <a:r>
-                        <a:rPr lang="en-US" altLang="ko-KR" sz="700" b="0" i="0" u="none" strike="noStrike" kern="1200">
-                          <a:solidFill>
-                            <a:srgbClr val="000000"/>
-                          </a:solidFill>
-                          <a:effectLst/>
-                          <a:latin typeface="대명체 보통" panose="020B0600000101010101" pitchFamily="50" charset="-127"/>
-                          <a:ea typeface="대명체 보통" panose="020B0600000101010101" pitchFamily="50" charset="-127"/>
-                          <a:cs typeface="+mn-cs"/>
-                        </a:rPr>
-                        <a:t>19,329</a:t>
-                      </a:r>
-                    </a:p>
-                  </a:txBody>
-                  <a:tcPr marL="9525" marR="9525" marT="9525" marB="0" anchor="ctr">
-                    <a:lnL w="6350" cap="flat" cmpd="sng" algn="ctr">
-                      <a:solidFill>
-                        <a:schemeClr val="bg2">
-                          <a:lumMod val="75000"/>
-                        </a:schemeClr>
-                      </a:solidFill>
-                      <a:prstDash val="solid"/>
-                      <a:round/>
-                      <a:headEnd type="none" w="med" len="med"/>
-                      <a:tailEnd type="none" w="med" len="med"/>
-                    </a:lnL>
-                    <a:lnR w="6350" cap="flat" cmpd="sng" algn="ctr">
-                      <a:solidFill>
-                        <a:schemeClr val="bg2">
-                          <a:lumMod val="75000"/>
-                        </a:schemeClr>
-                      </a:solidFill>
-                      <a:prstDash val="solid"/>
-                      <a:round/>
-                      <a:headEnd type="none" w="med" len="med"/>
-                      <a:tailEnd type="none" w="med" len="med"/>
-                    </a:lnR>
-                    <a:lnT w="6350" cap="flat" cmpd="sng" algn="ctr">
-                      <a:solidFill>
-                        <a:schemeClr val="bg2">
-                          <a:lumMod val="75000"/>
-                        </a:schemeClr>
-                      </a:solidFill>
-                      <a:prstDash val="solid"/>
-                      <a:round/>
-                      <a:headEnd type="none" w="med" len="med"/>
-                      <a:tailEnd type="none" w="med" len="med"/>
-                    </a:lnT>
-                    <a:lnB w="6350" cap="flat" cmpd="sng" algn="ctr">
-                      <a:solidFill>
-                        <a:schemeClr val="bg2">
-                          <a:lumMod val="75000"/>
-                        </a:schemeClr>
-                      </a:solidFill>
-                      <a:prstDash val="solid"/>
-                      <a:round/>
-                      <a:headEnd type="none" w="med" len="med"/>
-                      <a:tailEnd type="none" w="med" len="med"/>
-                    </a:lnB>
-                  </a:tcPr>
-                </a:tc>
-                <a:tc>
-                  <a:txBody>
-                    <a:bodyPr/>
-                    <a:lstStyle/>
-                    <a:p>
-                      <a:pPr algn="r" rtl="0" fontAlgn="ctr"/>
-                      <a:r>
-                        <a:rPr lang="en-US" altLang="ko-KR" sz="700" b="0" i="0" u="none" strike="noStrike" kern="1200">
-                          <a:solidFill>
-                            <a:srgbClr val="000000"/>
-                          </a:solidFill>
-                          <a:effectLst/>
-                          <a:latin typeface="대명체 보통" panose="020B0600000101010101" pitchFamily="50" charset="-127"/>
-                          <a:ea typeface="대명체 보통" panose="020B0600000101010101" pitchFamily="50" charset="-127"/>
-                          <a:cs typeface="+mn-cs"/>
-                        </a:rPr>
-                        <a:t>112%</a:t>
-                      </a:r>
-                    </a:p>
-                  </a:txBody>
-                  <a:tcPr marL="9525" marR="9525" marT="9525" marB="0" anchor="ctr">
-                    <a:lnL w="6350" cap="flat" cmpd="sng" algn="ctr">
-                      <a:solidFill>
-                        <a:schemeClr val="bg2">
-                          <a:lumMod val="75000"/>
-                        </a:schemeClr>
-                      </a:solidFill>
-                      <a:prstDash val="solid"/>
-                      <a:round/>
-                      <a:headEnd type="none" w="med" len="med"/>
-                      <a:tailEnd type="none" w="med" len="med"/>
-                    </a:lnL>
-                    <a:lnR w="6350" cap="flat" cmpd="sng" algn="ctr">
-                      <a:solidFill>
-                        <a:schemeClr val="bg2">
-                          <a:lumMod val="75000"/>
-                        </a:schemeClr>
-                      </a:solidFill>
-                      <a:prstDash val="solid"/>
-                      <a:round/>
-                      <a:headEnd type="none" w="med" len="med"/>
-                      <a:tailEnd type="none" w="med" len="med"/>
-                    </a:lnR>
-                    <a:lnT w="6350" cap="flat" cmpd="sng" algn="ctr">
-                      <a:solidFill>
-                        <a:schemeClr val="bg2">
-                          <a:lumMod val="75000"/>
-                        </a:schemeClr>
-                      </a:solidFill>
-                      <a:prstDash val="solid"/>
-                      <a:round/>
-                      <a:headEnd type="none" w="med" len="med"/>
-                      <a:tailEnd type="none" w="med" len="med"/>
-                    </a:lnT>
-                    <a:lnB w="6350" cap="flat" cmpd="sng" algn="ctr">
-                      <a:solidFill>
-                        <a:schemeClr val="bg2">
-                          <a:lumMod val="75000"/>
-                        </a:schemeClr>
-                      </a:solidFill>
-                      <a:prstDash val="solid"/>
-                      <a:round/>
-                      <a:headEnd type="none" w="med" len="med"/>
-                      <a:tailEnd type="none" w="med" len="med"/>
-                    </a:lnB>
-                  </a:tcPr>
-                </a:tc>
-                <a:tc>
-                  <a:txBody>
-                    <a:bodyPr/>
-                    <a:lstStyle/>
-                    <a:p>
-                      <a:pPr algn="r" rtl="0" fontAlgn="ctr"/>
-                      <a:r>
-                        <a:rPr lang="en-US" altLang="ko-KR" sz="700" b="0" i="0" u="none" strike="noStrike" kern="1200">
-                          <a:solidFill>
-                            <a:srgbClr val="000000"/>
-                          </a:solidFill>
-                          <a:effectLst/>
-                          <a:latin typeface="대명체 보통" panose="020B0600000101010101" pitchFamily="50" charset="-127"/>
-                          <a:ea typeface="대명체 보통" panose="020B0600000101010101" pitchFamily="50" charset="-127"/>
-                          <a:cs typeface="+mn-cs"/>
-                        </a:rPr>
-                        <a:t>125,643</a:t>
-                      </a:r>
-                    </a:p>
-                  </a:txBody>
-                  <a:tcPr marL="9525" marR="9525" marT="9525" marB="0" anchor="ctr">
-                    <a:lnL w="6350" cap="flat" cmpd="sng" algn="ctr">
-                      <a:solidFill>
-                        <a:schemeClr val="bg2">
-                          <a:lumMod val="75000"/>
-                        </a:schemeClr>
-                      </a:solidFill>
-                      <a:prstDash val="solid"/>
-                      <a:round/>
-                      <a:headEnd type="none" w="med" len="med"/>
-                      <a:tailEnd type="none" w="med" len="med"/>
-                    </a:lnL>
-                    <a:lnR w="6350" cap="flat" cmpd="sng" algn="ctr">
-                      <a:noFill/>
-                      <a:prstDash val="solid"/>
-                      <a:round/>
-                      <a:headEnd type="none" w="med" len="med"/>
-                      <a:tailEnd type="none" w="med" len="med"/>
-                    </a:lnR>
-                    <a:lnT w="6350" cap="flat" cmpd="sng" algn="ctr">
-                      <a:solidFill>
-                        <a:schemeClr val="bg2">
-                          <a:lumMod val="75000"/>
-                        </a:schemeClr>
-                      </a:solidFill>
-                      <a:prstDash val="solid"/>
-                      <a:round/>
-                      <a:headEnd type="none" w="med" len="med"/>
-                      <a:tailEnd type="none" w="med" len="med"/>
-                    </a:lnT>
-                    <a:lnB w="6350" cap="flat" cmpd="sng" algn="ctr">
-                      <a:solidFill>
-                        <a:schemeClr val="bg2">
-                          <a:lumMod val="75000"/>
-                        </a:schemeClr>
-                      </a:solidFill>
-                      <a:prstDash val="solid"/>
-                      <a:round/>
-                      <a:headEnd type="none" w="med" len="med"/>
-                      <a:tailEnd type="none" w="med" len="med"/>
-                    </a:lnB>
-                  </a:tcPr>
-                </a:tc>
-                <a:tc>
-                  <a:txBody>
-                    <a:bodyPr/>
-                    <a:lstStyle/>
-                    <a:p>
-                      <a:pPr algn="r" rtl="0" fontAlgn="ctr"/>
-                      <a:r>
-                        <a:rPr lang="en-US" altLang="ko-KR" sz="700" b="0" i="0" u="none" strike="noStrike" kern="1200">
-                          <a:solidFill>
-                            <a:srgbClr val="000000"/>
-                          </a:solidFill>
-                          <a:effectLst/>
-                          <a:latin typeface="대명체 보통" panose="020B0600000101010101" pitchFamily="50" charset="-127"/>
-                          <a:ea typeface="대명체 보통" panose="020B0600000101010101" pitchFamily="50" charset="-127"/>
-                          <a:cs typeface="+mn-cs"/>
-                        </a:rPr>
-                        <a:t>27%</a:t>
-                      </a:r>
-                    </a:p>
-                  </a:txBody>
-                  <a:tcPr marL="9525" marR="9525" marT="9525" marB="0" anchor="ctr">
-                    <a:lnL w="6350" cap="flat" cmpd="sng" algn="ctr">
-                      <a:noFill/>
-                      <a:prstDash val="solid"/>
-                      <a:round/>
-                      <a:headEnd type="none" w="med" len="med"/>
-                      <a:tailEnd type="none" w="med" len="med"/>
-                    </a:lnL>
-                    <a:lnR w="6350" cap="flat" cmpd="sng" algn="ctr">
-                      <a:solidFill>
-                        <a:schemeClr val="bg2">
-                          <a:lumMod val="75000"/>
-                        </a:schemeClr>
-                      </a:solidFill>
-                      <a:prstDash val="solid"/>
-                      <a:round/>
-                      <a:headEnd type="none" w="med" len="med"/>
-                      <a:tailEnd type="none" w="med" len="med"/>
-                    </a:lnR>
-                    <a:lnT w="6350" cap="flat" cmpd="sng" algn="ctr">
-                      <a:solidFill>
-                        <a:schemeClr val="bg2">
-                          <a:lumMod val="75000"/>
-                        </a:schemeClr>
-                      </a:solidFill>
-                      <a:prstDash val="solid"/>
-                      <a:round/>
-                      <a:headEnd type="none" w="med" len="med"/>
-                      <a:tailEnd type="none" w="med" len="med"/>
-                    </a:lnT>
-                    <a:lnB w="6350" cap="flat" cmpd="sng" algn="ctr">
-                      <a:solidFill>
-                        <a:schemeClr val="bg2">
-                          <a:lumMod val="75000"/>
-                        </a:schemeClr>
-                      </a:solidFill>
-                      <a:prstDash val="solid"/>
-                      <a:round/>
-                      <a:headEnd type="none" w="med" len="med"/>
-                      <a:tailEnd type="none" w="med" len="med"/>
-                    </a:lnB>
-                  </a:tcPr>
-                </a:tc>
-                <a:tc>
-                  <a:txBody>
-                    <a:bodyPr/>
-                    <a:lstStyle/>
-                    <a:p>
-                      <a:pPr algn="r" rtl="0" fontAlgn="ctr"/>
-                      <a:r>
-                        <a:rPr lang="en-US" altLang="ko-KR" sz="700" b="0" i="0" u="none" strike="noStrike" kern="1200">
-                          <a:solidFill>
-                            <a:srgbClr val="000000"/>
-                          </a:solidFill>
-                          <a:effectLst/>
-                          <a:latin typeface="대명체 보통" panose="020B0600000101010101" pitchFamily="50" charset="-127"/>
-                          <a:ea typeface="대명체 보통" panose="020B0600000101010101" pitchFamily="50" charset="-127"/>
-                          <a:cs typeface="+mn-cs"/>
-                        </a:rPr>
-                        <a:t>48,702</a:t>
-                      </a:r>
-                    </a:p>
-                  </a:txBody>
-                  <a:tcPr marL="9525" marR="9525" marT="9525" marB="0" anchor="ctr">
-                    <a:lnL w="6350" cap="flat" cmpd="sng" algn="ctr">
-                      <a:solidFill>
-                        <a:schemeClr val="bg2">
-                          <a:lumMod val="75000"/>
-                        </a:schemeClr>
-                      </a:solidFill>
-                      <a:prstDash val="solid"/>
-                      <a:round/>
-                      <a:headEnd type="none" w="med" len="med"/>
-                      <a:tailEnd type="none" w="med" len="med"/>
-                    </a:lnL>
-                    <a:lnR w="6350" cap="flat" cmpd="sng" algn="ctr">
-                      <a:solidFill>
-                        <a:schemeClr val="bg2">
-                          <a:lumMod val="75000"/>
-                        </a:schemeClr>
-                      </a:solidFill>
-                      <a:prstDash val="solid"/>
-                      <a:round/>
-                      <a:headEnd type="none" w="med" len="med"/>
-                      <a:tailEnd type="none" w="med" len="med"/>
-                    </a:lnR>
-                    <a:lnT w="6350" cap="flat" cmpd="sng" algn="ctr">
-                      <a:solidFill>
-                        <a:schemeClr val="bg2">
-                          <a:lumMod val="75000"/>
-                        </a:schemeClr>
-                      </a:solidFill>
-                      <a:prstDash val="solid"/>
-                      <a:round/>
-                      <a:headEnd type="none" w="med" len="med"/>
-                      <a:tailEnd type="none" w="med" len="med"/>
-                    </a:lnT>
-                    <a:lnB w="6350" cap="flat" cmpd="sng" algn="ctr">
-                      <a:solidFill>
-                        <a:schemeClr val="bg2">
-                          <a:lumMod val="75000"/>
-                        </a:schemeClr>
-                      </a:solidFill>
-                      <a:prstDash val="solid"/>
-                      <a:round/>
-                      <a:headEnd type="none" w="med" len="med"/>
-                      <a:tailEnd type="none" w="med" len="med"/>
-                    </a:lnB>
-                  </a:tcPr>
-                </a:tc>
-                <a:tc>
-                  <a:txBody>
-                    <a:bodyPr/>
-                    <a:lstStyle/>
-                    <a:p>
-                      <a:pPr algn="r" rtl="0" fontAlgn="ctr"/>
-                      <a:r>
-                        <a:rPr lang="en-US" altLang="ko-KR" sz="700" b="0" i="0" u="none" strike="noStrike" kern="1200">
-                          <a:solidFill>
-                            <a:srgbClr val="000000"/>
-                          </a:solidFill>
-                          <a:effectLst/>
-                          <a:latin typeface="대명체 보통" panose="020B0600000101010101" pitchFamily="50" charset="-127"/>
-                          <a:ea typeface="대명체 보통" panose="020B0600000101010101" pitchFamily="50" charset="-127"/>
-                          <a:cs typeface="+mn-cs"/>
-                        </a:rPr>
-                        <a:t>39%</a:t>
+                        <a:t>38%</a:t>
                       </a:r>
                     </a:p>
                   </a:txBody>
@@ -14237,7 +14237,7 @@
                           <a:ea typeface="대명체 보통" panose="020B0600000101010101" pitchFamily="50" charset="-127"/>
                           <a:cs typeface="+mn-cs"/>
                         </a:rPr>
-                        <a:t>7,954</a:t>
+                        <a:t>7,773</a:t>
                       </a:r>
                     </a:p>
                   </a:txBody>
@@ -14355,7 +14355,7 @@
                           <a:ea typeface="대명체 보통" panose="020B0600000101010101" pitchFamily="50" charset="-127"/>
                           <a:cs typeface="+mn-cs"/>
                         </a:rPr>
-                        <a:t>-1,656</a:t>
+                        <a:t>-1,838</a:t>
                       </a:r>
                       <a:endParaRPr lang="en-US" altLang="ko-KR" sz="700" b="0" i="0" u="none" strike="noStrike" kern="1200" dirty="0">
                         <a:solidFill>
@@ -14427,7 +14427,7 @@
                           <a:ea typeface="대명체 보통" panose="020B0600000101010101" pitchFamily="50" charset="-127"/>
                           <a:cs typeface="+mn-cs"/>
                         </a:rPr>
-                        <a:t>83%</a:t>
+                        <a:t>81%</a:t>
                       </a:r>
                     </a:p>
                   </a:txBody>
@@ -14490,7 +14490,7 @@
                           <a:ea typeface="대명체 보통" panose="020B0600000101010101" pitchFamily="50" charset="-127"/>
                           <a:cs typeface="+mn-cs"/>
                         </a:rPr>
-                        <a:t>7,533</a:t>
+                        <a:t>7,717</a:t>
                       </a:r>
                     </a:p>
                   </a:txBody>
@@ -14608,7 +14608,7 @@
                           <a:ea typeface="대명체 보통" panose="020B0600000101010101" pitchFamily="50" charset="-127"/>
                           <a:cs typeface="+mn-cs"/>
                         </a:rPr>
-                        <a:t>421</a:t>
+                        <a:t>56</a:t>
                       </a:r>
                     </a:p>
                   </a:txBody>
@@ -14671,7 +14671,7 @@
                           <a:ea typeface="대명체 보통" panose="020B0600000101010101" pitchFamily="50" charset="-127"/>
                           <a:cs typeface="+mn-cs"/>
                         </a:rPr>
-                        <a:t>6%</a:t>
+                        <a:t>1%</a:t>
                       </a:r>
                     </a:p>
                   </a:txBody>
@@ -14900,7 +14900,7 @@
                           <a:ea typeface="대명체 보통" panose="020B0600000101010101" pitchFamily="50" charset="-127"/>
                           <a:cs typeface="+mn-cs"/>
                         </a:rPr>
-                        <a:t>99,710</a:t>
+                        <a:t>99,529</a:t>
                       </a:r>
                     </a:p>
                   </a:txBody>
@@ -15018,7 +15018,7 @@
                           <a:ea typeface="대명체 보통" panose="020B0600000101010101" pitchFamily="50" charset="-127"/>
                           <a:cs typeface="+mn-cs"/>
                         </a:rPr>
-                        <a:t>9,726</a:t>
+                        <a:t>9,545</a:t>
                       </a:r>
                     </a:p>
                   </a:txBody>
@@ -15144,7 +15144,7 @@
                           <a:ea typeface="대명체 보통" panose="020B0600000101010101" pitchFamily="50" charset="-127"/>
                           <a:cs typeface="+mn-cs"/>
                         </a:rPr>
-                        <a:t>72,397</a:t>
+                        <a:t>72,580</a:t>
                       </a:r>
                     </a:p>
                   </a:txBody>
@@ -15262,7 +15262,7 @@
                           <a:ea typeface="대명체 보통" panose="020B0600000101010101" pitchFamily="50" charset="-127"/>
                           <a:cs typeface="+mn-cs"/>
                         </a:rPr>
-                        <a:t>27,313</a:t>
+                        <a:t>26,948</a:t>
                       </a:r>
                     </a:p>
                   </a:txBody>
@@ -15325,7 +15325,7 @@
                           <a:ea typeface="대명체 보통" panose="020B0600000101010101" pitchFamily="50" charset="-127"/>
                           <a:cs typeface="+mn-cs"/>
                         </a:rPr>
-                        <a:t>38%</a:t>
+                        <a:t>37%</a:t>
                       </a:r>
                     </a:p>
                   </a:txBody>
@@ -15643,7 +15643,7 @@
                           <a:ea typeface="대명체 보통" panose="020B0600000101010101" pitchFamily="50" charset="-127"/>
                           <a:cs typeface="+mn-cs"/>
                         </a:rPr>
-                        <a:t>6,818</a:t>
+                        <a:t>6,676</a:t>
                       </a:r>
                     </a:p>
                   </a:txBody>
@@ -15753,7 +15753,7 @@
                           <a:ea typeface="대명체 보통" panose="020B0600000101010101" pitchFamily="50" charset="-127"/>
                           <a:cs typeface="+mn-cs"/>
                         </a:rPr>
-                        <a:t>960</a:t>
+                        <a:t>817</a:t>
                       </a:r>
                       <a:endParaRPr lang="en-US" altLang="ko-KR" sz="700" b="0" i="0" u="none" strike="noStrike" kern="1200" dirty="0">
                         <a:solidFill>
@@ -15821,7 +15821,7 @@
                           <a:ea typeface="대명체 보통" panose="020B0600000101010101" pitchFamily="50" charset="-127"/>
                           <a:cs typeface="+mn-cs"/>
                         </a:rPr>
-                        <a:t>116%</a:t>
+                        <a:t>114%</a:t>
                       </a:r>
                     </a:p>
                   </a:txBody>
@@ -15880,7 +15880,7 @@
                           <a:ea typeface="대명체 보통" panose="020B0600000101010101" pitchFamily="50" charset="-127"/>
                           <a:cs typeface="+mn-cs"/>
                         </a:rPr>
-                        <a:t>4,214</a:t>
+                        <a:t>4,341</a:t>
                       </a:r>
                     </a:p>
                   </a:txBody>
@@ -15990,7 +15990,7 @@
                           <a:ea typeface="대명체 보통" panose="020B0600000101010101" pitchFamily="50" charset="-127"/>
                           <a:cs typeface="+mn-cs"/>
                         </a:rPr>
-                        <a:t>2,604</a:t>
+                        <a:t>2,335</a:t>
                       </a:r>
                     </a:p>
                   </a:txBody>
@@ -16049,7 +16049,7 @@
                           <a:ea typeface="대명체 보통" panose="020B0600000101010101" pitchFamily="50" charset="-127"/>
                           <a:cs typeface="+mn-cs"/>
                         </a:rPr>
-                        <a:t>62%</a:t>
+                        <a:t>54%</a:t>
                       </a:r>
                     </a:p>
                   </a:txBody>
@@ -16266,7 +16266,7 @@
                           <a:ea typeface="대명체 보통" panose="020B0600000101010101" pitchFamily="50" charset="-127"/>
                           <a:cs typeface="+mn-cs"/>
                         </a:rPr>
-                        <a:t>68,080</a:t>
+                        <a:t>67,937</a:t>
                       </a:r>
                     </a:p>
                   </a:txBody>
@@ -16376,7 +16376,7 @@
                           <a:ea typeface="대명체 보통" panose="020B0600000101010101" pitchFamily="50" charset="-127"/>
                           <a:cs typeface="+mn-cs"/>
                         </a:rPr>
-                        <a:t>7,437</a:t>
+                        <a:t>7,294</a:t>
                       </a:r>
                     </a:p>
                   </a:txBody>
@@ -16494,7 +16494,7 @@
                           <a:ea typeface="대명체 보통" panose="020B0600000101010101" pitchFamily="50" charset="-127"/>
                           <a:cs typeface="+mn-cs"/>
                         </a:rPr>
-                        <a:t>49,155</a:t>
+                        <a:t>49,282</a:t>
                       </a:r>
                     </a:p>
                   </a:txBody>
@@ -16604,7 +16604,7 @@
                           <a:ea typeface="대명체 보통" panose="020B0600000101010101" pitchFamily="50" charset="-127"/>
                           <a:cs typeface="+mn-cs"/>
                         </a:rPr>
-                        <a:t>18,925</a:t>
+                        <a:t>18,655</a:t>
                       </a:r>
                     </a:p>
                   </a:txBody>
@@ -16663,7 +16663,7 @@
                           <a:ea typeface="대명체 보통" panose="020B0600000101010101" pitchFamily="50" charset="-127"/>
                           <a:cs typeface="+mn-cs"/>
                         </a:rPr>
-                        <a:t>39%</a:t>
+                        <a:t>38%</a:t>
                       </a:r>
                     </a:p>
                   </a:txBody>
@@ -16999,7 +16999,7 @@
                           <a:ea typeface="대명체 보통" panose="020B0600000101010101" pitchFamily="50" charset="-127"/>
                           <a:cs typeface="+mn-cs"/>
                         </a:rPr>
-                        <a:t>774</a:t>
+                        <a:t>758</a:t>
                       </a:r>
                       <a:endParaRPr lang="en-US" altLang="ko-KR" sz="700" b="0" i="0" u="none" strike="noStrike" kern="1200" dirty="0">
                         <a:solidFill>
@@ -17126,7 +17126,7 @@
                           <a:ea typeface="대명체 보통" panose="020B0600000101010101" pitchFamily="50" charset="-127"/>
                           <a:cs typeface="+mn-cs"/>
                         </a:rPr>
-                        <a:t>255</a:t>
+                        <a:t>239</a:t>
                       </a:r>
                       <a:endParaRPr lang="en-US" altLang="ko-KR" sz="700" b="0" i="0" u="none" strike="noStrike" kern="1200" dirty="0">
                         <a:solidFill>
@@ -17198,7 +17198,7 @@
                           <a:ea typeface="대명체 보통" panose="020B0600000101010101" pitchFamily="50" charset="-127"/>
                           <a:cs typeface="+mn-cs"/>
                         </a:rPr>
-                        <a:t>149%</a:t>
+                        <a:t>146%</a:t>
                       </a:r>
                     </a:p>
                   </a:txBody>
@@ -17261,7 +17261,7 @@
                           <a:ea typeface="대명체 보통" panose="020B0600000101010101" pitchFamily="50" charset="-127"/>
                           <a:cs typeface="+mn-cs"/>
                         </a:rPr>
-                        <a:t>498</a:t>
+                        <a:t>512</a:t>
                       </a:r>
                       <a:endParaRPr lang="en-US" altLang="ko-KR" sz="700" b="0" i="0" u="none" strike="noStrike" kern="1200" dirty="0">
                         <a:solidFill>
@@ -17388,7 +17388,7 @@
                           <a:ea typeface="대명체 보통" panose="020B0600000101010101" pitchFamily="50" charset="-127"/>
                           <a:cs typeface="+mn-cs"/>
                         </a:rPr>
-                        <a:t>276</a:t>
+                        <a:t>246</a:t>
                       </a:r>
                     </a:p>
                   </a:txBody>
@@ -17451,7 +17451,7 @@
                           <a:ea typeface="대명체 보통" panose="020B0600000101010101" pitchFamily="50" charset="-127"/>
                           <a:cs typeface="+mn-cs"/>
                         </a:rPr>
-                        <a:t>55%</a:t>
+                        <a:t>48%</a:t>
                       </a:r>
                     </a:p>
                   </a:txBody>
@@ -17680,7 +17680,7 @@
                           <a:ea typeface="대명체 보통" panose="020B0600000101010101" pitchFamily="50" charset="-127"/>
                           <a:cs typeface="+mn-cs"/>
                         </a:rPr>
-                        <a:t>6,555</a:t>
+                        <a:t>6,539</a:t>
                       </a:r>
                     </a:p>
                   </a:txBody>
@@ -17798,7 +17798,7 @@
                           <a:ea typeface="대명체 보통" panose="020B0600000101010101" pitchFamily="50" charset="-127"/>
                           <a:cs typeface="+mn-cs"/>
                         </a:rPr>
-                        <a:t>2,166</a:t>
+                        <a:t>2,150</a:t>
                       </a:r>
                       <a:endParaRPr lang="en-US" altLang="ko-KR" sz="700" b="0" i="0" u="none" strike="noStrike" kern="1200" dirty="0">
                         <a:solidFill>
@@ -17933,7 +17933,7 @@
                           <a:ea typeface="대명체 보통" panose="020B0600000101010101" pitchFamily="50" charset="-127"/>
                           <a:cs typeface="+mn-cs"/>
                         </a:rPr>
-                        <a:t>4,092</a:t>
+                        <a:t>4,105</a:t>
                       </a:r>
                     </a:p>
                   </a:txBody>
@@ -18051,7 +18051,7 @@
                           <a:ea typeface="대명체 보통" panose="020B0600000101010101" pitchFamily="50" charset="-127"/>
                           <a:cs typeface="+mn-cs"/>
                         </a:rPr>
-                        <a:t>2,464</a:t>
+                        <a:t>2,434</a:t>
                       </a:r>
                     </a:p>
                   </a:txBody>
@@ -18114,7 +18114,7 @@
                           <a:ea typeface="대명체 보통" panose="020B0600000101010101" pitchFamily="50" charset="-127"/>
                           <a:cs typeface="+mn-cs"/>
                         </a:rPr>
-                        <a:t>60%</a:t>
+                        <a:t>59%</a:t>
                       </a:r>
                     </a:p>
                   </a:txBody>

--- a/docs/data/세일즈마케팅_예상매출현황.pptx
+++ b/docs/data/세일즈마케팅_예상매출현황.pptx
@@ -12756,7 +12756,7 @@
                           <a:ea typeface="대명체 보통" panose="020B0600000101010101" pitchFamily="50" charset="-127"/>
                           <a:cs typeface="+mn-cs"/>
                         </a:rPr>
-                        <a:t>15,206</a:t>
+                        <a:t>15,169</a:t>
                       </a:r>
                     </a:p>
                   </a:txBody>
@@ -12882,7 +12882,7 @@
                           <a:ea typeface="대명체 보통" panose="020B0600000101010101" pitchFamily="50" charset="-127"/>
                           <a:cs typeface="+mn-cs"/>
                         </a:rPr>
-                        <a:t>-782</a:t>
+                        <a:t>-819</a:t>
                       </a:r>
                     </a:p>
                   </a:txBody>
@@ -13016,7 +13016,7 @@
                           <a:ea typeface="대명체 보통" panose="020B0600000101010101" pitchFamily="50" charset="-127"/>
                           <a:cs typeface="+mn-cs"/>
                         </a:rPr>
-                        <a:t>12,570</a:t>
+                        <a:t>12,641</a:t>
                       </a:r>
                     </a:p>
                   </a:txBody>
@@ -13142,7 +13142,7 @@
                           <a:ea typeface="대명체 보통" panose="020B0600000101010101" pitchFamily="50" charset="-127"/>
                           <a:cs typeface="+mn-cs"/>
                         </a:rPr>
-                        <a:t>2,637</a:t>
+                        <a:t>2,529</a:t>
                       </a:r>
                     </a:p>
                   </a:txBody>
@@ -13209,7 +13209,7 @@
                           <a:ea typeface="대명체 보통" panose="020B0600000101010101" pitchFamily="50" charset="-127"/>
                           <a:cs typeface="+mn-cs"/>
                         </a:rPr>
-                        <a:t>21%</a:t>
+                        <a:t>20%</a:t>
                       </a:r>
                     </a:p>
                   </a:txBody>
@@ -13450,7 +13450,7 @@
                           <a:ea typeface="대명체 보통" panose="020B0600000101010101" pitchFamily="50" charset="-127"/>
                           <a:cs typeface="+mn-cs"/>
                         </a:rPr>
-                        <a:t>174,005</a:t>
+                        <a:t>173,968</a:t>
                       </a:r>
                     </a:p>
                   </a:txBody>
@@ -13576,7 +13576,7 @@
                           <a:ea typeface="대명체 보통" panose="020B0600000101010101" pitchFamily="50" charset="-127"/>
                           <a:cs typeface="+mn-cs"/>
                         </a:rPr>
-                        <a:t>18,989</a:t>
+                        <a:t>18,952</a:t>
                       </a:r>
                     </a:p>
                   </a:txBody>
@@ -13710,7 +13710,7 @@
                           <a:ea typeface="대명체 보통" panose="020B0600000101010101" pitchFamily="50" charset="-127"/>
                           <a:cs typeface="+mn-cs"/>
                         </a:rPr>
-                        <a:t>125,967</a:t>
+                        <a:t>126,038</a:t>
                       </a:r>
                     </a:p>
                   </a:txBody>
@@ -13836,7 +13836,7 @@
                           <a:ea typeface="대명체 보통" panose="020B0600000101010101" pitchFamily="50" charset="-127"/>
                           <a:cs typeface="+mn-cs"/>
                         </a:rPr>
-                        <a:t>48,038</a:t>
+                        <a:t>47,930</a:t>
                       </a:r>
                     </a:p>
                   </a:txBody>
@@ -14237,7 +14237,7 @@
                           <a:ea typeface="대명체 보통" panose="020B0600000101010101" pitchFamily="50" charset="-127"/>
                           <a:cs typeface="+mn-cs"/>
                         </a:rPr>
-                        <a:t>7,773</a:t>
+                        <a:t>7,754</a:t>
                       </a:r>
                     </a:p>
                   </a:txBody>
@@ -14355,7 +14355,7 @@
                           <a:ea typeface="대명체 보통" panose="020B0600000101010101" pitchFamily="50" charset="-127"/>
                           <a:cs typeface="+mn-cs"/>
                         </a:rPr>
-                        <a:t>-1,838</a:t>
+                        <a:t>-1,856</a:t>
                       </a:r>
                       <a:endParaRPr lang="en-US" altLang="ko-KR" sz="700" b="0" i="0" u="none" strike="noStrike" kern="1200" dirty="0">
                         <a:solidFill>
@@ -14490,7 +14490,7 @@
                           <a:ea typeface="대명체 보통" panose="020B0600000101010101" pitchFamily="50" charset="-127"/>
                           <a:cs typeface="+mn-cs"/>
                         </a:rPr>
-                        <a:t>7,717</a:t>
+                        <a:t>7,752</a:t>
                       </a:r>
                     </a:p>
                   </a:txBody>
@@ -14608,7 +14608,7 @@
                           <a:ea typeface="대명체 보통" panose="020B0600000101010101" pitchFamily="50" charset="-127"/>
                           <a:cs typeface="+mn-cs"/>
                         </a:rPr>
-                        <a:t>56</a:t>
+                        <a:t>2</a:t>
                       </a:r>
                     </a:p>
                   </a:txBody>
@@ -14671,7 +14671,7 @@
                           <a:ea typeface="대명체 보통" panose="020B0600000101010101" pitchFamily="50" charset="-127"/>
                           <a:cs typeface="+mn-cs"/>
                         </a:rPr>
-                        <a:t>1%</a:t>
+                        <a:t>0%</a:t>
                       </a:r>
                     </a:p>
                   </a:txBody>
@@ -14900,7 +14900,7 @@
                           <a:ea typeface="대명체 보통" panose="020B0600000101010101" pitchFamily="50" charset="-127"/>
                           <a:cs typeface="+mn-cs"/>
                         </a:rPr>
-                        <a:t>99,529</a:t>
+                        <a:t>99,510</a:t>
                       </a:r>
                     </a:p>
                   </a:txBody>
@@ -15018,7 +15018,7 @@
                           <a:ea typeface="대명체 보통" panose="020B0600000101010101" pitchFamily="50" charset="-127"/>
                           <a:cs typeface="+mn-cs"/>
                         </a:rPr>
-                        <a:t>9,545</a:t>
+                        <a:t>9,526</a:t>
                       </a:r>
                     </a:p>
                   </a:txBody>
@@ -15144,7 +15144,7 @@
                           <a:ea typeface="대명체 보통" panose="020B0600000101010101" pitchFamily="50" charset="-127"/>
                           <a:cs typeface="+mn-cs"/>
                         </a:rPr>
-                        <a:t>72,580</a:t>
+                        <a:t>72,616</a:t>
                       </a:r>
                     </a:p>
                   </a:txBody>
@@ -15262,7 +15262,7 @@
                           <a:ea typeface="대명체 보통" panose="020B0600000101010101" pitchFamily="50" charset="-127"/>
                           <a:cs typeface="+mn-cs"/>
                         </a:rPr>
-                        <a:t>26,948</a:t>
+                        <a:t>26,894</a:t>
                       </a:r>
                     </a:p>
                   </a:txBody>
@@ -15643,7 +15643,7 @@
                           <a:ea typeface="대명체 보통" panose="020B0600000101010101" pitchFamily="50" charset="-127"/>
                           <a:cs typeface="+mn-cs"/>
                         </a:rPr>
-                        <a:t>6,676</a:t>
+                        <a:t>6,659</a:t>
                       </a:r>
                     </a:p>
                   </a:txBody>
@@ -15753,7 +15753,7 @@
                           <a:ea typeface="대명체 보통" panose="020B0600000101010101" pitchFamily="50" charset="-127"/>
                           <a:cs typeface="+mn-cs"/>
                         </a:rPr>
-                        <a:t>817</a:t>
+                        <a:t>801</a:t>
                       </a:r>
                       <a:endParaRPr lang="en-US" altLang="ko-KR" sz="700" b="0" i="0" u="none" strike="noStrike" kern="1200" dirty="0">
                         <a:solidFill>
@@ -15880,7 +15880,7 @@
                           <a:ea typeface="대명체 보통" panose="020B0600000101010101" pitchFamily="50" charset="-127"/>
                           <a:cs typeface="+mn-cs"/>
                         </a:rPr>
-                        <a:t>4,341</a:t>
+                        <a:t>4,377</a:t>
                       </a:r>
                     </a:p>
                   </a:txBody>
@@ -15990,7 +15990,7 @@
                           <a:ea typeface="대명체 보통" panose="020B0600000101010101" pitchFamily="50" charset="-127"/>
                           <a:cs typeface="+mn-cs"/>
                         </a:rPr>
-                        <a:t>2,335</a:t>
+                        <a:t>2,283</a:t>
                       </a:r>
                     </a:p>
                   </a:txBody>
@@ -16049,7 +16049,7 @@
                           <a:ea typeface="대명체 보통" panose="020B0600000101010101" pitchFamily="50" charset="-127"/>
                           <a:cs typeface="+mn-cs"/>
                         </a:rPr>
-                        <a:t>54%</a:t>
+                        <a:t>52%</a:t>
                       </a:r>
                     </a:p>
                   </a:txBody>
@@ -16266,7 +16266,7 @@
                           <a:ea typeface="대명체 보통" panose="020B0600000101010101" pitchFamily="50" charset="-127"/>
                           <a:cs typeface="+mn-cs"/>
                         </a:rPr>
-                        <a:t>67,937</a:t>
+                        <a:t>67,921</a:t>
                       </a:r>
                     </a:p>
                   </a:txBody>
@@ -16376,7 +16376,7 @@
                           <a:ea typeface="대명체 보통" panose="020B0600000101010101" pitchFamily="50" charset="-127"/>
                           <a:cs typeface="+mn-cs"/>
                         </a:rPr>
-                        <a:t>7,294</a:t>
+                        <a:t>7,278</a:t>
                       </a:r>
                     </a:p>
                   </a:txBody>
@@ -16494,7 +16494,7 @@
                           <a:ea typeface="대명체 보통" panose="020B0600000101010101" pitchFamily="50" charset="-127"/>
                           <a:cs typeface="+mn-cs"/>
                         </a:rPr>
-                        <a:t>49,282</a:t>
+                        <a:t>49,317</a:t>
                       </a:r>
                     </a:p>
                   </a:txBody>
@@ -16604,7 +16604,7 @@
                           <a:ea typeface="대명체 보통" panose="020B0600000101010101" pitchFamily="50" charset="-127"/>
                           <a:cs typeface="+mn-cs"/>
                         </a:rPr>
-                        <a:t>18,655</a:t>
+                        <a:t>18,603</a:t>
                       </a:r>
                     </a:p>
                   </a:txBody>
@@ -16999,7 +16999,7 @@
                           <a:ea typeface="대명체 보통" panose="020B0600000101010101" pitchFamily="50" charset="-127"/>
                           <a:cs typeface="+mn-cs"/>
                         </a:rPr>
-                        <a:t>758</a:t>
+                        <a:t>756</a:t>
                       </a:r>
                       <a:endParaRPr lang="en-US" altLang="ko-KR" sz="700" b="0" i="0" u="none" strike="noStrike" kern="1200" dirty="0">
                         <a:solidFill>
@@ -17126,7 +17126,7 @@
                           <a:ea typeface="대명체 보통" panose="020B0600000101010101" pitchFamily="50" charset="-127"/>
                           <a:cs typeface="+mn-cs"/>
                         </a:rPr>
-                        <a:t>239</a:t>
+                        <a:t>236</a:t>
                       </a:r>
                       <a:endParaRPr lang="en-US" altLang="ko-KR" sz="700" b="0" i="0" u="none" strike="noStrike" kern="1200" dirty="0">
                         <a:solidFill>
@@ -17198,7 +17198,7 @@
                           <a:ea typeface="대명체 보통" panose="020B0600000101010101" pitchFamily="50" charset="-127"/>
                           <a:cs typeface="+mn-cs"/>
                         </a:rPr>
-                        <a:t>146%</a:t>
+                        <a:t>145%</a:t>
                       </a:r>
                     </a:p>
                   </a:txBody>
@@ -17388,7 +17388,7 @@
                           <a:ea typeface="대명체 보통" panose="020B0600000101010101" pitchFamily="50" charset="-127"/>
                           <a:cs typeface="+mn-cs"/>
                         </a:rPr>
-                        <a:t>246</a:t>
+                        <a:t>244</a:t>
                       </a:r>
                     </a:p>
                   </a:txBody>
@@ -17680,7 +17680,7 @@
                           <a:ea typeface="대명체 보통" panose="020B0600000101010101" pitchFamily="50" charset="-127"/>
                           <a:cs typeface="+mn-cs"/>
                         </a:rPr>
-                        <a:t>6,539</a:t>
+                        <a:t>6,537</a:t>
                       </a:r>
                     </a:p>
                   </a:txBody>
@@ -17798,7 +17798,7 @@
                           <a:ea typeface="대명체 보통" panose="020B0600000101010101" pitchFamily="50" charset="-127"/>
                           <a:cs typeface="+mn-cs"/>
                         </a:rPr>
-                        <a:t>2,150</a:t>
+                        <a:t>2,148</a:t>
                       </a:r>
                       <a:endParaRPr lang="en-US" altLang="ko-KR" sz="700" b="0" i="0" u="none" strike="noStrike" kern="1200" dirty="0">
                         <a:solidFill>
@@ -18051,7 +18051,7 @@
                           <a:ea typeface="대명체 보통" panose="020B0600000101010101" pitchFamily="50" charset="-127"/>
                           <a:cs typeface="+mn-cs"/>
                         </a:rPr>
-                        <a:t>2,434</a:t>
+                        <a:t>2,432</a:t>
                       </a:r>
                     </a:p>
                   </a:txBody>

--- a/docs/data/세일즈마케팅_예상매출현황.pptx
+++ b/docs/data/세일즈마케팅_예상매출현황.pptx
@@ -12756,7 +12756,7 @@
                           <a:ea typeface="대명체 보통" panose="020B0600000101010101" pitchFamily="50" charset="-127"/>
                           <a:cs typeface="+mn-cs"/>
                         </a:rPr>
-                        <a:t>15,169</a:t>
+                        <a:t>15,163</a:t>
                       </a:r>
                     </a:p>
                   </a:txBody>
@@ -12882,7 +12882,7 @@
                           <a:ea typeface="대명체 보통" panose="020B0600000101010101" pitchFamily="50" charset="-127"/>
                           <a:cs typeface="+mn-cs"/>
                         </a:rPr>
-                        <a:t>-819</a:t>
+                        <a:t>-825</a:t>
                       </a:r>
                     </a:p>
                   </a:txBody>
@@ -13142,7 +13142,7 @@
                           <a:ea typeface="대명체 보통" panose="020B0600000101010101" pitchFamily="50" charset="-127"/>
                           <a:cs typeface="+mn-cs"/>
                         </a:rPr>
-                        <a:t>2,529</a:t>
+                        <a:t>2,523</a:t>
                       </a:r>
                     </a:p>
                   </a:txBody>
@@ -13450,7 +13450,7 @@
                           <a:ea typeface="대명체 보통" panose="020B0600000101010101" pitchFamily="50" charset="-127"/>
                           <a:cs typeface="+mn-cs"/>
                         </a:rPr>
-                        <a:t>173,968</a:t>
+                        <a:t>173,962</a:t>
                       </a:r>
                     </a:p>
                   </a:txBody>
@@ -13576,7 +13576,7 @@
                           <a:ea typeface="대명체 보통" panose="020B0600000101010101" pitchFamily="50" charset="-127"/>
                           <a:cs typeface="+mn-cs"/>
                         </a:rPr>
-                        <a:t>18,952</a:t>
+                        <a:t>18,946</a:t>
                       </a:r>
                     </a:p>
                   </a:txBody>
@@ -13836,7 +13836,7 @@
                           <a:ea typeface="대명체 보통" panose="020B0600000101010101" pitchFamily="50" charset="-127"/>
                           <a:cs typeface="+mn-cs"/>
                         </a:rPr>
-                        <a:t>47,930</a:t>
+                        <a:t>47,924</a:t>
                       </a:r>
                     </a:p>
                   </a:txBody>
@@ -14237,7 +14237,7 @@
                           <a:ea typeface="대명체 보통" panose="020B0600000101010101" pitchFamily="50" charset="-127"/>
                           <a:cs typeface="+mn-cs"/>
                         </a:rPr>
-                        <a:t>7,754</a:t>
+                        <a:t>7,747</a:t>
                       </a:r>
                     </a:p>
                   </a:txBody>
@@ -14355,7 +14355,7 @@
                           <a:ea typeface="대명체 보통" panose="020B0600000101010101" pitchFamily="50" charset="-127"/>
                           <a:cs typeface="+mn-cs"/>
                         </a:rPr>
-                        <a:t>-1,856</a:t>
+                        <a:t>-1,863</a:t>
                       </a:r>
                       <a:endParaRPr lang="en-US" altLang="ko-KR" sz="700" b="0" i="0" u="none" strike="noStrike" kern="1200" dirty="0">
                         <a:solidFill>
@@ -14601,14 +14601,14 @@
                       <a:r>
                         <a:rPr lang="en-US" altLang="ko-KR" sz="700" b="0" i="0" u="none" strike="noStrike" kern="1200">
                           <a:solidFill>
-                            <a:srgbClr val="000000"/>
+                            <a:srgbClr val="FF0000"/>
                           </a:solidFill>
                           <a:effectLst/>
                           <a:latin typeface="대명체 보통" panose="020B0600000101010101" pitchFamily="50" charset="-127"/>
                           <a:ea typeface="대명체 보통" panose="020B0600000101010101" pitchFamily="50" charset="-127"/>
                           <a:cs typeface="+mn-cs"/>
                         </a:rPr>
-                        <a:t>2</a:t>
+                        <a:t>-5</a:t>
                       </a:r>
                     </a:p>
                   </a:txBody>
@@ -14900,7 +14900,7 @@
                           <a:ea typeface="대명체 보통" panose="020B0600000101010101" pitchFamily="50" charset="-127"/>
                           <a:cs typeface="+mn-cs"/>
                         </a:rPr>
-                        <a:t>99,510</a:t>
+                        <a:t>99,503</a:t>
                       </a:r>
                     </a:p>
                   </a:txBody>
@@ -15018,7 +15018,7 @@
                           <a:ea typeface="대명체 보통" panose="020B0600000101010101" pitchFamily="50" charset="-127"/>
                           <a:cs typeface="+mn-cs"/>
                         </a:rPr>
-                        <a:t>9,526</a:t>
+                        <a:t>9,519</a:t>
                       </a:r>
                     </a:p>
                   </a:txBody>
@@ -15262,7 +15262,7 @@
                           <a:ea typeface="대명체 보통" panose="020B0600000101010101" pitchFamily="50" charset="-127"/>
                           <a:cs typeface="+mn-cs"/>
                         </a:rPr>
-                        <a:t>26,894</a:t>
+                        <a:t>26,887</a:t>
                       </a:r>
                     </a:p>
                   </a:txBody>
@@ -16999,7 +16999,7 @@
                           <a:ea typeface="대명체 보통" panose="020B0600000101010101" pitchFamily="50" charset="-127"/>
                           <a:cs typeface="+mn-cs"/>
                         </a:rPr>
-                        <a:t>756</a:t>
+                        <a:t>757</a:t>
                       </a:r>
                       <a:endParaRPr lang="en-US" altLang="ko-KR" sz="700" b="0" i="0" u="none" strike="noStrike" kern="1200" dirty="0">
                         <a:solidFill>
@@ -17126,7 +17126,7 @@
                           <a:ea typeface="대명체 보통" panose="020B0600000101010101" pitchFamily="50" charset="-127"/>
                           <a:cs typeface="+mn-cs"/>
                         </a:rPr>
-                        <a:t>236</a:t>
+                        <a:t>237</a:t>
                       </a:r>
                       <a:endParaRPr lang="en-US" altLang="ko-KR" sz="700" b="0" i="0" u="none" strike="noStrike" kern="1200" dirty="0">
                         <a:solidFill>
@@ -17198,7 +17198,7 @@
                           <a:ea typeface="대명체 보통" panose="020B0600000101010101" pitchFamily="50" charset="-127"/>
                           <a:cs typeface="+mn-cs"/>
                         </a:rPr>
-                        <a:t>145%</a:t>
+                        <a:t>146%</a:t>
                       </a:r>
                     </a:p>
                   </a:txBody>
@@ -17388,7 +17388,7 @@
                           <a:ea typeface="대명체 보통" panose="020B0600000101010101" pitchFamily="50" charset="-127"/>
                           <a:cs typeface="+mn-cs"/>
                         </a:rPr>
-                        <a:t>244</a:t>
+                        <a:t>245</a:t>
                       </a:r>
                     </a:p>
                   </a:txBody>
@@ -17680,7 +17680,7 @@
                           <a:ea typeface="대명체 보통" panose="020B0600000101010101" pitchFamily="50" charset="-127"/>
                           <a:cs typeface="+mn-cs"/>
                         </a:rPr>
-                        <a:t>6,537</a:t>
+                        <a:t>6,538</a:t>
                       </a:r>
                     </a:p>
                   </a:txBody>
@@ -17798,7 +17798,7 @@
                           <a:ea typeface="대명체 보통" panose="020B0600000101010101" pitchFamily="50" charset="-127"/>
                           <a:cs typeface="+mn-cs"/>
                         </a:rPr>
-                        <a:t>2,148</a:t>
+                        <a:t>2,149</a:t>
                       </a:r>
                       <a:endParaRPr lang="en-US" altLang="ko-KR" sz="700" b="0" i="0" u="none" strike="noStrike" kern="1200" dirty="0">
                         <a:solidFill>
@@ -18051,7 +18051,7 @@
                           <a:ea typeface="대명체 보통" panose="020B0600000101010101" pitchFamily="50" charset="-127"/>
                           <a:cs typeface="+mn-cs"/>
                         </a:rPr>
-                        <a:t>2,432</a:t>
+                        <a:t>2,433</a:t>
                       </a:r>
                     </a:p>
                   </a:txBody>

--- a/docs/data/세일즈마케팅_예상매출현황.pptx
+++ b/docs/data/세일즈마케팅_예상매출현황.pptx
@@ -12756,7 +12756,7 @@
                           <a:ea typeface="대명체 보통" panose="020B0600000101010101" pitchFamily="50" charset="-127"/>
                           <a:cs typeface="+mn-cs"/>
                         </a:rPr>
-                        <a:t>15,163</a:t>
+                        <a:t>15,111</a:t>
                       </a:r>
                     </a:p>
                   </a:txBody>
@@ -12882,7 +12882,7 @@
                           <a:ea typeface="대명체 보통" panose="020B0600000101010101" pitchFamily="50" charset="-127"/>
                           <a:cs typeface="+mn-cs"/>
                         </a:rPr>
-                        <a:t>-825</a:t>
+                        <a:t>-877</a:t>
                       </a:r>
                     </a:p>
                   </a:txBody>
@@ -13016,7 +13016,7 @@
                           <a:ea typeface="대명체 보통" panose="020B0600000101010101" pitchFamily="50" charset="-127"/>
                           <a:cs typeface="+mn-cs"/>
                         </a:rPr>
-                        <a:t>12,641</a:t>
+                        <a:t>12,710</a:t>
                       </a:r>
                     </a:p>
                   </a:txBody>
@@ -13142,7 +13142,7 @@
                           <a:ea typeface="대명체 보통" panose="020B0600000101010101" pitchFamily="50" charset="-127"/>
                           <a:cs typeface="+mn-cs"/>
                         </a:rPr>
-                        <a:t>2,523</a:t>
+                        <a:t>2,401</a:t>
                       </a:r>
                     </a:p>
                   </a:txBody>
@@ -13209,7 +13209,7 @@
                           <a:ea typeface="대명체 보통" panose="020B0600000101010101" pitchFamily="50" charset="-127"/>
                           <a:cs typeface="+mn-cs"/>
                         </a:rPr>
-                        <a:t>20%</a:t>
+                        <a:t>19%</a:t>
                       </a:r>
                     </a:p>
                   </a:txBody>
@@ -13450,7 +13450,7 @@
                           <a:ea typeface="대명체 보통" panose="020B0600000101010101" pitchFamily="50" charset="-127"/>
                           <a:cs typeface="+mn-cs"/>
                         </a:rPr>
-                        <a:t>173,962</a:t>
+                        <a:t>173,910</a:t>
                       </a:r>
                     </a:p>
                   </a:txBody>
@@ -13576,7 +13576,7 @@
                           <a:ea typeface="대명체 보통" panose="020B0600000101010101" pitchFamily="50" charset="-127"/>
                           <a:cs typeface="+mn-cs"/>
                         </a:rPr>
-                        <a:t>18,946</a:t>
+                        <a:t>18,894</a:t>
                       </a:r>
                     </a:p>
                   </a:txBody>
@@ -13710,7 +13710,7 @@
                           <a:ea typeface="대명체 보통" panose="020B0600000101010101" pitchFamily="50" charset="-127"/>
                           <a:cs typeface="+mn-cs"/>
                         </a:rPr>
-                        <a:t>126,038</a:t>
+                        <a:t>126,107</a:t>
                       </a:r>
                     </a:p>
                   </a:txBody>
@@ -13836,7 +13836,7 @@
                           <a:ea typeface="대명체 보통" panose="020B0600000101010101" pitchFamily="50" charset="-127"/>
                           <a:cs typeface="+mn-cs"/>
                         </a:rPr>
-                        <a:t>47,924</a:t>
+                        <a:t>47,803</a:t>
                       </a:r>
                     </a:p>
                   </a:txBody>
@@ -14237,7 +14237,7 @@
                           <a:ea typeface="대명체 보통" panose="020B0600000101010101" pitchFamily="50" charset="-127"/>
                           <a:cs typeface="+mn-cs"/>
                         </a:rPr>
-                        <a:t>7,747</a:t>
+                        <a:t>7,717</a:t>
                       </a:r>
                     </a:p>
                   </a:txBody>
@@ -14355,7 +14355,7 @@
                           <a:ea typeface="대명체 보통" panose="020B0600000101010101" pitchFamily="50" charset="-127"/>
                           <a:cs typeface="+mn-cs"/>
                         </a:rPr>
-                        <a:t>-1,863</a:t>
+                        <a:t>-1,893</a:t>
                       </a:r>
                       <a:endParaRPr lang="en-US" altLang="ko-KR" sz="700" b="0" i="0" u="none" strike="noStrike" kern="1200" dirty="0">
                         <a:solidFill>
@@ -14427,7 +14427,7 @@
                           <a:ea typeface="대명체 보통" panose="020B0600000101010101" pitchFamily="50" charset="-127"/>
                           <a:cs typeface="+mn-cs"/>
                         </a:rPr>
-                        <a:t>81%</a:t>
+                        <a:t>80%</a:t>
                       </a:r>
                     </a:p>
                   </a:txBody>
@@ -14490,7 +14490,7 @@
                           <a:ea typeface="대명체 보통" panose="020B0600000101010101" pitchFamily="50" charset="-127"/>
                           <a:cs typeface="+mn-cs"/>
                         </a:rPr>
-                        <a:t>7,752</a:t>
+                        <a:t>7,790</a:t>
                       </a:r>
                     </a:p>
                   </a:txBody>
@@ -14608,7 +14608,7 @@
                           <a:ea typeface="대명체 보통" panose="020B0600000101010101" pitchFamily="50" charset="-127"/>
                           <a:cs typeface="+mn-cs"/>
                         </a:rPr>
-                        <a:t>-5</a:t>
+                        <a:t>-73</a:t>
                       </a:r>
                     </a:p>
                   </a:txBody>
@@ -14664,14 +14664,14 @@
                       <a:r>
                         <a:rPr lang="en-US" altLang="ko-KR" sz="700" b="0" i="0" u="none" strike="noStrike" kern="1200">
                           <a:solidFill>
-                            <a:srgbClr val="000000"/>
+                            <a:srgbClr val="FF0000"/>
                           </a:solidFill>
                           <a:effectLst/>
                           <a:latin typeface="대명체 보통" panose="020B0600000101010101" pitchFamily="50" charset="-127"/>
                           <a:ea typeface="대명체 보통" panose="020B0600000101010101" pitchFamily="50" charset="-127"/>
                           <a:cs typeface="+mn-cs"/>
                         </a:rPr>
-                        <a:t>0%</a:t>
+                        <a:t>-1%</a:t>
                       </a:r>
                     </a:p>
                   </a:txBody>
@@ -14900,7 +14900,7 @@
                           <a:ea typeface="대명체 보통" panose="020B0600000101010101" pitchFamily="50" charset="-127"/>
                           <a:cs typeface="+mn-cs"/>
                         </a:rPr>
-                        <a:t>99,503</a:t>
+                        <a:t>99,473</a:t>
                       </a:r>
                     </a:p>
                   </a:txBody>
@@ -15018,7 +15018,7 @@
                           <a:ea typeface="대명체 보통" panose="020B0600000101010101" pitchFamily="50" charset="-127"/>
                           <a:cs typeface="+mn-cs"/>
                         </a:rPr>
-                        <a:t>9,519</a:t>
+                        <a:t>9,489</a:t>
                       </a:r>
                     </a:p>
                   </a:txBody>
@@ -15144,7 +15144,7 @@
                           <a:ea typeface="대명체 보통" panose="020B0600000101010101" pitchFamily="50" charset="-127"/>
                           <a:cs typeface="+mn-cs"/>
                         </a:rPr>
-                        <a:t>72,616</a:t>
+                        <a:t>72,653</a:t>
                       </a:r>
                     </a:p>
                   </a:txBody>
@@ -15262,7 +15262,7 @@
                           <a:ea typeface="대명체 보통" panose="020B0600000101010101" pitchFamily="50" charset="-127"/>
                           <a:cs typeface="+mn-cs"/>
                         </a:rPr>
-                        <a:t>26,887</a:t>
+                        <a:t>26,820</a:t>
                       </a:r>
                     </a:p>
                   </a:txBody>
@@ -15643,7 +15643,7 @@
                           <a:ea typeface="대명체 보통" panose="020B0600000101010101" pitchFamily="50" charset="-127"/>
                           <a:cs typeface="+mn-cs"/>
                         </a:rPr>
-                        <a:t>6,659</a:t>
+                        <a:t>6,641</a:t>
                       </a:r>
                     </a:p>
                   </a:txBody>
@@ -15753,7 +15753,7 @@
                           <a:ea typeface="대명체 보통" panose="020B0600000101010101" pitchFamily="50" charset="-127"/>
                           <a:cs typeface="+mn-cs"/>
                         </a:rPr>
-                        <a:t>801</a:t>
+                        <a:t>783</a:t>
                       </a:r>
                       <a:endParaRPr lang="en-US" altLang="ko-KR" sz="700" b="0" i="0" u="none" strike="noStrike" kern="1200" dirty="0">
                         <a:solidFill>
@@ -15821,7 +15821,7 @@
                           <a:ea typeface="대명체 보통" panose="020B0600000101010101" pitchFamily="50" charset="-127"/>
                           <a:cs typeface="+mn-cs"/>
                         </a:rPr>
-                        <a:t>114%</a:t>
+                        <a:t>113%</a:t>
                       </a:r>
                     </a:p>
                   </a:txBody>
@@ -15880,7 +15880,7 @@
                           <a:ea typeface="대명체 보통" panose="020B0600000101010101" pitchFamily="50" charset="-127"/>
                           <a:cs typeface="+mn-cs"/>
                         </a:rPr>
-                        <a:t>4,377</a:t>
+                        <a:t>4,408</a:t>
                       </a:r>
                     </a:p>
                   </a:txBody>
@@ -15990,7 +15990,7 @@
                           <a:ea typeface="대명체 보통" panose="020B0600000101010101" pitchFamily="50" charset="-127"/>
                           <a:cs typeface="+mn-cs"/>
                         </a:rPr>
-                        <a:t>2,283</a:t>
+                        <a:t>2,233</a:t>
                       </a:r>
                     </a:p>
                   </a:txBody>
@@ -16049,7 +16049,7 @@
                           <a:ea typeface="대명체 보통" panose="020B0600000101010101" pitchFamily="50" charset="-127"/>
                           <a:cs typeface="+mn-cs"/>
                         </a:rPr>
-                        <a:t>52%</a:t>
+                        <a:t>51%</a:t>
                       </a:r>
                     </a:p>
                   </a:txBody>
@@ -16266,7 +16266,7 @@
                           <a:ea typeface="대명체 보통" panose="020B0600000101010101" pitchFamily="50" charset="-127"/>
                           <a:cs typeface="+mn-cs"/>
                         </a:rPr>
-                        <a:t>67,921</a:t>
+                        <a:t>67,903</a:t>
                       </a:r>
                     </a:p>
                   </a:txBody>
@@ -16376,7 +16376,7 @@
                           <a:ea typeface="대명체 보통" panose="020B0600000101010101" pitchFamily="50" charset="-127"/>
                           <a:cs typeface="+mn-cs"/>
                         </a:rPr>
-                        <a:t>7,278</a:t>
+                        <a:t>7,260</a:t>
                       </a:r>
                     </a:p>
                   </a:txBody>
@@ -16494,7 +16494,7 @@
                           <a:ea typeface="대명체 보통" panose="020B0600000101010101" pitchFamily="50" charset="-127"/>
                           <a:cs typeface="+mn-cs"/>
                         </a:rPr>
-                        <a:t>49,317</a:t>
+                        <a:t>49,349</a:t>
                       </a:r>
                     </a:p>
                   </a:txBody>
@@ -16604,7 +16604,7 @@
                           <a:ea typeface="대명체 보통" panose="020B0600000101010101" pitchFamily="50" charset="-127"/>
                           <a:cs typeface="+mn-cs"/>
                         </a:rPr>
-                        <a:t>18,603</a:t>
+                        <a:t>18,554</a:t>
                       </a:r>
                     </a:p>
                   </a:txBody>
@@ -16999,7 +16999,7 @@
                           <a:ea typeface="대명체 보통" panose="020B0600000101010101" pitchFamily="50" charset="-127"/>
                           <a:cs typeface="+mn-cs"/>
                         </a:rPr>
-                        <a:t>757</a:t>
+                        <a:t>753</a:t>
                       </a:r>
                       <a:endParaRPr lang="en-US" altLang="ko-KR" sz="700" b="0" i="0" u="none" strike="noStrike" kern="1200" dirty="0">
                         <a:solidFill>
@@ -17126,7 +17126,7 @@
                           <a:ea typeface="대명체 보통" panose="020B0600000101010101" pitchFamily="50" charset="-127"/>
                           <a:cs typeface="+mn-cs"/>
                         </a:rPr>
-                        <a:t>237</a:t>
+                        <a:t>234</a:t>
                       </a:r>
                       <a:endParaRPr lang="en-US" altLang="ko-KR" sz="700" b="0" i="0" u="none" strike="noStrike" kern="1200" dirty="0">
                         <a:solidFill>
@@ -17198,7 +17198,7 @@
                           <a:ea typeface="대명체 보통" panose="020B0600000101010101" pitchFamily="50" charset="-127"/>
                           <a:cs typeface="+mn-cs"/>
                         </a:rPr>
-                        <a:t>146%</a:t>
+                        <a:t>145%</a:t>
                       </a:r>
                     </a:p>
                   </a:txBody>
@@ -17388,7 +17388,7 @@
                           <a:ea typeface="대명체 보통" panose="020B0600000101010101" pitchFamily="50" charset="-127"/>
                           <a:cs typeface="+mn-cs"/>
                         </a:rPr>
-                        <a:t>245</a:t>
+                        <a:t>241</a:t>
                       </a:r>
                     </a:p>
                   </a:txBody>
@@ -17451,7 +17451,7 @@
                           <a:ea typeface="대명체 보통" panose="020B0600000101010101" pitchFamily="50" charset="-127"/>
                           <a:cs typeface="+mn-cs"/>
                         </a:rPr>
-                        <a:t>48%</a:t>
+                        <a:t>47%</a:t>
                       </a:r>
                     </a:p>
                   </a:txBody>
@@ -17680,7 +17680,7 @@
                           <a:ea typeface="대명체 보통" panose="020B0600000101010101" pitchFamily="50" charset="-127"/>
                           <a:cs typeface="+mn-cs"/>
                         </a:rPr>
-                        <a:t>6,538</a:t>
+                        <a:t>6,534</a:t>
                       </a:r>
                     </a:p>
                   </a:txBody>
@@ -17798,7 +17798,7 @@
                           <a:ea typeface="대명체 보통" panose="020B0600000101010101" pitchFamily="50" charset="-127"/>
                           <a:cs typeface="+mn-cs"/>
                         </a:rPr>
-                        <a:t>2,149</a:t>
+                        <a:t>2,145</a:t>
                       </a:r>
                       <a:endParaRPr lang="en-US" altLang="ko-KR" sz="700" b="0" i="0" u="none" strike="noStrike" kern="1200" dirty="0">
                         <a:solidFill>
@@ -18051,7 +18051,7 @@
                           <a:ea typeface="대명체 보통" panose="020B0600000101010101" pitchFamily="50" charset="-127"/>
                           <a:cs typeface="+mn-cs"/>
                         </a:rPr>
-                        <a:t>2,433</a:t>
+                        <a:t>2,429</a:t>
                       </a:r>
                     </a:p>
                   </a:txBody>

--- a/docs/data/세일즈마케팅_예상매출현황.pptx
+++ b/docs/data/세일즈마케팅_예상매출현황.pptx
@@ -12756,7 +12756,7 @@
                           <a:ea typeface="대명체 보통" panose="020B0600000101010101" pitchFamily="50" charset="-127"/>
                           <a:cs typeface="+mn-cs"/>
                         </a:rPr>
-                        <a:t>15,111</a:t>
+                        <a:t>15,075</a:t>
                       </a:r>
                     </a:p>
                   </a:txBody>
@@ -12882,7 +12882,7 @@
                           <a:ea typeface="대명체 보통" panose="020B0600000101010101" pitchFamily="50" charset="-127"/>
                           <a:cs typeface="+mn-cs"/>
                         </a:rPr>
-                        <a:t>-877</a:t>
+                        <a:t>-914</a:t>
                       </a:r>
                     </a:p>
                   </a:txBody>
@@ -12949,7 +12949,7 @@
                           <a:ea typeface="대명체 보통" panose="020B0600000101010101" pitchFamily="50" charset="-127"/>
                           <a:cs typeface="+mn-cs"/>
                         </a:rPr>
-                        <a:t>95%</a:t>
+                        <a:t>94%</a:t>
                       </a:r>
                     </a:p>
                   </a:txBody>
@@ -13016,7 +13016,7 @@
                           <a:ea typeface="대명체 보통" panose="020B0600000101010101" pitchFamily="50" charset="-127"/>
                           <a:cs typeface="+mn-cs"/>
                         </a:rPr>
-                        <a:t>12,710</a:t>
+                        <a:t>12,772</a:t>
                       </a:r>
                     </a:p>
                   </a:txBody>
@@ -13142,7 +13142,7 @@
                           <a:ea typeface="대명체 보통" panose="020B0600000101010101" pitchFamily="50" charset="-127"/>
                           <a:cs typeface="+mn-cs"/>
                         </a:rPr>
-                        <a:t>2,401</a:t>
+                        <a:t>2,303</a:t>
                       </a:r>
                     </a:p>
                   </a:txBody>
@@ -13209,7 +13209,7 @@
                           <a:ea typeface="대명체 보통" panose="020B0600000101010101" pitchFamily="50" charset="-127"/>
                           <a:cs typeface="+mn-cs"/>
                         </a:rPr>
-                        <a:t>19%</a:t>
+                        <a:t>18%</a:t>
                       </a:r>
                     </a:p>
                   </a:txBody>
@@ -13450,7 +13450,7 @@
                           <a:ea typeface="대명체 보통" panose="020B0600000101010101" pitchFamily="50" charset="-127"/>
                           <a:cs typeface="+mn-cs"/>
                         </a:rPr>
-                        <a:t>173,910</a:t>
+                        <a:t>173,873</a:t>
                       </a:r>
                     </a:p>
                   </a:txBody>
@@ -13576,7 +13576,7 @@
                           <a:ea typeface="대명체 보통" panose="020B0600000101010101" pitchFamily="50" charset="-127"/>
                           <a:cs typeface="+mn-cs"/>
                         </a:rPr>
-                        <a:t>18,894</a:t>
+                        <a:t>18,857</a:t>
                       </a:r>
                     </a:p>
                   </a:txBody>
@@ -13710,7 +13710,7 @@
                           <a:ea typeface="대명체 보통" panose="020B0600000101010101" pitchFamily="50" charset="-127"/>
                           <a:cs typeface="+mn-cs"/>
                         </a:rPr>
-                        <a:t>126,107</a:t>
+                        <a:t>126,169</a:t>
                       </a:r>
                     </a:p>
                   </a:txBody>
@@ -13836,7 +13836,7 @@
                           <a:ea typeface="대명체 보통" panose="020B0600000101010101" pitchFamily="50" charset="-127"/>
                           <a:cs typeface="+mn-cs"/>
                         </a:rPr>
-                        <a:t>47,803</a:t>
+                        <a:t>47,705</a:t>
                       </a:r>
                     </a:p>
                   </a:txBody>
@@ -14237,7 +14237,7 @@
                           <a:ea typeface="대명체 보통" panose="020B0600000101010101" pitchFamily="50" charset="-127"/>
                           <a:cs typeface="+mn-cs"/>
                         </a:rPr>
-                        <a:t>7,717</a:t>
+                        <a:t>7,693</a:t>
                       </a:r>
                     </a:p>
                   </a:txBody>
@@ -14355,7 +14355,7 @@
                           <a:ea typeface="대명체 보통" panose="020B0600000101010101" pitchFamily="50" charset="-127"/>
                           <a:cs typeface="+mn-cs"/>
                         </a:rPr>
-                        <a:t>-1,893</a:t>
+                        <a:t>-1,917</a:t>
                       </a:r>
                       <a:endParaRPr lang="en-US" altLang="ko-KR" sz="700" b="0" i="0" u="none" strike="noStrike" kern="1200" dirty="0">
                         <a:solidFill>
@@ -14490,7 +14490,7 @@
                           <a:ea typeface="대명체 보통" panose="020B0600000101010101" pitchFamily="50" charset="-127"/>
                           <a:cs typeface="+mn-cs"/>
                         </a:rPr>
-                        <a:t>7,790</a:t>
+                        <a:t>7,823</a:t>
                       </a:r>
                     </a:p>
                   </a:txBody>
@@ -14608,7 +14608,7 @@
                           <a:ea typeface="대명체 보통" panose="020B0600000101010101" pitchFamily="50" charset="-127"/>
                           <a:cs typeface="+mn-cs"/>
                         </a:rPr>
-                        <a:t>-73</a:t>
+                        <a:t>-130</a:t>
                       </a:r>
                     </a:p>
                   </a:txBody>
@@ -14671,7 +14671,7 @@
                           <a:ea typeface="대명체 보통" panose="020B0600000101010101" pitchFamily="50" charset="-127"/>
                           <a:cs typeface="+mn-cs"/>
                         </a:rPr>
-                        <a:t>-1%</a:t>
+                        <a:t>-2%</a:t>
                       </a:r>
                     </a:p>
                   </a:txBody>
@@ -14900,7 +14900,7 @@
                           <a:ea typeface="대명체 보통" panose="020B0600000101010101" pitchFamily="50" charset="-127"/>
                           <a:cs typeface="+mn-cs"/>
                         </a:rPr>
-                        <a:t>99,473</a:t>
+                        <a:t>99,449</a:t>
                       </a:r>
                     </a:p>
                   </a:txBody>
@@ -15018,7 +15018,7 @@
                           <a:ea typeface="대명체 보통" panose="020B0600000101010101" pitchFamily="50" charset="-127"/>
                           <a:cs typeface="+mn-cs"/>
                         </a:rPr>
-                        <a:t>9,489</a:t>
+                        <a:t>9,465</a:t>
                       </a:r>
                     </a:p>
                   </a:txBody>
@@ -15144,7 +15144,7 @@
                           <a:ea typeface="대명체 보통" panose="020B0600000101010101" pitchFamily="50" charset="-127"/>
                           <a:cs typeface="+mn-cs"/>
                         </a:rPr>
-                        <a:t>72,653</a:t>
+                        <a:t>72,686</a:t>
                       </a:r>
                     </a:p>
                   </a:txBody>
@@ -15262,7 +15262,7 @@
                           <a:ea typeface="대명체 보통" panose="020B0600000101010101" pitchFamily="50" charset="-127"/>
                           <a:cs typeface="+mn-cs"/>
                         </a:rPr>
-                        <a:t>26,820</a:t>
+                        <a:t>26,763</a:t>
                       </a:r>
                     </a:p>
                   </a:txBody>
@@ -15643,7 +15643,7 @@
                           <a:ea typeface="대명체 보통" panose="020B0600000101010101" pitchFamily="50" charset="-127"/>
                           <a:cs typeface="+mn-cs"/>
                         </a:rPr>
-                        <a:t>6,641</a:t>
+                        <a:t>6,628</a:t>
                       </a:r>
                     </a:p>
                   </a:txBody>
@@ -15753,7 +15753,7 @@
                           <a:ea typeface="대명체 보통" panose="020B0600000101010101" pitchFamily="50" charset="-127"/>
                           <a:cs typeface="+mn-cs"/>
                         </a:rPr>
-                        <a:t>783</a:t>
+                        <a:t>770</a:t>
                       </a:r>
                       <a:endParaRPr lang="en-US" altLang="ko-KR" sz="700" b="0" i="0" u="none" strike="noStrike" kern="1200" dirty="0">
                         <a:solidFill>
@@ -15880,7 +15880,7 @@
                           <a:ea typeface="대명체 보통" panose="020B0600000101010101" pitchFamily="50" charset="-127"/>
                           <a:cs typeface="+mn-cs"/>
                         </a:rPr>
-                        <a:t>4,408</a:t>
+                        <a:t>4,436</a:t>
                       </a:r>
                     </a:p>
                   </a:txBody>
@@ -15990,7 +15990,7 @@
                           <a:ea typeface="대명체 보통" panose="020B0600000101010101" pitchFamily="50" charset="-127"/>
                           <a:cs typeface="+mn-cs"/>
                         </a:rPr>
-                        <a:t>2,233</a:t>
+                        <a:t>2,192</a:t>
                       </a:r>
                     </a:p>
                   </a:txBody>
@@ -16049,7 +16049,7 @@
                           <a:ea typeface="대명체 보통" panose="020B0600000101010101" pitchFamily="50" charset="-127"/>
                           <a:cs typeface="+mn-cs"/>
                         </a:rPr>
-                        <a:t>51%</a:t>
+                        <a:t>49%</a:t>
                       </a:r>
                     </a:p>
                   </a:txBody>
@@ -16266,7 +16266,7 @@
                           <a:ea typeface="대명체 보통" panose="020B0600000101010101" pitchFamily="50" charset="-127"/>
                           <a:cs typeface="+mn-cs"/>
                         </a:rPr>
-                        <a:t>67,903</a:t>
+                        <a:t>67,890</a:t>
                       </a:r>
                     </a:p>
                   </a:txBody>
@@ -16376,7 +16376,7 @@
                           <a:ea typeface="대명체 보통" panose="020B0600000101010101" pitchFamily="50" charset="-127"/>
                           <a:cs typeface="+mn-cs"/>
                         </a:rPr>
-                        <a:t>7,260</a:t>
+                        <a:t>7,247</a:t>
                       </a:r>
                     </a:p>
                   </a:txBody>
@@ -16494,7 +16494,7 @@
                           <a:ea typeface="대명체 보통" panose="020B0600000101010101" pitchFamily="50" charset="-127"/>
                           <a:cs typeface="+mn-cs"/>
                         </a:rPr>
-                        <a:t>49,349</a:t>
+                        <a:t>49,377</a:t>
                       </a:r>
                     </a:p>
                   </a:txBody>
@@ -16604,7 +16604,7 @@
                           <a:ea typeface="대명체 보통" panose="020B0600000101010101" pitchFamily="50" charset="-127"/>
                           <a:cs typeface="+mn-cs"/>
                         </a:rPr>
-                        <a:t>18,554</a:t>
+                        <a:t>18,512</a:t>
                       </a:r>
                     </a:p>
                   </a:txBody>
@@ -16663,7 +16663,7 @@
                           <a:ea typeface="대명체 보통" panose="020B0600000101010101" pitchFamily="50" charset="-127"/>
                           <a:cs typeface="+mn-cs"/>
                         </a:rPr>
-                        <a:t>38%</a:t>
+                        <a:t>37%</a:t>
                       </a:r>
                     </a:p>
                   </a:txBody>
@@ -16999,7 +16999,7 @@
                           <a:ea typeface="대명체 보통" panose="020B0600000101010101" pitchFamily="50" charset="-127"/>
                           <a:cs typeface="+mn-cs"/>
                         </a:rPr>
-                        <a:t>753</a:t>
+                        <a:t>754</a:t>
                       </a:r>
                       <a:endParaRPr lang="en-US" altLang="ko-KR" sz="700" b="0" i="0" u="none" strike="noStrike" kern="1200" dirty="0">
                         <a:solidFill>
@@ -17680,7 +17680,7 @@
                           <a:ea typeface="대명체 보통" panose="020B0600000101010101" pitchFamily="50" charset="-127"/>
                           <a:cs typeface="+mn-cs"/>
                         </a:rPr>
-                        <a:t>6,534</a:t>
+                        <a:t>6,535</a:t>
                       </a:r>
                     </a:p>
                   </a:txBody>
@@ -17798,7 +17798,7 @@
                           <a:ea typeface="대명체 보통" panose="020B0600000101010101" pitchFamily="50" charset="-127"/>
                           <a:cs typeface="+mn-cs"/>
                         </a:rPr>
-                        <a:t>2,145</a:t>
+                        <a:t>2,146</a:t>
                       </a:r>
                       <a:endParaRPr lang="en-US" altLang="ko-KR" sz="700" b="0" i="0" u="none" strike="noStrike" kern="1200" dirty="0">
                         <a:solidFill>

--- a/docs/data/세일즈마케팅_예상매출현황.pptx
+++ b/docs/data/세일즈마케팅_예상매출현황.pptx
@@ -12756,7 +12756,7 @@
                           <a:ea typeface="대명체 보통" panose="020B0600000101010101" pitchFamily="50" charset="-127"/>
                           <a:cs typeface="+mn-cs"/>
                         </a:rPr>
-                        <a:t>15,075</a:t>
+                        <a:t>15,050</a:t>
                       </a:r>
                     </a:p>
                   </a:txBody>
@@ -12882,7 +12882,7 @@
                           <a:ea typeface="대명체 보통" panose="020B0600000101010101" pitchFamily="50" charset="-127"/>
                           <a:cs typeface="+mn-cs"/>
                         </a:rPr>
-                        <a:t>-914</a:t>
+                        <a:t>-939</a:t>
                       </a:r>
                     </a:p>
                   </a:txBody>
@@ -13016,7 +13016,7 @@
                           <a:ea typeface="대명체 보통" panose="020B0600000101010101" pitchFamily="50" charset="-127"/>
                           <a:cs typeface="+mn-cs"/>
                         </a:rPr>
-                        <a:t>12,772</a:t>
+                        <a:t>12,818</a:t>
                       </a:r>
                     </a:p>
                   </a:txBody>
@@ -13142,7 +13142,7 @@
                           <a:ea typeface="대명체 보통" panose="020B0600000101010101" pitchFamily="50" charset="-127"/>
                           <a:cs typeface="+mn-cs"/>
                         </a:rPr>
-                        <a:t>2,303</a:t>
+                        <a:t>2,231</a:t>
                       </a:r>
                     </a:p>
                   </a:txBody>
@@ -13209,7 +13209,7 @@
                           <a:ea typeface="대명체 보통" panose="020B0600000101010101" pitchFamily="50" charset="-127"/>
                           <a:cs typeface="+mn-cs"/>
                         </a:rPr>
-                        <a:t>18%</a:t>
+                        <a:t>17%</a:t>
                       </a:r>
                     </a:p>
                   </a:txBody>
@@ -13450,7 +13450,7 @@
                           <a:ea typeface="대명체 보통" panose="020B0600000101010101" pitchFamily="50" charset="-127"/>
                           <a:cs typeface="+mn-cs"/>
                         </a:rPr>
-                        <a:t>173,873</a:t>
+                        <a:t>173,849</a:t>
                       </a:r>
                     </a:p>
                   </a:txBody>
@@ -13576,7 +13576,7 @@
                           <a:ea typeface="대명체 보통" panose="020B0600000101010101" pitchFamily="50" charset="-127"/>
                           <a:cs typeface="+mn-cs"/>
                         </a:rPr>
-                        <a:t>18,857</a:t>
+                        <a:t>18,832</a:t>
                       </a:r>
                     </a:p>
                   </a:txBody>
@@ -13710,7 +13710,7 @@
                           <a:ea typeface="대명체 보통" panose="020B0600000101010101" pitchFamily="50" charset="-127"/>
                           <a:cs typeface="+mn-cs"/>
                         </a:rPr>
-                        <a:t>126,169</a:t>
+                        <a:t>126,216</a:t>
                       </a:r>
                     </a:p>
                   </a:txBody>
@@ -13836,7 +13836,7 @@
                           <a:ea typeface="대명체 보통" panose="020B0600000101010101" pitchFamily="50" charset="-127"/>
                           <a:cs typeface="+mn-cs"/>
                         </a:rPr>
-                        <a:t>47,705</a:t>
+                        <a:t>47,633</a:t>
                       </a:r>
                     </a:p>
                   </a:txBody>
@@ -14237,7 +14237,7 @@
                           <a:ea typeface="대명체 보통" panose="020B0600000101010101" pitchFamily="50" charset="-127"/>
                           <a:cs typeface="+mn-cs"/>
                         </a:rPr>
-                        <a:t>7,693</a:t>
+                        <a:t>7,673</a:t>
                       </a:r>
                     </a:p>
                   </a:txBody>
@@ -14355,7 +14355,7 @@
                           <a:ea typeface="대명체 보통" panose="020B0600000101010101" pitchFamily="50" charset="-127"/>
                           <a:cs typeface="+mn-cs"/>
                         </a:rPr>
-                        <a:t>-1,917</a:t>
+                        <a:t>-1,937</a:t>
                       </a:r>
                       <a:endParaRPr lang="en-US" altLang="ko-KR" sz="700" b="0" i="0" u="none" strike="noStrike" kern="1200" dirty="0">
                         <a:solidFill>
@@ -14490,7 +14490,7 @@
                           <a:ea typeface="대명체 보통" panose="020B0600000101010101" pitchFamily="50" charset="-127"/>
                           <a:cs typeface="+mn-cs"/>
                         </a:rPr>
-                        <a:t>7,823</a:t>
+                        <a:t>7,850</a:t>
                       </a:r>
                     </a:p>
                   </a:txBody>
@@ -14608,7 +14608,7 @@
                           <a:ea typeface="대명체 보통" panose="020B0600000101010101" pitchFamily="50" charset="-127"/>
                           <a:cs typeface="+mn-cs"/>
                         </a:rPr>
-                        <a:t>-130</a:t>
+                        <a:t>-176</a:t>
                       </a:r>
                     </a:p>
                   </a:txBody>
@@ -14900,7 +14900,7 @@
                           <a:ea typeface="대명체 보통" panose="020B0600000101010101" pitchFamily="50" charset="-127"/>
                           <a:cs typeface="+mn-cs"/>
                         </a:rPr>
-                        <a:t>99,449</a:t>
+                        <a:t>99,430</a:t>
                       </a:r>
                     </a:p>
                   </a:txBody>
@@ -15018,7 +15018,7 @@
                           <a:ea typeface="대명체 보통" panose="020B0600000101010101" pitchFamily="50" charset="-127"/>
                           <a:cs typeface="+mn-cs"/>
                         </a:rPr>
-                        <a:t>9,465</a:t>
+                        <a:t>9,445</a:t>
                       </a:r>
                     </a:p>
                   </a:txBody>
@@ -15081,7 +15081,7 @@
                           <a:ea typeface="대명체 보통" panose="020B0600000101010101" pitchFamily="50" charset="-127"/>
                           <a:cs typeface="+mn-cs"/>
                         </a:rPr>
-                        <a:t>111%</a:t>
+                        <a:t>110%</a:t>
                       </a:r>
                     </a:p>
                   </a:txBody>
@@ -15144,7 +15144,7 @@
                           <a:ea typeface="대명체 보통" panose="020B0600000101010101" pitchFamily="50" charset="-127"/>
                           <a:cs typeface="+mn-cs"/>
                         </a:rPr>
-                        <a:t>72,686</a:t>
+                        <a:t>72,713</a:t>
                       </a:r>
                     </a:p>
                   </a:txBody>
@@ -15262,7 +15262,7 @@
                           <a:ea typeface="대명체 보통" panose="020B0600000101010101" pitchFamily="50" charset="-127"/>
                           <a:cs typeface="+mn-cs"/>
                         </a:rPr>
-                        <a:t>26,763</a:t>
+                        <a:t>26,717</a:t>
                       </a:r>
                     </a:p>
                   </a:txBody>
@@ -15643,7 +15643,7 @@
                           <a:ea typeface="대명체 보통" panose="020B0600000101010101" pitchFamily="50" charset="-127"/>
                           <a:cs typeface="+mn-cs"/>
                         </a:rPr>
-                        <a:t>6,628</a:t>
+                        <a:t>6,623</a:t>
                       </a:r>
                     </a:p>
                   </a:txBody>
@@ -15753,7 +15753,7 @@
                           <a:ea typeface="대명체 보통" panose="020B0600000101010101" pitchFamily="50" charset="-127"/>
                           <a:cs typeface="+mn-cs"/>
                         </a:rPr>
-                        <a:t>770</a:t>
+                        <a:t>764</a:t>
                       </a:r>
                       <a:endParaRPr lang="en-US" altLang="ko-KR" sz="700" b="0" i="0" u="none" strike="noStrike" kern="1200" dirty="0">
                         <a:solidFill>
@@ -15880,7 +15880,7 @@
                           <a:ea typeface="대명체 보통" panose="020B0600000101010101" pitchFamily="50" charset="-127"/>
                           <a:cs typeface="+mn-cs"/>
                         </a:rPr>
-                        <a:t>4,436</a:t>
+                        <a:t>4,456</a:t>
                       </a:r>
                     </a:p>
                   </a:txBody>
@@ -15990,7 +15990,7 @@
                           <a:ea typeface="대명체 보통" panose="020B0600000101010101" pitchFamily="50" charset="-127"/>
                           <a:cs typeface="+mn-cs"/>
                         </a:rPr>
-                        <a:t>2,192</a:t>
+                        <a:t>2,166</a:t>
                       </a:r>
                     </a:p>
                   </a:txBody>
@@ -16266,7 +16266,7 @@
                           <a:ea typeface="대명체 보통" panose="020B0600000101010101" pitchFamily="50" charset="-127"/>
                           <a:cs typeface="+mn-cs"/>
                         </a:rPr>
-                        <a:t>67,890</a:t>
+                        <a:t>67,884</a:t>
                       </a:r>
                     </a:p>
                   </a:txBody>
@@ -16376,7 +16376,7 @@
                           <a:ea typeface="대명체 보통" panose="020B0600000101010101" pitchFamily="50" charset="-127"/>
                           <a:cs typeface="+mn-cs"/>
                         </a:rPr>
-                        <a:t>7,247</a:t>
+                        <a:t>7,242</a:t>
                       </a:r>
                     </a:p>
                   </a:txBody>
@@ -16494,7 +16494,7 @@
                           <a:ea typeface="대명체 보통" panose="020B0600000101010101" pitchFamily="50" charset="-127"/>
                           <a:cs typeface="+mn-cs"/>
                         </a:rPr>
-                        <a:t>49,377</a:t>
+                        <a:t>49,397</a:t>
                       </a:r>
                     </a:p>
                   </a:txBody>
@@ -16604,7 +16604,7 @@
                           <a:ea typeface="대명체 보통" panose="020B0600000101010101" pitchFamily="50" charset="-127"/>
                           <a:cs typeface="+mn-cs"/>
                         </a:rPr>
-                        <a:t>18,512</a:t>
+                        <a:t>18,487</a:t>
                       </a:r>
                     </a:p>
                   </a:txBody>
@@ -17798,7 +17798,7 @@
                           <a:ea typeface="대명체 보통" panose="020B0600000101010101" pitchFamily="50" charset="-127"/>
                           <a:cs typeface="+mn-cs"/>
                         </a:rPr>
-                        <a:t>2,146</a:t>
+                        <a:t>2,145</a:t>
                       </a:r>
                       <a:endParaRPr lang="en-US" altLang="ko-KR" sz="700" b="0" i="0" u="none" strike="noStrike" kern="1200" dirty="0">
                         <a:solidFill>
@@ -17933,7 +17933,7 @@
                           <a:ea typeface="대명체 보통" panose="020B0600000101010101" pitchFamily="50" charset="-127"/>
                           <a:cs typeface="+mn-cs"/>
                         </a:rPr>
-                        <a:t>4,105</a:t>
+                        <a:t>4,106</a:t>
                       </a:r>
                     </a:p>
                   </a:txBody>

--- a/docs/data/세일즈마케팅_예상매출현황.pptx
+++ b/docs/data/세일즈마케팅_예상매출현황.pptx
@@ -12756,7 +12756,7 @@
                           <a:ea typeface="대명체 보통" panose="020B0600000101010101" pitchFamily="50" charset="-127"/>
                           <a:cs typeface="+mn-cs"/>
                         </a:rPr>
-                        <a:t>15,050</a:t>
+                        <a:t>14,952</a:t>
                       </a:r>
                     </a:p>
                   </a:txBody>
@@ -12882,7 +12882,7 @@
                           <a:ea typeface="대명체 보통" panose="020B0600000101010101" pitchFamily="50" charset="-127"/>
                           <a:cs typeface="+mn-cs"/>
                         </a:rPr>
-                        <a:t>-939</a:t>
+                        <a:t>-1,036</a:t>
                       </a:r>
                     </a:p>
                   </a:txBody>
@@ -13016,7 +13016,7 @@
                           <a:ea typeface="대명체 보통" panose="020B0600000101010101" pitchFamily="50" charset="-127"/>
                           <a:cs typeface="+mn-cs"/>
                         </a:rPr>
-                        <a:t>12,818</a:t>
+                        <a:t>12,877</a:t>
                       </a:r>
                     </a:p>
                   </a:txBody>
@@ -13142,7 +13142,7 @@
                           <a:ea typeface="대명체 보통" panose="020B0600000101010101" pitchFamily="50" charset="-127"/>
                           <a:cs typeface="+mn-cs"/>
                         </a:rPr>
-                        <a:t>2,231</a:t>
+                        <a:t>2,076</a:t>
                       </a:r>
                     </a:p>
                   </a:txBody>
@@ -13209,7 +13209,7 @@
                           <a:ea typeface="대명체 보통" panose="020B0600000101010101" pitchFamily="50" charset="-127"/>
                           <a:cs typeface="+mn-cs"/>
                         </a:rPr>
-                        <a:t>17%</a:t>
+                        <a:t>16%</a:t>
                       </a:r>
                     </a:p>
                   </a:txBody>
@@ -13450,7 +13450,7 @@
                           <a:ea typeface="대명체 보통" panose="020B0600000101010101" pitchFamily="50" charset="-127"/>
                           <a:cs typeface="+mn-cs"/>
                         </a:rPr>
-                        <a:t>173,849</a:t>
+                        <a:t>173,751</a:t>
                       </a:r>
                     </a:p>
                   </a:txBody>
@@ -13576,7 +13576,7 @@
                           <a:ea typeface="대명체 보통" panose="020B0600000101010101" pitchFamily="50" charset="-127"/>
                           <a:cs typeface="+mn-cs"/>
                         </a:rPr>
-                        <a:t>18,832</a:t>
+                        <a:t>18,735</a:t>
                       </a:r>
                     </a:p>
                   </a:txBody>
@@ -13710,7 +13710,7 @@
                           <a:ea typeface="대명체 보통" panose="020B0600000101010101" pitchFamily="50" charset="-127"/>
                           <a:cs typeface="+mn-cs"/>
                         </a:rPr>
-                        <a:t>126,216</a:t>
+                        <a:t>126,274</a:t>
                       </a:r>
                     </a:p>
                   </a:txBody>
@@ -13836,7 +13836,7 @@
                           <a:ea typeface="대명체 보통" panose="020B0600000101010101" pitchFamily="50" charset="-127"/>
                           <a:cs typeface="+mn-cs"/>
                         </a:rPr>
-                        <a:t>47,633</a:t>
+                        <a:t>47,477</a:t>
                       </a:r>
                     </a:p>
                   </a:txBody>
@@ -14237,7 +14237,7 @@
                           <a:ea typeface="대명체 보통" panose="020B0600000101010101" pitchFamily="50" charset="-127"/>
                           <a:cs typeface="+mn-cs"/>
                         </a:rPr>
-                        <a:t>7,673</a:t>
+                        <a:t>7,619</a:t>
                       </a:r>
                     </a:p>
                   </a:txBody>
@@ -14355,7 +14355,7 @@
                           <a:ea typeface="대명체 보통" panose="020B0600000101010101" pitchFamily="50" charset="-127"/>
                           <a:cs typeface="+mn-cs"/>
                         </a:rPr>
-                        <a:t>-1,937</a:t>
+                        <a:t>-1,991</a:t>
                       </a:r>
                       <a:endParaRPr lang="en-US" altLang="ko-KR" sz="700" b="0" i="0" u="none" strike="noStrike" kern="1200" dirty="0">
                         <a:solidFill>
@@ -14427,7 +14427,7 @@
                           <a:ea typeface="대명체 보통" panose="020B0600000101010101" pitchFamily="50" charset="-127"/>
                           <a:cs typeface="+mn-cs"/>
                         </a:rPr>
-                        <a:t>80%</a:t>
+                        <a:t>79%</a:t>
                       </a:r>
                     </a:p>
                   </a:txBody>
@@ -14490,7 +14490,7 @@
                           <a:ea typeface="대명체 보통" panose="020B0600000101010101" pitchFamily="50" charset="-127"/>
                           <a:cs typeface="+mn-cs"/>
                         </a:rPr>
-                        <a:t>7,850</a:t>
+                        <a:t>7,880</a:t>
                       </a:r>
                     </a:p>
                   </a:txBody>
@@ -14608,7 +14608,7 @@
                           <a:ea typeface="대명체 보통" panose="020B0600000101010101" pitchFamily="50" charset="-127"/>
                           <a:cs typeface="+mn-cs"/>
                         </a:rPr>
-                        <a:t>-176</a:t>
+                        <a:t>-261</a:t>
                       </a:r>
                     </a:p>
                   </a:txBody>
@@ -14671,7 +14671,7 @@
                           <a:ea typeface="대명체 보통" panose="020B0600000101010101" pitchFamily="50" charset="-127"/>
                           <a:cs typeface="+mn-cs"/>
                         </a:rPr>
-                        <a:t>-2%</a:t>
+                        <a:t>-3%</a:t>
                       </a:r>
                     </a:p>
                   </a:txBody>
@@ -14900,7 +14900,7 @@
                           <a:ea typeface="대명체 보통" panose="020B0600000101010101" pitchFamily="50" charset="-127"/>
                           <a:cs typeface="+mn-cs"/>
                         </a:rPr>
-                        <a:t>99,430</a:t>
+                        <a:t>99,376</a:t>
                       </a:r>
                     </a:p>
                   </a:txBody>
@@ -15018,7 +15018,7 @@
                           <a:ea typeface="대명체 보통" panose="020B0600000101010101" pitchFamily="50" charset="-127"/>
                           <a:cs typeface="+mn-cs"/>
                         </a:rPr>
-                        <a:t>9,445</a:t>
+                        <a:t>9,391</a:t>
                       </a:r>
                     </a:p>
                   </a:txBody>
@@ -15144,7 +15144,7 @@
                           <a:ea typeface="대명체 보통" panose="020B0600000101010101" pitchFamily="50" charset="-127"/>
                           <a:cs typeface="+mn-cs"/>
                         </a:rPr>
-                        <a:t>72,713</a:t>
+                        <a:t>72,744</a:t>
                       </a:r>
                     </a:p>
                   </a:txBody>
@@ -15262,7 +15262,7 @@
                           <a:ea typeface="대명체 보통" panose="020B0600000101010101" pitchFamily="50" charset="-127"/>
                           <a:cs typeface="+mn-cs"/>
                         </a:rPr>
-                        <a:t>26,717</a:t>
+                        <a:t>26,632</a:t>
                       </a:r>
                     </a:p>
                   </a:txBody>
@@ -15643,7 +15643,7 @@
                           <a:ea typeface="대명체 보통" panose="020B0600000101010101" pitchFamily="50" charset="-127"/>
                           <a:cs typeface="+mn-cs"/>
                         </a:rPr>
-                        <a:t>6,623</a:t>
+                        <a:t>6,581</a:t>
                       </a:r>
                     </a:p>
                   </a:txBody>
@@ -15753,7 +15753,7 @@
                           <a:ea typeface="대명체 보통" panose="020B0600000101010101" pitchFamily="50" charset="-127"/>
                           <a:cs typeface="+mn-cs"/>
                         </a:rPr>
-                        <a:t>764</a:t>
+                        <a:t>722</a:t>
                       </a:r>
                       <a:endParaRPr lang="en-US" altLang="ko-KR" sz="700" b="0" i="0" u="none" strike="noStrike" kern="1200" dirty="0">
                         <a:solidFill>
@@ -15821,7 +15821,7 @@
                           <a:ea typeface="대명체 보통" panose="020B0600000101010101" pitchFamily="50" charset="-127"/>
                           <a:cs typeface="+mn-cs"/>
                         </a:rPr>
-                        <a:t>113%</a:t>
+                        <a:t>112%</a:t>
                       </a:r>
                     </a:p>
                   </a:txBody>
@@ -15880,7 +15880,7 @@
                           <a:ea typeface="대명체 보통" panose="020B0600000101010101" pitchFamily="50" charset="-127"/>
                           <a:cs typeface="+mn-cs"/>
                         </a:rPr>
-                        <a:t>4,456</a:t>
+                        <a:t>4,484</a:t>
                       </a:r>
                     </a:p>
                   </a:txBody>
@@ -15990,7 +15990,7 @@
                           <a:ea typeface="대명체 보통" panose="020B0600000101010101" pitchFamily="50" charset="-127"/>
                           <a:cs typeface="+mn-cs"/>
                         </a:rPr>
-                        <a:t>2,166</a:t>
+                        <a:t>2,097</a:t>
                       </a:r>
                     </a:p>
                   </a:txBody>
@@ -16049,7 +16049,7 @@
                           <a:ea typeface="대명체 보통" panose="020B0600000101010101" pitchFamily="50" charset="-127"/>
                           <a:cs typeface="+mn-cs"/>
                         </a:rPr>
-                        <a:t>49%</a:t>
+                        <a:t>47%</a:t>
                       </a:r>
                     </a:p>
                   </a:txBody>
@@ -16266,7 +16266,7 @@
                           <a:ea typeface="대명체 보통" panose="020B0600000101010101" pitchFamily="50" charset="-127"/>
                           <a:cs typeface="+mn-cs"/>
                         </a:rPr>
-                        <a:t>67,884</a:t>
+                        <a:t>67,842</a:t>
                       </a:r>
                     </a:p>
                   </a:txBody>
@@ -16376,7 +16376,7 @@
                           <a:ea typeface="대명체 보통" panose="020B0600000101010101" pitchFamily="50" charset="-127"/>
                           <a:cs typeface="+mn-cs"/>
                         </a:rPr>
-                        <a:t>7,242</a:t>
+                        <a:t>7,200</a:t>
                       </a:r>
                     </a:p>
                   </a:txBody>
@@ -16494,7 +16494,7 @@
                           <a:ea typeface="대명체 보통" panose="020B0600000101010101" pitchFamily="50" charset="-127"/>
                           <a:cs typeface="+mn-cs"/>
                         </a:rPr>
-                        <a:t>49,397</a:t>
+                        <a:t>49,425</a:t>
                       </a:r>
                     </a:p>
                   </a:txBody>
@@ -16604,7 +16604,7 @@
                           <a:ea typeface="대명체 보통" panose="020B0600000101010101" pitchFamily="50" charset="-127"/>
                           <a:cs typeface="+mn-cs"/>
                         </a:rPr>
-                        <a:t>18,487</a:t>
+                        <a:t>18,418</a:t>
                       </a:r>
                     </a:p>
                   </a:txBody>
@@ -16999,7 +16999,7 @@
                           <a:ea typeface="대명체 보통" panose="020B0600000101010101" pitchFamily="50" charset="-127"/>
                           <a:cs typeface="+mn-cs"/>
                         </a:rPr>
-                        <a:t>754</a:t>
+                        <a:t>752</a:t>
                       </a:r>
                       <a:endParaRPr lang="en-US" altLang="ko-KR" sz="700" b="0" i="0" u="none" strike="noStrike" kern="1200" dirty="0">
                         <a:solidFill>
@@ -17126,7 +17126,7 @@
                           <a:ea typeface="대명체 보통" panose="020B0600000101010101" pitchFamily="50" charset="-127"/>
                           <a:cs typeface="+mn-cs"/>
                         </a:rPr>
-                        <a:t>234</a:t>
+                        <a:t>233</a:t>
                       </a:r>
                       <a:endParaRPr lang="en-US" altLang="ko-KR" sz="700" b="0" i="0" u="none" strike="noStrike" kern="1200" dirty="0">
                         <a:solidFill>
@@ -17388,7 +17388,7 @@
                           <a:ea typeface="대명체 보통" panose="020B0600000101010101" pitchFamily="50" charset="-127"/>
                           <a:cs typeface="+mn-cs"/>
                         </a:rPr>
-                        <a:t>241</a:t>
+                        <a:t>240</a:t>
                       </a:r>
                     </a:p>
                   </a:txBody>
@@ -17680,7 +17680,7 @@
                           <a:ea typeface="대명체 보통" panose="020B0600000101010101" pitchFamily="50" charset="-127"/>
                           <a:cs typeface="+mn-cs"/>
                         </a:rPr>
-                        <a:t>6,535</a:t>
+                        <a:t>6,533</a:t>
                       </a:r>
                     </a:p>
                   </a:txBody>
@@ -17798,7 +17798,7 @@
                           <a:ea typeface="대명체 보통" panose="020B0600000101010101" pitchFamily="50" charset="-127"/>
                           <a:cs typeface="+mn-cs"/>
                         </a:rPr>
-                        <a:t>2,145</a:t>
+                        <a:t>2,144</a:t>
                       </a:r>
                       <a:endParaRPr lang="en-US" altLang="ko-KR" sz="700" b="0" i="0" u="none" strike="noStrike" kern="1200" dirty="0">
                         <a:solidFill>
@@ -18051,7 +18051,7 @@
                           <a:ea typeface="대명체 보통" panose="020B0600000101010101" pitchFamily="50" charset="-127"/>
                           <a:cs typeface="+mn-cs"/>
                         </a:rPr>
-                        <a:t>2,429</a:t>
+                        <a:t>2,428</a:t>
                       </a:r>
                     </a:p>
                   </a:txBody>

--- a/docs/data/세일즈마케팅_예상매출현황.pptx
+++ b/docs/data/세일즈마케팅_예상매출현황.pptx
@@ -4058,7 +4058,7 @@
                           <a:latin typeface="대명체 보통" panose="020B0600000101010101" pitchFamily="50" charset="-127"/>
                           <a:ea typeface="대명체 보통" panose="020B0600000101010101" pitchFamily="50" charset="-127"/>
                         </a:rPr>
-                        <a:t>당월 예상실적 (10.01~10.31)</a:t>
+                        <a:t>당월 예상실적 (11.01~11.30)</a:t>
                       </a:r>
                       <a:endParaRPr lang="en-US" altLang="ko-KR" sz="800" b="1" i="0" u="none" strike="noStrike" dirty="0">
                         <a:ln>
@@ -4310,7 +4310,7 @@
                           <a:latin typeface="대명체 보통" panose="020B0600000101010101" pitchFamily="50" charset="-127"/>
                           <a:ea typeface="대명체 보통" panose="020B0600000101010101" pitchFamily="50" charset="-127"/>
                         </a:rPr>
-                        <a:t>누계 실적 (01.01~10.31)</a:t>
+                        <a:t>누계 실적 (01.01~11.30)</a:t>
                       </a:r>
                       <a:endParaRPr lang="en-US" altLang="ko-KR" sz="800" b="1" i="0" u="none" strike="noStrike" dirty="0">
                         <a:ln>
@@ -12630,7 +12630,7 @@
                           <a:ea typeface="대명체 보통" panose="020B0600000101010101" pitchFamily="50" charset="-127"/>
                           <a:cs typeface="+mn-cs"/>
                         </a:rPr>
-                        <a:t>15,988</a:t>
+                        <a:t>11,524</a:t>
                       </a:r>
                     </a:p>
                   </a:txBody>
@@ -12756,7 +12756,7 @@
                           <a:ea typeface="대명체 보통" panose="020B0600000101010101" pitchFamily="50" charset="-127"/>
                           <a:cs typeface="+mn-cs"/>
                         </a:rPr>
-                        <a:t>14,952</a:t>
+                        <a:t>13,918</a:t>
                       </a:r>
                     </a:p>
                   </a:txBody>
@@ -12875,14 +12875,14 @@
                       <a:r>
                         <a:rPr lang="en-US" altLang="ko-KR" sz="700" b="0" i="0" u="none" strike="noStrike" kern="1200" dirty="0">
                           <a:solidFill>
-                            <a:srgbClr val="FF0000"/>
+                            <a:srgbClr val="000000"/>
                           </a:solidFill>
                           <a:effectLst/>
                           <a:latin typeface="대명체 보통" panose="020B0600000101010101" pitchFamily="50" charset="-127"/>
                           <a:ea typeface="대명체 보통" panose="020B0600000101010101" pitchFamily="50" charset="-127"/>
                           <a:cs typeface="+mn-cs"/>
                         </a:rPr>
-                        <a:t>-1,036</a:t>
+                        <a:t>2,394</a:t>
                       </a:r>
                     </a:p>
                   </a:txBody>
@@ -12949,7 +12949,7 @@
                           <a:ea typeface="대명체 보통" panose="020B0600000101010101" pitchFamily="50" charset="-127"/>
                           <a:cs typeface="+mn-cs"/>
                         </a:rPr>
-                        <a:t>94%</a:t>
+                        <a:t>121%</a:t>
                       </a:r>
                     </a:p>
                   </a:txBody>
@@ -13016,7 +13016,7 @@
                           <a:ea typeface="대명체 보통" panose="020B0600000101010101" pitchFamily="50" charset="-127"/>
                           <a:cs typeface="+mn-cs"/>
                         </a:rPr>
-                        <a:t>12,877</a:t>
+                        <a:t>6,389</a:t>
                       </a:r>
                     </a:p>
                   </a:txBody>
@@ -13142,7 +13142,7 @@
                           <a:ea typeface="대명체 보통" panose="020B0600000101010101" pitchFamily="50" charset="-127"/>
                           <a:cs typeface="+mn-cs"/>
                         </a:rPr>
-                        <a:t>2,076</a:t>
+                        <a:t>7,530</a:t>
                       </a:r>
                     </a:p>
                   </a:txBody>
@@ -13209,7 +13209,7 @@
                           <a:ea typeface="대명체 보통" panose="020B0600000101010101" pitchFamily="50" charset="-127"/>
                           <a:cs typeface="+mn-cs"/>
                         </a:rPr>
-                        <a:t>16%</a:t>
+                        <a:t>118%</a:t>
                       </a:r>
                     </a:p>
                   </a:txBody>
@@ -13328,7 +13328,7 @@
                           <a:ea typeface="대명체 보통" panose="020B0600000101010101" pitchFamily="50" charset="-127"/>
                           <a:cs typeface="+mn-cs"/>
                         </a:rPr>
-                        <a:t>155,016</a:t>
+                        <a:t>166,540</a:t>
                       </a:r>
                     </a:p>
                   </a:txBody>
@@ -13450,7 +13450,7 @@
                           <a:ea typeface="대명체 보통" panose="020B0600000101010101" pitchFamily="50" charset="-127"/>
                           <a:cs typeface="+mn-cs"/>
                         </a:rPr>
-                        <a:t>173,751</a:t>
+                        <a:t>188,354</a:t>
                       </a:r>
                     </a:p>
                   </a:txBody>
@@ -13576,7 +13576,7 @@
                           <a:ea typeface="대명체 보통" panose="020B0600000101010101" pitchFamily="50" charset="-127"/>
                           <a:cs typeface="+mn-cs"/>
                         </a:rPr>
-                        <a:t>18,735</a:t>
+                        <a:t>21,814</a:t>
                       </a:r>
                     </a:p>
                   </a:txBody>
@@ -13643,7 +13643,7 @@
                           <a:ea typeface="대명체 보통" panose="020B0600000101010101" pitchFamily="50" charset="-127"/>
                           <a:cs typeface="+mn-cs"/>
                         </a:rPr>
-                        <a:t>112%</a:t>
+                        <a:t>113%</a:t>
                       </a:r>
                     </a:p>
                   </a:txBody>
@@ -13710,7 +13710,7 @@
                           <a:ea typeface="대명체 보통" panose="020B0600000101010101" pitchFamily="50" charset="-127"/>
                           <a:cs typeface="+mn-cs"/>
                         </a:rPr>
-                        <a:t>126,274</a:t>
+                        <a:t>132,663</a:t>
                       </a:r>
                     </a:p>
                   </a:txBody>
@@ -13836,7 +13836,7 @@
                           <a:ea typeface="대명체 보통" panose="020B0600000101010101" pitchFamily="50" charset="-127"/>
                           <a:cs typeface="+mn-cs"/>
                         </a:rPr>
-                        <a:t>47,477</a:t>
+                        <a:t>55,692</a:t>
                       </a:r>
                     </a:p>
                   </a:txBody>
@@ -13903,7 +13903,7 @@
                           <a:ea typeface="대명체 보통" panose="020B0600000101010101" pitchFamily="50" charset="-127"/>
                           <a:cs typeface="+mn-cs"/>
                         </a:rPr>
-                        <a:t>38%</a:t>
+                        <a:t>42%</a:t>
                       </a:r>
                     </a:p>
                   </a:txBody>
@@ -14119,7 +14119,7 @@
                           <a:ea typeface="대명체 보통" panose="020B0600000101010101" pitchFamily="50" charset="-127"/>
                           <a:cs typeface="+mn-cs"/>
                         </a:rPr>
-                        <a:t>9,610</a:t>
+                        <a:t>6,760</a:t>
                       </a:r>
                     </a:p>
                   </a:txBody>
@@ -14237,7 +14237,7 @@
                           <a:ea typeface="대명체 보통" panose="020B0600000101010101" pitchFamily="50" charset="-127"/>
                           <a:cs typeface="+mn-cs"/>
                         </a:rPr>
-                        <a:t>7,619</a:t>
+                        <a:t>6,699</a:t>
                       </a:r>
                     </a:p>
                   </a:txBody>
@@ -14355,7 +14355,7 @@
                           <a:ea typeface="대명체 보통" panose="020B0600000101010101" pitchFamily="50" charset="-127"/>
                           <a:cs typeface="+mn-cs"/>
                         </a:rPr>
-                        <a:t>-1,991</a:t>
+                        <a:t>-61</a:t>
                       </a:r>
                       <a:endParaRPr lang="en-US" altLang="ko-KR" sz="700" b="0" i="0" u="none" strike="noStrike" kern="1200" dirty="0">
                         <a:solidFill>
@@ -14427,7 +14427,7 @@
                           <a:ea typeface="대명체 보통" panose="020B0600000101010101" pitchFamily="50" charset="-127"/>
                           <a:cs typeface="+mn-cs"/>
                         </a:rPr>
-                        <a:t>79%</a:t>
+                        <a:t>99%</a:t>
                       </a:r>
                     </a:p>
                   </a:txBody>
@@ -14490,7 +14490,7 @@
                           <a:ea typeface="대명체 보통" panose="020B0600000101010101" pitchFamily="50" charset="-127"/>
                           <a:cs typeface="+mn-cs"/>
                         </a:rPr>
-                        <a:t>7,880</a:t>
+                        <a:t>3,407</a:t>
                       </a:r>
                     </a:p>
                   </a:txBody>
@@ -14601,14 +14601,14 @@
                       <a:r>
                         <a:rPr lang="en-US" altLang="ko-KR" sz="700" b="0" i="0" u="none" strike="noStrike" kern="1200">
                           <a:solidFill>
-                            <a:srgbClr val="FF0000"/>
+                            <a:srgbClr val="000000"/>
                           </a:solidFill>
                           <a:effectLst/>
                           <a:latin typeface="대명체 보통" panose="020B0600000101010101" pitchFamily="50" charset="-127"/>
                           <a:ea typeface="대명체 보통" panose="020B0600000101010101" pitchFamily="50" charset="-127"/>
                           <a:cs typeface="+mn-cs"/>
                         </a:rPr>
-                        <a:t>-261</a:t>
+                        <a:t>3,292</a:t>
                       </a:r>
                     </a:p>
                   </a:txBody>
@@ -14653,121 +14653,6 @@
                       <a:headEnd type="none" w="med" len="med"/>
                       <a:tailEnd type="none" w="med" len="med"/>
                     </a:lnB>
-                  </a:tcPr>
-                </a:tc>
-                <a:tc>
-                  <a:txBody>
-                    <a:bodyPr/>
-                    <a:lstStyle/>
-                    <a:p>
-                      <a:pPr algn="r" rtl="0" fontAlgn="ctr"/>
-                      <a:r>
-                        <a:rPr lang="en-US" altLang="ko-KR" sz="700" b="0" i="0" u="none" strike="noStrike" kern="1200">
-                          <a:solidFill>
-                            <a:srgbClr val="FF0000"/>
-                          </a:solidFill>
-                          <a:effectLst/>
-                          <a:latin typeface="대명체 보통" panose="020B0600000101010101" pitchFamily="50" charset="-127"/>
-                          <a:ea typeface="대명체 보통" panose="020B0600000101010101" pitchFamily="50" charset="-127"/>
-                          <a:cs typeface="+mn-cs"/>
-                        </a:rPr>
-                        <a:t>-3%</a:t>
-                      </a:r>
-                    </a:p>
-                  </a:txBody>
-                  <a:tcPr marL="9525" marR="9525" marT="9525" marB="0" anchor="ctr">
-                    <a:lnL w="6350" cap="flat" cmpd="sng" algn="ctr">
-                      <a:solidFill>
-                        <a:schemeClr val="bg2">
-                          <a:lumMod val="75000"/>
-                        </a:schemeClr>
-                      </a:solidFill>
-                      <a:prstDash val="solid"/>
-                      <a:round/>
-                      <a:headEnd type="none" w="med" len="med"/>
-                      <a:tailEnd type="none" w="med" len="med"/>
-                    </a:lnL>
-                    <a:lnR w="6350" cap="flat" cmpd="sng" algn="ctr">
-                      <a:noFill/>
-                      <a:prstDash val="solid"/>
-                      <a:round/>
-                      <a:headEnd type="none" w="med" len="med"/>
-                      <a:tailEnd type="none" w="med" len="med"/>
-                    </a:lnR>
-                    <a:lnT w="6350" cap="flat" cmpd="sng" algn="ctr">
-                      <a:solidFill>
-                        <a:schemeClr val="bg2">
-                          <a:lumMod val="75000"/>
-                        </a:schemeClr>
-                      </a:solidFill>
-                      <a:prstDash val="solid"/>
-                      <a:round/>
-                      <a:headEnd type="none" w="med" len="med"/>
-                      <a:tailEnd type="none" w="med" len="med"/>
-                    </a:lnT>
-                    <a:lnB w="6350" cap="flat" cmpd="sng" algn="ctr">
-                      <a:noFill/>
-                      <a:prstDash val="solid"/>
-                      <a:round/>
-                      <a:headEnd type="none" w="med" len="med"/>
-                      <a:tailEnd type="none" w="med" len="med"/>
-                    </a:lnB>
-                  </a:tcPr>
-                </a:tc>
-                <a:tc>
-                  <a:txBody>
-                    <a:bodyPr/>
-                    <a:lstStyle/>
-                    <a:p>
-                      <a:pPr algn="r" fontAlgn="ctr"/>
-                      <a:endParaRPr lang="ko-KR" altLang="en-US" sz="700" b="0" i="0" u="none" strike="noStrike" kern="1200">
-                        <a:solidFill>
-                          <a:srgbClr val="000000"/>
-                        </a:solidFill>
-                        <a:effectLst/>
-                        <a:latin typeface="대명체 보통" panose="020B0600000101010101" pitchFamily="50" charset="-127"/>
-                        <a:ea typeface="대명체 보통" panose="020B0600000101010101" pitchFamily="50" charset="-127"/>
-                        <a:cs typeface="+mn-cs"/>
-                      </a:endParaRPr>
-                    </a:p>
-                  </a:txBody>
-                  <a:tcPr marL="9525" marR="9525" marT="9525" marB="0" anchor="ctr">
-                    <a:lnL w="6350" cap="flat" cmpd="sng" algn="ctr">
-                      <a:noFill/>
-                      <a:prstDash val="solid"/>
-                      <a:round/>
-                      <a:headEnd type="none" w="med" len="med"/>
-                      <a:tailEnd type="none" w="med" len="med"/>
-                    </a:lnL>
-                    <a:lnR w="6350" cap="flat" cmpd="sng" algn="ctr">
-                      <a:noFill/>
-                      <a:prstDash val="solid"/>
-                      <a:round/>
-                      <a:headEnd type="none" w="med" len="med"/>
-                      <a:tailEnd type="none" w="med" len="med"/>
-                    </a:lnR>
-                    <a:lnT w="6350" cap="flat" cmpd="sng" algn="ctr">
-                      <a:noFill/>
-                      <a:prstDash val="solid"/>
-                      <a:round/>
-                      <a:headEnd type="none" w="med" len="med"/>
-                      <a:tailEnd type="none" w="med" len="med"/>
-                    </a:lnT>
-                    <a:lnB w="6350" cap="flat" cmpd="sng" algn="ctr">
-                      <a:noFill/>
-                      <a:prstDash val="solid"/>
-                      <a:round/>
-                      <a:headEnd type="none" w="med" len="med"/>
-                      <a:tailEnd type="none" w="med" len="med"/>
-                    </a:lnB>
-                    <a:lnTlToBr w="12700" cmpd="sng">
-                      <a:noFill/>
-                      <a:prstDash val="solid"/>
-                    </a:lnTlToBr>
-                    <a:lnBlToTr w="12700" cmpd="sng">
-                      <a:noFill/>
-                      <a:prstDash val="solid"/>
-                    </a:lnBlToTr>
                   </a:tcPr>
                 </a:tc>
                 <a:tc>
@@ -14786,7 +14671,122 @@
                           <a:ea typeface="대명체 보통" panose="020B0600000101010101" pitchFamily="50" charset="-127"/>
                           <a:cs typeface="+mn-cs"/>
                         </a:rPr>
-                        <a:t>89,984</a:t>
+                        <a:t>97%</a:t>
+                      </a:r>
+                    </a:p>
+                  </a:txBody>
+                  <a:tcPr marL="9525" marR="9525" marT="9525" marB="0" anchor="ctr">
+                    <a:lnL w="6350" cap="flat" cmpd="sng" algn="ctr">
+                      <a:solidFill>
+                        <a:schemeClr val="bg2">
+                          <a:lumMod val="75000"/>
+                        </a:schemeClr>
+                      </a:solidFill>
+                      <a:prstDash val="solid"/>
+                      <a:round/>
+                      <a:headEnd type="none" w="med" len="med"/>
+                      <a:tailEnd type="none" w="med" len="med"/>
+                    </a:lnL>
+                    <a:lnR w="6350" cap="flat" cmpd="sng" algn="ctr">
+                      <a:noFill/>
+                      <a:prstDash val="solid"/>
+                      <a:round/>
+                      <a:headEnd type="none" w="med" len="med"/>
+                      <a:tailEnd type="none" w="med" len="med"/>
+                    </a:lnR>
+                    <a:lnT w="6350" cap="flat" cmpd="sng" algn="ctr">
+                      <a:solidFill>
+                        <a:schemeClr val="bg2">
+                          <a:lumMod val="75000"/>
+                        </a:schemeClr>
+                      </a:solidFill>
+                      <a:prstDash val="solid"/>
+                      <a:round/>
+                      <a:headEnd type="none" w="med" len="med"/>
+                      <a:tailEnd type="none" w="med" len="med"/>
+                    </a:lnT>
+                    <a:lnB w="6350" cap="flat" cmpd="sng" algn="ctr">
+                      <a:noFill/>
+                      <a:prstDash val="solid"/>
+                      <a:round/>
+                      <a:headEnd type="none" w="med" len="med"/>
+                      <a:tailEnd type="none" w="med" len="med"/>
+                    </a:lnB>
+                  </a:tcPr>
+                </a:tc>
+                <a:tc>
+                  <a:txBody>
+                    <a:bodyPr/>
+                    <a:lstStyle/>
+                    <a:p>
+                      <a:pPr algn="r" fontAlgn="ctr"/>
+                      <a:endParaRPr lang="ko-KR" altLang="en-US" sz="700" b="0" i="0" u="none" strike="noStrike" kern="1200">
+                        <a:solidFill>
+                          <a:srgbClr val="000000"/>
+                        </a:solidFill>
+                        <a:effectLst/>
+                        <a:latin typeface="대명체 보통" panose="020B0600000101010101" pitchFamily="50" charset="-127"/>
+                        <a:ea typeface="대명체 보통" panose="020B0600000101010101" pitchFamily="50" charset="-127"/>
+                        <a:cs typeface="+mn-cs"/>
+                      </a:endParaRPr>
+                    </a:p>
+                  </a:txBody>
+                  <a:tcPr marL="9525" marR="9525" marT="9525" marB="0" anchor="ctr">
+                    <a:lnL w="6350" cap="flat" cmpd="sng" algn="ctr">
+                      <a:noFill/>
+                      <a:prstDash val="solid"/>
+                      <a:round/>
+                      <a:headEnd type="none" w="med" len="med"/>
+                      <a:tailEnd type="none" w="med" len="med"/>
+                    </a:lnL>
+                    <a:lnR w="6350" cap="flat" cmpd="sng" algn="ctr">
+                      <a:noFill/>
+                      <a:prstDash val="solid"/>
+                      <a:round/>
+                      <a:headEnd type="none" w="med" len="med"/>
+                      <a:tailEnd type="none" w="med" len="med"/>
+                    </a:lnR>
+                    <a:lnT w="6350" cap="flat" cmpd="sng" algn="ctr">
+                      <a:noFill/>
+                      <a:prstDash val="solid"/>
+                      <a:round/>
+                      <a:headEnd type="none" w="med" len="med"/>
+                      <a:tailEnd type="none" w="med" len="med"/>
+                    </a:lnT>
+                    <a:lnB w="6350" cap="flat" cmpd="sng" algn="ctr">
+                      <a:noFill/>
+                      <a:prstDash val="solid"/>
+                      <a:round/>
+                      <a:headEnd type="none" w="med" len="med"/>
+                      <a:tailEnd type="none" w="med" len="med"/>
+                    </a:lnB>
+                    <a:lnTlToBr w="12700" cmpd="sng">
+                      <a:noFill/>
+                      <a:prstDash val="solid"/>
+                    </a:lnTlToBr>
+                    <a:lnBlToTr w="12700" cmpd="sng">
+                      <a:noFill/>
+                      <a:prstDash val="solid"/>
+                    </a:lnBlToTr>
+                  </a:tcPr>
+                </a:tc>
+                <a:tc>
+                  <a:txBody>
+                    <a:bodyPr/>
+                    <a:lstStyle/>
+                    <a:p>
+                      <a:pPr algn="r" rtl="0" fontAlgn="ctr"/>
+                      <a:r>
+                        <a:rPr lang="en-US" altLang="ko-KR" sz="700" b="0" i="0" u="none" strike="noStrike" kern="1200">
+                          <a:solidFill>
+                            <a:srgbClr val="000000"/>
+                          </a:solidFill>
+                          <a:effectLst/>
+                          <a:latin typeface="대명체 보통" panose="020B0600000101010101" pitchFamily="50" charset="-127"/>
+                          <a:ea typeface="대명체 보통" panose="020B0600000101010101" pitchFamily="50" charset="-127"/>
+                          <a:cs typeface="+mn-cs"/>
+                        </a:rPr>
+                        <a:t>96,744</a:t>
                       </a:r>
                     </a:p>
                   </a:txBody>
@@ -14900,7 +14900,7 @@
                           <a:ea typeface="대명체 보통" panose="020B0600000101010101" pitchFamily="50" charset="-127"/>
                           <a:cs typeface="+mn-cs"/>
                         </a:rPr>
-                        <a:t>99,376</a:t>
+                        <a:t>106,130</a:t>
                       </a:r>
                     </a:p>
                   </a:txBody>
@@ -15018,7 +15018,7 @@
                           <a:ea typeface="대명체 보통" panose="020B0600000101010101" pitchFamily="50" charset="-127"/>
                           <a:cs typeface="+mn-cs"/>
                         </a:rPr>
-                        <a:t>9,391</a:t>
+                        <a:t>9,386</a:t>
                       </a:r>
                     </a:p>
                   </a:txBody>
@@ -15144,7 +15144,7 @@
                           <a:ea typeface="대명체 보통" panose="020B0600000101010101" pitchFamily="50" charset="-127"/>
                           <a:cs typeface="+mn-cs"/>
                         </a:rPr>
-                        <a:t>72,744</a:t>
+                        <a:t>76,150</a:t>
                       </a:r>
                     </a:p>
                   </a:txBody>
@@ -15262,7 +15262,7 @@
                           <a:ea typeface="대명체 보통" panose="020B0600000101010101" pitchFamily="50" charset="-127"/>
                           <a:cs typeface="+mn-cs"/>
                         </a:rPr>
-                        <a:t>26,632</a:t>
+                        <a:t>29,979</a:t>
                       </a:r>
                     </a:p>
                   </a:txBody>
@@ -15325,7 +15325,7 @@
                           <a:ea typeface="대명체 보통" panose="020B0600000101010101" pitchFamily="50" charset="-127"/>
                           <a:cs typeface="+mn-cs"/>
                         </a:rPr>
-                        <a:t>37%</a:t>
+                        <a:t>39%</a:t>
                       </a:r>
                     </a:p>
                   </a:txBody>
@@ -15533,7 +15533,7 @@
                           <a:ea typeface="대명체 보통" panose="020B0600000101010101" pitchFamily="50" charset="-127"/>
                           <a:cs typeface="+mn-cs"/>
                         </a:rPr>
-                        <a:t>5,859</a:t>
+                        <a:t>4,339</a:t>
                       </a:r>
                     </a:p>
                   </a:txBody>
@@ -15643,7 +15643,7 @@
                           <a:ea typeface="대명체 보통" panose="020B0600000101010101" pitchFamily="50" charset="-127"/>
                           <a:cs typeface="+mn-cs"/>
                         </a:rPr>
-                        <a:t>6,581</a:t>
+                        <a:t>5,875</a:t>
                       </a:r>
                     </a:p>
                   </a:txBody>
@@ -15753,7 +15753,7 @@
                           <a:ea typeface="대명체 보통" panose="020B0600000101010101" pitchFamily="50" charset="-127"/>
                           <a:cs typeface="+mn-cs"/>
                         </a:rPr>
-                        <a:t>722</a:t>
+                        <a:t>1,536</a:t>
                       </a:r>
                       <a:endParaRPr lang="en-US" altLang="ko-KR" sz="700" b="0" i="0" u="none" strike="noStrike" kern="1200" dirty="0">
                         <a:solidFill>
@@ -15821,7 +15821,7 @@
                           <a:ea typeface="대명체 보통" panose="020B0600000101010101" pitchFamily="50" charset="-127"/>
                           <a:cs typeface="+mn-cs"/>
                         </a:rPr>
-                        <a:t>112%</a:t>
+                        <a:t>135%</a:t>
                       </a:r>
                     </a:p>
                   </a:txBody>
@@ -15880,7 +15880,7 @@
                           <a:ea typeface="대명체 보통" panose="020B0600000101010101" pitchFamily="50" charset="-127"/>
                           <a:cs typeface="+mn-cs"/>
                         </a:rPr>
-                        <a:t>4,484</a:t>
+                        <a:t>2,586</a:t>
                       </a:r>
                     </a:p>
                   </a:txBody>
@@ -15990,7 +15990,7 @@
                           <a:ea typeface="대명체 보통" panose="020B0600000101010101" pitchFamily="50" charset="-127"/>
                           <a:cs typeface="+mn-cs"/>
                         </a:rPr>
-                        <a:t>2,097</a:t>
+                        <a:t>3,289</a:t>
                       </a:r>
                     </a:p>
                   </a:txBody>
@@ -16049,7 +16049,7 @@
                           <a:ea typeface="대명체 보통" panose="020B0600000101010101" pitchFamily="50" charset="-127"/>
                           <a:cs typeface="+mn-cs"/>
                         </a:rPr>
-                        <a:t>47%</a:t>
+                        <a:t>127%</a:t>
                       </a:r>
                     </a:p>
                   </a:txBody>
@@ -16160,7 +16160,7 @@
                           <a:ea typeface="대명체 보통" panose="020B0600000101010101" pitchFamily="50" charset="-127"/>
                           <a:cs typeface="+mn-cs"/>
                         </a:rPr>
-                        <a:t>60,643</a:t>
+                        <a:t>64,982</a:t>
                       </a:r>
                     </a:p>
                   </a:txBody>
@@ -16266,7 +16266,7 @@
                           <a:ea typeface="대명체 보통" panose="020B0600000101010101" pitchFamily="50" charset="-127"/>
                           <a:cs typeface="+mn-cs"/>
                         </a:rPr>
-                        <a:t>67,842</a:t>
+                        <a:t>74,324</a:t>
                       </a:r>
                     </a:p>
                   </a:txBody>
@@ -16376,7 +16376,7 @@
                           <a:ea typeface="대명체 보통" panose="020B0600000101010101" pitchFamily="50" charset="-127"/>
                           <a:cs typeface="+mn-cs"/>
                         </a:rPr>
-                        <a:t>7,200</a:t>
+                        <a:t>9,342</a:t>
                       </a:r>
                     </a:p>
                   </a:txBody>
@@ -16435,7 +16435,7 @@
                           <a:ea typeface="대명체 보통" panose="020B0600000101010101" pitchFamily="50" charset="-127"/>
                           <a:cs typeface="+mn-cs"/>
                         </a:rPr>
-                        <a:t>112%</a:t>
+                        <a:t>114%</a:t>
                       </a:r>
                     </a:p>
                   </a:txBody>
@@ -16494,7 +16494,7 @@
                           <a:ea typeface="대명체 보통" panose="020B0600000101010101" pitchFamily="50" charset="-127"/>
                           <a:cs typeface="+mn-cs"/>
                         </a:rPr>
-                        <a:t>49,425</a:t>
+                        <a:t>52,010</a:t>
                       </a:r>
                     </a:p>
                   </a:txBody>
@@ -16604,7 +16604,7 @@
                           <a:ea typeface="대명체 보통" panose="020B0600000101010101" pitchFamily="50" charset="-127"/>
                           <a:cs typeface="+mn-cs"/>
                         </a:rPr>
-                        <a:t>18,418</a:t>
+                        <a:t>22,314</a:t>
                       </a:r>
                     </a:p>
                   </a:txBody>
@@ -16663,7 +16663,7 @@
                           <a:ea typeface="대명체 보통" panose="020B0600000101010101" pitchFamily="50" charset="-127"/>
                           <a:cs typeface="+mn-cs"/>
                         </a:rPr>
-                        <a:t>37%</a:t>
+                        <a:t>43%</a:t>
                       </a:r>
                     </a:p>
                   </a:txBody>
@@ -16872,7 +16872,7 @@
                           <a:ea typeface="대명체 보통" panose="020B0600000101010101" pitchFamily="50" charset="-127"/>
                           <a:cs typeface="+mn-cs"/>
                         </a:rPr>
-                        <a:t>520</a:t>
+                        <a:t>425</a:t>
                       </a:r>
                       <a:endParaRPr lang="en-US" altLang="ko-KR" sz="700" b="0" i="0" u="none" strike="noStrike" kern="1200" dirty="0">
                         <a:solidFill>
@@ -16999,7 +16999,7 @@
                           <a:ea typeface="대명체 보통" panose="020B0600000101010101" pitchFamily="50" charset="-127"/>
                           <a:cs typeface="+mn-cs"/>
                         </a:rPr>
-                        <a:t>752</a:t>
+                        <a:t>1,345</a:t>
                       </a:r>
                       <a:endParaRPr lang="en-US" altLang="ko-KR" sz="700" b="0" i="0" u="none" strike="noStrike" kern="1200" dirty="0">
                         <a:solidFill>
@@ -17126,7 +17126,7 @@
                           <a:ea typeface="대명체 보통" panose="020B0600000101010101" pitchFamily="50" charset="-127"/>
                           <a:cs typeface="+mn-cs"/>
                         </a:rPr>
-                        <a:t>233</a:t>
+                        <a:t>919</a:t>
                       </a:r>
                       <a:endParaRPr lang="en-US" altLang="ko-KR" sz="700" b="0" i="0" u="none" strike="noStrike" kern="1200" dirty="0">
                         <a:solidFill>
@@ -17198,7 +17198,7 @@
                           <a:ea typeface="대명체 보통" panose="020B0600000101010101" pitchFamily="50" charset="-127"/>
                           <a:cs typeface="+mn-cs"/>
                         </a:rPr>
-                        <a:t>145%</a:t>
+                        <a:t>316%</a:t>
                       </a:r>
                     </a:p>
                   </a:txBody>
@@ -17261,7 +17261,7 @@
                           <a:ea typeface="대명체 보통" panose="020B0600000101010101" pitchFamily="50" charset="-127"/>
                           <a:cs typeface="+mn-cs"/>
                         </a:rPr>
-                        <a:t>512</a:t>
+                        <a:t>397</a:t>
                       </a:r>
                       <a:endParaRPr lang="en-US" altLang="ko-KR" sz="700" b="0" i="0" u="none" strike="noStrike" kern="1200" dirty="0">
                         <a:solidFill>
@@ -17388,7 +17388,7 @@
                           <a:ea typeface="대명체 보통" panose="020B0600000101010101" pitchFamily="50" charset="-127"/>
                           <a:cs typeface="+mn-cs"/>
                         </a:rPr>
-                        <a:t>240</a:t>
+                        <a:t>948</a:t>
                       </a:r>
                     </a:p>
                   </a:txBody>
@@ -17451,7 +17451,7 @@
                           <a:ea typeface="대명체 보통" panose="020B0600000101010101" pitchFamily="50" charset="-127"/>
                           <a:cs typeface="+mn-cs"/>
                         </a:rPr>
-                        <a:t>47%</a:t>
+                        <a:t>239%</a:t>
                       </a:r>
                     </a:p>
                   </a:txBody>
@@ -17566,7 +17566,7 @@
                           <a:ea typeface="대명체 보통" panose="020B0600000101010101" pitchFamily="50" charset="-127"/>
                           <a:cs typeface="+mn-cs"/>
                         </a:rPr>
-                        <a:t>4,389</a:t>
+                        <a:t>4,815</a:t>
                       </a:r>
                     </a:p>
                   </a:txBody>
@@ -17680,7 +17680,7 @@
                           <a:ea typeface="대명체 보통" panose="020B0600000101010101" pitchFamily="50" charset="-127"/>
                           <a:cs typeface="+mn-cs"/>
                         </a:rPr>
-                        <a:t>6,533</a:t>
+                        <a:t>7,901</a:t>
                       </a:r>
                     </a:p>
                   </a:txBody>
@@ -17798,7 +17798,7 @@
                           <a:ea typeface="대명체 보통" panose="020B0600000101010101" pitchFamily="50" charset="-127"/>
                           <a:cs typeface="+mn-cs"/>
                         </a:rPr>
-                        <a:t>2,144</a:t>
+                        <a:t>3,086</a:t>
                       </a:r>
                       <a:endParaRPr lang="en-US" altLang="ko-KR" sz="700" b="0" i="0" u="none" strike="noStrike" kern="1200" dirty="0">
                         <a:solidFill>
@@ -17870,7 +17870,7 @@
                           <a:ea typeface="대명체 보통" panose="020B0600000101010101" pitchFamily="50" charset="-127"/>
                           <a:cs typeface="+mn-cs"/>
                         </a:rPr>
-                        <a:t>149%</a:t>
+                        <a:t>164%</a:t>
                       </a:r>
                     </a:p>
                   </a:txBody>
@@ -17933,7 +17933,7 @@
                           <a:ea typeface="대명체 보통" panose="020B0600000101010101" pitchFamily="50" charset="-127"/>
                           <a:cs typeface="+mn-cs"/>
                         </a:rPr>
-                        <a:t>4,106</a:t>
+                        <a:t>4,502</a:t>
                       </a:r>
                     </a:p>
                   </a:txBody>
@@ -18051,7 +18051,7 @@
                           <a:ea typeface="대명체 보통" panose="020B0600000101010101" pitchFamily="50" charset="-127"/>
                           <a:cs typeface="+mn-cs"/>
                         </a:rPr>
-                        <a:t>2,428</a:t>
+                        <a:t>3,399</a:t>
                       </a:r>
                     </a:p>
                   </a:txBody>
@@ -18114,7 +18114,7 @@
                           <a:ea typeface="대명체 보통" panose="020B0600000101010101" pitchFamily="50" charset="-127"/>
                           <a:cs typeface="+mn-cs"/>
                         </a:rPr>
-                        <a:t>59%</a:t>
+                        <a:t>75%</a:t>
                       </a:r>
                     </a:p>
                   </a:txBody>
